--- a/outputs/flyers/USMLE_Info_Session_Deck.pptx
+++ b/outputs/flyers/USMLE_Info_Session_Deck.pptx
@@ -12,9 +12,10 @@
     <p:sldId id="260" r:id="rId6"/>
     <p:sldId id="261" r:id="rId7"/>
     <p:sldId id="262" r:id="rId8"/>
+    <p:sldId id="263" r:id="rId9"/>
   </p:sldIdLst>
   <p:notesMasterIdLst>
-    <p:notesMasterId r:id="rId9"/>
+    <p:notesMasterId r:id="rId10"/>
   </p:notesMasterIdLst>
   <p:sldSz cx="12192000" cy="6858000"/>
   <p:notesSz cx="6858000" cy="12192000"/>
@@ -1060,6 +1061,94 @@
             <a:fld id="{F7021451-1387-4CA6-816F-3879F97B5CBC}" type="slidenum">
               <a:rPr lang="en-US"/>
               <a:t>7</a:t>
+            </a:fld>
+            <a:endParaRPr lang="en-US"/>
+          </a:p>
+        </p:txBody>
+      </p:sp>
+    </p:spTree>
+    <p:extLst>
+      <p:ext uri="{BB962C8B-B14F-4D97-AF65-F5344CB8AC3E}">
+        <p14:creationId xmlns:p14="http://schemas.microsoft.com/office/powerpoint/2010/main" val="1024086991"/>
+      </p:ext>
+    </p:extLst>
+  </p:cSld>
+  <p:clrMapOvr>
+    <a:masterClrMapping/>
+  </p:clrMapOvr>
+</p:notes>
+</file>
+
+<file path=ppt/notesSlides/notesSlide8.xml><?xml version="1.0" encoding="utf-8"?>
+<p:notes xmlns:a="http://schemas.openxmlformats.org/drawingml/2006/main" xmlns:r="http://schemas.openxmlformats.org/officeDocument/2006/relationships" xmlns:p="http://schemas.openxmlformats.org/presentationml/2006/main">
+  <p:cSld>
+    <p:spTree>
+      <p:nvGrpSpPr>
+        <p:cNvPr id="1" name=""/>
+        <p:cNvGrpSpPr/>
+        <p:nvPr/>
+      </p:nvGrpSpPr>
+      <p:grpSpPr>
+        <a:xfrm>
+          <a:off x="0" y="0"/>
+          <a:ext cx="0" cy="0"/>
+          <a:chOff x="0" y="0"/>
+          <a:chExt cx="0" cy="0"/>
+        </a:xfrm>
+      </p:grpSpPr>
+      <p:sp>
+        <p:nvSpPr>
+          <p:cNvPr id="2" name="Slide Image Placeholder 1"/>
+          <p:cNvSpPr>
+            <a:spLocks noGrp="1" noRot="1" noChangeAspect="1"/>
+          </p:cNvSpPr>
+          <p:nvPr>
+            <p:ph type="sldImg"/>
+          </p:nvPr>
+        </p:nvSpPr>
+        <p:spPr/>
+      </p:sp>
+      <p:sp>
+        <p:nvSpPr>
+          <p:cNvPr id="3" name="Notes Placeholder 2"/>
+          <p:cNvSpPr>
+            <a:spLocks noGrp="1"/>
+          </p:cNvSpPr>
+          <p:nvPr>
+            <p:ph type="body" idx="1"/>
+          </p:nvPr>
+        </p:nvSpPr>
+        <p:spPr/>
+        <p:txBody>
+          <a:bodyPr/>
+          <a:lstStyle/>
+          <a:p>
+            <a:r>
+              <a:rPr lang="en-US" dirty="0"/>
+              <a:t/>
+            </a:r>
+            <a:endParaRPr lang="en-US" dirty="0"/>
+          </a:p>
+        </p:txBody>
+      </p:sp>
+      <p:sp>
+        <p:nvSpPr>
+          <p:cNvPr id="4" name="Slide Number Placeholder 3"/>
+          <p:cNvSpPr>
+            <a:spLocks noGrp="1"/>
+          </p:cNvSpPr>
+          <p:nvPr>
+            <p:ph type="sldNum" sz="quarter" idx="10"/>
+          </p:nvPr>
+        </p:nvSpPr>
+        <p:spPr/>
+        <p:txBody>
+          <a:bodyPr/>
+          <a:lstStyle/>
+          <a:p>
+            <a:fld id="{F7021451-1387-4CA6-816F-3879F97B5CBC}" type="slidenum">
+              <a:rPr lang="en-US"/>
+              <a:t>8</a:t>
             </a:fld>
             <a:endParaRPr lang="en-US"/>
           </a:p>
@@ -2033,7 +2122,7 @@
                 <a:ea typeface="Calibri" pitchFamily="34" charset="-122"/>
                 <a:cs typeface="Calibri" pitchFamily="34" charset="-120"/>
               </a:rPr>
-              <a:t>1 / 7</a:t>
+              <a:t>1 / 8</a:t>
             </a:r>
             <a:endParaRPr lang="en-US" sz="1000" dirty="0"/>
           </a:p>
@@ -3646,7 +3735,7 @@
                 <a:ea typeface="Calibri" pitchFamily="34" charset="-122"/>
                 <a:cs typeface="Calibri" pitchFamily="34" charset="-120"/>
               </a:rPr>
-              <a:t>2 / 7</a:t>
+              <a:t>2 / 8</a:t>
             </a:r>
             <a:endParaRPr lang="en-US" sz="1000" dirty="0"/>
           </a:p>
@@ -3699,11 +3788,11 @@
             <a:avLst/>
           </a:prstGeom>
           <a:solidFill>
-            <a:srgbClr val="0284C7"/>
+            <a:srgbClr val="075985"/>
           </a:solidFill>
           <a:ln w="12700">
             <a:solidFill>
-              <a:srgbClr val="0284C7"/>
+              <a:srgbClr val="075985"/>
             </a:solidFill>
             <a:prstDash val="solid"/>
           </a:ln>
@@ -3719,6 +3808,134 @@
           <a:xfrm>
             <a:off x="7315017" y="0"/>
             <a:ext cx="4876678" cy="411480"/>
+          </a:xfrm>
+          <a:prstGeom prst="rect">
+            <a:avLst/>
+          </a:prstGeom>
+          <a:solidFill>
+            <a:srgbClr val="B45309"/>
+          </a:solidFill>
+          <a:ln w="12700">
+            <a:solidFill>
+              <a:srgbClr val="B45309"/>
+            </a:solidFill>
+            <a:prstDash val="solid"/>
+          </a:ln>
+        </p:spPr>
+      </p:sp>
+      <p:sp>
+        <p:nvSpPr>
+          <p:cNvPr id="4" name="Text 2"/>
+          <p:cNvSpPr/>
+          <p:nvPr/>
+        </p:nvSpPr>
+        <p:spPr>
+          <a:xfrm>
+            <a:off x="502920" y="640080"/>
+            <a:ext cx="11185855" cy="274320"/>
+          </a:xfrm>
+          <a:prstGeom prst="rect">
+            <a:avLst/>
+          </a:prstGeom>
+          <a:noFill/>
+          <a:ln/>
+        </p:spPr>
+        <p:txBody>
+          <a:bodyPr wrap="square" lIns="0" tIns="0" rIns="0" bIns="0" rtlCol="0" anchor="ctr"/>
+          <a:lstStyle/>
+          <a:p>
+            <a:pPr indent="0" marL="0">
+              <a:buNone/>
+            </a:pPr>
+            <a:r>
+              <a:rPr lang="en-US" sz="1200" b="1" spc="400" kern="0" dirty="0">
+                <a:solidFill>
+                  <a:srgbClr val="075985"/>
+                </a:solidFill>
+                <a:latin typeface="Calibri" pitchFamily="34" charset="0"/>
+                <a:ea typeface="Calibri" pitchFamily="34" charset="-122"/>
+                <a:cs typeface="Calibri" pitchFamily="34" charset="-120"/>
+              </a:rPr>
+              <a:t>APPLICATION ROADMAP  ·  MYINTEALTH → STEP 2 CK</a:t>
+            </a:r>
+            <a:endParaRPr lang="en-US" sz="1200" dirty="0"/>
+          </a:p>
+        </p:txBody>
+      </p:sp>
+      <p:sp>
+        <p:nvSpPr>
+          <p:cNvPr id="5" name="Text 3"/>
+          <p:cNvSpPr/>
+          <p:nvPr/>
+        </p:nvSpPr>
+        <p:spPr>
+          <a:xfrm>
+            <a:off x="502920" y="914400"/>
+            <a:ext cx="11185855" cy="731520"/>
+          </a:xfrm>
+          <a:prstGeom prst="rect">
+            <a:avLst/>
+          </a:prstGeom>
+          <a:noFill/>
+          <a:ln/>
+        </p:spPr>
+        <p:txBody>
+          <a:bodyPr wrap="square" lIns="0" tIns="0" rIns="0" bIns="0" rtlCol="0" anchor="ctr"/>
+          <a:lstStyle/>
+          <a:p>
+            <a:pPr indent="0" marL="0">
+              <a:buNone/>
+            </a:pPr>
+            <a:r>
+              <a:rPr lang="en-US" sz="3200" b="1" dirty="0">
+                <a:solidFill>
+                  <a:srgbClr val="0C2A3D"/>
+                </a:solidFill>
+                <a:latin typeface="Arial Black" pitchFamily="34" charset="0"/>
+                <a:ea typeface="Arial Black" pitchFamily="34" charset="-122"/>
+                <a:cs typeface="Arial Black" pitchFamily="34" charset="-120"/>
+              </a:rPr>
+              <a:t>From account to exam — 8 concrete steps</a:t>
+            </a:r>
+            <a:endParaRPr lang="en-US" sz="3200" dirty="0"/>
+          </a:p>
+        </p:txBody>
+      </p:sp>
+      <p:sp>
+        <p:nvSpPr>
+          <p:cNvPr id="6" name="Shape 4"/>
+          <p:cNvSpPr/>
+          <p:nvPr/>
+        </p:nvSpPr>
+        <p:spPr>
+          <a:xfrm>
+            <a:off x="502920" y="1874520"/>
+            <a:ext cx="5455768" cy="1024128"/>
+          </a:xfrm>
+          <a:prstGeom prst="rect">
+            <a:avLst/>
+          </a:prstGeom>
+          <a:solidFill>
+            <a:srgbClr val="F5FBFF"/>
+          </a:solidFill>
+          <a:ln w="9525">
+            <a:solidFill>
+              <a:srgbClr val="D6E8F5"/>
+            </a:solidFill>
+            <a:prstDash val="solid"/>
+          </a:ln>
+        </p:spPr>
+      </p:sp>
+      <p:sp>
+        <p:nvSpPr>
+          <p:cNvPr id="7" name="Shape 5"/>
+          <p:cNvSpPr/>
+          <p:nvPr/>
+        </p:nvSpPr>
+        <p:spPr>
+          <a:xfrm>
+            <a:off x="502920" y="1874520"/>
+            <a:ext cx="91440" cy="1024128"/>
           </a:xfrm>
           <a:prstGeom prst="rect">
             <a:avLst/>
@@ -3736,92 +3953,78 @@
       </p:sp>
       <p:sp>
         <p:nvSpPr>
-          <p:cNvPr id="4" name="Text 2"/>
-          <p:cNvSpPr/>
-          <p:nvPr/>
-        </p:nvSpPr>
-        <p:spPr>
-          <a:xfrm>
-            <a:off x="502920" y="640080"/>
-            <a:ext cx="11185855" cy="274320"/>
-          </a:xfrm>
-          <a:prstGeom prst="rect">
-            <a:avLst/>
-          </a:prstGeom>
-          <a:noFill/>
-          <a:ln/>
-        </p:spPr>
-        <p:txBody>
-          <a:bodyPr wrap="square" lIns="0" tIns="0" rIns="0" bIns="0" rtlCol="0" anchor="ctr"/>
-          <a:lstStyle/>
-          <a:p>
-            <a:pPr indent="0" marL="0">
-              <a:buNone/>
-            </a:pPr>
-            <a:r>
-              <a:rPr lang="en-US" sz="1200" b="1" spc="400" kern="0" dirty="0">
-                <a:solidFill>
-                  <a:srgbClr val="0284C7"/>
-                </a:solidFill>
-                <a:latin typeface="Calibri" pitchFamily="34" charset="0"/>
-                <a:ea typeface="Calibri" pitchFamily="34" charset="-122"/>
-                <a:cs typeface="Calibri" pitchFamily="34" charset="-120"/>
-              </a:rPr>
-              <a:t>STEP 1 PREP</a:t>
-            </a:r>
-            <a:endParaRPr lang="en-US" sz="1200" dirty="0"/>
-          </a:p>
-        </p:txBody>
-      </p:sp>
-      <p:sp>
-        <p:nvSpPr>
-          <p:cNvPr id="5" name="Text 3"/>
-          <p:cNvSpPr/>
-          <p:nvPr/>
-        </p:nvSpPr>
-        <p:spPr>
-          <a:xfrm>
-            <a:off x="502920" y="914400"/>
-            <a:ext cx="11185855" cy="731520"/>
-          </a:xfrm>
-          <a:prstGeom prst="rect">
-            <a:avLst/>
-          </a:prstGeom>
-          <a:noFill/>
-          <a:ln/>
-        </p:spPr>
-        <p:txBody>
-          <a:bodyPr wrap="square" lIns="0" tIns="0" rIns="0" bIns="0" rtlCol="0" anchor="ctr"/>
-          <a:lstStyle/>
-          <a:p>
-            <a:pPr indent="0" marL="0">
-              <a:buNone/>
-            </a:pPr>
-            <a:r>
-              <a:rPr lang="en-US" sz="3200" b="1" dirty="0">
-                <a:solidFill>
-                  <a:srgbClr val="0C2A3D"/>
+          <p:cNvPr id="8" name="Shape 6"/>
+          <p:cNvSpPr/>
+          <p:nvPr/>
+        </p:nvSpPr>
+        <p:spPr>
+          <a:xfrm>
+            <a:off x="704088" y="2148840"/>
+            <a:ext cx="411480" cy="411480"/>
+          </a:xfrm>
+          <a:prstGeom prst="ellipse">
+            <a:avLst/>
+          </a:prstGeom>
+          <a:solidFill>
+            <a:srgbClr val="075985"/>
+          </a:solidFill>
+          <a:ln w="12700">
+            <a:solidFill>
+              <a:srgbClr val="075985"/>
+            </a:solidFill>
+            <a:prstDash val="solid"/>
+          </a:ln>
+        </p:spPr>
+      </p:sp>
+      <p:sp>
+        <p:nvSpPr>
+          <p:cNvPr id="9" name="Text 7"/>
+          <p:cNvSpPr/>
+          <p:nvPr/>
+        </p:nvSpPr>
+        <p:spPr>
+          <a:xfrm>
+            <a:off x="704088" y="2148840"/>
+            <a:ext cx="411480" cy="411480"/>
+          </a:xfrm>
+          <a:prstGeom prst="rect">
+            <a:avLst/>
+          </a:prstGeom>
+          <a:noFill/>
+          <a:ln/>
+        </p:spPr>
+        <p:txBody>
+          <a:bodyPr wrap="square" lIns="0" tIns="0" rIns="0" bIns="0" rtlCol="0" anchor="ctr"/>
+          <a:lstStyle/>
+          <a:p>
+            <a:pPr algn="ctr" indent="0" marL="0">
+              <a:buNone/>
+            </a:pPr>
+            <a:r>
+              <a:rPr lang="en-US" sz="1800" b="1" dirty="0">
+                <a:solidFill>
+                  <a:srgbClr val="FFFFFF"/>
                 </a:solidFill>
                 <a:latin typeface="Arial Black" pitchFamily="34" charset="0"/>
                 <a:ea typeface="Arial Black" pitchFamily="34" charset="-122"/>
                 <a:cs typeface="Arial Black" pitchFamily="34" charset="-120"/>
               </a:rPr>
-              <a:t>Foundational sciences. Pass / Fail.</a:t>
-            </a:r>
-            <a:endParaRPr lang="en-US" sz="3200" dirty="0"/>
-          </a:p>
-        </p:txBody>
-      </p:sp>
-      <p:sp>
-        <p:nvSpPr>
-          <p:cNvPr id="6" name="Text 4"/>
-          <p:cNvSpPr/>
-          <p:nvPr/>
-        </p:nvSpPr>
-        <p:spPr>
-          <a:xfrm>
-            <a:off x="502920" y="1874520"/>
-            <a:ext cx="4698059" cy="256032"/>
+              <a:t>1</a:t>
+            </a:r>
+            <a:endParaRPr lang="en-US" sz="1800" dirty="0"/>
+          </a:p>
+        </p:txBody>
+      </p:sp>
+      <p:sp>
+        <p:nvSpPr>
+          <p:cNvPr id="10" name="Text 8"/>
+          <p:cNvSpPr/>
+          <p:nvPr/>
+        </p:nvSpPr>
+        <p:spPr>
+          <a:xfrm>
+            <a:off x="1216152" y="1965960"/>
+            <a:ext cx="4084168" cy="329184"/>
           </a:xfrm>
           <a:prstGeom prst="rect">
             <a:avLst/>
@@ -3837,15 +4040,93 @@
               <a:buNone/>
             </a:pPr>
             <a:r>
-              <a:rPr lang="en-US" sz="1100" b="1" spc="300" kern="0" dirty="0">
-                <a:solidFill>
-                  <a:srgbClr val="075985"/>
-                </a:solidFill>
-                <a:latin typeface="Calibri" pitchFamily="34" charset="0"/>
-                <a:ea typeface="Calibri" pitchFamily="34" charset="-122"/>
-                <a:cs typeface="Calibri" pitchFamily="34" charset="-120"/>
-              </a:rPr>
-              <a:t>WHAT'S TESTED</a:t>
+              <a:rPr lang="en-US" sz="1400" b="1" dirty="0">
+                <a:solidFill>
+                  <a:srgbClr val="0C2A3D"/>
+                </a:solidFill>
+                <a:latin typeface="Calibri" pitchFamily="34" charset="0"/>
+                <a:ea typeface="Calibri" pitchFamily="34" charset="-122"/>
+                <a:cs typeface="Calibri" pitchFamily="34" charset="-120"/>
+              </a:rPr>
+              <a:t>Establish MyIntealth account</a:t>
+            </a:r>
+            <a:endParaRPr lang="en-US" sz="1400" dirty="0"/>
+          </a:p>
+        </p:txBody>
+      </p:sp>
+      <p:sp>
+        <p:nvSpPr>
+          <p:cNvPr id="11" name="Text 9"/>
+          <p:cNvSpPr/>
+          <p:nvPr/>
+        </p:nvSpPr>
+        <p:spPr>
+          <a:xfrm>
+            <a:off x="5245456" y="1965960"/>
+            <a:ext cx="640080" cy="274320"/>
+          </a:xfrm>
+          <a:prstGeom prst="rect">
+            <a:avLst/>
+          </a:prstGeom>
+          <a:noFill/>
+          <a:ln/>
+        </p:spPr>
+        <p:txBody>
+          <a:bodyPr wrap="square" lIns="0" tIns="0" rIns="0" bIns="0" rtlCol="0" anchor="ctr"/>
+          <a:lstStyle/>
+          <a:p>
+            <a:pPr algn="r" indent="0" marL="0">
+              <a:buNone/>
+            </a:pPr>
+            <a:r>
+              <a:rPr lang="en-US" sz="1000" i="1" dirty="0">
+                <a:solidFill>
+                  <a:srgbClr val="6B87A3"/>
+                </a:solidFill>
+                <a:latin typeface="Calibri" pitchFamily="34" charset="0"/>
+                <a:ea typeface="Calibri" pitchFamily="34" charset="-122"/>
+                <a:cs typeface="Calibri" pitchFamily="34" charset="-120"/>
+              </a:rPr>
+              <a:t>p. 10</a:t>
+            </a:r>
+            <a:endParaRPr lang="en-US" sz="1000" dirty="0"/>
+          </a:p>
+        </p:txBody>
+      </p:sp>
+      <p:sp>
+        <p:nvSpPr>
+          <p:cNvPr id="12" name="Text 10"/>
+          <p:cNvSpPr/>
+          <p:nvPr/>
+        </p:nvSpPr>
+        <p:spPr>
+          <a:xfrm>
+            <a:off x="1216152" y="2295144"/>
+            <a:ext cx="4614520" cy="566928"/>
+          </a:xfrm>
+          <a:prstGeom prst="rect">
+            <a:avLst/>
+          </a:prstGeom>
+          <a:noFill/>
+          <a:ln/>
+        </p:spPr>
+        <p:txBody>
+          <a:bodyPr wrap="square" lIns="0" tIns="0" rIns="0" bIns="0" rtlCol="0" anchor="ctr"/>
+          <a:lstStyle/>
+          <a:p>
+            <a:pPr indent="0" marL="0">
+              <a:buNone/>
+            </a:pPr>
+            <a:r>
+              <a:rPr lang="en-US" sz="1100" dirty="0">
+                <a:solidFill>
+                  <a:srgbClr val="345671"/>
+                </a:solidFill>
+                <a:latin typeface="Calibri" pitchFamily="34" charset="0"/>
+                <a:ea typeface="Calibri" pitchFamily="34" charset="-122"/>
+                <a:cs typeface="Calibri" pitchFamily="34" charset="-120"/>
+              </a:rPr>
+              <a:t>Required first. Name as on passport, DOB, address, school info, plus identity verification. One MyIntealth ID, forever.</a:t>
             </a:r>
             <a:endParaRPr lang="en-US" sz="1100" dirty="0"/>
           </a:p>
@@ -3853,716 +4134,14 @@
       </p:sp>
       <p:sp>
         <p:nvSpPr>
-          <p:cNvPr id="7" name="Text 5"/>
-          <p:cNvSpPr/>
-          <p:nvPr/>
-        </p:nvSpPr>
-        <p:spPr>
-          <a:xfrm>
-            <a:off x="502920" y="2194560"/>
-            <a:ext cx="3783659" cy="292608"/>
-          </a:xfrm>
-          <a:prstGeom prst="rect">
-            <a:avLst/>
-          </a:prstGeom>
-          <a:noFill/>
-          <a:ln/>
-        </p:spPr>
-        <p:txBody>
-          <a:bodyPr wrap="square" lIns="0" tIns="0" rIns="0" bIns="0" rtlCol="0" anchor="ctr"/>
-          <a:lstStyle/>
-          <a:p>
-            <a:pPr indent="0" marL="0">
-              <a:buNone/>
-            </a:pPr>
-            <a:r>
-              <a:rPr lang="en-US" sz="1300" dirty="0">
-                <a:solidFill>
-                  <a:srgbClr val="0C2A3D"/>
-                </a:solidFill>
-                <a:latin typeface="Calibri" pitchFamily="34" charset="0"/>
-                <a:ea typeface="Calibri" pitchFamily="34" charset="-122"/>
-                <a:cs typeface="Calibri" pitchFamily="34" charset="-120"/>
-              </a:rPr>
-              <a:t>Applying foundational science concepts</a:t>
-            </a:r>
-            <a:endParaRPr lang="en-US" sz="1300" dirty="0"/>
-          </a:p>
-        </p:txBody>
-      </p:sp>
-      <p:sp>
-        <p:nvSpPr>
-          <p:cNvPr id="8" name="Text 6"/>
-          <p:cNvSpPr/>
-          <p:nvPr/>
-        </p:nvSpPr>
-        <p:spPr>
-          <a:xfrm>
-            <a:off x="4286579" y="2194560"/>
-            <a:ext cx="914400" cy="292608"/>
-          </a:xfrm>
-          <a:prstGeom prst="rect">
-            <a:avLst/>
-          </a:prstGeom>
-          <a:noFill/>
-          <a:ln/>
-        </p:spPr>
-        <p:txBody>
-          <a:bodyPr wrap="square" lIns="0" tIns="0" rIns="0" bIns="0" rtlCol="0" anchor="ctr"/>
-          <a:lstStyle/>
-          <a:p>
-            <a:pPr algn="r" indent="0" marL="0">
-              <a:buNone/>
-            </a:pPr>
-            <a:r>
-              <a:rPr lang="en-US" sz="1300" b="1" dirty="0">
-                <a:solidFill>
-                  <a:srgbClr val="0284C7"/>
-                </a:solidFill>
-                <a:latin typeface="Calibri" pitchFamily="34" charset="0"/>
-                <a:ea typeface="Calibri" pitchFamily="34" charset="-122"/>
-                <a:cs typeface="Calibri" pitchFamily="34" charset="-120"/>
-              </a:rPr>
-              <a:t>60–70%</a:t>
-            </a:r>
-            <a:endParaRPr lang="en-US" sz="1300" dirty="0"/>
-          </a:p>
-        </p:txBody>
-      </p:sp>
-      <p:sp>
-        <p:nvSpPr>
-          <p:cNvPr id="9" name="Text 7"/>
-          <p:cNvSpPr/>
-          <p:nvPr/>
-        </p:nvSpPr>
-        <p:spPr>
-          <a:xfrm>
-            <a:off x="502920" y="2560320"/>
-            <a:ext cx="3783659" cy="292608"/>
-          </a:xfrm>
-          <a:prstGeom prst="rect">
-            <a:avLst/>
-          </a:prstGeom>
-          <a:noFill/>
-          <a:ln/>
-        </p:spPr>
-        <p:txBody>
-          <a:bodyPr wrap="square" lIns="0" tIns="0" rIns="0" bIns="0" rtlCol="0" anchor="ctr"/>
-          <a:lstStyle/>
-          <a:p>
-            <a:pPr indent="0" marL="0">
-              <a:buNone/>
-            </a:pPr>
-            <a:r>
-              <a:rPr lang="en-US" sz="1300" dirty="0">
-                <a:solidFill>
-                  <a:srgbClr val="0C2A3D"/>
-                </a:solidFill>
-                <a:latin typeface="Calibri" pitchFamily="34" charset="0"/>
-                <a:ea typeface="Calibri" pitchFamily="34" charset="-122"/>
-                <a:cs typeface="Calibri" pitchFamily="34" charset="-120"/>
-              </a:rPr>
-              <a:t>Diagnosis</a:t>
-            </a:r>
-            <a:endParaRPr lang="en-US" sz="1300" dirty="0"/>
-          </a:p>
-        </p:txBody>
-      </p:sp>
-      <p:sp>
-        <p:nvSpPr>
-          <p:cNvPr id="10" name="Text 8"/>
-          <p:cNvSpPr/>
-          <p:nvPr/>
-        </p:nvSpPr>
-        <p:spPr>
-          <a:xfrm>
-            <a:off x="4286579" y="2560320"/>
-            <a:ext cx="914400" cy="292608"/>
-          </a:xfrm>
-          <a:prstGeom prst="rect">
-            <a:avLst/>
-          </a:prstGeom>
-          <a:noFill/>
-          <a:ln/>
-        </p:spPr>
-        <p:txBody>
-          <a:bodyPr wrap="square" lIns="0" tIns="0" rIns="0" bIns="0" rtlCol="0" anchor="ctr"/>
-          <a:lstStyle/>
-          <a:p>
-            <a:pPr algn="r" indent="0" marL="0">
-              <a:buNone/>
-            </a:pPr>
-            <a:r>
-              <a:rPr lang="en-US" sz="1300" b="1" dirty="0">
-                <a:solidFill>
-                  <a:srgbClr val="0284C7"/>
-                </a:solidFill>
-                <a:latin typeface="Calibri" pitchFamily="34" charset="0"/>
-                <a:ea typeface="Calibri" pitchFamily="34" charset="-122"/>
-                <a:cs typeface="Calibri" pitchFamily="34" charset="-120"/>
-              </a:rPr>
-              <a:t>20–25%</a:t>
-            </a:r>
-            <a:endParaRPr lang="en-US" sz="1300" dirty="0"/>
-          </a:p>
-        </p:txBody>
-      </p:sp>
-      <p:sp>
-        <p:nvSpPr>
-          <p:cNvPr id="11" name="Text 9"/>
-          <p:cNvSpPr/>
-          <p:nvPr/>
-        </p:nvSpPr>
-        <p:spPr>
-          <a:xfrm>
-            <a:off x="502920" y="2926080"/>
-            <a:ext cx="3783659" cy="292608"/>
-          </a:xfrm>
-          <a:prstGeom prst="rect">
-            <a:avLst/>
-          </a:prstGeom>
-          <a:noFill/>
-          <a:ln/>
-        </p:spPr>
-        <p:txBody>
-          <a:bodyPr wrap="square" lIns="0" tIns="0" rIns="0" bIns="0" rtlCol="0" anchor="ctr"/>
-          <a:lstStyle/>
-          <a:p>
-            <a:pPr indent="0" marL="0">
-              <a:buNone/>
-            </a:pPr>
-            <a:r>
-              <a:rPr lang="en-US" sz="1300" dirty="0">
-                <a:solidFill>
-                  <a:srgbClr val="0C2A3D"/>
-                </a:solidFill>
-                <a:latin typeface="Calibri" pitchFamily="34" charset="0"/>
-                <a:ea typeface="Calibri" pitchFamily="34" charset="-122"/>
-                <a:cs typeface="Calibri" pitchFamily="34" charset="-120"/>
-              </a:rPr>
-              <a:t>Communication &amp; interpersonal skills</a:t>
-            </a:r>
-            <a:endParaRPr lang="en-US" sz="1300" dirty="0"/>
-          </a:p>
-        </p:txBody>
-      </p:sp>
-      <p:sp>
-        <p:nvSpPr>
-          <p:cNvPr id="12" name="Text 10"/>
-          <p:cNvSpPr/>
-          <p:nvPr/>
-        </p:nvSpPr>
-        <p:spPr>
-          <a:xfrm>
-            <a:off x="4286579" y="2926080"/>
-            <a:ext cx="914400" cy="292608"/>
-          </a:xfrm>
-          <a:prstGeom prst="rect">
-            <a:avLst/>
-          </a:prstGeom>
-          <a:noFill/>
-          <a:ln/>
-        </p:spPr>
-        <p:txBody>
-          <a:bodyPr wrap="square" lIns="0" tIns="0" rIns="0" bIns="0" rtlCol="0" anchor="ctr"/>
-          <a:lstStyle/>
-          <a:p>
-            <a:pPr algn="r" indent="0" marL="0">
-              <a:buNone/>
-            </a:pPr>
-            <a:r>
-              <a:rPr lang="en-US" sz="1300" b="1" dirty="0">
-                <a:solidFill>
-                  <a:srgbClr val="0284C7"/>
-                </a:solidFill>
-                <a:latin typeface="Calibri" pitchFamily="34" charset="0"/>
-                <a:ea typeface="Calibri" pitchFamily="34" charset="-122"/>
-                <a:cs typeface="Calibri" pitchFamily="34" charset="-120"/>
-              </a:rPr>
-              <a:t>6–9%</a:t>
-            </a:r>
-            <a:endParaRPr lang="en-US" sz="1300" dirty="0"/>
-          </a:p>
-        </p:txBody>
-      </p:sp>
-      <p:sp>
-        <p:nvSpPr>
-          <p:cNvPr id="13" name="Text 11"/>
-          <p:cNvSpPr/>
-          <p:nvPr/>
-        </p:nvSpPr>
-        <p:spPr>
-          <a:xfrm>
-            <a:off x="502920" y="3291840"/>
-            <a:ext cx="3783659" cy="292608"/>
-          </a:xfrm>
-          <a:prstGeom prst="rect">
-            <a:avLst/>
-          </a:prstGeom>
-          <a:noFill/>
-          <a:ln/>
-        </p:spPr>
-        <p:txBody>
-          <a:bodyPr wrap="square" lIns="0" tIns="0" rIns="0" bIns="0" rtlCol="0" anchor="ctr"/>
-          <a:lstStyle/>
-          <a:p>
-            <a:pPr indent="0" marL="0">
-              <a:buNone/>
-            </a:pPr>
-            <a:r>
-              <a:rPr lang="en-US" sz="1300" dirty="0">
-                <a:solidFill>
-                  <a:srgbClr val="0C2A3D"/>
-                </a:solidFill>
-                <a:latin typeface="Calibri" pitchFamily="34" charset="0"/>
-                <a:ea typeface="Calibri" pitchFamily="34" charset="-122"/>
-                <a:cs typeface="Calibri" pitchFamily="34" charset="-120"/>
-              </a:rPr>
-              <a:t>Evidence-based medicine</a:t>
-            </a:r>
-            <a:endParaRPr lang="en-US" sz="1300" dirty="0"/>
-          </a:p>
-        </p:txBody>
-      </p:sp>
-      <p:sp>
-        <p:nvSpPr>
-          <p:cNvPr id="14" name="Text 12"/>
-          <p:cNvSpPr/>
-          <p:nvPr/>
-        </p:nvSpPr>
-        <p:spPr>
-          <a:xfrm>
-            <a:off x="4286579" y="3291840"/>
-            <a:ext cx="914400" cy="292608"/>
-          </a:xfrm>
-          <a:prstGeom prst="rect">
-            <a:avLst/>
-          </a:prstGeom>
-          <a:noFill/>
-          <a:ln/>
-        </p:spPr>
-        <p:txBody>
-          <a:bodyPr wrap="square" lIns="0" tIns="0" rIns="0" bIns="0" rtlCol="0" anchor="ctr"/>
-          <a:lstStyle/>
-          <a:p>
-            <a:pPr algn="r" indent="0" marL="0">
-              <a:buNone/>
-            </a:pPr>
-            <a:r>
-              <a:rPr lang="en-US" sz="1300" b="1" dirty="0">
-                <a:solidFill>
-                  <a:srgbClr val="0284C7"/>
-                </a:solidFill>
-                <a:latin typeface="Calibri" pitchFamily="34" charset="0"/>
-                <a:ea typeface="Calibri" pitchFamily="34" charset="-122"/>
-                <a:cs typeface="Calibri" pitchFamily="34" charset="-120"/>
-              </a:rPr>
-              <a:t>4–6%</a:t>
-            </a:r>
-            <a:endParaRPr lang="en-US" sz="1300" dirty="0"/>
-          </a:p>
-        </p:txBody>
-      </p:sp>
-      <p:sp>
-        <p:nvSpPr>
-          <p:cNvPr id="15" name="Text 13"/>
-          <p:cNvSpPr/>
-          <p:nvPr/>
-        </p:nvSpPr>
-        <p:spPr>
-          <a:xfrm>
-            <a:off x="502920" y="3931920"/>
-            <a:ext cx="4698059" cy="256032"/>
-          </a:xfrm>
-          <a:prstGeom prst="rect">
-            <a:avLst/>
-          </a:prstGeom>
-          <a:noFill/>
-          <a:ln/>
-        </p:spPr>
-        <p:txBody>
-          <a:bodyPr wrap="square" lIns="0" tIns="0" rIns="0" bIns="0" rtlCol="0" anchor="ctr"/>
-          <a:lstStyle/>
-          <a:p>
-            <a:pPr indent="0" marL="0">
-              <a:buNone/>
-            </a:pPr>
-            <a:r>
-              <a:rPr lang="en-US" sz="1100" b="1" spc="300" kern="0" dirty="0">
-                <a:solidFill>
-                  <a:srgbClr val="075985"/>
-                </a:solidFill>
-                <a:latin typeface="Calibri" pitchFamily="34" charset="0"/>
-                <a:ea typeface="Calibri" pitchFamily="34" charset="-122"/>
-                <a:cs typeface="Calibri" pitchFamily="34" charset="-120"/>
-              </a:rPr>
-              <a:t>FORMAT</a:t>
-            </a:r>
-            <a:endParaRPr lang="en-US" sz="1100" dirty="0"/>
-          </a:p>
-        </p:txBody>
-      </p:sp>
-      <p:sp>
-        <p:nvSpPr>
-          <p:cNvPr id="16" name="Text 14"/>
-          <p:cNvSpPr/>
-          <p:nvPr/>
-        </p:nvSpPr>
-        <p:spPr>
-          <a:xfrm>
-            <a:off x="502920" y="4251960"/>
-            <a:ext cx="3600779" cy="274320"/>
-          </a:xfrm>
-          <a:prstGeom prst="rect">
-            <a:avLst/>
-          </a:prstGeom>
-          <a:noFill/>
-          <a:ln/>
-        </p:spPr>
-        <p:txBody>
-          <a:bodyPr wrap="square" lIns="0" tIns="0" rIns="0" bIns="0" rtlCol="0" anchor="ctr"/>
-          <a:lstStyle/>
-          <a:p>
-            <a:pPr indent="0" marL="0">
-              <a:buNone/>
-            </a:pPr>
-            <a:r>
-              <a:rPr lang="en-US" sz="1200" dirty="0">
-                <a:solidFill>
-                  <a:srgbClr val="345671"/>
-                </a:solidFill>
-                <a:latin typeface="Calibri" pitchFamily="34" charset="0"/>
-                <a:ea typeface="Calibri" pitchFamily="34" charset="-122"/>
-                <a:cs typeface="Calibri" pitchFamily="34" charset="-120"/>
-              </a:rPr>
-              <a:t>Question blocks</a:t>
-            </a:r>
-            <a:endParaRPr lang="en-US" sz="1200" dirty="0"/>
-          </a:p>
-        </p:txBody>
-      </p:sp>
-      <p:sp>
-        <p:nvSpPr>
-          <p:cNvPr id="17" name="Text 15"/>
-          <p:cNvSpPr/>
-          <p:nvPr/>
-        </p:nvSpPr>
-        <p:spPr>
-          <a:xfrm>
-            <a:off x="4103699" y="4251960"/>
-            <a:ext cx="1097280" cy="274320"/>
-          </a:xfrm>
-          <a:prstGeom prst="rect">
-            <a:avLst/>
-          </a:prstGeom>
-          <a:noFill/>
-          <a:ln/>
-        </p:spPr>
-        <p:txBody>
-          <a:bodyPr wrap="square" lIns="0" tIns="0" rIns="0" bIns="0" rtlCol="0" anchor="ctr"/>
-          <a:lstStyle/>
-          <a:p>
-            <a:pPr algn="r" indent="0" marL="0">
-              <a:buNone/>
-            </a:pPr>
-            <a:r>
-              <a:rPr lang="en-US" sz="1200" b="1" dirty="0">
-                <a:solidFill>
-                  <a:srgbClr val="0C2A3D"/>
-                </a:solidFill>
-                <a:latin typeface="Calibri" pitchFamily="34" charset="0"/>
-                <a:ea typeface="Calibri" pitchFamily="34" charset="-122"/>
-                <a:cs typeface="Calibri" pitchFamily="34" charset="-120"/>
-              </a:rPr>
-              <a:t>7</a:t>
-            </a:r>
-            <a:endParaRPr lang="en-US" sz="1200" dirty="0"/>
-          </a:p>
-        </p:txBody>
-      </p:sp>
-      <p:sp>
-        <p:nvSpPr>
-          <p:cNvPr id="18" name="Text 16"/>
-          <p:cNvSpPr/>
-          <p:nvPr/>
-        </p:nvSpPr>
-        <p:spPr>
-          <a:xfrm>
-            <a:off x="502920" y="4581144"/>
-            <a:ext cx="3600779" cy="274320"/>
-          </a:xfrm>
-          <a:prstGeom prst="rect">
-            <a:avLst/>
-          </a:prstGeom>
-          <a:noFill/>
-          <a:ln/>
-        </p:spPr>
-        <p:txBody>
-          <a:bodyPr wrap="square" lIns="0" tIns="0" rIns="0" bIns="0" rtlCol="0" anchor="ctr"/>
-          <a:lstStyle/>
-          <a:p>
-            <a:pPr indent="0" marL="0">
-              <a:buNone/>
-            </a:pPr>
-            <a:r>
-              <a:rPr lang="en-US" sz="1200" dirty="0">
-                <a:solidFill>
-                  <a:srgbClr val="345671"/>
-                </a:solidFill>
-                <a:latin typeface="Calibri" pitchFamily="34" charset="0"/>
-                <a:ea typeface="Calibri" pitchFamily="34" charset="-122"/>
-                <a:cs typeface="Calibri" pitchFamily="34" charset="-120"/>
-              </a:rPr>
-              <a:t>Items (max)</a:t>
-            </a:r>
-            <a:endParaRPr lang="en-US" sz="1200" dirty="0"/>
-          </a:p>
-        </p:txBody>
-      </p:sp>
-      <p:sp>
-        <p:nvSpPr>
-          <p:cNvPr id="19" name="Text 17"/>
-          <p:cNvSpPr/>
-          <p:nvPr/>
-        </p:nvSpPr>
-        <p:spPr>
-          <a:xfrm>
-            <a:off x="4103699" y="4581144"/>
-            <a:ext cx="1097280" cy="274320"/>
-          </a:xfrm>
-          <a:prstGeom prst="rect">
-            <a:avLst/>
-          </a:prstGeom>
-          <a:noFill/>
-          <a:ln/>
-        </p:spPr>
-        <p:txBody>
-          <a:bodyPr wrap="square" lIns="0" tIns="0" rIns="0" bIns="0" rtlCol="0" anchor="ctr"/>
-          <a:lstStyle/>
-          <a:p>
-            <a:pPr algn="r" indent="0" marL="0">
-              <a:buNone/>
-            </a:pPr>
-            <a:r>
-              <a:rPr lang="en-US" sz="1200" b="1" dirty="0">
-                <a:solidFill>
-                  <a:srgbClr val="0C2A3D"/>
-                </a:solidFill>
-                <a:latin typeface="Calibri" pitchFamily="34" charset="0"/>
-                <a:ea typeface="Calibri" pitchFamily="34" charset="-122"/>
-                <a:cs typeface="Calibri" pitchFamily="34" charset="-120"/>
-              </a:rPr>
-              <a:t>280</a:t>
-            </a:r>
-            <a:endParaRPr lang="en-US" sz="1200" dirty="0"/>
-          </a:p>
-        </p:txBody>
-      </p:sp>
-      <p:sp>
-        <p:nvSpPr>
-          <p:cNvPr id="20" name="Text 18"/>
-          <p:cNvSpPr/>
-          <p:nvPr/>
-        </p:nvSpPr>
-        <p:spPr>
-          <a:xfrm>
-            <a:off x="502920" y="4910328"/>
-            <a:ext cx="3600779" cy="274320"/>
-          </a:xfrm>
-          <a:prstGeom prst="rect">
-            <a:avLst/>
-          </a:prstGeom>
-          <a:noFill/>
-          <a:ln/>
-        </p:spPr>
-        <p:txBody>
-          <a:bodyPr wrap="square" lIns="0" tIns="0" rIns="0" bIns="0" rtlCol="0" anchor="ctr"/>
-          <a:lstStyle/>
-          <a:p>
-            <a:pPr indent="0" marL="0">
-              <a:buNone/>
-            </a:pPr>
-            <a:r>
-              <a:rPr lang="en-US" sz="1200" dirty="0">
-                <a:solidFill>
-                  <a:srgbClr val="345671"/>
-                </a:solidFill>
-                <a:latin typeface="Calibri" pitchFamily="34" charset="0"/>
-                <a:ea typeface="Calibri" pitchFamily="34" charset="-122"/>
-                <a:cs typeface="Calibri" pitchFamily="34" charset="-120"/>
-              </a:rPr>
-              <a:t>Test day length</a:t>
-            </a:r>
-            <a:endParaRPr lang="en-US" sz="1200" dirty="0"/>
-          </a:p>
-        </p:txBody>
-      </p:sp>
-      <p:sp>
-        <p:nvSpPr>
-          <p:cNvPr id="21" name="Text 19"/>
-          <p:cNvSpPr/>
-          <p:nvPr/>
-        </p:nvSpPr>
-        <p:spPr>
-          <a:xfrm>
-            <a:off x="4103699" y="4910328"/>
-            <a:ext cx="1097280" cy="274320"/>
-          </a:xfrm>
-          <a:prstGeom prst="rect">
-            <a:avLst/>
-          </a:prstGeom>
-          <a:noFill/>
-          <a:ln/>
-        </p:spPr>
-        <p:txBody>
-          <a:bodyPr wrap="square" lIns="0" tIns="0" rIns="0" bIns="0" rtlCol="0" anchor="ctr"/>
-          <a:lstStyle/>
-          <a:p>
-            <a:pPr algn="r" indent="0" marL="0">
-              <a:buNone/>
-            </a:pPr>
-            <a:r>
-              <a:rPr lang="en-US" sz="1200" b="1" dirty="0">
-                <a:solidFill>
-                  <a:srgbClr val="0C2A3D"/>
-                </a:solidFill>
-                <a:latin typeface="Calibri" pitchFamily="34" charset="0"/>
-                <a:ea typeface="Calibri" pitchFamily="34" charset="-122"/>
-                <a:cs typeface="Calibri" pitchFamily="34" charset="-120"/>
-              </a:rPr>
-              <a:t>8 hours</a:t>
-            </a:r>
-            <a:endParaRPr lang="en-US" sz="1200" dirty="0"/>
-          </a:p>
-        </p:txBody>
-      </p:sp>
-      <p:sp>
-        <p:nvSpPr>
-          <p:cNvPr id="22" name="Text 20"/>
-          <p:cNvSpPr/>
-          <p:nvPr/>
-        </p:nvSpPr>
-        <p:spPr>
-          <a:xfrm>
-            <a:off x="502920" y="5239512"/>
-            <a:ext cx="3600779" cy="274320"/>
-          </a:xfrm>
-          <a:prstGeom prst="rect">
-            <a:avLst/>
-          </a:prstGeom>
-          <a:noFill/>
-          <a:ln/>
-        </p:spPr>
-        <p:txBody>
-          <a:bodyPr wrap="square" lIns="0" tIns="0" rIns="0" bIns="0" rtlCol="0" anchor="ctr"/>
-          <a:lstStyle/>
-          <a:p>
-            <a:pPr indent="0" marL="0">
-              <a:buNone/>
-            </a:pPr>
-            <a:r>
-              <a:rPr lang="en-US" sz="1200" dirty="0">
-                <a:solidFill>
-                  <a:srgbClr val="345671"/>
-                </a:solidFill>
-                <a:latin typeface="Calibri" pitchFamily="34" charset="0"/>
-                <a:ea typeface="Calibri" pitchFamily="34" charset="-122"/>
-                <a:cs typeface="Calibri" pitchFamily="34" charset="-120"/>
-              </a:rPr>
-              <a:t>Result</a:t>
-            </a:r>
-            <a:endParaRPr lang="en-US" sz="1200" dirty="0"/>
-          </a:p>
-        </p:txBody>
-      </p:sp>
-      <p:sp>
-        <p:nvSpPr>
-          <p:cNvPr id="23" name="Text 21"/>
-          <p:cNvSpPr/>
-          <p:nvPr/>
-        </p:nvSpPr>
-        <p:spPr>
-          <a:xfrm>
-            <a:off x="4103699" y="5239512"/>
-            <a:ext cx="1097280" cy="274320"/>
-          </a:xfrm>
-          <a:prstGeom prst="rect">
-            <a:avLst/>
-          </a:prstGeom>
-          <a:noFill/>
-          <a:ln/>
-        </p:spPr>
-        <p:txBody>
-          <a:bodyPr wrap="square" lIns="0" tIns="0" rIns="0" bIns="0" rtlCol="0" anchor="ctr"/>
-          <a:lstStyle/>
-          <a:p>
-            <a:pPr algn="r" indent="0" marL="0">
-              <a:buNone/>
-            </a:pPr>
-            <a:r>
-              <a:rPr lang="en-US" sz="1200" b="1" dirty="0">
-                <a:solidFill>
-                  <a:srgbClr val="0C2A3D"/>
-                </a:solidFill>
-                <a:latin typeface="Calibri" pitchFamily="34" charset="0"/>
-                <a:ea typeface="Calibri" pitchFamily="34" charset="-122"/>
-                <a:cs typeface="Calibri" pitchFamily="34" charset="-120"/>
-              </a:rPr>
-              <a:t>Pass / Fail</a:t>
-            </a:r>
-            <a:endParaRPr lang="en-US" sz="1200" dirty="0"/>
-          </a:p>
-        </p:txBody>
-      </p:sp>
-      <p:sp>
-        <p:nvSpPr>
-          <p:cNvPr id="24" name="Text 22"/>
-          <p:cNvSpPr/>
-          <p:nvPr/>
-        </p:nvSpPr>
-        <p:spPr>
-          <a:xfrm>
-            <a:off x="5475299" y="1874520"/>
-            <a:ext cx="6213476" cy="256032"/>
-          </a:xfrm>
-          <a:prstGeom prst="rect">
-            <a:avLst/>
-          </a:prstGeom>
-          <a:noFill/>
-          <a:ln/>
-        </p:spPr>
-        <p:txBody>
-          <a:bodyPr wrap="square" lIns="0" tIns="0" rIns="0" bIns="0" rtlCol="0" anchor="ctr"/>
-          <a:lstStyle/>
-          <a:p>
-            <a:pPr indent="0" marL="0">
-              <a:buNone/>
-            </a:pPr>
-            <a:r>
-              <a:rPr lang="en-US" sz="1100" b="1" spc="300" kern="0" dirty="0">
-                <a:solidFill>
-                  <a:srgbClr val="075985"/>
-                </a:solidFill>
-                <a:latin typeface="Calibri" pitchFamily="34" charset="0"/>
-                <a:ea typeface="Calibri" pitchFamily="34" charset="-122"/>
-                <a:cs typeface="Calibri" pitchFamily="34" charset="-120"/>
-              </a:rPr>
-              <a:t>HIGH-YIELD CONTENT</a:t>
-            </a:r>
-            <a:endParaRPr lang="en-US" sz="1100" dirty="0"/>
-          </a:p>
-        </p:txBody>
-      </p:sp>
-      <p:sp>
-        <p:nvSpPr>
-          <p:cNvPr id="25" name="Shape 23"/>
-          <p:cNvSpPr/>
-          <p:nvPr/>
-        </p:nvSpPr>
-        <p:spPr>
-          <a:xfrm>
-            <a:off x="5475299" y="2194560"/>
-            <a:ext cx="6213476" cy="1508760"/>
+          <p:cNvPr id="13" name="Shape 11"/>
+          <p:cNvSpPr/>
+          <p:nvPr/>
+        </p:nvSpPr>
+        <p:spPr>
+          <a:xfrm>
+            <a:off x="6233008" y="1874520"/>
+            <a:ext cx="5455768" cy="1024128"/>
           </a:xfrm>
           <a:prstGeom prst="rect">
             <a:avLst/>
@@ -4580,14 +4159,14 @@
       </p:sp>
       <p:sp>
         <p:nvSpPr>
-          <p:cNvPr id="26" name="Shape 24"/>
-          <p:cNvSpPr/>
-          <p:nvPr/>
-        </p:nvSpPr>
-        <p:spPr>
-          <a:xfrm>
-            <a:off x="5475299" y="2194560"/>
-            <a:ext cx="91440" cy="1508760"/>
+          <p:cNvPr id="14" name="Shape 12"/>
+          <p:cNvSpPr/>
+          <p:nvPr/>
+        </p:nvSpPr>
+        <p:spPr>
+          <a:xfrm>
+            <a:off x="6233008" y="1874520"/>
+            <a:ext cx="91440" cy="1024128"/>
           </a:xfrm>
           <a:prstGeom prst="rect">
             <a:avLst/>
@@ -4605,14 +4184,78 @@
       </p:sp>
       <p:sp>
         <p:nvSpPr>
-          <p:cNvPr id="27" name="Text 25"/>
-          <p:cNvSpPr/>
-          <p:nvPr/>
-        </p:nvSpPr>
-        <p:spPr>
-          <a:xfrm>
-            <a:off x="5749619" y="2331720"/>
-            <a:ext cx="5847716" cy="310896"/>
+          <p:cNvPr id="15" name="Shape 13"/>
+          <p:cNvSpPr/>
+          <p:nvPr/>
+        </p:nvSpPr>
+        <p:spPr>
+          <a:xfrm>
+            <a:off x="6434176" y="2148840"/>
+            <a:ext cx="411480" cy="411480"/>
+          </a:xfrm>
+          <a:prstGeom prst="ellipse">
+            <a:avLst/>
+          </a:prstGeom>
+          <a:solidFill>
+            <a:srgbClr val="075985"/>
+          </a:solidFill>
+          <a:ln w="12700">
+            <a:solidFill>
+              <a:srgbClr val="075985"/>
+            </a:solidFill>
+            <a:prstDash val="solid"/>
+          </a:ln>
+        </p:spPr>
+      </p:sp>
+      <p:sp>
+        <p:nvSpPr>
+          <p:cNvPr id="16" name="Text 14"/>
+          <p:cNvSpPr/>
+          <p:nvPr/>
+        </p:nvSpPr>
+        <p:spPr>
+          <a:xfrm>
+            <a:off x="6434176" y="2148840"/>
+            <a:ext cx="411480" cy="411480"/>
+          </a:xfrm>
+          <a:prstGeom prst="rect">
+            <a:avLst/>
+          </a:prstGeom>
+          <a:noFill/>
+          <a:ln/>
+        </p:spPr>
+        <p:txBody>
+          <a:bodyPr wrap="square" lIns="0" tIns="0" rIns="0" bIns="0" rtlCol="0" anchor="ctr"/>
+          <a:lstStyle/>
+          <a:p>
+            <a:pPr algn="ctr" indent="0" marL="0">
+              <a:buNone/>
+            </a:pPr>
+            <a:r>
+              <a:rPr lang="en-US" sz="1800" b="1" dirty="0">
+                <a:solidFill>
+                  <a:srgbClr val="FFFFFF"/>
+                </a:solidFill>
+                <a:latin typeface="Arial Black" pitchFamily="34" charset="0"/>
+                <a:ea typeface="Arial Black" pitchFamily="34" charset="-122"/>
+                <a:cs typeface="Arial Black" pitchFamily="34" charset="-120"/>
+              </a:rPr>
+              <a:t>2</a:t>
+            </a:r>
+            <a:endParaRPr lang="en-US" sz="1800" dirty="0"/>
+          </a:p>
+        </p:txBody>
+      </p:sp>
+      <p:sp>
+        <p:nvSpPr>
+          <p:cNvPr id="17" name="Text 15"/>
+          <p:cNvSpPr/>
+          <p:nvPr/>
+        </p:nvSpPr>
+        <p:spPr>
+          <a:xfrm>
+            <a:off x="6946240" y="1965960"/>
+            <a:ext cx="4084168" cy="329184"/>
           </a:xfrm>
           <a:prstGeom prst="rect">
             <a:avLst/>
@@ -4636,7 +4279,7 @@
                 <a:ea typeface="Calibri" pitchFamily="34" charset="-122"/>
                 <a:cs typeface="Calibri" pitchFamily="34" charset="-120"/>
               </a:rPr>
-              <a:t>Disciplines</a:t>
+              <a:t>Confirm name of record</a:t>
             </a:r>
             <a:endParaRPr lang="en-US" sz="1400" dirty="0"/>
           </a:p>
@@ -4644,14 +4287,53 @@
       </p:sp>
       <p:sp>
         <p:nvSpPr>
-          <p:cNvPr id="28" name="Text 26"/>
-          <p:cNvSpPr/>
-          <p:nvPr/>
-        </p:nvSpPr>
-        <p:spPr>
-          <a:xfrm>
-            <a:off x="5749619" y="2651760"/>
-            <a:ext cx="5847716" cy="960120"/>
+          <p:cNvPr id="18" name="Text 16"/>
+          <p:cNvSpPr/>
+          <p:nvPr/>
+        </p:nvSpPr>
+        <p:spPr>
+          <a:xfrm>
+            <a:off x="10975543" y="1965960"/>
+            <a:ext cx="640080" cy="274320"/>
+          </a:xfrm>
+          <a:prstGeom prst="rect">
+            <a:avLst/>
+          </a:prstGeom>
+          <a:noFill/>
+          <a:ln/>
+        </p:spPr>
+        <p:txBody>
+          <a:bodyPr wrap="square" lIns="0" tIns="0" rIns="0" bIns="0" rtlCol="0" anchor="ctr"/>
+          <a:lstStyle/>
+          <a:p>
+            <a:pPr algn="r" indent="0" marL="0">
+              <a:buNone/>
+            </a:pPr>
+            <a:r>
+              <a:rPr lang="en-US" sz="1000" i="1" dirty="0">
+                <a:solidFill>
+                  <a:srgbClr val="6B87A3"/>
+                </a:solidFill>
+                <a:latin typeface="Calibri" pitchFamily="34" charset="0"/>
+                <a:ea typeface="Calibri" pitchFamily="34" charset="-122"/>
+                <a:cs typeface="Calibri" pitchFamily="34" charset="-120"/>
+              </a:rPr>
+              <a:t>p. 12</a:t>
+            </a:r>
+            <a:endParaRPr lang="en-US" sz="1000" dirty="0"/>
+          </a:p>
+        </p:txBody>
+      </p:sp>
+      <p:sp>
+        <p:nvSpPr>
+          <p:cNvPr id="19" name="Text 17"/>
+          <p:cNvSpPr/>
+          <p:nvPr/>
+        </p:nvSpPr>
+        <p:spPr>
+          <a:xfrm>
+            <a:off x="6946240" y="2295144"/>
+            <a:ext cx="4614520" cy="566928"/>
           </a:xfrm>
           <a:prstGeom prst="rect">
             <a:avLst/>
@@ -4667,7 +4349,7 @@
               <a:buNone/>
             </a:pPr>
             <a:r>
-              <a:rPr lang="en-US" sz="1200" dirty="0">
+              <a:rPr lang="en-US" sz="1100" dirty="0">
                 <a:solidFill>
                   <a:srgbClr val="345671"/>
                 </a:solidFill>
@@ -4675,22 +4357,22 @@
                 <a:ea typeface="Calibri" pitchFamily="34" charset="-122"/>
                 <a:cs typeface="Calibri" pitchFamily="34" charset="-120"/>
               </a:rPr>
-              <a:t>Pathology · Physiology · Biochemistry · Pharmacology · Anatomy &amp; Embryology · Microbiology · Immunology · Histology · Behavioral Sciences · Genetics</a:t>
-            </a:r>
-            <a:endParaRPr lang="en-US" sz="1200" dirty="0"/>
-          </a:p>
-        </p:txBody>
-      </p:sp>
-      <p:sp>
-        <p:nvSpPr>
-          <p:cNvPr id="29" name="Shape 27"/>
-          <p:cNvSpPr/>
-          <p:nvPr/>
-        </p:nvSpPr>
-        <p:spPr>
-          <a:xfrm>
-            <a:off x="5475299" y="3886200"/>
-            <a:ext cx="6213476" cy="1508760"/>
+              <a:t>Must match your passport exactly. Different name on diploma → submit verification documentation.</a:t>
+            </a:r>
+            <a:endParaRPr lang="en-US" sz="1100" dirty="0"/>
+          </a:p>
+        </p:txBody>
+      </p:sp>
+      <p:sp>
+        <p:nvSpPr>
+          <p:cNvPr id="20" name="Shape 18"/>
+          <p:cNvSpPr/>
+          <p:nvPr/>
+        </p:nvSpPr>
+        <p:spPr>
+          <a:xfrm>
+            <a:off x="502920" y="2990088"/>
+            <a:ext cx="5455768" cy="1024128"/>
           </a:xfrm>
           <a:prstGeom prst="rect">
             <a:avLst/>
@@ -4708,14 +4390,14 @@
       </p:sp>
       <p:sp>
         <p:nvSpPr>
-          <p:cNvPr id="30" name="Shape 28"/>
-          <p:cNvSpPr/>
-          <p:nvPr/>
-        </p:nvSpPr>
-        <p:spPr>
-          <a:xfrm>
-            <a:off x="5475299" y="3886200"/>
-            <a:ext cx="91440" cy="1508760"/>
+          <p:cNvPr id="21" name="Shape 19"/>
+          <p:cNvSpPr/>
+          <p:nvPr/>
+        </p:nvSpPr>
+        <p:spPr>
+          <a:xfrm>
+            <a:off x="502920" y="2990088"/>
+            <a:ext cx="91440" cy="1024128"/>
           </a:xfrm>
           <a:prstGeom prst="rect">
             <a:avLst/>
@@ -4733,14 +4415,309 @@
       </p:sp>
       <p:sp>
         <p:nvSpPr>
+          <p:cNvPr id="22" name="Shape 20"/>
+          <p:cNvSpPr/>
+          <p:nvPr/>
+        </p:nvSpPr>
+        <p:spPr>
+          <a:xfrm>
+            <a:off x="704088" y="3264408"/>
+            <a:ext cx="411480" cy="411480"/>
+          </a:xfrm>
+          <a:prstGeom prst="ellipse">
+            <a:avLst/>
+          </a:prstGeom>
+          <a:solidFill>
+            <a:srgbClr val="075985"/>
+          </a:solidFill>
+          <a:ln w="12700">
+            <a:solidFill>
+              <a:srgbClr val="075985"/>
+            </a:solidFill>
+            <a:prstDash val="solid"/>
+          </a:ln>
+        </p:spPr>
+      </p:sp>
+      <p:sp>
+        <p:nvSpPr>
+          <p:cNvPr id="23" name="Text 21"/>
+          <p:cNvSpPr/>
+          <p:nvPr/>
+        </p:nvSpPr>
+        <p:spPr>
+          <a:xfrm>
+            <a:off x="704088" y="3264408"/>
+            <a:ext cx="411480" cy="411480"/>
+          </a:xfrm>
+          <a:prstGeom prst="rect">
+            <a:avLst/>
+          </a:prstGeom>
+          <a:noFill/>
+          <a:ln/>
+        </p:spPr>
+        <p:txBody>
+          <a:bodyPr wrap="square" lIns="0" tIns="0" rIns="0" bIns="0" rtlCol="0" anchor="ctr"/>
+          <a:lstStyle/>
+          <a:p>
+            <a:pPr algn="ctr" indent="0" marL="0">
+              <a:buNone/>
+            </a:pPr>
+            <a:r>
+              <a:rPr lang="en-US" sz="1800" b="1" dirty="0">
+                <a:solidFill>
+                  <a:srgbClr val="FFFFFF"/>
+                </a:solidFill>
+                <a:latin typeface="Arial Black" pitchFamily="34" charset="0"/>
+                <a:ea typeface="Arial Black" pitchFamily="34" charset="-122"/>
+                <a:cs typeface="Arial Black" pitchFamily="34" charset="-120"/>
+              </a:rPr>
+              <a:t>3</a:t>
+            </a:r>
+            <a:endParaRPr lang="en-US" sz="1800" dirty="0"/>
+          </a:p>
+        </p:txBody>
+      </p:sp>
+      <p:sp>
+        <p:nvSpPr>
+          <p:cNvPr id="24" name="Text 22"/>
+          <p:cNvSpPr/>
+          <p:nvPr/>
+        </p:nvSpPr>
+        <p:spPr>
+          <a:xfrm>
+            <a:off x="1216152" y="3081528"/>
+            <a:ext cx="4084168" cy="329184"/>
+          </a:xfrm>
+          <a:prstGeom prst="rect">
+            <a:avLst/>
+          </a:prstGeom>
+          <a:noFill/>
+          <a:ln/>
+        </p:spPr>
+        <p:txBody>
+          <a:bodyPr wrap="square" lIns="0" tIns="0" rIns="0" bIns="0" rtlCol="0" anchor="ctr"/>
+          <a:lstStyle/>
+          <a:p>
+            <a:pPr indent="0" marL="0">
+              <a:buNone/>
+            </a:pPr>
+            <a:r>
+              <a:rPr lang="en-US" sz="1400" b="1" dirty="0">
+                <a:solidFill>
+                  <a:srgbClr val="0C2A3D"/>
+                </a:solidFill>
+                <a:latin typeface="Calibri" pitchFamily="34" charset="0"/>
+                <a:ea typeface="Calibri" pitchFamily="34" charset="-122"/>
+                <a:cs typeface="Calibri" pitchFamily="34" charset="-120"/>
+              </a:rPr>
+              <a:t>Application for ECFMG Cert.</a:t>
+            </a:r>
+            <a:endParaRPr lang="en-US" sz="1400" dirty="0"/>
+          </a:p>
+        </p:txBody>
+      </p:sp>
+      <p:sp>
+        <p:nvSpPr>
+          <p:cNvPr id="25" name="Text 23"/>
+          <p:cNvSpPr/>
+          <p:nvPr/>
+        </p:nvSpPr>
+        <p:spPr>
+          <a:xfrm>
+            <a:off x="5245456" y="3081528"/>
+            <a:ext cx="640080" cy="274320"/>
+          </a:xfrm>
+          <a:prstGeom prst="rect">
+            <a:avLst/>
+          </a:prstGeom>
+          <a:noFill/>
+          <a:ln/>
+        </p:spPr>
+        <p:txBody>
+          <a:bodyPr wrap="square" lIns="0" tIns="0" rIns="0" bIns="0" rtlCol="0" anchor="ctr"/>
+          <a:lstStyle/>
+          <a:p>
+            <a:pPr algn="r" indent="0" marL="0">
+              <a:buNone/>
+            </a:pPr>
+            <a:r>
+              <a:rPr lang="en-US" sz="1000" i="1" dirty="0">
+                <a:solidFill>
+                  <a:srgbClr val="6B87A3"/>
+                </a:solidFill>
+                <a:latin typeface="Calibri" pitchFamily="34" charset="0"/>
+                <a:ea typeface="Calibri" pitchFamily="34" charset="-122"/>
+                <a:cs typeface="Calibri" pitchFamily="34" charset="-120"/>
+              </a:rPr>
+              <a:t>p. 21</a:t>
+            </a:r>
+            <a:endParaRPr lang="en-US" sz="1000" dirty="0"/>
+          </a:p>
+        </p:txBody>
+      </p:sp>
+      <p:sp>
+        <p:nvSpPr>
+          <p:cNvPr id="26" name="Text 24"/>
+          <p:cNvSpPr/>
+          <p:nvPr/>
+        </p:nvSpPr>
+        <p:spPr>
+          <a:xfrm>
+            <a:off x="1216152" y="3410712"/>
+            <a:ext cx="4614520" cy="566928"/>
+          </a:xfrm>
+          <a:prstGeom prst="rect">
+            <a:avLst/>
+          </a:prstGeom>
+          <a:noFill/>
+          <a:ln/>
+        </p:spPr>
+        <p:txBody>
+          <a:bodyPr wrap="square" lIns="0" tIns="0" rIns="0" bIns="0" rtlCol="0" anchor="ctr"/>
+          <a:lstStyle/>
+          <a:p>
+            <a:pPr indent="0" marL="0">
+              <a:buNone/>
+            </a:pPr>
+            <a:r>
+              <a:rPr lang="en-US" sz="1100" dirty="0">
+                <a:solidFill>
+                  <a:srgbClr val="345671"/>
+                </a:solidFill>
+                <a:latin typeface="Calibri" pitchFamily="34" charset="0"/>
+                <a:ea typeface="Calibri" pitchFamily="34" charset="-122"/>
+                <a:cs typeface="Calibri" pitchFamily="34" charset="-120"/>
+              </a:rPr>
+              <a:t>Pay fee. Medical school must be in the World Directory with ECFMG Sponsor Note (Graduation Years: Current). Track in My Cases.</a:t>
+            </a:r>
+            <a:endParaRPr lang="en-US" sz="1100" dirty="0"/>
+          </a:p>
+        </p:txBody>
+      </p:sp>
+      <p:sp>
+        <p:nvSpPr>
+          <p:cNvPr id="27" name="Shape 25"/>
+          <p:cNvSpPr/>
+          <p:nvPr/>
+        </p:nvSpPr>
+        <p:spPr>
+          <a:xfrm>
+            <a:off x="6233008" y="2990088"/>
+            <a:ext cx="5455768" cy="1024128"/>
+          </a:xfrm>
+          <a:prstGeom prst="rect">
+            <a:avLst/>
+          </a:prstGeom>
+          <a:solidFill>
+            <a:srgbClr val="F5FBFF"/>
+          </a:solidFill>
+          <a:ln w="9525">
+            <a:solidFill>
+              <a:srgbClr val="D6E8F5"/>
+            </a:solidFill>
+            <a:prstDash val="solid"/>
+          </a:ln>
+        </p:spPr>
+      </p:sp>
+      <p:sp>
+        <p:nvSpPr>
+          <p:cNvPr id="28" name="Shape 26"/>
+          <p:cNvSpPr/>
+          <p:nvPr/>
+        </p:nvSpPr>
+        <p:spPr>
+          <a:xfrm>
+            <a:off x="6233008" y="2990088"/>
+            <a:ext cx="91440" cy="1024128"/>
+          </a:xfrm>
+          <a:prstGeom prst="rect">
+            <a:avLst/>
+          </a:prstGeom>
+          <a:solidFill>
+            <a:srgbClr val="0284C7"/>
+          </a:solidFill>
+          <a:ln w="12700">
+            <a:solidFill>
+              <a:srgbClr val="0284C7"/>
+            </a:solidFill>
+            <a:prstDash val="solid"/>
+          </a:ln>
+        </p:spPr>
+      </p:sp>
+      <p:sp>
+        <p:nvSpPr>
+          <p:cNvPr id="29" name="Shape 27"/>
+          <p:cNvSpPr/>
+          <p:nvPr/>
+        </p:nvSpPr>
+        <p:spPr>
+          <a:xfrm>
+            <a:off x="6434176" y="3264408"/>
+            <a:ext cx="411480" cy="411480"/>
+          </a:xfrm>
+          <a:prstGeom prst="ellipse">
+            <a:avLst/>
+          </a:prstGeom>
+          <a:solidFill>
+            <a:srgbClr val="075985"/>
+          </a:solidFill>
+          <a:ln w="12700">
+            <a:solidFill>
+              <a:srgbClr val="075985"/>
+            </a:solidFill>
+            <a:prstDash val="solid"/>
+          </a:ln>
+        </p:spPr>
+      </p:sp>
+      <p:sp>
+        <p:nvSpPr>
+          <p:cNvPr id="30" name="Text 28"/>
+          <p:cNvSpPr/>
+          <p:nvPr/>
+        </p:nvSpPr>
+        <p:spPr>
+          <a:xfrm>
+            <a:off x="6434176" y="3264408"/>
+            <a:ext cx="411480" cy="411480"/>
+          </a:xfrm>
+          <a:prstGeom prst="rect">
+            <a:avLst/>
+          </a:prstGeom>
+          <a:noFill/>
+          <a:ln/>
+        </p:spPr>
+        <p:txBody>
+          <a:bodyPr wrap="square" lIns="0" tIns="0" rIns="0" bIns="0" rtlCol="0" anchor="ctr"/>
+          <a:lstStyle/>
+          <a:p>
+            <a:pPr algn="ctr" indent="0" marL="0">
+              <a:buNone/>
+            </a:pPr>
+            <a:r>
+              <a:rPr lang="en-US" sz="1800" b="1" dirty="0">
+                <a:solidFill>
+                  <a:srgbClr val="FFFFFF"/>
+                </a:solidFill>
+                <a:latin typeface="Arial Black" pitchFamily="34" charset="0"/>
+                <a:ea typeface="Arial Black" pitchFamily="34" charset="-122"/>
+                <a:cs typeface="Arial Black" pitchFamily="34" charset="-120"/>
+              </a:rPr>
+              <a:t>4</a:t>
+            </a:r>
+            <a:endParaRPr lang="en-US" sz="1800" dirty="0"/>
+          </a:p>
+        </p:txBody>
+      </p:sp>
+      <p:sp>
+        <p:nvSpPr>
           <p:cNvPr id="31" name="Text 29"/>
           <p:cNvSpPr/>
           <p:nvPr/>
         </p:nvSpPr>
         <p:spPr>
           <a:xfrm>
-            <a:off x="5749619" y="4023360"/>
-            <a:ext cx="5847716" cy="310896"/>
+            <a:off x="6946240" y="3081528"/>
+            <a:ext cx="4084168" cy="329184"/>
           </a:xfrm>
           <a:prstGeom prst="rect">
             <a:avLst/>
@@ -4764,7 +4741,7 @@
                 <a:ea typeface="Calibri" pitchFamily="34" charset="-122"/>
                 <a:cs typeface="Calibri" pitchFamily="34" charset="-120"/>
               </a:rPr>
-              <a:t>Organ systems</a:t>
+              <a:t>Submit medical credentials</a:t>
             </a:r>
             <a:endParaRPr lang="en-US" sz="1400" dirty="0"/>
           </a:p>
@@ -4778,8 +4755,47 @@
         </p:nvSpPr>
         <p:spPr>
           <a:xfrm>
-            <a:off x="5749619" y="4343400"/>
-            <a:ext cx="5847716" cy="960120"/>
+            <a:off x="10975543" y="3081528"/>
+            <a:ext cx="640080" cy="274320"/>
+          </a:xfrm>
+          <a:prstGeom prst="rect">
+            <a:avLst/>
+          </a:prstGeom>
+          <a:noFill/>
+          <a:ln/>
+        </p:spPr>
+        <p:txBody>
+          <a:bodyPr wrap="square" lIns="0" tIns="0" rIns="0" bIns="0" rtlCol="0" anchor="ctr"/>
+          <a:lstStyle/>
+          <a:p>
+            <a:pPr algn="r" indent="0" marL="0">
+              <a:buNone/>
+            </a:pPr>
+            <a:r>
+              <a:rPr lang="en-US" sz="1000" i="1" dirty="0">
+                <a:solidFill>
+                  <a:srgbClr val="6B87A3"/>
+                </a:solidFill>
+                <a:latin typeface="Calibri" pitchFamily="34" charset="0"/>
+                <a:ea typeface="Calibri" pitchFamily="34" charset="-122"/>
+                <a:cs typeface="Calibri" pitchFamily="34" charset="-120"/>
+              </a:rPr>
+              <a:t>p. 34</a:t>
+            </a:r>
+            <a:endParaRPr lang="en-US" sz="1000" dirty="0"/>
+          </a:p>
+        </p:txBody>
+      </p:sp>
+      <p:sp>
+        <p:nvSpPr>
+          <p:cNvPr id="33" name="Text 31"/>
+          <p:cNvSpPr/>
+          <p:nvPr/>
+        </p:nvSpPr>
+        <p:spPr>
+          <a:xfrm>
+            <a:off x="6946240" y="3410712"/>
+            <a:ext cx="4614520" cy="566928"/>
           </a:xfrm>
           <a:prstGeom prst="rect">
             <a:avLst/>
@@ -4795,7 +4811,7 @@
               <a:buNone/>
             </a:pPr>
             <a:r>
-              <a:rPr lang="en-US" sz="1200" dirty="0">
+              <a:rPr lang="en-US" sz="1100" dirty="0">
                 <a:solidFill>
                   <a:srgbClr val="345671"/>
                 </a:solidFill>
@@ -4803,22 +4819,136 @@
                 <a:ea typeface="Calibri" pitchFamily="34" charset="-122"/>
                 <a:cs typeface="Calibri" pitchFamily="34" charset="-120"/>
               </a:rPr>
-              <a:t>General Principles · Cardiovascular · Respiratory · GI · Renal/Urinary · Reproductive &amp; Endocrine · MSK &amp; Skin · Nervous &amp; Behavioral · Heme &amp; Immune · Biostats &amp; Epi</a:t>
-            </a:r>
-            <a:endParaRPr lang="en-US" sz="1200" dirty="0"/>
-          </a:p>
-        </p:txBody>
-      </p:sp>
-      <p:sp>
-        <p:nvSpPr>
-          <p:cNvPr id="33" name="Text 31"/>
-          <p:cNvSpPr/>
-          <p:nvPr/>
-        </p:nvSpPr>
-        <p:spPr>
-          <a:xfrm>
-            <a:off x="502920" y="5989320"/>
-            <a:ext cx="11185855" cy="292608"/>
+              <a:t>Final diploma + transcript (+ English translations). ECFMG verifies with the issuing institution before the application is accepted.</a:t>
+            </a:r>
+            <a:endParaRPr lang="en-US" sz="1100" dirty="0"/>
+          </a:p>
+        </p:txBody>
+      </p:sp>
+      <p:sp>
+        <p:nvSpPr>
+          <p:cNvPr id="34" name="Shape 32"/>
+          <p:cNvSpPr/>
+          <p:nvPr/>
+        </p:nvSpPr>
+        <p:spPr>
+          <a:xfrm>
+            <a:off x="502920" y="4105656"/>
+            <a:ext cx="5455768" cy="1024128"/>
+          </a:xfrm>
+          <a:prstGeom prst="rect">
+            <a:avLst/>
+          </a:prstGeom>
+          <a:solidFill>
+            <a:srgbClr val="F5FBFF"/>
+          </a:solidFill>
+          <a:ln w="9525">
+            <a:solidFill>
+              <a:srgbClr val="D6E8F5"/>
+            </a:solidFill>
+            <a:prstDash val="solid"/>
+          </a:ln>
+        </p:spPr>
+      </p:sp>
+      <p:sp>
+        <p:nvSpPr>
+          <p:cNvPr id="35" name="Shape 33"/>
+          <p:cNvSpPr/>
+          <p:nvPr/>
+        </p:nvSpPr>
+        <p:spPr>
+          <a:xfrm>
+            <a:off x="502920" y="4105656"/>
+            <a:ext cx="91440" cy="1024128"/>
+          </a:xfrm>
+          <a:prstGeom prst="rect">
+            <a:avLst/>
+          </a:prstGeom>
+          <a:solidFill>
+            <a:srgbClr val="D97706"/>
+          </a:solidFill>
+          <a:ln w="12700">
+            <a:solidFill>
+              <a:srgbClr val="D97706"/>
+            </a:solidFill>
+            <a:prstDash val="solid"/>
+          </a:ln>
+        </p:spPr>
+      </p:sp>
+      <p:sp>
+        <p:nvSpPr>
+          <p:cNvPr id="36" name="Shape 34"/>
+          <p:cNvSpPr/>
+          <p:nvPr/>
+        </p:nvSpPr>
+        <p:spPr>
+          <a:xfrm>
+            <a:off x="704088" y="4379976"/>
+            <a:ext cx="411480" cy="411480"/>
+          </a:xfrm>
+          <a:prstGeom prst="ellipse">
+            <a:avLst/>
+          </a:prstGeom>
+          <a:solidFill>
+            <a:srgbClr val="B45309"/>
+          </a:solidFill>
+          <a:ln w="12700">
+            <a:solidFill>
+              <a:srgbClr val="B45309"/>
+            </a:solidFill>
+            <a:prstDash val="solid"/>
+          </a:ln>
+        </p:spPr>
+      </p:sp>
+      <p:sp>
+        <p:nvSpPr>
+          <p:cNvPr id="37" name="Text 35"/>
+          <p:cNvSpPr/>
+          <p:nvPr/>
+        </p:nvSpPr>
+        <p:spPr>
+          <a:xfrm>
+            <a:off x="704088" y="4379976"/>
+            <a:ext cx="411480" cy="411480"/>
+          </a:xfrm>
+          <a:prstGeom prst="rect">
+            <a:avLst/>
+          </a:prstGeom>
+          <a:noFill/>
+          <a:ln/>
+        </p:spPr>
+        <p:txBody>
+          <a:bodyPr wrap="square" lIns="0" tIns="0" rIns="0" bIns="0" rtlCol="0" anchor="ctr"/>
+          <a:lstStyle/>
+          <a:p>
+            <a:pPr algn="ctr" indent="0" marL="0">
+              <a:buNone/>
+            </a:pPr>
+            <a:r>
+              <a:rPr lang="en-US" sz="1800" b="1" dirty="0">
+                <a:solidFill>
+                  <a:srgbClr val="FFFFFF"/>
+                </a:solidFill>
+                <a:latin typeface="Arial Black" pitchFamily="34" charset="0"/>
+                <a:ea typeface="Arial Black" pitchFamily="34" charset="-122"/>
+                <a:cs typeface="Arial Black" pitchFamily="34" charset="-120"/>
+              </a:rPr>
+              <a:t>5</a:t>
+            </a:r>
+            <a:endParaRPr lang="en-US" sz="1800" dirty="0"/>
+          </a:p>
+        </p:txBody>
+      </p:sp>
+      <p:sp>
+        <p:nvSpPr>
+          <p:cNvPr id="38" name="Text 36"/>
+          <p:cNvSpPr/>
+          <p:nvPr/>
+        </p:nvSpPr>
+        <p:spPr>
+          <a:xfrm>
+            <a:off x="1216152" y="4197096"/>
+            <a:ext cx="4084168" cy="329184"/>
           </a:xfrm>
           <a:prstGeom prst="rect">
             <a:avLst/>
@@ -4834,29 +4964,800 @@
               <a:buNone/>
             </a:pPr>
             <a:r>
-              <a:rPr lang="en-US" sz="1200" b="1" i="1" dirty="0">
-                <a:solidFill>
-                  <a:srgbClr val="075985"/>
-                </a:solidFill>
-                <a:latin typeface="Calibri" pitchFamily="34" charset="0"/>
-                <a:ea typeface="Calibri" pitchFamily="34" charset="-122"/>
-                <a:cs typeface="Calibri" pitchFamily="34" charset="-120"/>
-              </a:rPr>
-              <a:t>Our approach: master First Aid + UWorld with daily Mon–Sun reps over a 4-month roadmap.</a:t>
-            </a:r>
-            <a:endParaRPr lang="en-US" sz="1200" dirty="0"/>
-          </a:p>
-        </p:txBody>
-      </p:sp>
-      <p:sp>
-        <p:nvSpPr>
-          <p:cNvPr id="34" name="Text 32"/>
-          <p:cNvSpPr/>
-          <p:nvPr/>
-        </p:nvSpPr>
-        <p:spPr>
-          <a:xfrm>
-            <a:off x="502920" y="6263640"/>
+              <a:rPr lang="en-US" sz="1400" b="1" dirty="0">
+                <a:solidFill>
+                  <a:srgbClr val="0C2A3D"/>
+                </a:solidFill>
+                <a:latin typeface="Calibri" pitchFamily="34" charset="0"/>
+                <a:ea typeface="Calibri" pitchFamily="34" charset="-122"/>
+                <a:cs typeface="Calibri" pitchFamily="34" charset="-120"/>
+              </a:rPr>
+              <a:t>Receive your USMLE ID</a:t>
+            </a:r>
+            <a:endParaRPr lang="en-US" sz="1400" dirty="0"/>
+          </a:p>
+        </p:txBody>
+      </p:sp>
+      <p:sp>
+        <p:nvSpPr>
+          <p:cNvPr id="39" name="Text 37"/>
+          <p:cNvSpPr/>
+          <p:nvPr/>
+        </p:nvSpPr>
+        <p:spPr>
+          <a:xfrm>
+            <a:off x="5245456" y="4197096"/>
+            <a:ext cx="640080" cy="274320"/>
+          </a:xfrm>
+          <a:prstGeom prst="rect">
+            <a:avLst/>
+          </a:prstGeom>
+          <a:noFill/>
+          <a:ln/>
+        </p:spPr>
+        <p:txBody>
+          <a:bodyPr wrap="square" lIns="0" tIns="0" rIns="0" bIns="0" rtlCol="0" anchor="ctr"/>
+          <a:lstStyle/>
+          <a:p>
+            <a:pPr algn="r" indent="0" marL="0">
+              <a:buNone/>
+            </a:pPr>
+            <a:r>
+              <a:rPr lang="en-US" sz="1000" i="1" dirty="0">
+                <a:solidFill>
+                  <a:srgbClr val="6B87A3"/>
+                </a:solidFill>
+                <a:latin typeface="Calibri" pitchFamily="34" charset="0"/>
+                <a:ea typeface="Calibri" pitchFamily="34" charset="-122"/>
+                <a:cs typeface="Calibri" pitchFamily="34" charset="-120"/>
+              </a:rPr>
+              <a:t>p. 10</a:t>
+            </a:r>
+            <a:endParaRPr lang="en-US" sz="1000" dirty="0"/>
+          </a:p>
+        </p:txBody>
+      </p:sp>
+      <p:sp>
+        <p:nvSpPr>
+          <p:cNvPr id="40" name="Text 38"/>
+          <p:cNvSpPr/>
+          <p:nvPr/>
+        </p:nvSpPr>
+        <p:spPr>
+          <a:xfrm>
+            <a:off x="1216152" y="4526280"/>
+            <a:ext cx="4614520" cy="566928"/>
+          </a:xfrm>
+          <a:prstGeom prst="rect">
+            <a:avLst/>
+          </a:prstGeom>
+          <a:noFill/>
+          <a:ln/>
+        </p:spPr>
+        <p:txBody>
+          <a:bodyPr wrap="square" lIns="0" tIns="0" rIns="0" bIns="0" rtlCol="0" anchor="ctr"/>
+          <a:lstStyle/>
+          <a:p>
+            <a:pPr indent="0" marL="0">
+              <a:buNone/>
+            </a:pPr>
+            <a:r>
+              <a:rPr lang="en-US" sz="1100" dirty="0">
+                <a:solidFill>
+                  <a:srgbClr val="345671"/>
+                </a:solidFill>
+                <a:latin typeface="Calibri" pitchFamily="34" charset="0"/>
+                <a:ea typeface="Calibri" pitchFamily="34" charset="-122"/>
+                <a:cs typeface="Calibri" pitchFamily="34" charset="-120"/>
+              </a:rPr>
+              <a:t>Since Jan 2026 USMLE Service Transition, FSMB issues this when you register for your first Step. View in My Profile.</a:t>
+            </a:r>
+            <a:endParaRPr lang="en-US" sz="1100" dirty="0"/>
+          </a:p>
+        </p:txBody>
+      </p:sp>
+      <p:sp>
+        <p:nvSpPr>
+          <p:cNvPr id="41" name="Shape 39"/>
+          <p:cNvSpPr/>
+          <p:nvPr/>
+        </p:nvSpPr>
+        <p:spPr>
+          <a:xfrm>
+            <a:off x="6233008" y="4105656"/>
+            <a:ext cx="5455768" cy="1024128"/>
+          </a:xfrm>
+          <a:prstGeom prst="rect">
+            <a:avLst/>
+          </a:prstGeom>
+          <a:solidFill>
+            <a:srgbClr val="F5FBFF"/>
+          </a:solidFill>
+          <a:ln w="9525">
+            <a:solidFill>
+              <a:srgbClr val="D6E8F5"/>
+            </a:solidFill>
+            <a:prstDash val="solid"/>
+          </a:ln>
+        </p:spPr>
+      </p:sp>
+      <p:sp>
+        <p:nvSpPr>
+          <p:cNvPr id="42" name="Shape 40"/>
+          <p:cNvSpPr/>
+          <p:nvPr/>
+        </p:nvSpPr>
+        <p:spPr>
+          <a:xfrm>
+            <a:off x="6233008" y="4105656"/>
+            <a:ext cx="91440" cy="1024128"/>
+          </a:xfrm>
+          <a:prstGeom prst="rect">
+            <a:avLst/>
+          </a:prstGeom>
+          <a:solidFill>
+            <a:srgbClr val="D97706"/>
+          </a:solidFill>
+          <a:ln w="12700">
+            <a:solidFill>
+              <a:srgbClr val="D97706"/>
+            </a:solidFill>
+            <a:prstDash val="solid"/>
+          </a:ln>
+        </p:spPr>
+      </p:sp>
+      <p:sp>
+        <p:nvSpPr>
+          <p:cNvPr id="43" name="Shape 41"/>
+          <p:cNvSpPr/>
+          <p:nvPr/>
+        </p:nvSpPr>
+        <p:spPr>
+          <a:xfrm>
+            <a:off x="6434176" y="4379976"/>
+            <a:ext cx="411480" cy="411480"/>
+          </a:xfrm>
+          <a:prstGeom prst="ellipse">
+            <a:avLst/>
+          </a:prstGeom>
+          <a:solidFill>
+            <a:srgbClr val="B45309"/>
+          </a:solidFill>
+          <a:ln w="12700">
+            <a:solidFill>
+              <a:srgbClr val="B45309"/>
+            </a:solidFill>
+            <a:prstDash val="solid"/>
+          </a:ln>
+        </p:spPr>
+      </p:sp>
+      <p:sp>
+        <p:nvSpPr>
+          <p:cNvPr id="44" name="Text 42"/>
+          <p:cNvSpPr/>
+          <p:nvPr/>
+        </p:nvSpPr>
+        <p:spPr>
+          <a:xfrm>
+            <a:off x="6434176" y="4379976"/>
+            <a:ext cx="411480" cy="411480"/>
+          </a:xfrm>
+          <a:prstGeom prst="rect">
+            <a:avLst/>
+          </a:prstGeom>
+          <a:noFill/>
+          <a:ln/>
+        </p:spPr>
+        <p:txBody>
+          <a:bodyPr wrap="square" lIns="0" tIns="0" rIns="0" bIns="0" rtlCol="0" anchor="ctr"/>
+          <a:lstStyle/>
+          <a:p>
+            <a:pPr algn="ctr" indent="0" marL="0">
+              <a:buNone/>
+            </a:pPr>
+            <a:r>
+              <a:rPr lang="en-US" sz="1800" b="1" dirty="0">
+                <a:solidFill>
+                  <a:srgbClr val="FFFFFF"/>
+                </a:solidFill>
+                <a:latin typeface="Arial Black" pitchFamily="34" charset="0"/>
+                <a:ea typeface="Arial Black" pitchFamily="34" charset="-122"/>
+                <a:cs typeface="Arial Black" pitchFamily="34" charset="-120"/>
+              </a:rPr>
+              <a:t>6</a:t>
+            </a:r>
+            <a:endParaRPr lang="en-US" sz="1800" dirty="0"/>
+          </a:p>
+        </p:txBody>
+      </p:sp>
+      <p:sp>
+        <p:nvSpPr>
+          <p:cNvPr id="45" name="Text 43"/>
+          <p:cNvSpPr/>
+          <p:nvPr/>
+        </p:nvSpPr>
+        <p:spPr>
+          <a:xfrm>
+            <a:off x="6946240" y="4197096"/>
+            <a:ext cx="4084168" cy="329184"/>
+          </a:xfrm>
+          <a:prstGeom prst="rect">
+            <a:avLst/>
+          </a:prstGeom>
+          <a:noFill/>
+          <a:ln/>
+        </p:spPr>
+        <p:txBody>
+          <a:bodyPr wrap="square" lIns="0" tIns="0" rIns="0" bIns="0" rtlCol="0" anchor="ctr"/>
+          <a:lstStyle/>
+          <a:p>
+            <a:pPr indent="0" marL="0">
+              <a:buNone/>
+            </a:pPr>
+            <a:r>
+              <a:rPr lang="en-US" sz="1400" b="1" dirty="0">
+                <a:solidFill>
+                  <a:srgbClr val="0C2A3D"/>
+                </a:solidFill>
+                <a:latin typeface="Calibri" pitchFamily="34" charset="0"/>
+                <a:ea typeface="Calibri" pitchFamily="34" charset="-122"/>
+                <a:cs typeface="Calibri" pitchFamily="34" charset="-120"/>
+              </a:rPr>
+              <a:t>Apply for USMLE Step 1</a:t>
+            </a:r>
+            <a:endParaRPr lang="en-US" sz="1400" dirty="0"/>
+          </a:p>
+        </p:txBody>
+      </p:sp>
+      <p:sp>
+        <p:nvSpPr>
+          <p:cNvPr id="46" name="Text 44"/>
+          <p:cNvSpPr/>
+          <p:nvPr/>
+        </p:nvSpPr>
+        <p:spPr>
+          <a:xfrm>
+            <a:off x="10975543" y="4197096"/>
+            <a:ext cx="640080" cy="274320"/>
+          </a:xfrm>
+          <a:prstGeom prst="rect">
+            <a:avLst/>
+          </a:prstGeom>
+          <a:noFill/>
+          <a:ln/>
+        </p:spPr>
+        <p:txBody>
+          <a:bodyPr wrap="square" lIns="0" tIns="0" rIns="0" bIns="0" rtlCol="0" anchor="ctr"/>
+          <a:lstStyle/>
+          <a:p>
+            <a:pPr algn="r" indent="0" marL="0">
+              <a:buNone/>
+            </a:pPr>
+            <a:r>
+              <a:rPr lang="en-US" sz="1000" i="1" dirty="0">
+                <a:solidFill>
+                  <a:srgbClr val="6B87A3"/>
+                </a:solidFill>
+                <a:latin typeface="Calibri" pitchFamily="34" charset="0"/>
+                <a:ea typeface="Calibri" pitchFamily="34" charset="-122"/>
+                <a:cs typeface="Calibri" pitchFamily="34" charset="-120"/>
+              </a:rPr>
+              <a:t>p. 26</a:t>
+            </a:r>
+            <a:endParaRPr lang="en-US" sz="1000" dirty="0"/>
+          </a:p>
+        </p:txBody>
+      </p:sp>
+      <p:sp>
+        <p:nvSpPr>
+          <p:cNvPr id="47" name="Text 45"/>
+          <p:cNvSpPr/>
+          <p:nvPr/>
+        </p:nvSpPr>
+        <p:spPr>
+          <a:xfrm>
+            <a:off x="6946240" y="4526280"/>
+            <a:ext cx="4614520" cy="566928"/>
+          </a:xfrm>
+          <a:prstGeom prst="rect">
+            <a:avLst/>
+          </a:prstGeom>
+          <a:noFill/>
+          <a:ln/>
+        </p:spPr>
+        <p:txBody>
+          <a:bodyPr wrap="square" lIns="0" tIns="0" rIns="0" bIns="0" rtlCol="0" anchor="ctr"/>
+          <a:lstStyle/>
+          <a:p>
+            <a:pPr indent="0" marL="0">
+              <a:buNone/>
+            </a:pPr>
+            <a:r>
+              <a:rPr lang="en-US" sz="1100" dirty="0">
+                <a:solidFill>
+                  <a:srgbClr val="345671"/>
+                </a:solidFill>
+                <a:latin typeface="Calibri" pitchFamily="34" charset="0"/>
+                <a:ea typeface="Calibri" pitchFamily="34" charset="-122"/>
+                <a:cs typeface="Calibri" pitchFamily="34" charset="-120"/>
+              </a:rPr>
+              <a:t>Through FSMB. FSMB confirms with ECFMG that you're eligible. Students need school official to certify enrollment.</a:t>
+            </a:r>
+            <a:endParaRPr lang="en-US" sz="1100" dirty="0"/>
+          </a:p>
+        </p:txBody>
+      </p:sp>
+      <p:sp>
+        <p:nvSpPr>
+          <p:cNvPr id="48" name="Shape 46"/>
+          <p:cNvSpPr/>
+          <p:nvPr/>
+        </p:nvSpPr>
+        <p:spPr>
+          <a:xfrm>
+            <a:off x="502920" y="5221224"/>
+            <a:ext cx="5455768" cy="1024128"/>
+          </a:xfrm>
+          <a:prstGeom prst="rect">
+            <a:avLst/>
+          </a:prstGeom>
+          <a:solidFill>
+            <a:srgbClr val="F5FBFF"/>
+          </a:solidFill>
+          <a:ln w="9525">
+            <a:solidFill>
+              <a:srgbClr val="D6E8F5"/>
+            </a:solidFill>
+            <a:prstDash val="solid"/>
+          </a:ln>
+        </p:spPr>
+      </p:sp>
+      <p:sp>
+        <p:nvSpPr>
+          <p:cNvPr id="49" name="Shape 47"/>
+          <p:cNvSpPr/>
+          <p:nvPr/>
+        </p:nvSpPr>
+        <p:spPr>
+          <a:xfrm>
+            <a:off x="502920" y="5221224"/>
+            <a:ext cx="91440" cy="1024128"/>
+          </a:xfrm>
+          <a:prstGeom prst="rect">
+            <a:avLst/>
+          </a:prstGeom>
+          <a:solidFill>
+            <a:srgbClr val="D97706"/>
+          </a:solidFill>
+          <a:ln w="12700">
+            <a:solidFill>
+              <a:srgbClr val="D97706"/>
+            </a:solidFill>
+            <a:prstDash val="solid"/>
+          </a:ln>
+        </p:spPr>
+      </p:sp>
+      <p:sp>
+        <p:nvSpPr>
+          <p:cNvPr id="50" name="Shape 48"/>
+          <p:cNvSpPr/>
+          <p:nvPr/>
+        </p:nvSpPr>
+        <p:spPr>
+          <a:xfrm>
+            <a:off x="704088" y="5495544"/>
+            <a:ext cx="411480" cy="411480"/>
+          </a:xfrm>
+          <a:prstGeom prst="ellipse">
+            <a:avLst/>
+          </a:prstGeom>
+          <a:solidFill>
+            <a:srgbClr val="B45309"/>
+          </a:solidFill>
+          <a:ln w="12700">
+            <a:solidFill>
+              <a:srgbClr val="B45309"/>
+            </a:solidFill>
+            <a:prstDash val="solid"/>
+          </a:ln>
+        </p:spPr>
+      </p:sp>
+      <p:sp>
+        <p:nvSpPr>
+          <p:cNvPr id="51" name="Text 49"/>
+          <p:cNvSpPr/>
+          <p:nvPr/>
+        </p:nvSpPr>
+        <p:spPr>
+          <a:xfrm>
+            <a:off x="704088" y="5495544"/>
+            <a:ext cx="411480" cy="411480"/>
+          </a:xfrm>
+          <a:prstGeom prst="rect">
+            <a:avLst/>
+          </a:prstGeom>
+          <a:noFill/>
+          <a:ln/>
+        </p:spPr>
+        <p:txBody>
+          <a:bodyPr wrap="square" lIns="0" tIns="0" rIns="0" bIns="0" rtlCol="0" anchor="ctr"/>
+          <a:lstStyle/>
+          <a:p>
+            <a:pPr algn="ctr" indent="0" marL="0">
+              <a:buNone/>
+            </a:pPr>
+            <a:r>
+              <a:rPr lang="en-US" sz="1800" b="1" dirty="0">
+                <a:solidFill>
+                  <a:srgbClr val="FFFFFF"/>
+                </a:solidFill>
+                <a:latin typeface="Arial Black" pitchFamily="34" charset="0"/>
+                <a:ea typeface="Arial Black" pitchFamily="34" charset="-122"/>
+                <a:cs typeface="Arial Black" pitchFamily="34" charset="-120"/>
+              </a:rPr>
+              <a:t>7</a:t>
+            </a:r>
+            <a:endParaRPr lang="en-US" sz="1800" dirty="0"/>
+          </a:p>
+        </p:txBody>
+      </p:sp>
+      <p:sp>
+        <p:nvSpPr>
+          <p:cNvPr id="52" name="Text 50"/>
+          <p:cNvSpPr/>
+          <p:nvPr/>
+        </p:nvSpPr>
+        <p:spPr>
+          <a:xfrm>
+            <a:off x="1216152" y="5312664"/>
+            <a:ext cx="4084168" cy="329184"/>
+          </a:xfrm>
+          <a:prstGeom prst="rect">
+            <a:avLst/>
+          </a:prstGeom>
+          <a:noFill/>
+          <a:ln/>
+        </p:spPr>
+        <p:txBody>
+          <a:bodyPr wrap="square" lIns="0" tIns="0" rIns="0" bIns="0" rtlCol="0" anchor="ctr"/>
+          <a:lstStyle/>
+          <a:p>
+            <a:pPr indent="0" marL="0">
+              <a:buNone/>
+            </a:pPr>
+            <a:r>
+              <a:rPr lang="en-US" sz="1400" b="1" dirty="0">
+                <a:solidFill>
+                  <a:srgbClr val="0C2A3D"/>
+                </a:solidFill>
+                <a:latin typeface="Calibri" pitchFamily="34" charset="0"/>
+                <a:ea typeface="Calibri" pitchFamily="34" charset="-122"/>
+                <a:cs typeface="Calibri" pitchFamily="34" charset="-120"/>
+              </a:rPr>
+              <a:t>Take Step 1  ·  Pass / Fail</a:t>
+            </a:r>
+            <a:endParaRPr lang="en-US" sz="1400" dirty="0"/>
+          </a:p>
+        </p:txBody>
+      </p:sp>
+      <p:sp>
+        <p:nvSpPr>
+          <p:cNvPr id="53" name="Text 51"/>
+          <p:cNvSpPr/>
+          <p:nvPr/>
+        </p:nvSpPr>
+        <p:spPr>
+          <a:xfrm>
+            <a:off x="5245456" y="5312664"/>
+            <a:ext cx="640080" cy="274320"/>
+          </a:xfrm>
+          <a:prstGeom prst="rect">
+            <a:avLst/>
+          </a:prstGeom>
+          <a:noFill/>
+          <a:ln/>
+        </p:spPr>
+        <p:txBody>
+          <a:bodyPr wrap="square" lIns="0" tIns="0" rIns="0" bIns="0" rtlCol="0" anchor="ctr"/>
+          <a:lstStyle/>
+          <a:p>
+            <a:pPr algn="r" indent="0" marL="0">
+              <a:buNone/>
+            </a:pPr>
+            <a:r>
+              <a:rPr lang="en-US" sz="1000" i="1" dirty="0">
+                <a:solidFill>
+                  <a:srgbClr val="6B87A3"/>
+                </a:solidFill>
+                <a:latin typeface="Calibri" pitchFamily="34" charset="0"/>
+                <a:ea typeface="Calibri" pitchFamily="34" charset="-122"/>
+                <a:cs typeface="Calibri" pitchFamily="34" charset="-120"/>
+              </a:rPr>
+              <a:t>—</a:t>
+            </a:r>
+            <a:endParaRPr lang="en-US" sz="1000" dirty="0"/>
+          </a:p>
+        </p:txBody>
+      </p:sp>
+      <p:sp>
+        <p:nvSpPr>
+          <p:cNvPr id="54" name="Text 52"/>
+          <p:cNvSpPr/>
+          <p:nvPr/>
+        </p:nvSpPr>
+        <p:spPr>
+          <a:xfrm>
+            <a:off x="1216152" y="5641848"/>
+            <a:ext cx="4614520" cy="566928"/>
+          </a:xfrm>
+          <a:prstGeom prst="rect">
+            <a:avLst/>
+          </a:prstGeom>
+          <a:noFill/>
+          <a:ln/>
+        </p:spPr>
+        <p:txBody>
+          <a:bodyPr wrap="square" lIns="0" tIns="0" rIns="0" bIns="0" rtlCol="0" anchor="ctr"/>
+          <a:lstStyle/>
+          <a:p>
+            <a:pPr indent="0" marL="0">
+              <a:buNone/>
+            </a:pPr>
+            <a:r>
+              <a:rPr lang="en-US" sz="1100" dirty="0">
+                <a:solidFill>
+                  <a:srgbClr val="345671"/>
+                </a:solidFill>
+                <a:latin typeface="Calibri" pitchFamily="34" charset="0"/>
+                <a:ea typeface="Calibri" pitchFamily="34" charset="-122"/>
+                <a:cs typeface="Calibri" pitchFamily="34" charset="-120"/>
+              </a:rPr>
+              <a:t>USMLE shares the outcome directly with ECFMG. You don't need to forward the result yourself.</a:t>
+            </a:r>
+            <a:endParaRPr lang="en-US" sz="1100" dirty="0"/>
+          </a:p>
+        </p:txBody>
+      </p:sp>
+      <p:sp>
+        <p:nvSpPr>
+          <p:cNvPr id="55" name="Shape 53"/>
+          <p:cNvSpPr/>
+          <p:nvPr/>
+        </p:nvSpPr>
+        <p:spPr>
+          <a:xfrm>
+            <a:off x="6233008" y="5221224"/>
+            <a:ext cx="5455768" cy="1024128"/>
+          </a:xfrm>
+          <a:prstGeom prst="rect">
+            <a:avLst/>
+          </a:prstGeom>
+          <a:solidFill>
+            <a:srgbClr val="F5FBFF"/>
+          </a:solidFill>
+          <a:ln w="9525">
+            <a:solidFill>
+              <a:srgbClr val="D6E8F5"/>
+            </a:solidFill>
+            <a:prstDash val="solid"/>
+          </a:ln>
+        </p:spPr>
+      </p:sp>
+      <p:sp>
+        <p:nvSpPr>
+          <p:cNvPr id="56" name="Shape 54"/>
+          <p:cNvSpPr/>
+          <p:nvPr/>
+        </p:nvSpPr>
+        <p:spPr>
+          <a:xfrm>
+            <a:off x="6233008" y="5221224"/>
+            <a:ext cx="91440" cy="1024128"/>
+          </a:xfrm>
+          <a:prstGeom prst="rect">
+            <a:avLst/>
+          </a:prstGeom>
+          <a:solidFill>
+            <a:srgbClr val="D97706"/>
+          </a:solidFill>
+          <a:ln w="12700">
+            <a:solidFill>
+              <a:srgbClr val="D97706"/>
+            </a:solidFill>
+            <a:prstDash val="solid"/>
+          </a:ln>
+        </p:spPr>
+      </p:sp>
+      <p:sp>
+        <p:nvSpPr>
+          <p:cNvPr id="57" name="Shape 55"/>
+          <p:cNvSpPr/>
+          <p:nvPr/>
+        </p:nvSpPr>
+        <p:spPr>
+          <a:xfrm>
+            <a:off x="6434176" y="5495544"/>
+            <a:ext cx="411480" cy="411480"/>
+          </a:xfrm>
+          <a:prstGeom prst="ellipse">
+            <a:avLst/>
+          </a:prstGeom>
+          <a:solidFill>
+            <a:srgbClr val="B45309"/>
+          </a:solidFill>
+          <a:ln w="12700">
+            <a:solidFill>
+              <a:srgbClr val="B45309"/>
+            </a:solidFill>
+            <a:prstDash val="solid"/>
+          </a:ln>
+        </p:spPr>
+      </p:sp>
+      <p:sp>
+        <p:nvSpPr>
+          <p:cNvPr id="58" name="Text 56"/>
+          <p:cNvSpPr/>
+          <p:nvPr/>
+        </p:nvSpPr>
+        <p:spPr>
+          <a:xfrm>
+            <a:off x="6434176" y="5495544"/>
+            <a:ext cx="411480" cy="411480"/>
+          </a:xfrm>
+          <a:prstGeom prst="rect">
+            <a:avLst/>
+          </a:prstGeom>
+          <a:noFill/>
+          <a:ln/>
+        </p:spPr>
+        <p:txBody>
+          <a:bodyPr wrap="square" lIns="0" tIns="0" rIns="0" bIns="0" rtlCol="0" anchor="ctr"/>
+          <a:lstStyle/>
+          <a:p>
+            <a:pPr algn="ctr" indent="0" marL="0">
+              <a:buNone/>
+            </a:pPr>
+            <a:r>
+              <a:rPr lang="en-US" sz="1800" b="1" dirty="0">
+                <a:solidFill>
+                  <a:srgbClr val="FFFFFF"/>
+                </a:solidFill>
+                <a:latin typeface="Arial Black" pitchFamily="34" charset="0"/>
+                <a:ea typeface="Arial Black" pitchFamily="34" charset="-122"/>
+                <a:cs typeface="Arial Black" pitchFamily="34" charset="-120"/>
+              </a:rPr>
+              <a:t>8</a:t>
+            </a:r>
+            <a:endParaRPr lang="en-US" sz="1800" dirty="0"/>
+          </a:p>
+        </p:txBody>
+      </p:sp>
+      <p:sp>
+        <p:nvSpPr>
+          <p:cNvPr id="59" name="Text 57"/>
+          <p:cNvSpPr/>
+          <p:nvPr/>
+        </p:nvSpPr>
+        <p:spPr>
+          <a:xfrm>
+            <a:off x="6946240" y="5312664"/>
+            <a:ext cx="4084168" cy="329184"/>
+          </a:xfrm>
+          <a:prstGeom prst="rect">
+            <a:avLst/>
+          </a:prstGeom>
+          <a:noFill/>
+          <a:ln/>
+        </p:spPr>
+        <p:txBody>
+          <a:bodyPr wrap="square" lIns="0" tIns="0" rIns="0" bIns="0" rtlCol="0" anchor="ctr"/>
+          <a:lstStyle/>
+          <a:p>
+            <a:pPr indent="0" marL="0">
+              <a:buNone/>
+            </a:pPr>
+            <a:r>
+              <a:rPr lang="en-US" sz="1400" b="1" dirty="0">
+                <a:solidFill>
+                  <a:srgbClr val="0C2A3D"/>
+                </a:solidFill>
+                <a:latin typeface="Calibri" pitchFamily="34" charset="0"/>
+                <a:ea typeface="Calibri" pitchFamily="34" charset="-122"/>
+                <a:cs typeface="Calibri" pitchFamily="34" charset="-120"/>
+              </a:rPr>
+              <a:t>Apply for USMLE Step 2 CK</a:t>
+            </a:r>
+            <a:endParaRPr lang="en-US" sz="1400" dirty="0"/>
+          </a:p>
+        </p:txBody>
+      </p:sp>
+      <p:sp>
+        <p:nvSpPr>
+          <p:cNvPr id="60" name="Text 58"/>
+          <p:cNvSpPr/>
+          <p:nvPr/>
+        </p:nvSpPr>
+        <p:spPr>
+          <a:xfrm>
+            <a:off x="10975543" y="5312664"/>
+            <a:ext cx="640080" cy="274320"/>
+          </a:xfrm>
+          <a:prstGeom prst="rect">
+            <a:avLst/>
+          </a:prstGeom>
+          <a:noFill/>
+          <a:ln/>
+        </p:spPr>
+        <p:txBody>
+          <a:bodyPr wrap="square" lIns="0" tIns="0" rIns="0" bIns="0" rtlCol="0" anchor="ctr"/>
+          <a:lstStyle/>
+          <a:p>
+            <a:pPr algn="r" indent="0" marL="0">
+              <a:buNone/>
+            </a:pPr>
+            <a:r>
+              <a:rPr lang="en-US" sz="1000" i="1" dirty="0">
+                <a:solidFill>
+                  <a:srgbClr val="6B87A3"/>
+                </a:solidFill>
+                <a:latin typeface="Calibri" pitchFamily="34" charset="0"/>
+                <a:ea typeface="Calibri" pitchFamily="34" charset="-122"/>
+                <a:cs typeface="Calibri" pitchFamily="34" charset="-120"/>
+              </a:rPr>
+              <a:t>p. 26</a:t>
+            </a:r>
+            <a:endParaRPr lang="en-US" sz="1000" dirty="0"/>
+          </a:p>
+        </p:txBody>
+      </p:sp>
+      <p:sp>
+        <p:nvSpPr>
+          <p:cNvPr id="61" name="Text 59"/>
+          <p:cNvSpPr/>
+          <p:nvPr/>
+        </p:nvSpPr>
+        <p:spPr>
+          <a:xfrm>
+            <a:off x="6946240" y="5641848"/>
+            <a:ext cx="4614520" cy="566928"/>
+          </a:xfrm>
+          <a:prstGeom prst="rect">
+            <a:avLst/>
+          </a:prstGeom>
+          <a:noFill/>
+          <a:ln/>
+        </p:spPr>
+        <p:txBody>
+          <a:bodyPr wrap="square" lIns="0" tIns="0" rIns="0" bIns="0" rtlCol="0" anchor="ctr"/>
+          <a:lstStyle/>
+          <a:p>
+            <a:pPr indent="0" marL="0">
+              <a:buNone/>
+            </a:pPr>
+            <a:r>
+              <a:rPr lang="en-US" sz="1100" dirty="0">
+                <a:solidFill>
+                  <a:srgbClr val="345671"/>
+                </a:solidFill>
+                <a:latin typeface="Calibri" pitchFamily="34" charset="0"/>
+                <a:ea typeface="Calibri" pitchFamily="34" charset="-122"/>
+                <a:cs typeface="Calibri" pitchFamily="34" charset="-120"/>
+              </a:rPr>
+              <a:t>Same eligibility chain. Plan timing carefully — NRMP and GME programs have deadlines, and ECFMG warns slot availability isn't guaranteed.</a:t>
+            </a:r>
+            <a:endParaRPr lang="en-US" sz="1100" dirty="0"/>
+          </a:p>
+        </p:txBody>
+      </p:sp>
+      <p:sp>
+        <p:nvSpPr>
+          <p:cNvPr id="62" name="Text 60"/>
+          <p:cNvSpPr/>
+          <p:nvPr/>
+        </p:nvSpPr>
+        <p:spPr>
+          <a:xfrm>
+            <a:off x="502920" y="6217920"/>
             <a:ext cx="11185855" cy="219456"/>
           </a:xfrm>
           <a:prstGeom prst="rect">
@@ -4881,7 +5782,7 @@
                 <a:ea typeface="Calibri" pitchFamily="34" charset="-122"/>
                 <a:cs typeface="Calibri" pitchFamily="34" charset="-120"/>
               </a:rPr>
-              <a:t>Source: usmle.org Step 1 content outline + FA 2025</a:t>
+              <a:t>Source: ECFMG 2026 Information Booklet (page references in upper right of each card).</a:t>
             </a:r>
             <a:endParaRPr lang="en-US" sz="1000" dirty="0"/>
           </a:p>
@@ -4889,7 +5790,7 @@
       </p:sp>
       <p:sp>
         <p:nvSpPr>
-          <p:cNvPr id="35" name="Text 33"/>
+          <p:cNvPr id="63" name="Text 61"/>
           <p:cNvSpPr/>
           <p:nvPr/>
         </p:nvSpPr>
@@ -4928,7 +5829,7 @@
       </p:sp>
       <p:sp>
         <p:nvSpPr>
-          <p:cNvPr id="36" name="Text 34"/>
+          <p:cNvPr id="64" name="Text 62"/>
           <p:cNvSpPr/>
           <p:nvPr/>
         </p:nvSpPr>
@@ -4959,7 +5860,7 @@
                 <a:ea typeface="Calibri" pitchFamily="34" charset="-122"/>
                 <a:cs typeface="Calibri" pitchFamily="34" charset="-120"/>
               </a:rPr>
-              <a:t>3 / 7</a:t>
+              <a:t>3 / 8</a:t>
             </a:r>
             <a:endParaRPr lang="en-US" sz="1000" dirty="0"/>
           </a:p>
@@ -5012,11 +5913,11 @@
             <a:avLst/>
           </a:prstGeom>
           <a:solidFill>
-            <a:srgbClr val="D97706"/>
+            <a:srgbClr val="0284C7"/>
           </a:solidFill>
           <a:ln w="12700">
             <a:solidFill>
-              <a:srgbClr val="D97706"/>
+              <a:srgbClr val="0284C7"/>
             </a:solidFill>
             <a:prstDash val="solid"/>
           </a:ln>
@@ -5037,11 +5938,11 @@
             <a:avLst/>
           </a:prstGeom>
           <a:solidFill>
-            <a:srgbClr val="D97706"/>
+            <a:srgbClr val="0284C7"/>
           </a:solidFill>
           <a:ln w="12700">
             <a:solidFill>
-              <a:srgbClr val="D97706"/>
+              <a:srgbClr val="0284C7"/>
             </a:solidFill>
             <a:prstDash val="solid"/>
           </a:ln>
@@ -5074,13 +5975,13 @@
             <a:r>
               <a:rPr lang="en-US" sz="1200" b="1" spc="400" kern="0" dirty="0">
                 <a:solidFill>
-                  <a:srgbClr val="D97706"/>
-                </a:solidFill>
-                <a:latin typeface="Calibri" pitchFamily="34" charset="0"/>
-                <a:ea typeface="Calibri" pitchFamily="34" charset="-122"/>
-                <a:cs typeface="Calibri" pitchFamily="34" charset="-120"/>
-              </a:rPr>
-              <a:t>STEP 2 CK PREP</a:t>
+                  <a:srgbClr val="0284C7"/>
+                </a:solidFill>
+                <a:latin typeface="Calibri" pitchFamily="34" charset="0"/>
+                <a:ea typeface="Calibri" pitchFamily="34" charset="-122"/>
+                <a:cs typeface="Calibri" pitchFamily="34" charset="-120"/>
+              </a:rPr>
+              <a:t>STEP 1 PREP</a:t>
             </a:r>
             <a:endParaRPr lang="en-US" sz="1200" dirty="0"/>
           </a:p>
@@ -5119,7 +6020,7 @@
                 <a:ea typeface="Arial Black" pitchFamily="34" charset="-122"/>
                 <a:cs typeface="Arial Black" pitchFamily="34" charset="-120"/>
               </a:rPr>
-              <a:t>Clinical knowledge. Scaled score 1–300.</a:t>
+              <a:t>Foundational sciences. Pass / Fail.</a:t>
             </a:r>
             <a:endParaRPr lang="en-US" sz="3200" dirty="0"/>
           </a:p>
@@ -5152,7 +6053,7 @@
             <a:r>
               <a:rPr lang="en-US" sz="1100" b="1" spc="300" kern="0" dirty="0">
                 <a:solidFill>
-                  <a:srgbClr val="B45309"/>
+                  <a:srgbClr val="075985"/>
                 </a:solidFill>
                 <a:latin typeface="Calibri" pitchFamily="34" charset="0"/>
                 <a:ea typeface="Calibri" pitchFamily="34" charset="-122"/>
@@ -5173,7 +6074,7 @@
         <p:spPr>
           <a:xfrm>
             <a:off x="502920" y="2194560"/>
-            <a:ext cx="3783659" cy="274320"/>
+            <a:ext cx="3783659" cy="292608"/>
           </a:xfrm>
           <a:prstGeom prst="rect">
             <a:avLst/>
@@ -5189,15 +6090,405 @@
               <a:buNone/>
             </a:pPr>
             <a:r>
+              <a:rPr lang="en-US" sz="1300" dirty="0">
+                <a:solidFill>
+                  <a:srgbClr val="0C2A3D"/>
+                </a:solidFill>
+                <a:latin typeface="Calibri" pitchFamily="34" charset="0"/>
+                <a:ea typeface="Calibri" pitchFamily="34" charset="-122"/>
+                <a:cs typeface="Calibri" pitchFamily="34" charset="-120"/>
+              </a:rPr>
+              <a:t>Applying foundational science concepts</a:t>
+            </a:r>
+            <a:endParaRPr lang="en-US" sz="1300" dirty="0"/>
+          </a:p>
+        </p:txBody>
+      </p:sp>
+      <p:sp>
+        <p:nvSpPr>
+          <p:cNvPr id="8" name="Text 6"/>
+          <p:cNvSpPr/>
+          <p:nvPr/>
+        </p:nvSpPr>
+        <p:spPr>
+          <a:xfrm>
+            <a:off x="4286579" y="2194560"/>
+            <a:ext cx="914400" cy="292608"/>
+          </a:xfrm>
+          <a:prstGeom prst="rect">
+            <a:avLst/>
+          </a:prstGeom>
+          <a:noFill/>
+          <a:ln/>
+        </p:spPr>
+        <p:txBody>
+          <a:bodyPr wrap="square" lIns="0" tIns="0" rIns="0" bIns="0" rtlCol="0" anchor="ctr"/>
+          <a:lstStyle/>
+          <a:p>
+            <a:pPr algn="r" indent="0" marL="0">
+              <a:buNone/>
+            </a:pPr>
+            <a:r>
+              <a:rPr lang="en-US" sz="1300" b="1" dirty="0">
+                <a:solidFill>
+                  <a:srgbClr val="0284C7"/>
+                </a:solidFill>
+                <a:latin typeface="Calibri" pitchFamily="34" charset="0"/>
+                <a:ea typeface="Calibri" pitchFamily="34" charset="-122"/>
+                <a:cs typeface="Calibri" pitchFamily="34" charset="-120"/>
+              </a:rPr>
+              <a:t>60–70%</a:t>
+            </a:r>
+            <a:endParaRPr lang="en-US" sz="1300" dirty="0"/>
+          </a:p>
+        </p:txBody>
+      </p:sp>
+      <p:sp>
+        <p:nvSpPr>
+          <p:cNvPr id="9" name="Text 7"/>
+          <p:cNvSpPr/>
+          <p:nvPr/>
+        </p:nvSpPr>
+        <p:spPr>
+          <a:xfrm>
+            <a:off x="502920" y="2560320"/>
+            <a:ext cx="3783659" cy="292608"/>
+          </a:xfrm>
+          <a:prstGeom prst="rect">
+            <a:avLst/>
+          </a:prstGeom>
+          <a:noFill/>
+          <a:ln/>
+        </p:spPr>
+        <p:txBody>
+          <a:bodyPr wrap="square" lIns="0" tIns="0" rIns="0" bIns="0" rtlCol="0" anchor="ctr"/>
+          <a:lstStyle/>
+          <a:p>
+            <a:pPr indent="0" marL="0">
+              <a:buNone/>
+            </a:pPr>
+            <a:r>
+              <a:rPr lang="en-US" sz="1300" dirty="0">
+                <a:solidFill>
+                  <a:srgbClr val="0C2A3D"/>
+                </a:solidFill>
+                <a:latin typeface="Calibri" pitchFamily="34" charset="0"/>
+                <a:ea typeface="Calibri" pitchFamily="34" charset="-122"/>
+                <a:cs typeface="Calibri" pitchFamily="34" charset="-120"/>
+              </a:rPr>
+              <a:t>Diagnosis</a:t>
+            </a:r>
+            <a:endParaRPr lang="en-US" sz="1300" dirty="0"/>
+          </a:p>
+        </p:txBody>
+      </p:sp>
+      <p:sp>
+        <p:nvSpPr>
+          <p:cNvPr id="10" name="Text 8"/>
+          <p:cNvSpPr/>
+          <p:nvPr/>
+        </p:nvSpPr>
+        <p:spPr>
+          <a:xfrm>
+            <a:off x="4286579" y="2560320"/>
+            <a:ext cx="914400" cy="292608"/>
+          </a:xfrm>
+          <a:prstGeom prst="rect">
+            <a:avLst/>
+          </a:prstGeom>
+          <a:noFill/>
+          <a:ln/>
+        </p:spPr>
+        <p:txBody>
+          <a:bodyPr wrap="square" lIns="0" tIns="0" rIns="0" bIns="0" rtlCol="0" anchor="ctr"/>
+          <a:lstStyle/>
+          <a:p>
+            <a:pPr algn="r" indent="0" marL="0">
+              <a:buNone/>
+            </a:pPr>
+            <a:r>
+              <a:rPr lang="en-US" sz="1300" b="1" dirty="0">
+                <a:solidFill>
+                  <a:srgbClr val="0284C7"/>
+                </a:solidFill>
+                <a:latin typeface="Calibri" pitchFamily="34" charset="0"/>
+                <a:ea typeface="Calibri" pitchFamily="34" charset="-122"/>
+                <a:cs typeface="Calibri" pitchFamily="34" charset="-120"/>
+              </a:rPr>
+              <a:t>20–25%</a:t>
+            </a:r>
+            <a:endParaRPr lang="en-US" sz="1300" dirty="0"/>
+          </a:p>
+        </p:txBody>
+      </p:sp>
+      <p:sp>
+        <p:nvSpPr>
+          <p:cNvPr id="11" name="Text 9"/>
+          <p:cNvSpPr/>
+          <p:nvPr/>
+        </p:nvSpPr>
+        <p:spPr>
+          <a:xfrm>
+            <a:off x="502920" y="2926080"/>
+            <a:ext cx="3783659" cy="292608"/>
+          </a:xfrm>
+          <a:prstGeom prst="rect">
+            <a:avLst/>
+          </a:prstGeom>
+          <a:noFill/>
+          <a:ln/>
+        </p:spPr>
+        <p:txBody>
+          <a:bodyPr wrap="square" lIns="0" tIns="0" rIns="0" bIns="0" rtlCol="0" anchor="ctr"/>
+          <a:lstStyle/>
+          <a:p>
+            <a:pPr indent="0" marL="0">
+              <a:buNone/>
+            </a:pPr>
+            <a:r>
+              <a:rPr lang="en-US" sz="1300" dirty="0">
+                <a:solidFill>
+                  <a:srgbClr val="0C2A3D"/>
+                </a:solidFill>
+                <a:latin typeface="Calibri" pitchFamily="34" charset="0"/>
+                <a:ea typeface="Calibri" pitchFamily="34" charset="-122"/>
+                <a:cs typeface="Calibri" pitchFamily="34" charset="-120"/>
+              </a:rPr>
+              <a:t>Communication &amp; interpersonal skills</a:t>
+            </a:r>
+            <a:endParaRPr lang="en-US" sz="1300" dirty="0"/>
+          </a:p>
+        </p:txBody>
+      </p:sp>
+      <p:sp>
+        <p:nvSpPr>
+          <p:cNvPr id="12" name="Text 10"/>
+          <p:cNvSpPr/>
+          <p:nvPr/>
+        </p:nvSpPr>
+        <p:spPr>
+          <a:xfrm>
+            <a:off x="4286579" y="2926080"/>
+            <a:ext cx="914400" cy="292608"/>
+          </a:xfrm>
+          <a:prstGeom prst="rect">
+            <a:avLst/>
+          </a:prstGeom>
+          <a:noFill/>
+          <a:ln/>
+        </p:spPr>
+        <p:txBody>
+          <a:bodyPr wrap="square" lIns="0" tIns="0" rIns="0" bIns="0" rtlCol="0" anchor="ctr"/>
+          <a:lstStyle/>
+          <a:p>
+            <a:pPr algn="r" indent="0" marL="0">
+              <a:buNone/>
+            </a:pPr>
+            <a:r>
+              <a:rPr lang="en-US" sz="1300" b="1" dirty="0">
+                <a:solidFill>
+                  <a:srgbClr val="0284C7"/>
+                </a:solidFill>
+                <a:latin typeface="Calibri" pitchFamily="34" charset="0"/>
+                <a:ea typeface="Calibri" pitchFamily="34" charset="-122"/>
+                <a:cs typeface="Calibri" pitchFamily="34" charset="-120"/>
+              </a:rPr>
+              <a:t>6–9%</a:t>
+            </a:r>
+            <a:endParaRPr lang="en-US" sz="1300" dirty="0"/>
+          </a:p>
+        </p:txBody>
+      </p:sp>
+      <p:sp>
+        <p:nvSpPr>
+          <p:cNvPr id="13" name="Text 11"/>
+          <p:cNvSpPr/>
+          <p:nvPr/>
+        </p:nvSpPr>
+        <p:spPr>
+          <a:xfrm>
+            <a:off x="502920" y="3291840"/>
+            <a:ext cx="3783659" cy="292608"/>
+          </a:xfrm>
+          <a:prstGeom prst="rect">
+            <a:avLst/>
+          </a:prstGeom>
+          <a:noFill/>
+          <a:ln/>
+        </p:spPr>
+        <p:txBody>
+          <a:bodyPr wrap="square" lIns="0" tIns="0" rIns="0" bIns="0" rtlCol="0" anchor="ctr"/>
+          <a:lstStyle/>
+          <a:p>
+            <a:pPr indent="0" marL="0">
+              <a:buNone/>
+            </a:pPr>
+            <a:r>
+              <a:rPr lang="en-US" sz="1300" dirty="0">
+                <a:solidFill>
+                  <a:srgbClr val="0C2A3D"/>
+                </a:solidFill>
+                <a:latin typeface="Calibri" pitchFamily="34" charset="0"/>
+                <a:ea typeface="Calibri" pitchFamily="34" charset="-122"/>
+                <a:cs typeface="Calibri" pitchFamily="34" charset="-120"/>
+              </a:rPr>
+              <a:t>Evidence-based medicine</a:t>
+            </a:r>
+            <a:endParaRPr lang="en-US" sz="1300" dirty="0"/>
+          </a:p>
+        </p:txBody>
+      </p:sp>
+      <p:sp>
+        <p:nvSpPr>
+          <p:cNvPr id="14" name="Text 12"/>
+          <p:cNvSpPr/>
+          <p:nvPr/>
+        </p:nvSpPr>
+        <p:spPr>
+          <a:xfrm>
+            <a:off x="4286579" y="3291840"/>
+            <a:ext cx="914400" cy="292608"/>
+          </a:xfrm>
+          <a:prstGeom prst="rect">
+            <a:avLst/>
+          </a:prstGeom>
+          <a:noFill/>
+          <a:ln/>
+        </p:spPr>
+        <p:txBody>
+          <a:bodyPr wrap="square" lIns="0" tIns="0" rIns="0" bIns="0" rtlCol="0" anchor="ctr"/>
+          <a:lstStyle/>
+          <a:p>
+            <a:pPr algn="r" indent="0" marL="0">
+              <a:buNone/>
+            </a:pPr>
+            <a:r>
+              <a:rPr lang="en-US" sz="1300" b="1" dirty="0">
+                <a:solidFill>
+                  <a:srgbClr val="0284C7"/>
+                </a:solidFill>
+                <a:latin typeface="Calibri" pitchFamily="34" charset="0"/>
+                <a:ea typeface="Calibri" pitchFamily="34" charset="-122"/>
+                <a:cs typeface="Calibri" pitchFamily="34" charset="-120"/>
+              </a:rPr>
+              <a:t>4–6%</a:t>
+            </a:r>
+            <a:endParaRPr lang="en-US" sz="1300" dirty="0"/>
+          </a:p>
+        </p:txBody>
+      </p:sp>
+      <p:sp>
+        <p:nvSpPr>
+          <p:cNvPr id="15" name="Text 13"/>
+          <p:cNvSpPr/>
+          <p:nvPr/>
+        </p:nvSpPr>
+        <p:spPr>
+          <a:xfrm>
+            <a:off x="502920" y="3931920"/>
+            <a:ext cx="4698059" cy="256032"/>
+          </a:xfrm>
+          <a:prstGeom prst="rect">
+            <a:avLst/>
+          </a:prstGeom>
+          <a:noFill/>
+          <a:ln/>
+        </p:spPr>
+        <p:txBody>
+          <a:bodyPr wrap="square" lIns="0" tIns="0" rIns="0" bIns="0" rtlCol="0" anchor="ctr"/>
+          <a:lstStyle/>
+          <a:p>
+            <a:pPr indent="0" marL="0">
+              <a:buNone/>
+            </a:pPr>
+            <a:r>
+              <a:rPr lang="en-US" sz="1100" b="1" spc="300" kern="0" dirty="0">
+                <a:solidFill>
+                  <a:srgbClr val="075985"/>
+                </a:solidFill>
+                <a:latin typeface="Calibri" pitchFamily="34" charset="0"/>
+                <a:ea typeface="Calibri" pitchFamily="34" charset="-122"/>
+                <a:cs typeface="Calibri" pitchFamily="34" charset="-120"/>
+              </a:rPr>
+              <a:t>FORMAT</a:t>
+            </a:r>
+            <a:endParaRPr lang="en-US" sz="1100" dirty="0"/>
+          </a:p>
+        </p:txBody>
+      </p:sp>
+      <p:sp>
+        <p:nvSpPr>
+          <p:cNvPr id="16" name="Text 14"/>
+          <p:cNvSpPr/>
+          <p:nvPr/>
+        </p:nvSpPr>
+        <p:spPr>
+          <a:xfrm>
+            <a:off x="502920" y="4251960"/>
+            <a:ext cx="3600779" cy="274320"/>
+          </a:xfrm>
+          <a:prstGeom prst="rect">
+            <a:avLst/>
+          </a:prstGeom>
+          <a:noFill/>
+          <a:ln/>
+        </p:spPr>
+        <p:txBody>
+          <a:bodyPr wrap="square" lIns="0" tIns="0" rIns="0" bIns="0" rtlCol="0" anchor="ctr"/>
+          <a:lstStyle/>
+          <a:p>
+            <a:pPr indent="0" marL="0">
+              <a:buNone/>
+            </a:pPr>
+            <a:r>
               <a:rPr lang="en-US" sz="1200" dirty="0">
                 <a:solidFill>
+                  <a:srgbClr val="345671"/>
+                </a:solidFill>
+                <a:latin typeface="Calibri" pitchFamily="34" charset="0"/>
+                <a:ea typeface="Calibri" pitchFamily="34" charset="-122"/>
+                <a:cs typeface="Calibri" pitchFamily="34" charset="-120"/>
+              </a:rPr>
+              <a:t>Question blocks</a:t>
+            </a:r>
+            <a:endParaRPr lang="en-US" sz="1200" dirty="0"/>
+          </a:p>
+        </p:txBody>
+      </p:sp>
+      <p:sp>
+        <p:nvSpPr>
+          <p:cNvPr id="17" name="Text 15"/>
+          <p:cNvSpPr/>
+          <p:nvPr/>
+        </p:nvSpPr>
+        <p:spPr>
+          <a:xfrm>
+            <a:off x="4103699" y="4251960"/>
+            <a:ext cx="1097280" cy="274320"/>
+          </a:xfrm>
+          <a:prstGeom prst="rect">
+            <a:avLst/>
+          </a:prstGeom>
+          <a:noFill/>
+          <a:ln/>
+        </p:spPr>
+        <p:txBody>
+          <a:bodyPr wrap="square" lIns="0" tIns="0" rIns="0" bIns="0" rtlCol="0" anchor="ctr"/>
+          <a:lstStyle/>
+          <a:p>
+            <a:pPr algn="r" indent="0" marL="0">
+              <a:buNone/>
+            </a:pPr>
+            <a:r>
+              <a:rPr lang="en-US" sz="1200" b="1" dirty="0">
+                <a:solidFill>
                   <a:srgbClr val="0C2A3D"/>
                 </a:solidFill>
                 <a:latin typeface="Calibri" pitchFamily="34" charset="0"/>
                 <a:ea typeface="Calibri" pitchFamily="34" charset="-122"/>
                 <a:cs typeface="Calibri" pitchFamily="34" charset="-120"/>
               </a:rPr>
-              <a:t>Diagnosis</a:t>
+              <a:t>7</a:t>
             </a:r>
             <a:endParaRPr lang="en-US" sz="1200" dirty="0"/>
           </a:p>
@@ -5205,14 +6496,53 @@
       </p:sp>
       <p:sp>
         <p:nvSpPr>
-          <p:cNvPr id="8" name="Text 6"/>
-          <p:cNvSpPr/>
-          <p:nvPr/>
-        </p:nvSpPr>
-        <p:spPr>
-          <a:xfrm>
-            <a:off x="4286579" y="2194560"/>
-            <a:ext cx="914400" cy="274320"/>
+          <p:cNvPr id="18" name="Text 16"/>
+          <p:cNvSpPr/>
+          <p:nvPr/>
+        </p:nvSpPr>
+        <p:spPr>
+          <a:xfrm>
+            <a:off x="502920" y="4581144"/>
+            <a:ext cx="3600779" cy="274320"/>
+          </a:xfrm>
+          <a:prstGeom prst="rect">
+            <a:avLst/>
+          </a:prstGeom>
+          <a:noFill/>
+          <a:ln/>
+        </p:spPr>
+        <p:txBody>
+          <a:bodyPr wrap="square" lIns="0" tIns="0" rIns="0" bIns="0" rtlCol="0" anchor="ctr"/>
+          <a:lstStyle/>
+          <a:p>
+            <a:pPr indent="0" marL="0">
+              <a:buNone/>
+            </a:pPr>
+            <a:r>
+              <a:rPr lang="en-US" sz="1200" dirty="0">
+                <a:solidFill>
+                  <a:srgbClr val="345671"/>
+                </a:solidFill>
+                <a:latin typeface="Calibri" pitchFamily="34" charset="0"/>
+                <a:ea typeface="Calibri" pitchFamily="34" charset="-122"/>
+                <a:cs typeface="Calibri" pitchFamily="34" charset="-120"/>
+              </a:rPr>
+              <a:t>Items (max)</a:t>
+            </a:r>
+            <a:endParaRPr lang="en-US" sz="1200" dirty="0"/>
+          </a:p>
+        </p:txBody>
+      </p:sp>
+      <p:sp>
+        <p:nvSpPr>
+          <p:cNvPr id="19" name="Text 17"/>
+          <p:cNvSpPr/>
+          <p:nvPr/>
+        </p:nvSpPr>
+        <p:spPr>
+          <a:xfrm>
+            <a:off x="4103699" y="4581144"/>
+            <a:ext cx="1097280" cy="274320"/>
           </a:xfrm>
           <a:prstGeom prst="rect">
             <a:avLst/>
@@ -5230,13 +6560,13 @@
             <a:r>
               <a:rPr lang="en-US" sz="1200" b="1" dirty="0">
                 <a:solidFill>
-                  <a:srgbClr val="D97706"/>
-                </a:solidFill>
-                <a:latin typeface="Calibri" pitchFamily="34" charset="0"/>
-                <a:ea typeface="Calibri" pitchFamily="34" charset="-122"/>
-                <a:cs typeface="Calibri" pitchFamily="34" charset="-120"/>
-              </a:rPr>
-              <a:t>34–46%</a:t>
+                  <a:srgbClr val="0C2A3D"/>
+                </a:solidFill>
+                <a:latin typeface="Calibri" pitchFamily="34" charset="0"/>
+                <a:ea typeface="Calibri" pitchFamily="34" charset="-122"/>
+                <a:cs typeface="Calibri" pitchFamily="34" charset="-120"/>
+              </a:rPr>
+              <a:t>280</a:t>
             </a:r>
             <a:endParaRPr lang="en-US" sz="1200" dirty="0"/>
           </a:p>
@@ -5244,14 +6574,14 @@
       </p:sp>
       <p:sp>
         <p:nvSpPr>
-          <p:cNvPr id="9" name="Text 7"/>
-          <p:cNvSpPr/>
-          <p:nvPr/>
-        </p:nvSpPr>
-        <p:spPr>
-          <a:xfrm>
-            <a:off x="502920" y="2523744"/>
-            <a:ext cx="3783659" cy="274320"/>
+          <p:cNvPr id="20" name="Text 18"/>
+          <p:cNvSpPr/>
+          <p:nvPr/>
+        </p:nvSpPr>
+        <p:spPr>
+          <a:xfrm>
+            <a:off x="502920" y="4910328"/>
+            <a:ext cx="3600779" cy="274320"/>
           </a:xfrm>
           <a:prstGeom prst="rect">
             <a:avLst/>
@@ -5269,13 +6599,52 @@
             <a:r>
               <a:rPr lang="en-US" sz="1200" dirty="0">
                 <a:solidFill>
+                  <a:srgbClr val="345671"/>
+                </a:solidFill>
+                <a:latin typeface="Calibri" pitchFamily="34" charset="0"/>
+                <a:ea typeface="Calibri" pitchFamily="34" charset="-122"/>
+                <a:cs typeface="Calibri" pitchFamily="34" charset="-120"/>
+              </a:rPr>
+              <a:t>Test day length</a:t>
+            </a:r>
+            <a:endParaRPr lang="en-US" sz="1200" dirty="0"/>
+          </a:p>
+        </p:txBody>
+      </p:sp>
+      <p:sp>
+        <p:nvSpPr>
+          <p:cNvPr id="21" name="Text 19"/>
+          <p:cNvSpPr/>
+          <p:nvPr/>
+        </p:nvSpPr>
+        <p:spPr>
+          <a:xfrm>
+            <a:off x="4103699" y="4910328"/>
+            <a:ext cx="1097280" cy="274320"/>
+          </a:xfrm>
+          <a:prstGeom prst="rect">
+            <a:avLst/>
+          </a:prstGeom>
+          <a:noFill/>
+          <a:ln/>
+        </p:spPr>
+        <p:txBody>
+          <a:bodyPr wrap="square" lIns="0" tIns="0" rIns="0" bIns="0" rtlCol="0" anchor="ctr"/>
+          <a:lstStyle/>
+          <a:p>
+            <a:pPr algn="r" indent="0" marL="0">
+              <a:buNone/>
+            </a:pPr>
+            <a:r>
+              <a:rPr lang="en-US" sz="1200" b="1" dirty="0">
+                <a:solidFill>
                   <a:srgbClr val="0C2A3D"/>
                 </a:solidFill>
                 <a:latin typeface="Calibri" pitchFamily="34" charset="0"/>
                 <a:ea typeface="Calibri" pitchFamily="34" charset="-122"/>
                 <a:cs typeface="Calibri" pitchFamily="34" charset="-120"/>
               </a:rPr>
-              <a:t>Pharmacotherapy &amp; management</a:t>
+              <a:t>8 hours</a:t>
             </a:r>
             <a:endParaRPr lang="en-US" sz="1200" dirty="0"/>
           </a:p>
@@ -5283,14 +6652,53 @@
       </p:sp>
       <p:sp>
         <p:nvSpPr>
-          <p:cNvPr id="10" name="Text 8"/>
-          <p:cNvSpPr/>
-          <p:nvPr/>
-        </p:nvSpPr>
-        <p:spPr>
-          <a:xfrm>
-            <a:off x="4286579" y="2523744"/>
-            <a:ext cx="914400" cy="274320"/>
+          <p:cNvPr id="22" name="Text 20"/>
+          <p:cNvSpPr/>
+          <p:nvPr/>
+        </p:nvSpPr>
+        <p:spPr>
+          <a:xfrm>
+            <a:off x="502920" y="5239512"/>
+            <a:ext cx="3600779" cy="274320"/>
+          </a:xfrm>
+          <a:prstGeom prst="rect">
+            <a:avLst/>
+          </a:prstGeom>
+          <a:noFill/>
+          <a:ln/>
+        </p:spPr>
+        <p:txBody>
+          <a:bodyPr wrap="square" lIns="0" tIns="0" rIns="0" bIns="0" rtlCol="0" anchor="ctr"/>
+          <a:lstStyle/>
+          <a:p>
+            <a:pPr indent="0" marL="0">
+              <a:buNone/>
+            </a:pPr>
+            <a:r>
+              <a:rPr lang="en-US" sz="1200" dirty="0">
+                <a:solidFill>
+                  <a:srgbClr val="345671"/>
+                </a:solidFill>
+                <a:latin typeface="Calibri" pitchFamily="34" charset="0"/>
+                <a:ea typeface="Calibri" pitchFamily="34" charset="-122"/>
+                <a:cs typeface="Calibri" pitchFamily="34" charset="-120"/>
+              </a:rPr>
+              <a:t>Result</a:t>
+            </a:r>
+            <a:endParaRPr lang="en-US" sz="1200" dirty="0"/>
+          </a:p>
+        </p:txBody>
+      </p:sp>
+      <p:sp>
+        <p:nvSpPr>
+          <p:cNvPr id="23" name="Text 21"/>
+          <p:cNvSpPr/>
+          <p:nvPr/>
+        </p:nvSpPr>
+        <p:spPr>
+          <a:xfrm>
+            <a:off x="4103699" y="5239512"/>
+            <a:ext cx="1097280" cy="274320"/>
           </a:xfrm>
           <a:prstGeom prst="rect">
             <a:avLst/>
@@ -5308,13 +6716,13 @@
             <a:r>
               <a:rPr lang="en-US" sz="1200" b="1" dirty="0">
                 <a:solidFill>
-                  <a:srgbClr val="D97706"/>
-                </a:solidFill>
-                <a:latin typeface="Calibri" pitchFamily="34" charset="0"/>
-                <a:ea typeface="Calibri" pitchFamily="34" charset="-122"/>
-                <a:cs typeface="Calibri" pitchFamily="34" charset="-120"/>
-              </a:rPr>
-              <a:t>26–38%</a:t>
+                  <a:srgbClr val="0C2A3D"/>
+                </a:solidFill>
+                <a:latin typeface="Calibri" pitchFamily="34" charset="0"/>
+                <a:ea typeface="Calibri" pitchFamily="34" charset="-122"/>
+                <a:cs typeface="Calibri" pitchFamily="34" charset="-120"/>
+              </a:rPr>
+              <a:t>Pass / Fail</a:t>
             </a:r>
             <a:endParaRPr lang="en-US" sz="1200" dirty="0"/>
           </a:p>
@@ -5322,592 +6730,7 @@
       </p:sp>
       <p:sp>
         <p:nvSpPr>
-          <p:cNvPr id="11" name="Text 9"/>
-          <p:cNvSpPr/>
-          <p:nvPr/>
-        </p:nvSpPr>
-        <p:spPr>
-          <a:xfrm>
-            <a:off x="502920" y="2852928"/>
-            <a:ext cx="3783659" cy="274320"/>
-          </a:xfrm>
-          <a:prstGeom prst="rect">
-            <a:avLst/>
-          </a:prstGeom>
-          <a:noFill/>
-          <a:ln/>
-        </p:spPr>
-        <p:txBody>
-          <a:bodyPr wrap="square" lIns="0" tIns="0" rIns="0" bIns="0" rtlCol="0" anchor="ctr"/>
-          <a:lstStyle/>
-          <a:p>
-            <a:pPr indent="0" marL="0">
-              <a:buNone/>
-            </a:pPr>
-            <a:r>
-              <a:rPr lang="en-US" sz="1200" dirty="0">
-                <a:solidFill>
-                  <a:srgbClr val="0C2A3D"/>
-                </a:solidFill>
-                <a:latin typeface="Calibri" pitchFamily="34" charset="0"/>
-                <a:ea typeface="Calibri" pitchFamily="34" charset="-122"/>
-                <a:cs typeface="Calibri" pitchFamily="34" charset="-120"/>
-              </a:rPr>
-              <a:t>Health maintenance &amp; prevention</a:t>
-            </a:r>
-            <a:endParaRPr lang="en-US" sz="1200" dirty="0"/>
-          </a:p>
-        </p:txBody>
-      </p:sp>
-      <p:sp>
-        <p:nvSpPr>
-          <p:cNvPr id="12" name="Text 10"/>
-          <p:cNvSpPr/>
-          <p:nvPr/>
-        </p:nvSpPr>
-        <p:spPr>
-          <a:xfrm>
-            <a:off x="4286579" y="2852928"/>
-            <a:ext cx="914400" cy="274320"/>
-          </a:xfrm>
-          <a:prstGeom prst="rect">
-            <a:avLst/>
-          </a:prstGeom>
-          <a:noFill/>
-          <a:ln/>
-        </p:spPr>
-        <p:txBody>
-          <a:bodyPr wrap="square" lIns="0" tIns="0" rIns="0" bIns="0" rtlCol="0" anchor="ctr"/>
-          <a:lstStyle/>
-          <a:p>
-            <a:pPr algn="r" indent="0" marL="0">
-              <a:buNone/>
-            </a:pPr>
-            <a:r>
-              <a:rPr lang="en-US" sz="1200" b="1" dirty="0">
-                <a:solidFill>
-                  <a:srgbClr val="D97706"/>
-                </a:solidFill>
-                <a:latin typeface="Calibri" pitchFamily="34" charset="0"/>
-                <a:ea typeface="Calibri" pitchFamily="34" charset="-122"/>
-                <a:cs typeface="Calibri" pitchFamily="34" charset="-120"/>
-              </a:rPr>
-              <a:t>8–12%</a:t>
-            </a:r>
-            <a:endParaRPr lang="en-US" sz="1200" dirty="0"/>
-          </a:p>
-        </p:txBody>
-      </p:sp>
-      <p:sp>
-        <p:nvSpPr>
-          <p:cNvPr id="13" name="Text 11"/>
-          <p:cNvSpPr/>
-          <p:nvPr/>
-        </p:nvSpPr>
-        <p:spPr>
-          <a:xfrm>
-            <a:off x="502920" y="3182112"/>
-            <a:ext cx="3783659" cy="274320"/>
-          </a:xfrm>
-          <a:prstGeom prst="rect">
-            <a:avLst/>
-          </a:prstGeom>
-          <a:noFill/>
-          <a:ln/>
-        </p:spPr>
-        <p:txBody>
-          <a:bodyPr wrap="square" lIns="0" tIns="0" rIns="0" bIns="0" rtlCol="0" anchor="ctr"/>
-          <a:lstStyle/>
-          <a:p>
-            <a:pPr indent="0" marL="0">
-              <a:buNone/>
-            </a:pPr>
-            <a:r>
-              <a:rPr lang="en-US" sz="1200" dirty="0">
-                <a:solidFill>
-                  <a:srgbClr val="0C2A3D"/>
-                </a:solidFill>
-                <a:latin typeface="Calibri" pitchFamily="34" charset="0"/>
-                <a:ea typeface="Calibri" pitchFamily="34" charset="-122"/>
-                <a:cs typeface="Calibri" pitchFamily="34" charset="-120"/>
-              </a:rPr>
-              <a:t>Ethics / professionalism</a:t>
-            </a:r>
-            <a:endParaRPr lang="en-US" sz="1200" dirty="0"/>
-          </a:p>
-        </p:txBody>
-      </p:sp>
-      <p:sp>
-        <p:nvSpPr>
-          <p:cNvPr id="14" name="Text 12"/>
-          <p:cNvSpPr/>
-          <p:nvPr/>
-        </p:nvSpPr>
-        <p:spPr>
-          <a:xfrm>
-            <a:off x="4286579" y="3182112"/>
-            <a:ext cx="914400" cy="274320"/>
-          </a:xfrm>
-          <a:prstGeom prst="rect">
-            <a:avLst/>
-          </a:prstGeom>
-          <a:noFill/>
-          <a:ln/>
-        </p:spPr>
-        <p:txBody>
-          <a:bodyPr wrap="square" lIns="0" tIns="0" rIns="0" bIns="0" rtlCol="0" anchor="ctr"/>
-          <a:lstStyle/>
-          <a:p>
-            <a:pPr algn="r" indent="0" marL="0">
-              <a:buNone/>
-            </a:pPr>
-            <a:r>
-              <a:rPr lang="en-US" sz="1200" b="1" dirty="0">
-                <a:solidFill>
-                  <a:srgbClr val="D97706"/>
-                </a:solidFill>
-                <a:latin typeface="Calibri" pitchFamily="34" charset="0"/>
-                <a:ea typeface="Calibri" pitchFamily="34" charset="-122"/>
-                <a:cs typeface="Calibri" pitchFamily="34" charset="-120"/>
-              </a:rPr>
-              <a:t>5–7%</a:t>
-            </a:r>
-            <a:endParaRPr lang="en-US" sz="1200" dirty="0"/>
-          </a:p>
-        </p:txBody>
-      </p:sp>
-      <p:sp>
-        <p:nvSpPr>
-          <p:cNvPr id="15" name="Text 13"/>
-          <p:cNvSpPr/>
-          <p:nvPr/>
-        </p:nvSpPr>
-        <p:spPr>
-          <a:xfrm>
-            <a:off x="502920" y="3511296"/>
-            <a:ext cx="3783659" cy="274320"/>
-          </a:xfrm>
-          <a:prstGeom prst="rect">
-            <a:avLst/>
-          </a:prstGeom>
-          <a:noFill/>
-          <a:ln/>
-        </p:spPr>
-        <p:txBody>
-          <a:bodyPr wrap="square" lIns="0" tIns="0" rIns="0" bIns="0" rtlCol="0" anchor="ctr"/>
-          <a:lstStyle/>
-          <a:p>
-            <a:pPr indent="0" marL="0">
-              <a:buNone/>
-            </a:pPr>
-            <a:r>
-              <a:rPr lang="en-US" sz="1200" dirty="0">
-                <a:solidFill>
-                  <a:srgbClr val="0C2A3D"/>
-                </a:solidFill>
-                <a:latin typeface="Calibri" pitchFamily="34" charset="0"/>
-                <a:ea typeface="Calibri" pitchFamily="34" charset="-122"/>
-                <a:cs typeface="Calibri" pitchFamily="34" charset="-120"/>
-              </a:rPr>
-              <a:t>Patient safety / systems-based practice</a:t>
-            </a:r>
-            <a:endParaRPr lang="en-US" sz="1200" dirty="0"/>
-          </a:p>
-        </p:txBody>
-      </p:sp>
-      <p:sp>
-        <p:nvSpPr>
-          <p:cNvPr id="16" name="Text 14"/>
-          <p:cNvSpPr/>
-          <p:nvPr/>
-        </p:nvSpPr>
-        <p:spPr>
-          <a:xfrm>
-            <a:off x="4286579" y="3511296"/>
-            <a:ext cx="914400" cy="274320"/>
-          </a:xfrm>
-          <a:prstGeom prst="rect">
-            <a:avLst/>
-          </a:prstGeom>
-          <a:noFill/>
-          <a:ln/>
-        </p:spPr>
-        <p:txBody>
-          <a:bodyPr wrap="square" lIns="0" tIns="0" rIns="0" bIns="0" rtlCol="0" anchor="ctr"/>
-          <a:lstStyle/>
-          <a:p>
-            <a:pPr algn="r" indent="0" marL="0">
-              <a:buNone/>
-            </a:pPr>
-            <a:r>
-              <a:rPr lang="en-US" sz="1200" b="1" dirty="0">
-                <a:solidFill>
-                  <a:srgbClr val="D97706"/>
-                </a:solidFill>
-                <a:latin typeface="Calibri" pitchFamily="34" charset="0"/>
-                <a:ea typeface="Calibri" pitchFamily="34" charset="-122"/>
-                <a:cs typeface="Calibri" pitchFamily="34" charset="-120"/>
-              </a:rPr>
-              <a:t>5–7%</a:t>
-            </a:r>
-            <a:endParaRPr lang="en-US" sz="1200" dirty="0"/>
-          </a:p>
-        </p:txBody>
-      </p:sp>
-      <p:sp>
-        <p:nvSpPr>
-          <p:cNvPr id="17" name="Text 15"/>
-          <p:cNvSpPr/>
-          <p:nvPr/>
-        </p:nvSpPr>
-        <p:spPr>
-          <a:xfrm>
-            <a:off x="502920" y="4023360"/>
-            <a:ext cx="4698059" cy="256032"/>
-          </a:xfrm>
-          <a:prstGeom prst="rect">
-            <a:avLst/>
-          </a:prstGeom>
-          <a:noFill/>
-          <a:ln/>
-        </p:spPr>
-        <p:txBody>
-          <a:bodyPr wrap="square" lIns="0" tIns="0" rIns="0" bIns="0" rtlCol="0" anchor="ctr"/>
-          <a:lstStyle/>
-          <a:p>
-            <a:pPr indent="0" marL="0">
-              <a:buNone/>
-            </a:pPr>
-            <a:r>
-              <a:rPr lang="en-US" sz="1100" b="1" spc="300" kern="0" dirty="0">
-                <a:solidFill>
-                  <a:srgbClr val="B45309"/>
-                </a:solidFill>
-                <a:latin typeface="Calibri" pitchFamily="34" charset="0"/>
-                <a:ea typeface="Calibri" pitchFamily="34" charset="-122"/>
-                <a:cs typeface="Calibri" pitchFamily="34" charset="-120"/>
-              </a:rPr>
-              <a:t>FORMAT</a:t>
-            </a:r>
-            <a:endParaRPr lang="en-US" sz="1100" dirty="0"/>
-          </a:p>
-        </p:txBody>
-      </p:sp>
-      <p:sp>
-        <p:nvSpPr>
-          <p:cNvPr id="18" name="Text 16"/>
-          <p:cNvSpPr/>
-          <p:nvPr/>
-        </p:nvSpPr>
-        <p:spPr>
-          <a:xfrm>
-            <a:off x="502920" y="4343400"/>
-            <a:ext cx="3326459" cy="274320"/>
-          </a:xfrm>
-          <a:prstGeom prst="rect">
-            <a:avLst/>
-          </a:prstGeom>
-          <a:noFill/>
-          <a:ln/>
-        </p:spPr>
-        <p:txBody>
-          <a:bodyPr wrap="square" lIns="0" tIns="0" rIns="0" bIns="0" rtlCol="0" anchor="ctr"/>
-          <a:lstStyle/>
-          <a:p>
-            <a:pPr indent="0" marL="0">
-              <a:buNone/>
-            </a:pPr>
-            <a:r>
-              <a:rPr lang="en-US" sz="1200" dirty="0">
-                <a:solidFill>
-                  <a:srgbClr val="345671"/>
-                </a:solidFill>
-                <a:latin typeface="Calibri" pitchFamily="34" charset="0"/>
-                <a:ea typeface="Calibri" pitchFamily="34" charset="-122"/>
-                <a:cs typeface="Calibri" pitchFamily="34" charset="-120"/>
-              </a:rPr>
-              <a:t>Question blocks</a:t>
-            </a:r>
-            <a:endParaRPr lang="en-US" sz="1200" dirty="0"/>
-          </a:p>
-        </p:txBody>
-      </p:sp>
-      <p:sp>
-        <p:nvSpPr>
-          <p:cNvPr id="19" name="Text 17"/>
-          <p:cNvSpPr/>
-          <p:nvPr/>
-        </p:nvSpPr>
-        <p:spPr>
-          <a:xfrm>
-            <a:off x="3829379" y="4343400"/>
-            <a:ext cx="1371600" cy="274320"/>
-          </a:xfrm>
-          <a:prstGeom prst="rect">
-            <a:avLst/>
-          </a:prstGeom>
-          <a:noFill/>
-          <a:ln/>
-        </p:spPr>
-        <p:txBody>
-          <a:bodyPr wrap="square" lIns="0" tIns="0" rIns="0" bIns="0" rtlCol="0" anchor="ctr"/>
-          <a:lstStyle/>
-          <a:p>
-            <a:pPr algn="r" indent="0" marL="0">
-              <a:buNone/>
-            </a:pPr>
-            <a:r>
-              <a:rPr lang="en-US" sz="1200" b="1" dirty="0">
-                <a:solidFill>
-                  <a:srgbClr val="0C2A3D"/>
-                </a:solidFill>
-                <a:latin typeface="Calibri" pitchFamily="34" charset="0"/>
-                <a:ea typeface="Calibri" pitchFamily="34" charset="-122"/>
-                <a:cs typeface="Calibri" pitchFamily="34" charset="-120"/>
-              </a:rPr>
-              <a:t>8</a:t>
-            </a:r>
-            <a:endParaRPr lang="en-US" sz="1200" dirty="0"/>
-          </a:p>
-        </p:txBody>
-      </p:sp>
-      <p:sp>
-        <p:nvSpPr>
-          <p:cNvPr id="20" name="Text 18"/>
-          <p:cNvSpPr/>
-          <p:nvPr/>
-        </p:nvSpPr>
-        <p:spPr>
-          <a:xfrm>
-            <a:off x="502920" y="4672584"/>
-            <a:ext cx="3326459" cy="274320"/>
-          </a:xfrm>
-          <a:prstGeom prst="rect">
-            <a:avLst/>
-          </a:prstGeom>
-          <a:noFill/>
-          <a:ln/>
-        </p:spPr>
-        <p:txBody>
-          <a:bodyPr wrap="square" lIns="0" tIns="0" rIns="0" bIns="0" rtlCol="0" anchor="ctr"/>
-          <a:lstStyle/>
-          <a:p>
-            <a:pPr indent="0" marL="0">
-              <a:buNone/>
-            </a:pPr>
-            <a:r>
-              <a:rPr lang="en-US" sz="1200" dirty="0">
-                <a:solidFill>
-                  <a:srgbClr val="345671"/>
-                </a:solidFill>
-                <a:latin typeface="Calibri" pitchFamily="34" charset="0"/>
-                <a:ea typeface="Calibri" pitchFamily="34" charset="-122"/>
-                <a:cs typeface="Calibri" pitchFamily="34" charset="-120"/>
-              </a:rPr>
-              <a:t>Items (max)</a:t>
-            </a:r>
-            <a:endParaRPr lang="en-US" sz="1200" dirty="0"/>
-          </a:p>
-        </p:txBody>
-      </p:sp>
-      <p:sp>
-        <p:nvSpPr>
-          <p:cNvPr id="21" name="Text 19"/>
-          <p:cNvSpPr/>
-          <p:nvPr/>
-        </p:nvSpPr>
-        <p:spPr>
-          <a:xfrm>
-            <a:off x="3829379" y="4672584"/>
-            <a:ext cx="1371600" cy="274320"/>
-          </a:xfrm>
-          <a:prstGeom prst="rect">
-            <a:avLst/>
-          </a:prstGeom>
-          <a:noFill/>
-          <a:ln/>
-        </p:spPr>
-        <p:txBody>
-          <a:bodyPr wrap="square" lIns="0" tIns="0" rIns="0" bIns="0" rtlCol="0" anchor="ctr"/>
-          <a:lstStyle/>
-          <a:p>
-            <a:pPr algn="r" indent="0" marL="0">
-              <a:buNone/>
-            </a:pPr>
-            <a:r>
-              <a:rPr lang="en-US" sz="1200" b="1" dirty="0">
-                <a:solidFill>
-                  <a:srgbClr val="0C2A3D"/>
-                </a:solidFill>
-                <a:latin typeface="Calibri" pitchFamily="34" charset="0"/>
-                <a:ea typeface="Calibri" pitchFamily="34" charset="-122"/>
-                <a:cs typeface="Calibri" pitchFamily="34" charset="-120"/>
-              </a:rPr>
-              <a:t>318</a:t>
-            </a:r>
-            <a:endParaRPr lang="en-US" sz="1200" dirty="0"/>
-          </a:p>
-        </p:txBody>
-      </p:sp>
-      <p:sp>
-        <p:nvSpPr>
-          <p:cNvPr id="22" name="Text 20"/>
-          <p:cNvSpPr/>
-          <p:nvPr/>
-        </p:nvSpPr>
-        <p:spPr>
-          <a:xfrm>
-            <a:off x="502920" y="5001768"/>
-            <a:ext cx="3326459" cy="274320"/>
-          </a:xfrm>
-          <a:prstGeom prst="rect">
-            <a:avLst/>
-          </a:prstGeom>
-          <a:noFill/>
-          <a:ln/>
-        </p:spPr>
-        <p:txBody>
-          <a:bodyPr wrap="square" lIns="0" tIns="0" rIns="0" bIns="0" rtlCol="0" anchor="ctr"/>
-          <a:lstStyle/>
-          <a:p>
-            <a:pPr indent="0" marL="0">
-              <a:buNone/>
-            </a:pPr>
-            <a:r>
-              <a:rPr lang="en-US" sz="1200" dirty="0">
-                <a:solidFill>
-                  <a:srgbClr val="345671"/>
-                </a:solidFill>
-                <a:latin typeface="Calibri" pitchFamily="34" charset="0"/>
-                <a:ea typeface="Calibri" pitchFamily="34" charset="-122"/>
-                <a:cs typeface="Calibri" pitchFamily="34" charset="-120"/>
-              </a:rPr>
-              <a:t>Test day length</a:t>
-            </a:r>
-            <a:endParaRPr lang="en-US" sz="1200" dirty="0"/>
-          </a:p>
-        </p:txBody>
-      </p:sp>
-      <p:sp>
-        <p:nvSpPr>
-          <p:cNvPr id="23" name="Text 21"/>
-          <p:cNvSpPr/>
-          <p:nvPr/>
-        </p:nvSpPr>
-        <p:spPr>
-          <a:xfrm>
-            <a:off x="3829379" y="5001768"/>
-            <a:ext cx="1371600" cy="274320"/>
-          </a:xfrm>
-          <a:prstGeom prst="rect">
-            <a:avLst/>
-          </a:prstGeom>
-          <a:noFill/>
-          <a:ln/>
-        </p:spPr>
-        <p:txBody>
-          <a:bodyPr wrap="square" lIns="0" tIns="0" rIns="0" bIns="0" rtlCol="0" anchor="ctr"/>
-          <a:lstStyle/>
-          <a:p>
-            <a:pPr algn="r" indent="0" marL="0">
-              <a:buNone/>
-            </a:pPr>
-            <a:r>
-              <a:rPr lang="en-US" sz="1200" b="1" dirty="0">
-                <a:solidFill>
-                  <a:srgbClr val="0C2A3D"/>
-                </a:solidFill>
-                <a:latin typeface="Calibri" pitchFamily="34" charset="0"/>
-                <a:ea typeface="Calibri" pitchFamily="34" charset="-122"/>
-                <a:cs typeface="Calibri" pitchFamily="34" charset="-120"/>
-              </a:rPr>
-              <a:t>9 hours</a:t>
-            </a:r>
-            <a:endParaRPr lang="en-US" sz="1200" dirty="0"/>
-          </a:p>
-        </p:txBody>
-      </p:sp>
-      <p:sp>
-        <p:nvSpPr>
           <p:cNvPr id="24" name="Text 22"/>
-          <p:cNvSpPr/>
-          <p:nvPr/>
-        </p:nvSpPr>
-        <p:spPr>
-          <a:xfrm>
-            <a:off x="502920" y="5330952"/>
-            <a:ext cx="3326459" cy="274320"/>
-          </a:xfrm>
-          <a:prstGeom prst="rect">
-            <a:avLst/>
-          </a:prstGeom>
-          <a:noFill/>
-          <a:ln/>
-        </p:spPr>
-        <p:txBody>
-          <a:bodyPr wrap="square" lIns="0" tIns="0" rIns="0" bIns="0" rtlCol="0" anchor="ctr"/>
-          <a:lstStyle/>
-          <a:p>
-            <a:pPr indent="0" marL="0">
-              <a:buNone/>
-            </a:pPr>
-            <a:r>
-              <a:rPr lang="en-US" sz="1200" dirty="0">
-                <a:solidFill>
-                  <a:srgbClr val="345671"/>
-                </a:solidFill>
-                <a:latin typeface="Calibri" pitchFamily="34" charset="0"/>
-                <a:ea typeface="Calibri" pitchFamily="34" charset="-122"/>
-                <a:cs typeface="Calibri" pitchFamily="34" charset="-120"/>
-              </a:rPr>
-              <a:t>Score scale</a:t>
-            </a:r>
-            <a:endParaRPr lang="en-US" sz="1200" dirty="0"/>
-          </a:p>
-        </p:txBody>
-      </p:sp>
-      <p:sp>
-        <p:nvSpPr>
-          <p:cNvPr id="25" name="Text 23"/>
-          <p:cNvSpPr/>
-          <p:nvPr/>
-        </p:nvSpPr>
-        <p:spPr>
-          <a:xfrm>
-            <a:off x="3829379" y="5330952"/>
-            <a:ext cx="1371600" cy="274320"/>
-          </a:xfrm>
-          <a:prstGeom prst="rect">
-            <a:avLst/>
-          </a:prstGeom>
-          <a:noFill/>
-          <a:ln/>
-        </p:spPr>
-        <p:txBody>
-          <a:bodyPr wrap="square" lIns="0" tIns="0" rIns="0" bIns="0" rtlCol="0" anchor="ctr"/>
-          <a:lstStyle/>
-          <a:p>
-            <a:pPr algn="r" indent="0" marL="0">
-              <a:buNone/>
-            </a:pPr>
-            <a:r>
-              <a:rPr lang="en-US" sz="1200" b="1" dirty="0">
-                <a:solidFill>
-                  <a:srgbClr val="0C2A3D"/>
-                </a:solidFill>
-                <a:latin typeface="Calibri" pitchFamily="34" charset="0"/>
-                <a:ea typeface="Calibri" pitchFamily="34" charset="-122"/>
-                <a:cs typeface="Calibri" pitchFamily="34" charset="-120"/>
-              </a:rPr>
-              <a:t>1 – 300 (mean ≈ 248)</a:t>
-            </a:r>
-            <a:endParaRPr lang="en-US" sz="1200" dirty="0"/>
-          </a:p>
-        </p:txBody>
-      </p:sp>
-      <p:sp>
-        <p:nvSpPr>
-          <p:cNvPr id="26" name="Text 24"/>
           <p:cNvSpPr/>
           <p:nvPr/>
         </p:nvSpPr>
@@ -5932,7 +6755,7 @@
             <a:r>
               <a:rPr lang="en-US" sz="1100" b="1" spc="300" kern="0" dirty="0">
                 <a:solidFill>
-                  <a:srgbClr val="B45309"/>
+                  <a:srgbClr val="075985"/>
                 </a:solidFill>
                 <a:latin typeface="Calibri" pitchFamily="34" charset="0"/>
                 <a:ea typeface="Calibri" pitchFamily="34" charset="-122"/>
@@ -5946,7 +6769,7 @@
       </p:sp>
       <p:sp>
         <p:nvSpPr>
-          <p:cNvPr id="27" name="Shape 25"/>
+          <p:cNvPr id="25" name="Shape 23"/>
           <p:cNvSpPr/>
           <p:nvPr/>
         </p:nvSpPr>
@@ -5959,11 +6782,11 @@
             <a:avLst/>
           </a:prstGeom>
           <a:solidFill>
-            <a:srgbClr val="FEF3C7"/>
+            <a:srgbClr val="F5FBFF"/>
           </a:solidFill>
           <a:ln w="9525">
             <a:solidFill>
-              <a:srgbClr val="EAB308"/>
+              <a:srgbClr val="D6E8F5"/>
             </a:solidFill>
             <a:prstDash val="solid"/>
           </a:ln>
@@ -5971,7 +6794,7 @@
       </p:sp>
       <p:sp>
         <p:nvSpPr>
-          <p:cNvPr id="28" name="Shape 26"/>
+          <p:cNvPr id="26" name="Shape 24"/>
           <p:cNvSpPr/>
           <p:nvPr/>
         </p:nvSpPr>
@@ -5984,11 +6807,11 @@
             <a:avLst/>
           </a:prstGeom>
           <a:solidFill>
-            <a:srgbClr val="D97706"/>
+            <a:srgbClr val="0284C7"/>
           </a:solidFill>
           <a:ln w="12700">
             <a:solidFill>
-              <a:srgbClr val="D97706"/>
+              <a:srgbClr val="0284C7"/>
             </a:solidFill>
             <a:prstDash val="solid"/>
           </a:ln>
@@ -5996,7 +6819,7 @@
       </p:sp>
       <p:sp>
         <p:nvSpPr>
-          <p:cNvPr id="29" name="Text 27"/>
+          <p:cNvPr id="27" name="Text 25"/>
           <p:cNvSpPr/>
           <p:nvPr/>
         </p:nvSpPr>
@@ -6035,7 +6858,7 @@
       </p:sp>
       <p:sp>
         <p:nvSpPr>
-          <p:cNvPr id="30" name="Text 28"/>
+          <p:cNvPr id="28" name="Text 26"/>
           <p:cNvSpPr/>
           <p:nvPr/>
         </p:nvSpPr>
@@ -6066,7 +6889,7 @@
                 <a:ea typeface="Calibri" pitchFamily="34" charset="-122"/>
                 <a:cs typeface="Calibri" pitchFamily="34" charset="-120"/>
               </a:rPr>
-              <a:t>Internal Medicine (50–60%) · Surgery (25–30%) · Pediatrics (20–25%) · OB-GYN (10–20%) · Psychiatry (10–15%) · Family Medicine</a:t>
+              <a:t>Pathology · Physiology · Biochemistry · Pharmacology · Anatomy &amp; Embryology · Microbiology · Immunology · Histology · Behavioral Sciences · Genetics</a:t>
             </a:r>
             <a:endParaRPr lang="en-US" sz="1200" dirty="0"/>
           </a:p>
@@ -6074,7 +6897,7 @@
       </p:sp>
       <p:sp>
         <p:nvSpPr>
-          <p:cNvPr id="31" name="Shape 29"/>
+          <p:cNvPr id="29" name="Shape 27"/>
           <p:cNvSpPr/>
           <p:nvPr/>
         </p:nvSpPr>
@@ -6087,11 +6910,11 @@
             <a:avLst/>
           </a:prstGeom>
           <a:solidFill>
-            <a:srgbClr val="FEF3C7"/>
+            <a:srgbClr val="F5FBFF"/>
           </a:solidFill>
           <a:ln w="9525">
             <a:solidFill>
-              <a:srgbClr val="EAB308"/>
+              <a:srgbClr val="D6E8F5"/>
             </a:solidFill>
             <a:prstDash val="solid"/>
           </a:ln>
@@ -6099,7 +6922,7 @@
       </p:sp>
       <p:sp>
         <p:nvSpPr>
-          <p:cNvPr id="32" name="Shape 30"/>
+          <p:cNvPr id="30" name="Shape 28"/>
           <p:cNvSpPr/>
           <p:nvPr/>
         </p:nvSpPr>
@@ -6112,11 +6935,11 @@
             <a:avLst/>
           </a:prstGeom>
           <a:solidFill>
-            <a:srgbClr val="D97706"/>
+            <a:srgbClr val="0284C7"/>
           </a:solidFill>
           <a:ln w="12700">
             <a:solidFill>
-              <a:srgbClr val="D97706"/>
+              <a:srgbClr val="0284C7"/>
             </a:solidFill>
             <a:prstDash val="solid"/>
           </a:ln>
@@ -6124,7 +6947,7 @@
       </p:sp>
       <p:sp>
         <p:nvSpPr>
-          <p:cNvPr id="33" name="Text 31"/>
+          <p:cNvPr id="31" name="Text 29"/>
           <p:cNvSpPr/>
           <p:nvPr/>
         </p:nvSpPr>
@@ -6155,7 +6978,7 @@
                 <a:ea typeface="Calibri" pitchFamily="34" charset="-122"/>
                 <a:cs typeface="Calibri" pitchFamily="34" charset="-120"/>
               </a:rPr>
-              <a:t>Organ systems &amp; cross-cutting</a:t>
+              <a:t>Organ systems</a:t>
             </a:r>
             <a:endParaRPr lang="en-US" sz="1400" dirty="0"/>
           </a:p>
@@ -6163,7 +6986,7 @@
       </p:sp>
       <p:sp>
         <p:nvSpPr>
-          <p:cNvPr id="34" name="Text 32"/>
+          <p:cNvPr id="32" name="Text 30"/>
           <p:cNvSpPr/>
           <p:nvPr/>
         </p:nvSpPr>
@@ -6194,7 +7017,7 @@
                 <a:ea typeface="Calibri" pitchFamily="34" charset="-122"/>
                 <a:cs typeface="Calibri" pitchFamily="34" charset="-120"/>
               </a:rPr>
-              <a:t>Cardiovascular · GI · Respiratory · MSK &amp; Skin · Nervous &amp; Behavioral · Endocrine · Reproductive &amp; Pregnancy · Renal · Heme &amp; Immune · Multisystem · Ethics &amp; Patient Safety</a:t>
+              <a:t>General Principles · Cardiovascular · Respiratory · GI · Renal/Urinary · Reproductive &amp; Endocrine · MSK &amp; Skin · Nervous &amp; Behavioral · Heme &amp; Immune · Biostats &amp; Epi</a:t>
             </a:r>
             <a:endParaRPr lang="en-US" sz="1200" dirty="0"/>
           </a:p>
@@ -6202,7 +7025,7 @@
       </p:sp>
       <p:sp>
         <p:nvSpPr>
-          <p:cNvPr id="35" name="Text 33"/>
+          <p:cNvPr id="33" name="Text 31"/>
           <p:cNvSpPr/>
           <p:nvPr/>
         </p:nvSpPr>
@@ -6227,13 +7050,13 @@
             <a:r>
               <a:rPr lang="en-US" sz="1200" b="1" i="1" dirty="0">
                 <a:solidFill>
-                  <a:srgbClr val="B45309"/>
-                </a:solidFill>
-                <a:latin typeface="Calibri" pitchFamily="34" charset="0"/>
-                <a:ea typeface="Calibri" pitchFamily="34" charset="-122"/>
-                <a:cs typeface="Calibri" pitchFamily="34" charset="-120"/>
-              </a:rPr>
-              <a:t>Our approach: case-based teaching across all disciplines, daily UWorld blocks, full FA 2025 mapping.</a:t>
+                  <a:srgbClr val="075985"/>
+                </a:solidFill>
+                <a:latin typeface="Calibri" pitchFamily="34" charset="0"/>
+                <a:ea typeface="Calibri" pitchFamily="34" charset="-122"/>
+                <a:cs typeface="Calibri" pitchFamily="34" charset="-120"/>
+              </a:rPr>
+              <a:t>Our approach: master First Aid + UWorld with daily Mon–Sun reps over a 4-month roadmap.</a:t>
             </a:r>
             <a:endParaRPr lang="en-US" sz="1200" dirty="0"/>
           </a:p>
@@ -6241,7 +7064,7 @@
       </p:sp>
       <p:sp>
         <p:nvSpPr>
-          <p:cNvPr id="36" name="Text 34"/>
+          <p:cNvPr id="34" name="Text 32"/>
           <p:cNvSpPr/>
           <p:nvPr/>
         </p:nvSpPr>
@@ -6272,7 +7095,7 @@
                 <a:ea typeface="Calibri" pitchFamily="34" charset="-122"/>
                 <a:cs typeface="Calibri" pitchFamily="34" charset="-120"/>
               </a:rPr>
-              <a:t>Source: usmle.org Step 2 CK content outline + FA 2025</a:t>
+              <a:t>Source: usmle.org Step 1 content outline + FA 2025</a:t>
             </a:r>
             <a:endParaRPr lang="en-US" sz="1000" dirty="0"/>
           </a:p>
@@ -6280,7 +7103,7 @@
       </p:sp>
       <p:sp>
         <p:nvSpPr>
-          <p:cNvPr id="37" name="Text 35"/>
+          <p:cNvPr id="35" name="Text 33"/>
           <p:cNvSpPr/>
           <p:nvPr/>
         </p:nvSpPr>
@@ -6319,7 +7142,7 @@
       </p:sp>
       <p:sp>
         <p:nvSpPr>
-          <p:cNvPr id="38" name="Text 36"/>
+          <p:cNvPr id="36" name="Text 34"/>
           <p:cNvSpPr/>
           <p:nvPr/>
         </p:nvSpPr>
@@ -6350,7 +7173,7 @@
                 <a:ea typeface="Calibri" pitchFamily="34" charset="-122"/>
                 <a:cs typeface="Calibri" pitchFamily="34" charset="-120"/>
               </a:rPr>
-              <a:t>4 / 7</a:t>
+              <a:t>4 / 8</a:t>
             </a:r>
             <a:endParaRPr lang="en-US" sz="1000" dirty="0"/>
           </a:p>
@@ -6403,11 +7226,11 @@
             <a:avLst/>
           </a:prstGeom>
           <a:solidFill>
-            <a:srgbClr val="0284C7"/>
+            <a:srgbClr val="D97706"/>
           </a:solidFill>
           <a:ln w="12700">
             <a:solidFill>
-              <a:srgbClr val="0284C7"/>
+              <a:srgbClr val="D97706"/>
             </a:solidFill>
             <a:prstDash val="solid"/>
           </a:ln>
@@ -6465,13 +7288,13 @@
             <a:r>
               <a:rPr lang="en-US" sz="1200" b="1" spc="400" kern="0" dirty="0">
                 <a:solidFill>
-                  <a:srgbClr val="0284C7"/>
-                </a:solidFill>
-                <a:latin typeface="Calibri" pitchFamily="34" charset="0"/>
-                <a:ea typeface="Calibri" pitchFamily="34" charset="-122"/>
-                <a:cs typeface="Calibri" pitchFamily="34" charset="-120"/>
-              </a:rPr>
-              <a:t>HOW THE CLASSES WORK  ·  PART 1</a:t>
+                  <a:srgbClr val="D97706"/>
+                </a:solidFill>
+                <a:latin typeface="Calibri" pitchFamily="34" charset="0"/>
+                <a:ea typeface="Calibri" pitchFamily="34" charset="-122"/>
+                <a:cs typeface="Calibri" pitchFamily="34" charset="-120"/>
+              </a:rPr>
+              <a:t>STEP 2 CK PREP</a:t>
             </a:r>
             <a:endParaRPr lang="en-US" sz="1200" dirty="0"/>
           </a:p>
@@ -6510,7 +7333,7 @@
                 <a:ea typeface="Arial Black" pitchFamily="34" charset="-122"/>
                 <a:cs typeface="Arial Black" pitchFamily="34" charset="-120"/>
               </a:rPr>
-              <a:t>Daily structure — Mon to Sun</a:t>
+              <a:t>Clinical knowledge. Scaled score 1–300.</a:t>
             </a:r>
             <a:endParaRPr lang="en-US" sz="3200" dirty="0"/>
           </a:p>
@@ -6518,24 +7341,843 @@
       </p:sp>
       <p:sp>
         <p:nvSpPr>
-          <p:cNvPr id="6" name="Shape 4"/>
-          <p:cNvSpPr/>
-          <p:nvPr/>
-        </p:nvSpPr>
-        <p:spPr>
-          <a:xfrm>
-            <a:off x="502920" y="1920240"/>
-            <a:ext cx="3545738" cy="1097280"/>
+          <p:cNvPr id="6" name="Text 4"/>
+          <p:cNvSpPr/>
+          <p:nvPr/>
+        </p:nvSpPr>
+        <p:spPr>
+          <a:xfrm>
+            <a:off x="502920" y="1874520"/>
+            <a:ext cx="4698059" cy="256032"/>
+          </a:xfrm>
+          <a:prstGeom prst="rect">
+            <a:avLst/>
+          </a:prstGeom>
+          <a:noFill/>
+          <a:ln/>
+        </p:spPr>
+        <p:txBody>
+          <a:bodyPr wrap="square" lIns="0" tIns="0" rIns="0" bIns="0" rtlCol="0" anchor="ctr"/>
+          <a:lstStyle/>
+          <a:p>
+            <a:pPr indent="0" marL="0">
+              <a:buNone/>
+            </a:pPr>
+            <a:r>
+              <a:rPr lang="en-US" sz="1100" b="1" spc="300" kern="0" dirty="0">
+                <a:solidFill>
+                  <a:srgbClr val="B45309"/>
+                </a:solidFill>
+                <a:latin typeface="Calibri" pitchFamily="34" charset="0"/>
+                <a:ea typeface="Calibri" pitchFamily="34" charset="-122"/>
+                <a:cs typeface="Calibri" pitchFamily="34" charset="-120"/>
+              </a:rPr>
+              <a:t>WHAT'S TESTED</a:t>
+            </a:r>
+            <a:endParaRPr lang="en-US" sz="1100" dirty="0"/>
+          </a:p>
+        </p:txBody>
+      </p:sp>
+      <p:sp>
+        <p:nvSpPr>
+          <p:cNvPr id="7" name="Text 5"/>
+          <p:cNvSpPr/>
+          <p:nvPr/>
+        </p:nvSpPr>
+        <p:spPr>
+          <a:xfrm>
+            <a:off x="502920" y="2194560"/>
+            <a:ext cx="3783659" cy="274320"/>
+          </a:xfrm>
+          <a:prstGeom prst="rect">
+            <a:avLst/>
+          </a:prstGeom>
+          <a:noFill/>
+          <a:ln/>
+        </p:spPr>
+        <p:txBody>
+          <a:bodyPr wrap="square" lIns="0" tIns="0" rIns="0" bIns="0" rtlCol="0" anchor="ctr"/>
+          <a:lstStyle/>
+          <a:p>
+            <a:pPr indent="0" marL="0">
+              <a:buNone/>
+            </a:pPr>
+            <a:r>
+              <a:rPr lang="en-US" sz="1200" dirty="0">
+                <a:solidFill>
+                  <a:srgbClr val="0C2A3D"/>
+                </a:solidFill>
+                <a:latin typeface="Calibri" pitchFamily="34" charset="0"/>
+                <a:ea typeface="Calibri" pitchFamily="34" charset="-122"/>
+                <a:cs typeface="Calibri" pitchFamily="34" charset="-120"/>
+              </a:rPr>
+              <a:t>Diagnosis</a:t>
+            </a:r>
+            <a:endParaRPr lang="en-US" sz="1200" dirty="0"/>
+          </a:p>
+        </p:txBody>
+      </p:sp>
+      <p:sp>
+        <p:nvSpPr>
+          <p:cNvPr id="8" name="Text 6"/>
+          <p:cNvSpPr/>
+          <p:nvPr/>
+        </p:nvSpPr>
+        <p:spPr>
+          <a:xfrm>
+            <a:off x="4286579" y="2194560"/>
+            <a:ext cx="914400" cy="274320"/>
+          </a:xfrm>
+          <a:prstGeom prst="rect">
+            <a:avLst/>
+          </a:prstGeom>
+          <a:noFill/>
+          <a:ln/>
+        </p:spPr>
+        <p:txBody>
+          <a:bodyPr wrap="square" lIns="0" tIns="0" rIns="0" bIns="0" rtlCol="0" anchor="ctr"/>
+          <a:lstStyle/>
+          <a:p>
+            <a:pPr algn="r" indent="0" marL="0">
+              <a:buNone/>
+            </a:pPr>
+            <a:r>
+              <a:rPr lang="en-US" sz="1200" b="1" dirty="0">
+                <a:solidFill>
+                  <a:srgbClr val="D97706"/>
+                </a:solidFill>
+                <a:latin typeface="Calibri" pitchFamily="34" charset="0"/>
+                <a:ea typeface="Calibri" pitchFamily="34" charset="-122"/>
+                <a:cs typeface="Calibri" pitchFamily="34" charset="-120"/>
+              </a:rPr>
+              <a:t>34–46%</a:t>
+            </a:r>
+            <a:endParaRPr lang="en-US" sz="1200" dirty="0"/>
+          </a:p>
+        </p:txBody>
+      </p:sp>
+      <p:sp>
+        <p:nvSpPr>
+          <p:cNvPr id="9" name="Text 7"/>
+          <p:cNvSpPr/>
+          <p:nvPr/>
+        </p:nvSpPr>
+        <p:spPr>
+          <a:xfrm>
+            <a:off x="502920" y="2523744"/>
+            <a:ext cx="3783659" cy="274320"/>
+          </a:xfrm>
+          <a:prstGeom prst="rect">
+            <a:avLst/>
+          </a:prstGeom>
+          <a:noFill/>
+          <a:ln/>
+        </p:spPr>
+        <p:txBody>
+          <a:bodyPr wrap="square" lIns="0" tIns="0" rIns="0" bIns="0" rtlCol="0" anchor="ctr"/>
+          <a:lstStyle/>
+          <a:p>
+            <a:pPr indent="0" marL="0">
+              <a:buNone/>
+            </a:pPr>
+            <a:r>
+              <a:rPr lang="en-US" sz="1200" dirty="0">
+                <a:solidFill>
+                  <a:srgbClr val="0C2A3D"/>
+                </a:solidFill>
+                <a:latin typeface="Calibri" pitchFamily="34" charset="0"/>
+                <a:ea typeface="Calibri" pitchFamily="34" charset="-122"/>
+                <a:cs typeface="Calibri" pitchFamily="34" charset="-120"/>
+              </a:rPr>
+              <a:t>Pharmacotherapy &amp; management</a:t>
+            </a:r>
+            <a:endParaRPr lang="en-US" sz="1200" dirty="0"/>
+          </a:p>
+        </p:txBody>
+      </p:sp>
+      <p:sp>
+        <p:nvSpPr>
+          <p:cNvPr id="10" name="Text 8"/>
+          <p:cNvSpPr/>
+          <p:nvPr/>
+        </p:nvSpPr>
+        <p:spPr>
+          <a:xfrm>
+            <a:off x="4286579" y="2523744"/>
+            <a:ext cx="914400" cy="274320"/>
+          </a:xfrm>
+          <a:prstGeom prst="rect">
+            <a:avLst/>
+          </a:prstGeom>
+          <a:noFill/>
+          <a:ln/>
+        </p:spPr>
+        <p:txBody>
+          <a:bodyPr wrap="square" lIns="0" tIns="0" rIns="0" bIns="0" rtlCol="0" anchor="ctr"/>
+          <a:lstStyle/>
+          <a:p>
+            <a:pPr algn="r" indent="0" marL="0">
+              <a:buNone/>
+            </a:pPr>
+            <a:r>
+              <a:rPr lang="en-US" sz="1200" b="1" dirty="0">
+                <a:solidFill>
+                  <a:srgbClr val="D97706"/>
+                </a:solidFill>
+                <a:latin typeface="Calibri" pitchFamily="34" charset="0"/>
+                <a:ea typeface="Calibri" pitchFamily="34" charset="-122"/>
+                <a:cs typeface="Calibri" pitchFamily="34" charset="-120"/>
+              </a:rPr>
+              <a:t>26–38%</a:t>
+            </a:r>
+            <a:endParaRPr lang="en-US" sz="1200" dirty="0"/>
+          </a:p>
+        </p:txBody>
+      </p:sp>
+      <p:sp>
+        <p:nvSpPr>
+          <p:cNvPr id="11" name="Text 9"/>
+          <p:cNvSpPr/>
+          <p:nvPr/>
+        </p:nvSpPr>
+        <p:spPr>
+          <a:xfrm>
+            <a:off x="502920" y="2852928"/>
+            <a:ext cx="3783659" cy="274320"/>
+          </a:xfrm>
+          <a:prstGeom prst="rect">
+            <a:avLst/>
+          </a:prstGeom>
+          <a:noFill/>
+          <a:ln/>
+        </p:spPr>
+        <p:txBody>
+          <a:bodyPr wrap="square" lIns="0" tIns="0" rIns="0" bIns="0" rtlCol="0" anchor="ctr"/>
+          <a:lstStyle/>
+          <a:p>
+            <a:pPr indent="0" marL="0">
+              <a:buNone/>
+            </a:pPr>
+            <a:r>
+              <a:rPr lang="en-US" sz="1200" dirty="0">
+                <a:solidFill>
+                  <a:srgbClr val="0C2A3D"/>
+                </a:solidFill>
+                <a:latin typeface="Calibri" pitchFamily="34" charset="0"/>
+                <a:ea typeface="Calibri" pitchFamily="34" charset="-122"/>
+                <a:cs typeface="Calibri" pitchFamily="34" charset="-120"/>
+              </a:rPr>
+              <a:t>Health maintenance &amp; prevention</a:t>
+            </a:r>
+            <a:endParaRPr lang="en-US" sz="1200" dirty="0"/>
+          </a:p>
+        </p:txBody>
+      </p:sp>
+      <p:sp>
+        <p:nvSpPr>
+          <p:cNvPr id="12" name="Text 10"/>
+          <p:cNvSpPr/>
+          <p:nvPr/>
+        </p:nvSpPr>
+        <p:spPr>
+          <a:xfrm>
+            <a:off x="4286579" y="2852928"/>
+            <a:ext cx="914400" cy="274320"/>
+          </a:xfrm>
+          <a:prstGeom prst="rect">
+            <a:avLst/>
+          </a:prstGeom>
+          <a:noFill/>
+          <a:ln/>
+        </p:spPr>
+        <p:txBody>
+          <a:bodyPr wrap="square" lIns="0" tIns="0" rIns="0" bIns="0" rtlCol="0" anchor="ctr"/>
+          <a:lstStyle/>
+          <a:p>
+            <a:pPr algn="r" indent="0" marL="0">
+              <a:buNone/>
+            </a:pPr>
+            <a:r>
+              <a:rPr lang="en-US" sz="1200" b="1" dirty="0">
+                <a:solidFill>
+                  <a:srgbClr val="D97706"/>
+                </a:solidFill>
+                <a:latin typeface="Calibri" pitchFamily="34" charset="0"/>
+                <a:ea typeface="Calibri" pitchFamily="34" charset="-122"/>
+                <a:cs typeface="Calibri" pitchFamily="34" charset="-120"/>
+              </a:rPr>
+              <a:t>8–12%</a:t>
+            </a:r>
+            <a:endParaRPr lang="en-US" sz="1200" dirty="0"/>
+          </a:p>
+        </p:txBody>
+      </p:sp>
+      <p:sp>
+        <p:nvSpPr>
+          <p:cNvPr id="13" name="Text 11"/>
+          <p:cNvSpPr/>
+          <p:nvPr/>
+        </p:nvSpPr>
+        <p:spPr>
+          <a:xfrm>
+            <a:off x="502920" y="3182112"/>
+            <a:ext cx="3783659" cy="274320"/>
+          </a:xfrm>
+          <a:prstGeom prst="rect">
+            <a:avLst/>
+          </a:prstGeom>
+          <a:noFill/>
+          <a:ln/>
+        </p:spPr>
+        <p:txBody>
+          <a:bodyPr wrap="square" lIns="0" tIns="0" rIns="0" bIns="0" rtlCol="0" anchor="ctr"/>
+          <a:lstStyle/>
+          <a:p>
+            <a:pPr indent="0" marL="0">
+              <a:buNone/>
+            </a:pPr>
+            <a:r>
+              <a:rPr lang="en-US" sz="1200" dirty="0">
+                <a:solidFill>
+                  <a:srgbClr val="0C2A3D"/>
+                </a:solidFill>
+                <a:latin typeface="Calibri" pitchFamily="34" charset="0"/>
+                <a:ea typeface="Calibri" pitchFamily="34" charset="-122"/>
+                <a:cs typeface="Calibri" pitchFamily="34" charset="-120"/>
+              </a:rPr>
+              <a:t>Ethics / professionalism</a:t>
+            </a:r>
+            <a:endParaRPr lang="en-US" sz="1200" dirty="0"/>
+          </a:p>
+        </p:txBody>
+      </p:sp>
+      <p:sp>
+        <p:nvSpPr>
+          <p:cNvPr id="14" name="Text 12"/>
+          <p:cNvSpPr/>
+          <p:nvPr/>
+        </p:nvSpPr>
+        <p:spPr>
+          <a:xfrm>
+            <a:off x="4286579" y="3182112"/>
+            <a:ext cx="914400" cy="274320"/>
+          </a:xfrm>
+          <a:prstGeom prst="rect">
+            <a:avLst/>
+          </a:prstGeom>
+          <a:noFill/>
+          <a:ln/>
+        </p:spPr>
+        <p:txBody>
+          <a:bodyPr wrap="square" lIns="0" tIns="0" rIns="0" bIns="0" rtlCol="0" anchor="ctr"/>
+          <a:lstStyle/>
+          <a:p>
+            <a:pPr algn="r" indent="0" marL="0">
+              <a:buNone/>
+            </a:pPr>
+            <a:r>
+              <a:rPr lang="en-US" sz="1200" b="1" dirty="0">
+                <a:solidFill>
+                  <a:srgbClr val="D97706"/>
+                </a:solidFill>
+                <a:latin typeface="Calibri" pitchFamily="34" charset="0"/>
+                <a:ea typeface="Calibri" pitchFamily="34" charset="-122"/>
+                <a:cs typeface="Calibri" pitchFamily="34" charset="-120"/>
+              </a:rPr>
+              <a:t>5–7%</a:t>
+            </a:r>
+            <a:endParaRPr lang="en-US" sz="1200" dirty="0"/>
+          </a:p>
+        </p:txBody>
+      </p:sp>
+      <p:sp>
+        <p:nvSpPr>
+          <p:cNvPr id="15" name="Text 13"/>
+          <p:cNvSpPr/>
+          <p:nvPr/>
+        </p:nvSpPr>
+        <p:spPr>
+          <a:xfrm>
+            <a:off x="502920" y="3511296"/>
+            <a:ext cx="3783659" cy="274320"/>
+          </a:xfrm>
+          <a:prstGeom prst="rect">
+            <a:avLst/>
+          </a:prstGeom>
+          <a:noFill/>
+          <a:ln/>
+        </p:spPr>
+        <p:txBody>
+          <a:bodyPr wrap="square" lIns="0" tIns="0" rIns="0" bIns="0" rtlCol="0" anchor="ctr"/>
+          <a:lstStyle/>
+          <a:p>
+            <a:pPr indent="0" marL="0">
+              <a:buNone/>
+            </a:pPr>
+            <a:r>
+              <a:rPr lang="en-US" sz="1200" dirty="0">
+                <a:solidFill>
+                  <a:srgbClr val="0C2A3D"/>
+                </a:solidFill>
+                <a:latin typeface="Calibri" pitchFamily="34" charset="0"/>
+                <a:ea typeface="Calibri" pitchFamily="34" charset="-122"/>
+                <a:cs typeface="Calibri" pitchFamily="34" charset="-120"/>
+              </a:rPr>
+              <a:t>Patient safety / systems-based practice</a:t>
+            </a:r>
+            <a:endParaRPr lang="en-US" sz="1200" dirty="0"/>
+          </a:p>
+        </p:txBody>
+      </p:sp>
+      <p:sp>
+        <p:nvSpPr>
+          <p:cNvPr id="16" name="Text 14"/>
+          <p:cNvSpPr/>
+          <p:nvPr/>
+        </p:nvSpPr>
+        <p:spPr>
+          <a:xfrm>
+            <a:off x="4286579" y="3511296"/>
+            <a:ext cx="914400" cy="274320"/>
+          </a:xfrm>
+          <a:prstGeom prst="rect">
+            <a:avLst/>
+          </a:prstGeom>
+          <a:noFill/>
+          <a:ln/>
+        </p:spPr>
+        <p:txBody>
+          <a:bodyPr wrap="square" lIns="0" tIns="0" rIns="0" bIns="0" rtlCol="0" anchor="ctr"/>
+          <a:lstStyle/>
+          <a:p>
+            <a:pPr algn="r" indent="0" marL="0">
+              <a:buNone/>
+            </a:pPr>
+            <a:r>
+              <a:rPr lang="en-US" sz="1200" b="1" dirty="0">
+                <a:solidFill>
+                  <a:srgbClr val="D97706"/>
+                </a:solidFill>
+                <a:latin typeface="Calibri" pitchFamily="34" charset="0"/>
+                <a:ea typeface="Calibri" pitchFamily="34" charset="-122"/>
+                <a:cs typeface="Calibri" pitchFamily="34" charset="-120"/>
+              </a:rPr>
+              <a:t>5–7%</a:t>
+            </a:r>
+            <a:endParaRPr lang="en-US" sz="1200" dirty="0"/>
+          </a:p>
+        </p:txBody>
+      </p:sp>
+      <p:sp>
+        <p:nvSpPr>
+          <p:cNvPr id="17" name="Text 15"/>
+          <p:cNvSpPr/>
+          <p:nvPr/>
+        </p:nvSpPr>
+        <p:spPr>
+          <a:xfrm>
+            <a:off x="502920" y="4023360"/>
+            <a:ext cx="4698059" cy="256032"/>
+          </a:xfrm>
+          <a:prstGeom prst="rect">
+            <a:avLst/>
+          </a:prstGeom>
+          <a:noFill/>
+          <a:ln/>
+        </p:spPr>
+        <p:txBody>
+          <a:bodyPr wrap="square" lIns="0" tIns="0" rIns="0" bIns="0" rtlCol="0" anchor="ctr"/>
+          <a:lstStyle/>
+          <a:p>
+            <a:pPr indent="0" marL="0">
+              <a:buNone/>
+            </a:pPr>
+            <a:r>
+              <a:rPr lang="en-US" sz="1100" b="1" spc="300" kern="0" dirty="0">
+                <a:solidFill>
+                  <a:srgbClr val="B45309"/>
+                </a:solidFill>
+                <a:latin typeface="Calibri" pitchFamily="34" charset="0"/>
+                <a:ea typeface="Calibri" pitchFamily="34" charset="-122"/>
+                <a:cs typeface="Calibri" pitchFamily="34" charset="-120"/>
+              </a:rPr>
+              <a:t>FORMAT</a:t>
+            </a:r>
+            <a:endParaRPr lang="en-US" sz="1100" dirty="0"/>
+          </a:p>
+        </p:txBody>
+      </p:sp>
+      <p:sp>
+        <p:nvSpPr>
+          <p:cNvPr id="18" name="Text 16"/>
+          <p:cNvSpPr/>
+          <p:nvPr/>
+        </p:nvSpPr>
+        <p:spPr>
+          <a:xfrm>
+            <a:off x="502920" y="4343400"/>
+            <a:ext cx="3326459" cy="274320"/>
+          </a:xfrm>
+          <a:prstGeom prst="rect">
+            <a:avLst/>
+          </a:prstGeom>
+          <a:noFill/>
+          <a:ln/>
+        </p:spPr>
+        <p:txBody>
+          <a:bodyPr wrap="square" lIns="0" tIns="0" rIns="0" bIns="0" rtlCol="0" anchor="ctr"/>
+          <a:lstStyle/>
+          <a:p>
+            <a:pPr indent="0" marL="0">
+              <a:buNone/>
+            </a:pPr>
+            <a:r>
+              <a:rPr lang="en-US" sz="1200" dirty="0">
+                <a:solidFill>
+                  <a:srgbClr val="345671"/>
+                </a:solidFill>
+                <a:latin typeface="Calibri" pitchFamily="34" charset="0"/>
+                <a:ea typeface="Calibri" pitchFamily="34" charset="-122"/>
+                <a:cs typeface="Calibri" pitchFamily="34" charset="-120"/>
+              </a:rPr>
+              <a:t>Question blocks</a:t>
+            </a:r>
+            <a:endParaRPr lang="en-US" sz="1200" dirty="0"/>
+          </a:p>
+        </p:txBody>
+      </p:sp>
+      <p:sp>
+        <p:nvSpPr>
+          <p:cNvPr id="19" name="Text 17"/>
+          <p:cNvSpPr/>
+          <p:nvPr/>
+        </p:nvSpPr>
+        <p:spPr>
+          <a:xfrm>
+            <a:off x="3829379" y="4343400"/>
+            <a:ext cx="1371600" cy="274320"/>
+          </a:xfrm>
+          <a:prstGeom prst="rect">
+            <a:avLst/>
+          </a:prstGeom>
+          <a:noFill/>
+          <a:ln/>
+        </p:spPr>
+        <p:txBody>
+          <a:bodyPr wrap="square" lIns="0" tIns="0" rIns="0" bIns="0" rtlCol="0" anchor="ctr"/>
+          <a:lstStyle/>
+          <a:p>
+            <a:pPr algn="r" indent="0" marL="0">
+              <a:buNone/>
+            </a:pPr>
+            <a:r>
+              <a:rPr lang="en-US" sz="1200" b="1" dirty="0">
+                <a:solidFill>
+                  <a:srgbClr val="0C2A3D"/>
+                </a:solidFill>
+                <a:latin typeface="Calibri" pitchFamily="34" charset="0"/>
+                <a:ea typeface="Calibri" pitchFamily="34" charset="-122"/>
+                <a:cs typeface="Calibri" pitchFamily="34" charset="-120"/>
+              </a:rPr>
+              <a:t>8</a:t>
+            </a:r>
+            <a:endParaRPr lang="en-US" sz="1200" dirty="0"/>
+          </a:p>
+        </p:txBody>
+      </p:sp>
+      <p:sp>
+        <p:nvSpPr>
+          <p:cNvPr id="20" name="Text 18"/>
+          <p:cNvSpPr/>
+          <p:nvPr/>
+        </p:nvSpPr>
+        <p:spPr>
+          <a:xfrm>
+            <a:off x="502920" y="4672584"/>
+            <a:ext cx="3326459" cy="274320"/>
+          </a:xfrm>
+          <a:prstGeom prst="rect">
+            <a:avLst/>
+          </a:prstGeom>
+          <a:noFill/>
+          <a:ln/>
+        </p:spPr>
+        <p:txBody>
+          <a:bodyPr wrap="square" lIns="0" tIns="0" rIns="0" bIns="0" rtlCol="0" anchor="ctr"/>
+          <a:lstStyle/>
+          <a:p>
+            <a:pPr indent="0" marL="0">
+              <a:buNone/>
+            </a:pPr>
+            <a:r>
+              <a:rPr lang="en-US" sz="1200" dirty="0">
+                <a:solidFill>
+                  <a:srgbClr val="345671"/>
+                </a:solidFill>
+                <a:latin typeface="Calibri" pitchFamily="34" charset="0"/>
+                <a:ea typeface="Calibri" pitchFamily="34" charset="-122"/>
+                <a:cs typeface="Calibri" pitchFamily="34" charset="-120"/>
+              </a:rPr>
+              <a:t>Items (max)</a:t>
+            </a:r>
+            <a:endParaRPr lang="en-US" sz="1200" dirty="0"/>
+          </a:p>
+        </p:txBody>
+      </p:sp>
+      <p:sp>
+        <p:nvSpPr>
+          <p:cNvPr id="21" name="Text 19"/>
+          <p:cNvSpPr/>
+          <p:nvPr/>
+        </p:nvSpPr>
+        <p:spPr>
+          <a:xfrm>
+            <a:off x="3829379" y="4672584"/>
+            <a:ext cx="1371600" cy="274320"/>
+          </a:xfrm>
+          <a:prstGeom prst="rect">
+            <a:avLst/>
+          </a:prstGeom>
+          <a:noFill/>
+          <a:ln/>
+        </p:spPr>
+        <p:txBody>
+          <a:bodyPr wrap="square" lIns="0" tIns="0" rIns="0" bIns="0" rtlCol="0" anchor="ctr"/>
+          <a:lstStyle/>
+          <a:p>
+            <a:pPr algn="r" indent="0" marL="0">
+              <a:buNone/>
+            </a:pPr>
+            <a:r>
+              <a:rPr lang="en-US" sz="1200" b="1" dirty="0">
+                <a:solidFill>
+                  <a:srgbClr val="0C2A3D"/>
+                </a:solidFill>
+                <a:latin typeface="Calibri" pitchFamily="34" charset="0"/>
+                <a:ea typeface="Calibri" pitchFamily="34" charset="-122"/>
+                <a:cs typeface="Calibri" pitchFamily="34" charset="-120"/>
+              </a:rPr>
+              <a:t>318</a:t>
+            </a:r>
+            <a:endParaRPr lang="en-US" sz="1200" dirty="0"/>
+          </a:p>
+        </p:txBody>
+      </p:sp>
+      <p:sp>
+        <p:nvSpPr>
+          <p:cNvPr id="22" name="Text 20"/>
+          <p:cNvSpPr/>
+          <p:nvPr/>
+        </p:nvSpPr>
+        <p:spPr>
+          <a:xfrm>
+            <a:off x="502920" y="5001768"/>
+            <a:ext cx="3326459" cy="274320"/>
+          </a:xfrm>
+          <a:prstGeom prst="rect">
+            <a:avLst/>
+          </a:prstGeom>
+          <a:noFill/>
+          <a:ln/>
+        </p:spPr>
+        <p:txBody>
+          <a:bodyPr wrap="square" lIns="0" tIns="0" rIns="0" bIns="0" rtlCol="0" anchor="ctr"/>
+          <a:lstStyle/>
+          <a:p>
+            <a:pPr indent="0" marL="0">
+              <a:buNone/>
+            </a:pPr>
+            <a:r>
+              <a:rPr lang="en-US" sz="1200" dirty="0">
+                <a:solidFill>
+                  <a:srgbClr val="345671"/>
+                </a:solidFill>
+                <a:latin typeface="Calibri" pitchFamily="34" charset="0"/>
+                <a:ea typeface="Calibri" pitchFamily="34" charset="-122"/>
+                <a:cs typeface="Calibri" pitchFamily="34" charset="-120"/>
+              </a:rPr>
+              <a:t>Test day length</a:t>
+            </a:r>
+            <a:endParaRPr lang="en-US" sz="1200" dirty="0"/>
+          </a:p>
+        </p:txBody>
+      </p:sp>
+      <p:sp>
+        <p:nvSpPr>
+          <p:cNvPr id="23" name="Text 21"/>
+          <p:cNvSpPr/>
+          <p:nvPr/>
+        </p:nvSpPr>
+        <p:spPr>
+          <a:xfrm>
+            <a:off x="3829379" y="5001768"/>
+            <a:ext cx="1371600" cy="274320"/>
+          </a:xfrm>
+          <a:prstGeom prst="rect">
+            <a:avLst/>
+          </a:prstGeom>
+          <a:noFill/>
+          <a:ln/>
+        </p:spPr>
+        <p:txBody>
+          <a:bodyPr wrap="square" lIns="0" tIns="0" rIns="0" bIns="0" rtlCol="0" anchor="ctr"/>
+          <a:lstStyle/>
+          <a:p>
+            <a:pPr algn="r" indent="0" marL="0">
+              <a:buNone/>
+            </a:pPr>
+            <a:r>
+              <a:rPr lang="en-US" sz="1200" b="1" dirty="0">
+                <a:solidFill>
+                  <a:srgbClr val="0C2A3D"/>
+                </a:solidFill>
+                <a:latin typeface="Calibri" pitchFamily="34" charset="0"/>
+                <a:ea typeface="Calibri" pitchFamily="34" charset="-122"/>
+                <a:cs typeface="Calibri" pitchFamily="34" charset="-120"/>
+              </a:rPr>
+              <a:t>9 hours</a:t>
+            </a:r>
+            <a:endParaRPr lang="en-US" sz="1200" dirty="0"/>
+          </a:p>
+        </p:txBody>
+      </p:sp>
+      <p:sp>
+        <p:nvSpPr>
+          <p:cNvPr id="24" name="Text 22"/>
+          <p:cNvSpPr/>
+          <p:nvPr/>
+        </p:nvSpPr>
+        <p:spPr>
+          <a:xfrm>
+            <a:off x="502920" y="5330952"/>
+            <a:ext cx="3326459" cy="274320"/>
+          </a:xfrm>
+          <a:prstGeom prst="rect">
+            <a:avLst/>
+          </a:prstGeom>
+          <a:noFill/>
+          <a:ln/>
+        </p:spPr>
+        <p:txBody>
+          <a:bodyPr wrap="square" lIns="0" tIns="0" rIns="0" bIns="0" rtlCol="0" anchor="ctr"/>
+          <a:lstStyle/>
+          <a:p>
+            <a:pPr indent="0" marL="0">
+              <a:buNone/>
+            </a:pPr>
+            <a:r>
+              <a:rPr lang="en-US" sz="1200" dirty="0">
+                <a:solidFill>
+                  <a:srgbClr val="345671"/>
+                </a:solidFill>
+                <a:latin typeface="Calibri" pitchFamily="34" charset="0"/>
+                <a:ea typeface="Calibri" pitchFamily="34" charset="-122"/>
+                <a:cs typeface="Calibri" pitchFamily="34" charset="-120"/>
+              </a:rPr>
+              <a:t>Score scale</a:t>
+            </a:r>
+            <a:endParaRPr lang="en-US" sz="1200" dirty="0"/>
+          </a:p>
+        </p:txBody>
+      </p:sp>
+      <p:sp>
+        <p:nvSpPr>
+          <p:cNvPr id="25" name="Text 23"/>
+          <p:cNvSpPr/>
+          <p:nvPr/>
+        </p:nvSpPr>
+        <p:spPr>
+          <a:xfrm>
+            <a:off x="3829379" y="5330952"/>
+            <a:ext cx="1371600" cy="274320"/>
+          </a:xfrm>
+          <a:prstGeom prst="rect">
+            <a:avLst/>
+          </a:prstGeom>
+          <a:noFill/>
+          <a:ln/>
+        </p:spPr>
+        <p:txBody>
+          <a:bodyPr wrap="square" lIns="0" tIns="0" rIns="0" bIns="0" rtlCol="0" anchor="ctr"/>
+          <a:lstStyle/>
+          <a:p>
+            <a:pPr algn="r" indent="0" marL="0">
+              <a:buNone/>
+            </a:pPr>
+            <a:r>
+              <a:rPr lang="en-US" sz="1200" b="1" dirty="0">
+                <a:solidFill>
+                  <a:srgbClr val="0C2A3D"/>
+                </a:solidFill>
+                <a:latin typeface="Calibri" pitchFamily="34" charset="0"/>
+                <a:ea typeface="Calibri" pitchFamily="34" charset="-122"/>
+                <a:cs typeface="Calibri" pitchFamily="34" charset="-120"/>
+              </a:rPr>
+              <a:t>1 – 300 (mean ≈ 248)</a:t>
+            </a:r>
+            <a:endParaRPr lang="en-US" sz="1200" dirty="0"/>
+          </a:p>
+        </p:txBody>
+      </p:sp>
+      <p:sp>
+        <p:nvSpPr>
+          <p:cNvPr id="26" name="Text 24"/>
+          <p:cNvSpPr/>
+          <p:nvPr/>
+        </p:nvSpPr>
+        <p:spPr>
+          <a:xfrm>
+            <a:off x="5475299" y="1874520"/>
+            <a:ext cx="6213476" cy="256032"/>
+          </a:xfrm>
+          <a:prstGeom prst="rect">
+            <a:avLst/>
+          </a:prstGeom>
+          <a:noFill/>
+          <a:ln/>
+        </p:spPr>
+        <p:txBody>
+          <a:bodyPr wrap="square" lIns="0" tIns="0" rIns="0" bIns="0" rtlCol="0" anchor="ctr"/>
+          <a:lstStyle/>
+          <a:p>
+            <a:pPr indent="0" marL="0">
+              <a:buNone/>
+            </a:pPr>
+            <a:r>
+              <a:rPr lang="en-US" sz="1100" b="1" spc="300" kern="0" dirty="0">
+                <a:solidFill>
+                  <a:srgbClr val="B45309"/>
+                </a:solidFill>
+                <a:latin typeface="Calibri" pitchFamily="34" charset="0"/>
+                <a:ea typeface="Calibri" pitchFamily="34" charset="-122"/>
+                <a:cs typeface="Calibri" pitchFamily="34" charset="-120"/>
+              </a:rPr>
+              <a:t>HIGH-YIELD CONTENT</a:t>
+            </a:r>
+            <a:endParaRPr lang="en-US" sz="1100" dirty="0"/>
+          </a:p>
+        </p:txBody>
+      </p:sp>
+      <p:sp>
+        <p:nvSpPr>
+          <p:cNvPr id="27" name="Shape 25"/>
+          <p:cNvSpPr/>
+          <p:nvPr/>
+        </p:nvSpPr>
+        <p:spPr>
+          <a:xfrm>
+            <a:off x="5475299" y="2194560"/>
+            <a:ext cx="6213476" cy="1508760"/>
           </a:xfrm>
           <a:prstGeom prst="rect">
             <a:avLst/>
           </a:prstGeom>
           <a:solidFill>
-            <a:srgbClr val="E0F2FE"/>
+            <a:srgbClr val="FEF3C7"/>
           </a:solidFill>
-          <a:ln w="12700">
+          <a:ln w="9525">
             <a:solidFill>
-              <a:srgbClr val="E0F2FE"/>
+              <a:srgbClr val="EAB308"/>
             </a:solidFill>
             <a:prstDash val="solid"/>
           </a:ln>
@@ -6543,529 +8185,14 @@
       </p:sp>
       <p:sp>
         <p:nvSpPr>
-          <p:cNvPr id="7" name="Text 5"/>
-          <p:cNvSpPr/>
-          <p:nvPr/>
-        </p:nvSpPr>
-        <p:spPr>
-          <a:xfrm>
-            <a:off x="502920" y="2011680"/>
-            <a:ext cx="3545738" cy="594360"/>
-          </a:xfrm>
-          <a:prstGeom prst="rect">
-            <a:avLst/>
-          </a:prstGeom>
-          <a:noFill/>
-          <a:ln/>
-        </p:spPr>
-        <p:txBody>
-          <a:bodyPr wrap="square" lIns="0" tIns="0" rIns="0" bIns="0" rtlCol="0" anchor="ctr"/>
-          <a:lstStyle/>
-          <a:p>
-            <a:pPr algn="ctr" indent="0" marL="0">
-              <a:buNone/>
-            </a:pPr>
-            <a:r>
-              <a:rPr lang="en-US" sz="3000" b="1" dirty="0">
-                <a:solidFill>
-                  <a:srgbClr val="075985"/>
-                </a:solidFill>
-                <a:latin typeface="Arial Black" pitchFamily="34" charset="0"/>
-                <a:ea typeface="Arial Black" pitchFamily="34" charset="-122"/>
-                <a:cs typeface="Arial Black" pitchFamily="34" charset="-120"/>
-              </a:rPr>
-              <a:t>Mon–Sun</a:t>
-            </a:r>
-            <a:endParaRPr lang="en-US" sz="3000" dirty="0"/>
-          </a:p>
-        </p:txBody>
-      </p:sp>
-      <p:sp>
-        <p:nvSpPr>
-          <p:cNvPr id="8" name="Text 6"/>
-          <p:cNvSpPr/>
-          <p:nvPr/>
-        </p:nvSpPr>
-        <p:spPr>
-          <a:xfrm>
-            <a:off x="502920" y="2606040"/>
-            <a:ext cx="3545738" cy="365760"/>
-          </a:xfrm>
-          <a:prstGeom prst="rect">
-            <a:avLst/>
-          </a:prstGeom>
-          <a:noFill/>
-          <a:ln/>
-        </p:spPr>
-        <p:txBody>
-          <a:bodyPr wrap="square" lIns="0" tIns="0" rIns="0" bIns="0" rtlCol="0" anchor="ctr"/>
-          <a:lstStyle/>
-          <a:p>
-            <a:pPr algn="ctr" indent="0" marL="0">
-              <a:buNone/>
-            </a:pPr>
-            <a:r>
-              <a:rPr lang="en-US" sz="1300" b="1" spc="200" kern="0" dirty="0">
-                <a:solidFill>
-                  <a:srgbClr val="345671"/>
-                </a:solidFill>
-                <a:latin typeface="Calibri" pitchFamily="34" charset="0"/>
-                <a:ea typeface="Calibri" pitchFamily="34" charset="-122"/>
-                <a:cs typeface="Calibri" pitchFamily="34" charset="-120"/>
-              </a:rPr>
-              <a:t>Daily classes</a:t>
-            </a:r>
-            <a:endParaRPr lang="en-US" sz="1300" dirty="0"/>
-          </a:p>
-        </p:txBody>
-      </p:sp>
-      <p:sp>
-        <p:nvSpPr>
-          <p:cNvPr id="9" name="Shape 7"/>
-          <p:cNvSpPr/>
-          <p:nvPr/>
-        </p:nvSpPr>
-        <p:spPr>
-          <a:xfrm>
-            <a:off x="4322978" y="1920240"/>
-            <a:ext cx="3545738" cy="1097280"/>
-          </a:xfrm>
-          <a:prstGeom prst="rect">
-            <a:avLst/>
-          </a:prstGeom>
-          <a:solidFill>
-            <a:srgbClr val="E0F2FE"/>
-          </a:solidFill>
-          <a:ln w="12700">
-            <a:solidFill>
-              <a:srgbClr val="E0F2FE"/>
-            </a:solidFill>
-            <a:prstDash val="solid"/>
-          </a:ln>
-        </p:spPr>
-      </p:sp>
-      <p:sp>
-        <p:nvSpPr>
-          <p:cNvPr id="10" name="Text 8"/>
-          <p:cNvSpPr/>
-          <p:nvPr/>
-        </p:nvSpPr>
-        <p:spPr>
-          <a:xfrm>
-            <a:off x="4322978" y="2011680"/>
-            <a:ext cx="3545738" cy="594360"/>
-          </a:xfrm>
-          <a:prstGeom prst="rect">
-            <a:avLst/>
-          </a:prstGeom>
-          <a:noFill/>
-          <a:ln/>
-        </p:spPr>
-        <p:txBody>
-          <a:bodyPr wrap="square" lIns="0" tIns="0" rIns="0" bIns="0" rtlCol="0" anchor="ctr"/>
-          <a:lstStyle/>
-          <a:p>
-            <a:pPr algn="ctr" indent="0" marL="0">
-              <a:buNone/>
-            </a:pPr>
-            <a:r>
-              <a:rPr lang="en-US" sz="3000" b="1" dirty="0">
-                <a:solidFill>
-                  <a:srgbClr val="075985"/>
-                </a:solidFill>
-                <a:latin typeface="Arial Black" pitchFamily="34" charset="0"/>
-                <a:ea typeface="Arial Black" pitchFamily="34" charset="-122"/>
-                <a:cs typeface="Arial Black" pitchFamily="34" charset="-120"/>
-              </a:rPr>
-              <a:t>4 months</a:t>
-            </a:r>
-            <a:endParaRPr lang="en-US" sz="3000" dirty="0"/>
-          </a:p>
-        </p:txBody>
-      </p:sp>
-      <p:sp>
-        <p:nvSpPr>
-          <p:cNvPr id="11" name="Text 9"/>
-          <p:cNvSpPr/>
-          <p:nvPr/>
-        </p:nvSpPr>
-        <p:spPr>
-          <a:xfrm>
-            <a:off x="4322978" y="2606040"/>
-            <a:ext cx="3545738" cy="365760"/>
-          </a:xfrm>
-          <a:prstGeom prst="rect">
-            <a:avLst/>
-          </a:prstGeom>
-          <a:noFill/>
-          <a:ln/>
-        </p:spPr>
-        <p:txBody>
-          <a:bodyPr wrap="square" lIns="0" tIns="0" rIns="0" bIns="0" rtlCol="0" anchor="ctr"/>
-          <a:lstStyle/>
-          <a:p>
-            <a:pPr algn="ctr" indent="0" marL="0">
-              <a:buNone/>
-            </a:pPr>
-            <a:r>
-              <a:rPr lang="en-US" sz="1300" b="1" spc="200" kern="0" dirty="0">
-                <a:solidFill>
-                  <a:srgbClr val="345671"/>
-                </a:solidFill>
-                <a:latin typeface="Calibri" pitchFamily="34" charset="0"/>
-                <a:ea typeface="Calibri" pitchFamily="34" charset="-122"/>
-                <a:cs typeface="Calibri" pitchFamily="34" charset="-120"/>
-              </a:rPr>
-              <a:t>Structured roadmap</a:t>
-            </a:r>
-            <a:endParaRPr lang="en-US" sz="1300" dirty="0"/>
-          </a:p>
-        </p:txBody>
-      </p:sp>
-      <p:sp>
-        <p:nvSpPr>
-          <p:cNvPr id="12" name="Shape 10"/>
-          <p:cNvSpPr/>
-          <p:nvPr/>
-        </p:nvSpPr>
-        <p:spPr>
-          <a:xfrm>
-            <a:off x="8143037" y="1920240"/>
-            <a:ext cx="3545738" cy="1097280"/>
-          </a:xfrm>
-          <a:prstGeom prst="rect">
-            <a:avLst/>
-          </a:prstGeom>
-          <a:solidFill>
-            <a:srgbClr val="E0F2FE"/>
-          </a:solidFill>
-          <a:ln w="12700">
-            <a:solidFill>
-              <a:srgbClr val="E0F2FE"/>
-            </a:solidFill>
-            <a:prstDash val="solid"/>
-          </a:ln>
-        </p:spPr>
-      </p:sp>
-      <p:sp>
-        <p:nvSpPr>
-          <p:cNvPr id="13" name="Text 11"/>
-          <p:cNvSpPr/>
-          <p:nvPr/>
-        </p:nvSpPr>
-        <p:spPr>
-          <a:xfrm>
-            <a:off x="8143037" y="2011680"/>
-            <a:ext cx="3545738" cy="594360"/>
-          </a:xfrm>
-          <a:prstGeom prst="rect">
-            <a:avLst/>
-          </a:prstGeom>
-          <a:noFill/>
-          <a:ln/>
-        </p:spPr>
-        <p:txBody>
-          <a:bodyPr wrap="square" lIns="0" tIns="0" rIns="0" bIns="0" rtlCol="0" anchor="ctr"/>
-          <a:lstStyle/>
-          <a:p>
-            <a:pPr algn="ctr" indent="0" marL="0">
-              <a:buNone/>
-            </a:pPr>
-            <a:r>
-              <a:rPr lang="en-US" sz="3000" b="1" dirty="0">
-                <a:solidFill>
-                  <a:srgbClr val="075985"/>
-                </a:solidFill>
-                <a:latin typeface="Arial Black" pitchFamily="34" charset="0"/>
-                <a:ea typeface="Arial Black" pitchFamily="34" charset="-122"/>
-                <a:cs typeface="Arial Black" pitchFamily="34" charset="-120"/>
-              </a:rPr>
-              <a:t>Step 1 + 2</a:t>
-            </a:r>
-            <a:endParaRPr lang="en-US" sz="3000" dirty="0"/>
-          </a:p>
-        </p:txBody>
-      </p:sp>
-      <p:sp>
-        <p:nvSpPr>
-          <p:cNvPr id="14" name="Text 12"/>
-          <p:cNvSpPr/>
-          <p:nvPr/>
-        </p:nvSpPr>
-        <p:spPr>
-          <a:xfrm>
-            <a:off x="8143037" y="2606040"/>
-            <a:ext cx="3545738" cy="365760"/>
-          </a:xfrm>
-          <a:prstGeom prst="rect">
-            <a:avLst/>
-          </a:prstGeom>
-          <a:noFill/>
-          <a:ln/>
-        </p:spPr>
-        <p:txBody>
-          <a:bodyPr wrap="square" lIns="0" tIns="0" rIns="0" bIns="0" rtlCol="0" anchor="ctr"/>
-          <a:lstStyle/>
-          <a:p>
-            <a:pPr algn="ctr" indent="0" marL="0">
-              <a:buNone/>
-            </a:pPr>
-            <a:r>
-              <a:rPr lang="en-US" sz="1300" b="1" spc="200" kern="0" dirty="0">
-                <a:solidFill>
-                  <a:srgbClr val="345671"/>
-                </a:solidFill>
-                <a:latin typeface="Calibri" pitchFamily="34" charset="0"/>
-                <a:ea typeface="Calibri" pitchFamily="34" charset="-122"/>
-                <a:cs typeface="Calibri" pitchFamily="34" charset="-120"/>
-              </a:rPr>
-              <a:t>Combined option</a:t>
-            </a:r>
-            <a:endParaRPr lang="en-US" sz="1300" dirty="0"/>
-          </a:p>
-        </p:txBody>
-      </p:sp>
-      <p:sp>
-        <p:nvSpPr>
-          <p:cNvPr id="15" name="Shape 13"/>
-          <p:cNvSpPr/>
-          <p:nvPr/>
-        </p:nvSpPr>
-        <p:spPr>
-          <a:xfrm>
-            <a:off x="502920" y="3383280"/>
-            <a:ext cx="2693594" cy="2194560"/>
-          </a:xfrm>
-          <a:prstGeom prst="rect">
-            <a:avLst/>
-          </a:prstGeom>
-          <a:solidFill>
-            <a:srgbClr val="FFFFFF"/>
-          </a:solidFill>
-          <a:ln w="9525">
-            <a:solidFill>
-              <a:srgbClr val="D6E8F5"/>
-            </a:solidFill>
-            <a:prstDash val="solid"/>
-          </a:ln>
-          <a:effectLst>
-            <a:outerShdw sx="100000" sy="100000" kx="0" ky="0" algn="bl" rotWithShape="0" blurRad="127000" dist="12700" dir="5400000">
-              <a:srgbClr val="0C2A3D">
-                <a:alpha val="8000"/>
-              </a:srgbClr>
-            </a:outerShdw>
-          </a:effectLst>
-        </p:spPr>
-      </p:sp>
-      <p:sp>
-        <p:nvSpPr>
-          <p:cNvPr id="16" name="Shape 14"/>
-          <p:cNvSpPr/>
-          <p:nvPr/>
-        </p:nvSpPr>
-        <p:spPr>
-          <a:xfrm>
-            <a:off x="502920" y="3383280"/>
-            <a:ext cx="2693594" cy="73152"/>
-          </a:xfrm>
-          <a:prstGeom prst="rect">
-            <a:avLst/>
-          </a:prstGeom>
-          <a:solidFill>
-            <a:srgbClr val="0284C7"/>
-          </a:solidFill>
-          <a:ln w="12700">
-            <a:solidFill>
-              <a:srgbClr val="0284C7"/>
-            </a:solidFill>
-            <a:prstDash val="solid"/>
-          </a:ln>
-        </p:spPr>
-      </p:sp>
-      <p:sp>
-        <p:nvSpPr>
-          <p:cNvPr id="17" name="Shape 15"/>
-          <p:cNvSpPr/>
-          <p:nvPr/>
-        </p:nvSpPr>
-        <p:spPr>
-          <a:xfrm>
-            <a:off x="777240" y="3657600"/>
-            <a:ext cx="457200" cy="457200"/>
-          </a:xfrm>
-          <a:prstGeom prst="ellipse">
-            <a:avLst/>
-          </a:prstGeom>
-          <a:solidFill>
-            <a:srgbClr val="0284C7"/>
-          </a:solidFill>
-          <a:ln w="12700">
-            <a:solidFill>
-              <a:srgbClr val="0284C7"/>
-            </a:solidFill>
-            <a:prstDash val="solid"/>
-          </a:ln>
-        </p:spPr>
-      </p:sp>
-      <p:sp>
-        <p:nvSpPr>
-          <p:cNvPr id="18" name="Text 16"/>
-          <p:cNvSpPr/>
-          <p:nvPr/>
-        </p:nvSpPr>
-        <p:spPr>
-          <a:xfrm>
-            <a:off x="777240" y="3657600"/>
-            <a:ext cx="457200" cy="457200"/>
-          </a:xfrm>
-          <a:prstGeom prst="rect">
-            <a:avLst/>
-          </a:prstGeom>
-          <a:noFill/>
-          <a:ln/>
-        </p:spPr>
-        <p:txBody>
-          <a:bodyPr wrap="square" lIns="0" tIns="0" rIns="0" bIns="0" rtlCol="0" anchor="ctr"/>
-          <a:lstStyle/>
-          <a:p>
-            <a:pPr algn="ctr" indent="0" marL="0">
-              <a:buNone/>
-            </a:pPr>
-            <a:r>
-              <a:rPr lang="en-US" sz="1800" b="1" dirty="0">
-                <a:solidFill>
-                  <a:srgbClr val="FFFFFF"/>
-                </a:solidFill>
-                <a:latin typeface="Arial Black" pitchFamily="34" charset="0"/>
-                <a:ea typeface="Arial Black" pitchFamily="34" charset="-122"/>
-                <a:cs typeface="Arial Black" pitchFamily="34" charset="-120"/>
-              </a:rPr>
-              <a:t>1</a:t>
-            </a:r>
-            <a:endParaRPr lang="en-US" sz="1800" dirty="0"/>
-          </a:p>
-        </p:txBody>
-      </p:sp>
-      <p:sp>
-        <p:nvSpPr>
-          <p:cNvPr id="19" name="Text 17"/>
-          <p:cNvSpPr/>
-          <p:nvPr/>
-        </p:nvSpPr>
-        <p:spPr>
-          <a:xfrm>
-            <a:off x="777240" y="4251960"/>
-            <a:ext cx="2144954" cy="365760"/>
-          </a:xfrm>
-          <a:prstGeom prst="rect">
-            <a:avLst/>
-          </a:prstGeom>
-          <a:noFill/>
-          <a:ln/>
-        </p:spPr>
-        <p:txBody>
-          <a:bodyPr wrap="square" lIns="0" tIns="0" rIns="0" bIns="0" rtlCol="0" anchor="ctr"/>
-          <a:lstStyle/>
-          <a:p>
-            <a:pPr indent="0" marL="0">
-              <a:buNone/>
-            </a:pPr>
-            <a:r>
-              <a:rPr lang="en-US" sz="1500" b="1" dirty="0">
-                <a:solidFill>
-                  <a:srgbClr val="0C2A3D"/>
-                </a:solidFill>
-                <a:latin typeface="Calibri" pitchFamily="34" charset="0"/>
-                <a:ea typeface="Calibri" pitchFamily="34" charset="-122"/>
-                <a:cs typeface="Calibri" pitchFamily="34" charset="-120"/>
-              </a:rPr>
-              <a:t>Topic teaching</a:t>
-            </a:r>
-            <a:endParaRPr lang="en-US" sz="1500" dirty="0"/>
-          </a:p>
-        </p:txBody>
-      </p:sp>
-      <p:sp>
-        <p:nvSpPr>
-          <p:cNvPr id="20" name="Text 18"/>
-          <p:cNvSpPr/>
-          <p:nvPr/>
-        </p:nvSpPr>
-        <p:spPr>
-          <a:xfrm>
-            <a:off x="777240" y="4663440"/>
-            <a:ext cx="2144954" cy="822960"/>
-          </a:xfrm>
-          <a:prstGeom prst="rect">
-            <a:avLst/>
-          </a:prstGeom>
-          <a:noFill/>
-          <a:ln/>
-        </p:spPr>
-        <p:txBody>
-          <a:bodyPr wrap="square" lIns="0" tIns="0" rIns="0" bIns="0" rtlCol="0" anchor="ctr"/>
-          <a:lstStyle/>
-          <a:p>
-            <a:pPr indent="0" marL="0">
-              <a:buNone/>
-            </a:pPr>
-            <a:r>
-              <a:rPr lang="en-US" sz="1150" dirty="0">
-                <a:solidFill>
-                  <a:srgbClr val="345671"/>
-                </a:solidFill>
-                <a:latin typeface="Calibri" pitchFamily="34" charset="0"/>
-                <a:ea typeface="Calibri" pitchFamily="34" charset="-122"/>
-                <a:cs typeface="Calibri" pitchFamily="34" charset="-120"/>
-              </a:rPr>
-              <a:t>30–45 min focused teaching mapped page-by-page to First Aid 2025.</a:t>
-            </a:r>
-            <a:endParaRPr lang="en-US" sz="1150" dirty="0"/>
-          </a:p>
-        </p:txBody>
-      </p:sp>
-      <p:sp>
-        <p:nvSpPr>
-          <p:cNvPr id="21" name="Shape 19"/>
-          <p:cNvSpPr/>
-          <p:nvPr/>
-        </p:nvSpPr>
-        <p:spPr>
-          <a:xfrm>
-            <a:off x="3333674" y="3383280"/>
-            <a:ext cx="2693594" cy="2194560"/>
-          </a:xfrm>
-          <a:prstGeom prst="rect">
-            <a:avLst/>
-          </a:prstGeom>
-          <a:solidFill>
-            <a:srgbClr val="FFFFFF"/>
-          </a:solidFill>
-          <a:ln w="9525">
-            <a:solidFill>
-              <a:srgbClr val="D6E8F5"/>
-            </a:solidFill>
-            <a:prstDash val="solid"/>
-          </a:ln>
-          <a:effectLst>
-            <a:outerShdw sx="100000" sy="100000" kx="0" ky="0" algn="bl" rotWithShape="0" blurRad="127000" dist="12700" dir="5400000">
-              <a:srgbClr val="0C2A3D">
-                <a:alpha val="8000"/>
-              </a:srgbClr>
-            </a:outerShdw>
-          </a:effectLst>
-        </p:spPr>
-      </p:sp>
-      <p:sp>
-        <p:nvSpPr>
-          <p:cNvPr id="22" name="Shape 20"/>
-          <p:cNvSpPr/>
-          <p:nvPr/>
-        </p:nvSpPr>
-        <p:spPr>
-          <a:xfrm>
-            <a:off x="3333674" y="3383280"/>
-            <a:ext cx="2693594" cy="73152"/>
+          <p:cNvPr id="28" name="Shape 26"/>
+          <p:cNvSpPr/>
+          <p:nvPr/>
+        </p:nvSpPr>
+        <p:spPr>
+          <a:xfrm>
+            <a:off x="5475299" y="2194560"/>
+            <a:ext cx="91440" cy="1508760"/>
           </a:xfrm>
           <a:prstGeom prst="rect">
             <a:avLst/>
@@ -7083,16 +8210,119 @@
       </p:sp>
       <p:sp>
         <p:nvSpPr>
-          <p:cNvPr id="23" name="Shape 21"/>
-          <p:cNvSpPr/>
-          <p:nvPr/>
-        </p:nvSpPr>
-        <p:spPr>
-          <a:xfrm>
-            <a:off x="3607994" y="3657600"/>
-            <a:ext cx="457200" cy="457200"/>
-          </a:xfrm>
-          <a:prstGeom prst="ellipse">
+          <p:cNvPr id="29" name="Text 27"/>
+          <p:cNvSpPr/>
+          <p:nvPr/>
+        </p:nvSpPr>
+        <p:spPr>
+          <a:xfrm>
+            <a:off x="5749619" y="2331720"/>
+            <a:ext cx="5847716" cy="310896"/>
+          </a:xfrm>
+          <a:prstGeom prst="rect">
+            <a:avLst/>
+          </a:prstGeom>
+          <a:noFill/>
+          <a:ln/>
+        </p:spPr>
+        <p:txBody>
+          <a:bodyPr wrap="square" lIns="0" tIns="0" rIns="0" bIns="0" rtlCol="0" anchor="ctr"/>
+          <a:lstStyle/>
+          <a:p>
+            <a:pPr indent="0" marL="0">
+              <a:buNone/>
+            </a:pPr>
+            <a:r>
+              <a:rPr lang="en-US" sz="1400" b="1" dirty="0">
+                <a:solidFill>
+                  <a:srgbClr val="0C2A3D"/>
+                </a:solidFill>
+                <a:latin typeface="Calibri" pitchFamily="34" charset="0"/>
+                <a:ea typeface="Calibri" pitchFamily="34" charset="-122"/>
+                <a:cs typeface="Calibri" pitchFamily="34" charset="-120"/>
+              </a:rPr>
+              <a:t>Disciplines</a:t>
+            </a:r>
+            <a:endParaRPr lang="en-US" sz="1400" dirty="0"/>
+          </a:p>
+        </p:txBody>
+      </p:sp>
+      <p:sp>
+        <p:nvSpPr>
+          <p:cNvPr id="30" name="Text 28"/>
+          <p:cNvSpPr/>
+          <p:nvPr/>
+        </p:nvSpPr>
+        <p:spPr>
+          <a:xfrm>
+            <a:off x="5749619" y="2651760"/>
+            <a:ext cx="5847716" cy="960120"/>
+          </a:xfrm>
+          <a:prstGeom prst="rect">
+            <a:avLst/>
+          </a:prstGeom>
+          <a:noFill/>
+          <a:ln/>
+        </p:spPr>
+        <p:txBody>
+          <a:bodyPr wrap="square" lIns="0" tIns="0" rIns="0" bIns="0" rtlCol="0" anchor="ctr"/>
+          <a:lstStyle/>
+          <a:p>
+            <a:pPr indent="0" marL="0">
+              <a:buNone/>
+            </a:pPr>
+            <a:r>
+              <a:rPr lang="en-US" sz="1200" dirty="0">
+                <a:solidFill>
+                  <a:srgbClr val="345671"/>
+                </a:solidFill>
+                <a:latin typeface="Calibri" pitchFamily="34" charset="0"/>
+                <a:ea typeface="Calibri" pitchFamily="34" charset="-122"/>
+                <a:cs typeface="Calibri" pitchFamily="34" charset="-120"/>
+              </a:rPr>
+              <a:t>Internal Medicine (50–60%) · Surgery (25–30%) · Pediatrics (20–25%) · OB-GYN (10–20%) · Psychiatry (10–15%) · Family Medicine</a:t>
+            </a:r>
+            <a:endParaRPr lang="en-US" sz="1200" dirty="0"/>
+          </a:p>
+        </p:txBody>
+      </p:sp>
+      <p:sp>
+        <p:nvSpPr>
+          <p:cNvPr id="31" name="Shape 29"/>
+          <p:cNvSpPr/>
+          <p:nvPr/>
+        </p:nvSpPr>
+        <p:spPr>
+          <a:xfrm>
+            <a:off x="5475299" y="3886200"/>
+            <a:ext cx="6213476" cy="1508760"/>
+          </a:xfrm>
+          <a:prstGeom prst="rect">
+            <a:avLst/>
+          </a:prstGeom>
+          <a:solidFill>
+            <a:srgbClr val="FEF3C7"/>
+          </a:solidFill>
+          <a:ln w="9525">
+            <a:solidFill>
+              <a:srgbClr val="EAB308"/>
+            </a:solidFill>
+            <a:prstDash val="solid"/>
+          </a:ln>
+        </p:spPr>
+      </p:sp>
+      <p:sp>
+        <p:nvSpPr>
+          <p:cNvPr id="32" name="Shape 30"/>
+          <p:cNvSpPr/>
+          <p:nvPr/>
+        </p:nvSpPr>
+        <p:spPr>
+          <a:xfrm>
+            <a:off x="5475299" y="3886200"/>
+            <a:ext cx="91440" cy="1508760"/>
+          </a:xfrm>
+          <a:prstGeom prst="rect">
             <a:avLst/>
           </a:prstGeom>
           <a:solidFill>
@@ -7108,53 +8338,14 @@
       </p:sp>
       <p:sp>
         <p:nvSpPr>
-          <p:cNvPr id="24" name="Text 22"/>
-          <p:cNvSpPr/>
-          <p:nvPr/>
-        </p:nvSpPr>
-        <p:spPr>
-          <a:xfrm>
-            <a:off x="3607994" y="3657600"/>
-            <a:ext cx="457200" cy="457200"/>
-          </a:xfrm>
-          <a:prstGeom prst="rect">
-            <a:avLst/>
-          </a:prstGeom>
-          <a:noFill/>
-          <a:ln/>
-        </p:spPr>
-        <p:txBody>
-          <a:bodyPr wrap="square" lIns="0" tIns="0" rIns="0" bIns="0" rtlCol="0" anchor="ctr"/>
-          <a:lstStyle/>
-          <a:p>
-            <a:pPr algn="ctr" indent="0" marL="0">
-              <a:buNone/>
-            </a:pPr>
-            <a:r>
-              <a:rPr lang="en-US" sz="1800" b="1" dirty="0">
-                <a:solidFill>
-                  <a:srgbClr val="FFFFFF"/>
-                </a:solidFill>
-                <a:latin typeface="Arial Black" pitchFamily="34" charset="0"/>
-                <a:ea typeface="Arial Black" pitchFamily="34" charset="-122"/>
-                <a:cs typeface="Arial Black" pitchFamily="34" charset="-120"/>
-              </a:rPr>
-              <a:t>2</a:t>
-            </a:r>
-            <a:endParaRPr lang="en-US" sz="1800" dirty="0"/>
-          </a:p>
-        </p:txBody>
-      </p:sp>
-      <p:sp>
-        <p:nvSpPr>
-          <p:cNvPr id="25" name="Text 23"/>
-          <p:cNvSpPr/>
-          <p:nvPr/>
-        </p:nvSpPr>
-        <p:spPr>
-          <a:xfrm>
-            <a:off x="3607994" y="4251960"/>
-            <a:ext cx="2144954" cy="365760"/>
+          <p:cNvPr id="33" name="Text 31"/>
+          <p:cNvSpPr/>
+          <p:nvPr/>
+        </p:nvSpPr>
+        <p:spPr>
+          <a:xfrm>
+            <a:off x="5749619" y="4023360"/>
+            <a:ext cx="5847716" cy="310896"/>
           </a:xfrm>
           <a:prstGeom prst="rect">
             <a:avLst/>
@@ -7170,7 +8361,7 @@
               <a:buNone/>
             </a:pPr>
             <a:r>
-              <a:rPr lang="en-US" sz="1500" b="1" dirty="0">
+              <a:rPr lang="en-US" sz="1400" b="1" dirty="0">
                 <a:solidFill>
                   <a:srgbClr val="0C2A3D"/>
                 </a:solidFill>
@@ -7178,22 +8369,22 @@
                 <a:ea typeface="Calibri" pitchFamily="34" charset="-122"/>
                 <a:cs typeface="Calibri" pitchFamily="34" charset="-120"/>
               </a:rPr>
-              <a:t>UWorld debrief</a:t>
-            </a:r>
-            <a:endParaRPr lang="en-US" sz="1500" dirty="0"/>
-          </a:p>
-        </p:txBody>
-      </p:sp>
-      <p:sp>
-        <p:nvSpPr>
-          <p:cNvPr id="26" name="Text 24"/>
-          <p:cNvSpPr/>
-          <p:nvPr/>
-        </p:nvSpPr>
-        <p:spPr>
-          <a:xfrm>
-            <a:off x="3607994" y="4663440"/>
-            <a:ext cx="2144954" cy="822960"/>
+              <a:t>Organ systems &amp; cross-cutting</a:t>
+            </a:r>
+            <a:endParaRPr lang="en-US" sz="1400" dirty="0"/>
+          </a:p>
+        </p:txBody>
+      </p:sp>
+      <p:sp>
+        <p:nvSpPr>
+          <p:cNvPr id="34" name="Text 32"/>
+          <p:cNvSpPr/>
+          <p:nvPr/>
+        </p:nvSpPr>
+        <p:spPr>
+          <a:xfrm>
+            <a:off x="5749619" y="4343400"/>
+            <a:ext cx="5847716" cy="960120"/>
           </a:xfrm>
           <a:prstGeom prst="rect">
             <a:avLst/>
@@ -7209,7 +8400,7 @@
               <a:buNone/>
             </a:pPr>
             <a:r>
-              <a:rPr lang="en-US" sz="1150" dirty="0">
+              <a:rPr lang="en-US" sz="1200" dirty="0">
                 <a:solidFill>
                   <a:srgbClr val="345671"/>
                 </a:solidFill>
@@ -7217,143 +8408,22 @@
                 <a:ea typeface="Calibri" pitchFamily="34" charset="-122"/>
                 <a:cs typeface="Calibri" pitchFamily="34" charset="-120"/>
               </a:rPr>
-              <a:t>Walk through the day's UWorld block with reasoning for every option.</a:t>
-            </a:r>
-            <a:endParaRPr lang="en-US" sz="1150" dirty="0"/>
-          </a:p>
-        </p:txBody>
-      </p:sp>
-      <p:sp>
-        <p:nvSpPr>
-          <p:cNvPr id="27" name="Shape 25"/>
-          <p:cNvSpPr/>
-          <p:nvPr/>
-        </p:nvSpPr>
-        <p:spPr>
-          <a:xfrm>
-            <a:off x="6164428" y="3383280"/>
-            <a:ext cx="2693594" cy="2194560"/>
-          </a:xfrm>
-          <a:prstGeom prst="rect">
-            <a:avLst/>
-          </a:prstGeom>
-          <a:solidFill>
-            <a:srgbClr val="FFFFFF"/>
-          </a:solidFill>
-          <a:ln w="9525">
-            <a:solidFill>
-              <a:srgbClr val="D6E8F5"/>
-            </a:solidFill>
-            <a:prstDash val="solid"/>
-          </a:ln>
-          <a:effectLst>
-            <a:outerShdw sx="100000" sy="100000" kx="0" ky="0" algn="bl" rotWithShape="0" blurRad="127000" dist="12700" dir="5400000">
-              <a:srgbClr val="0C2A3D">
-                <a:alpha val="8000"/>
-              </a:srgbClr>
-            </a:outerShdw>
-          </a:effectLst>
-        </p:spPr>
-      </p:sp>
-      <p:sp>
-        <p:nvSpPr>
-          <p:cNvPr id="28" name="Shape 26"/>
-          <p:cNvSpPr/>
-          <p:nvPr/>
-        </p:nvSpPr>
-        <p:spPr>
-          <a:xfrm>
-            <a:off x="6164428" y="3383280"/>
-            <a:ext cx="2693594" cy="73152"/>
-          </a:xfrm>
-          <a:prstGeom prst="rect">
-            <a:avLst/>
-          </a:prstGeom>
-          <a:solidFill>
-            <a:srgbClr val="0284C7"/>
-          </a:solidFill>
-          <a:ln w="12700">
-            <a:solidFill>
-              <a:srgbClr val="0284C7"/>
-            </a:solidFill>
-            <a:prstDash val="solid"/>
-          </a:ln>
-        </p:spPr>
-      </p:sp>
-      <p:sp>
-        <p:nvSpPr>
-          <p:cNvPr id="29" name="Shape 27"/>
-          <p:cNvSpPr/>
-          <p:nvPr/>
-        </p:nvSpPr>
-        <p:spPr>
-          <a:xfrm>
-            <a:off x="6438748" y="3657600"/>
-            <a:ext cx="457200" cy="457200"/>
-          </a:xfrm>
-          <a:prstGeom prst="ellipse">
-            <a:avLst/>
-          </a:prstGeom>
-          <a:solidFill>
-            <a:srgbClr val="0284C7"/>
-          </a:solidFill>
-          <a:ln w="12700">
-            <a:solidFill>
-              <a:srgbClr val="0284C7"/>
-            </a:solidFill>
-            <a:prstDash val="solid"/>
-          </a:ln>
-        </p:spPr>
-      </p:sp>
-      <p:sp>
-        <p:nvSpPr>
-          <p:cNvPr id="30" name="Text 28"/>
-          <p:cNvSpPr/>
-          <p:nvPr/>
-        </p:nvSpPr>
-        <p:spPr>
-          <a:xfrm>
-            <a:off x="6438748" y="3657600"/>
-            <a:ext cx="457200" cy="457200"/>
-          </a:xfrm>
-          <a:prstGeom prst="rect">
-            <a:avLst/>
-          </a:prstGeom>
-          <a:noFill/>
-          <a:ln/>
-        </p:spPr>
-        <p:txBody>
-          <a:bodyPr wrap="square" lIns="0" tIns="0" rIns="0" bIns="0" rtlCol="0" anchor="ctr"/>
-          <a:lstStyle/>
-          <a:p>
-            <a:pPr algn="ctr" indent="0" marL="0">
-              <a:buNone/>
-            </a:pPr>
-            <a:r>
-              <a:rPr lang="en-US" sz="1800" b="1" dirty="0">
-                <a:solidFill>
-                  <a:srgbClr val="FFFFFF"/>
-                </a:solidFill>
-                <a:latin typeface="Arial Black" pitchFamily="34" charset="0"/>
-                <a:ea typeface="Arial Black" pitchFamily="34" charset="-122"/>
-                <a:cs typeface="Arial Black" pitchFamily="34" charset="-120"/>
-              </a:rPr>
-              <a:t>3</a:t>
-            </a:r>
-            <a:endParaRPr lang="en-US" sz="1800" dirty="0"/>
-          </a:p>
-        </p:txBody>
-      </p:sp>
-      <p:sp>
-        <p:nvSpPr>
-          <p:cNvPr id="31" name="Text 29"/>
-          <p:cNvSpPr/>
-          <p:nvPr/>
-        </p:nvSpPr>
-        <p:spPr>
-          <a:xfrm>
-            <a:off x="6438748" y="4251960"/>
-            <a:ext cx="2144954" cy="365760"/>
+              <a:t>Cardiovascular · GI · Respiratory · MSK &amp; Skin · Nervous &amp; Behavioral · Endocrine · Reproductive &amp; Pregnancy · Renal · Heme &amp; Immune · Multisystem · Ethics &amp; Patient Safety</a:t>
+            </a:r>
+            <a:endParaRPr lang="en-US" sz="1200" dirty="0"/>
+          </a:p>
+        </p:txBody>
+      </p:sp>
+      <p:sp>
+        <p:nvSpPr>
+          <p:cNvPr id="35" name="Text 33"/>
+          <p:cNvSpPr/>
+          <p:nvPr/>
+        </p:nvSpPr>
+        <p:spPr>
+          <a:xfrm>
+            <a:off x="502920" y="5989320"/>
+            <a:ext cx="11185855" cy="292608"/>
           </a:xfrm>
           <a:prstGeom prst="rect">
             <a:avLst/>
@@ -7369,30 +8439,30 @@
               <a:buNone/>
             </a:pPr>
             <a:r>
-              <a:rPr lang="en-US" sz="1500" b="1" dirty="0">
-                <a:solidFill>
-                  <a:srgbClr val="0C2A3D"/>
-                </a:solidFill>
-                <a:latin typeface="Calibri" pitchFamily="34" charset="0"/>
-                <a:ea typeface="Calibri" pitchFamily="34" charset="-122"/>
-                <a:cs typeface="Calibri" pitchFamily="34" charset="-120"/>
-              </a:rPr>
-              <a:t>High-yield wrap</a:t>
-            </a:r>
-            <a:endParaRPr lang="en-US" sz="1500" dirty="0"/>
-          </a:p>
-        </p:txBody>
-      </p:sp>
-      <p:sp>
-        <p:nvSpPr>
-          <p:cNvPr id="32" name="Text 30"/>
-          <p:cNvSpPr/>
-          <p:nvPr/>
-        </p:nvSpPr>
-        <p:spPr>
-          <a:xfrm>
-            <a:off x="6438748" y="4663440"/>
-            <a:ext cx="2144954" cy="822960"/>
+              <a:rPr lang="en-US" sz="1200" b="1" i="1" dirty="0">
+                <a:solidFill>
+                  <a:srgbClr val="B45309"/>
+                </a:solidFill>
+                <a:latin typeface="Calibri" pitchFamily="34" charset="0"/>
+                <a:ea typeface="Calibri" pitchFamily="34" charset="-122"/>
+                <a:cs typeface="Calibri" pitchFamily="34" charset="-120"/>
+              </a:rPr>
+              <a:t>Our approach: case-based teaching across all disciplines, daily UWorld blocks, full FA 2025 mapping.</a:t>
+            </a:r>
+            <a:endParaRPr lang="en-US" sz="1200" dirty="0"/>
+          </a:p>
+        </p:txBody>
+      </p:sp>
+      <p:sp>
+        <p:nvSpPr>
+          <p:cNvPr id="36" name="Text 34"/>
+          <p:cNvSpPr/>
+          <p:nvPr/>
+        </p:nvSpPr>
+        <p:spPr>
+          <a:xfrm>
+            <a:off x="502920" y="6263640"/>
+            <a:ext cx="11185855" cy="219456"/>
           </a:xfrm>
           <a:prstGeom prst="rect">
             <a:avLst/>
@@ -7408,222 +8478,23 @@
               <a:buNone/>
             </a:pPr>
             <a:r>
-              <a:rPr lang="en-US" sz="1150" dirty="0">
-                <a:solidFill>
-                  <a:srgbClr val="345671"/>
-                </a:solidFill>
-                <a:latin typeface="Calibri" pitchFamily="34" charset="0"/>
-                <a:ea typeface="Calibri" pitchFamily="34" charset="-122"/>
-                <a:cs typeface="Calibri" pitchFamily="34" charset="-120"/>
-              </a:rPr>
-              <a:t>5-minute mnemonic / pearls recap that you take into the next day.</a:t>
-            </a:r>
-            <a:endParaRPr lang="en-US" sz="1150" dirty="0"/>
-          </a:p>
-        </p:txBody>
-      </p:sp>
-      <p:sp>
-        <p:nvSpPr>
-          <p:cNvPr id="33" name="Shape 31"/>
-          <p:cNvSpPr/>
-          <p:nvPr/>
-        </p:nvSpPr>
-        <p:spPr>
-          <a:xfrm>
-            <a:off x="8995181" y="3383280"/>
-            <a:ext cx="2693594" cy="2194560"/>
-          </a:xfrm>
-          <a:prstGeom prst="rect">
-            <a:avLst/>
-          </a:prstGeom>
-          <a:solidFill>
-            <a:srgbClr val="FFFFFF"/>
-          </a:solidFill>
-          <a:ln w="9525">
-            <a:solidFill>
-              <a:srgbClr val="D6E8F5"/>
-            </a:solidFill>
-            <a:prstDash val="solid"/>
-          </a:ln>
-          <a:effectLst>
-            <a:outerShdw sx="100000" sy="100000" kx="0" ky="0" algn="bl" rotWithShape="0" blurRad="127000" dist="12700" dir="5400000">
-              <a:srgbClr val="0C2A3D">
-                <a:alpha val="8000"/>
-              </a:srgbClr>
-            </a:outerShdw>
-          </a:effectLst>
-        </p:spPr>
-      </p:sp>
-      <p:sp>
-        <p:nvSpPr>
-          <p:cNvPr id="34" name="Shape 32"/>
-          <p:cNvSpPr/>
-          <p:nvPr/>
-        </p:nvSpPr>
-        <p:spPr>
-          <a:xfrm>
-            <a:off x="8995181" y="3383280"/>
-            <a:ext cx="2693594" cy="73152"/>
-          </a:xfrm>
-          <a:prstGeom prst="rect">
-            <a:avLst/>
-          </a:prstGeom>
-          <a:solidFill>
-            <a:srgbClr val="D97706"/>
-          </a:solidFill>
-          <a:ln w="12700">
-            <a:solidFill>
-              <a:srgbClr val="D97706"/>
-            </a:solidFill>
-            <a:prstDash val="solid"/>
-          </a:ln>
-        </p:spPr>
-      </p:sp>
-      <p:sp>
-        <p:nvSpPr>
-          <p:cNvPr id="35" name="Shape 33"/>
-          <p:cNvSpPr/>
-          <p:nvPr/>
-        </p:nvSpPr>
-        <p:spPr>
-          <a:xfrm>
-            <a:off x="9269501" y="3657600"/>
-            <a:ext cx="457200" cy="457200"/>
-          </a:xfrm>
-          <a:prstGeom prst="ellipse">
-            <a:avLst/>
-          </a:prstGeom>
-          <a:solidFill>
-            <a:srgbClr val="D97706"/>
-          </a:solidFill>
-          <a:ln w="12700">
-            <a:solidFill>
-              <a:srgbClr val="D97706"/>
-            </a:solidFill>
-            <a:prstDash val="solid"/>
-          </a:ln>
-        </p:spPr>
-      </p:sp>
-      <p:sp>
-        <p:nvSpPr>
-          <p:cNvPr id="36" name="Text 34"/>
-          <p:cNvSpPr/>
-          <p:nvPr/>
-        </p:nvSpPr>
-        <p:spPr>
-          <a:xfrm>
-            <a:off x="9269501" y="3657600"/>
-            <a:ext cx="457200" cy="457200"/>
-          </a:xfrm>
-          <a:prstGeom prst="rect">
-            <a:avLst/>
-          </a:prstGeom>
-          <a:noFill/>
-          <a:ln/>
-        </p:spPr>
-        <p:txBody>
-          <a:bodyPr wrap="square" lIns="0" tIns="0" rIns="0" bIns="0" rtlCol="0" anchor="ctr"/>
-          <a:lstStyle/>
-          <a:p>
-            <a:pPr algn="ctr" indent="0" marL="0">
-              <a:buNone/>
-            </a:pPr>
-            <a:r>
-              <a:rPr lang="en-US" sz="1800" b="1" dirty="0">
-                <a:solidFill>
-                  <a:srgbClr val="FFFFFF"/>
-                </a:solidFill>
-                <a:latin typeface="Arial Black" pitchFamily="34" charset="0"/>
-                <a:ea typeface="Arial Black" pitchFamily="34" charset="-122"/>
-                <a:cs typeface="Arial Black" pitchFamily="34" charset="-120"/>
-              </a:rPr>
-              <a:t>4</a:t>
-            </a:r>
-            <a:endParaRPr lang="en-US" sz="1800" dirty="0"/>
+              <a:rPr lang="en-US" sz="1000" i="1" dirty="0">
+                <a:solidFill>
+                  <a:srgbClr val="6B87A3"/>
+                </a:solidFill>
+                <a:latin typeface="Calibri" pitchFamily="34" charset="0"/>
+                <a:ea typeface="Calibri" pitchFamily="34" charset="-122"/>
+                <a:cs typeface="Calibri" pitchFamily="34" charset="-120"/>
+              </a:rPr>
+              <a:t>Source: usmle.org Step 2 CK content outline + FA 2025</a:t>
+            </a:r>
+            <a:endParaRPr lang="en-US" sz="1000" dirty="0"/>
           </a:p>
         </p:txBody>
       </p:sp>
       <p:sp>
         <p:nvSpPr>
           <p:cNvPr id="37" name="Text 35"/>
-          <p:cNvSpPr/>
-          <p:nvPr/>
-        </p:nvSpPr>
-        <p:spPr>
-          <a:xfrm>
-            <a:off x="9269501" y="4251960"/>
-            <a:ext cx="2144954" cy="365760"/>
-          </a:xfrm>
-          <a:prstGeom prst="rect">
-            <a:avLst/>
-          </a:prstGeom>
-          <a:noFill/>
-          <a:ln/>
-        </p:spPr>
-        <p:txBody>
-          <a:bodyPr wrap="square" lIns="0" tIns="0" rIns="0" bIns="0" rtlCol="0" anchor="ctr"/>
-          <a:lstStyle/>
-          <a:p>
-            <a:pPr indent="0" marL="0">
-              <a:buNone/>
-            </a:pPr>
-            <a:r>
-              <a:rPr lang="en-US" sz="1500" b="1" dirty="0">
-                <a:solidFill>
-                  <a:srgbClr val="0C2A3D"/>
-                </a:solidFill>
-                <a:latin typeface="Calibri" pitchFamily="34" charset="0"/>
-                <a:ea typeface="Calibri" pitchFamily="34" charset="-122"/>
-                <a:cs typeface="Calibri" pitchFamily="34" charset="-120"/>
-              </a:rPr>
-              <a:t>Office hours</a:t>
-            </a:r>
-            <a:endParaRPr lang="en-US" sz="1500" dirty="0"/>
-          </a:p>
-        </p:txBody>
-      </p:sp>
-      <p:sp>
-        <p:nvSpPr>
-          <p:cNvPr id="38" name="Text 36"/>
-          <p:cNvSpPr/>
-          <p:nvPr/>
-        </p:nvSpPr>
-        <p:spPr>
-          <a:xfrm>
-            <a:off x="9269501" y="4663440"/>
-            <a:ext cx="2144954" cy="822960"/>
-          </a:xfrm>
-          <a:prstGeom prst="rect">
-            <a:avLst/>
-          </a:prstGeom>
-          <a:noFill/>
-          <a:ln/>
-        </p:spPr>
-        <p:txBody>
-          <a:bodyPr wrap="square" lIns="0" tIns="0" rIns="0" bIns="0" rtlCol="0" anchor="ctr"/>
-          <a:lstStyle/>
-          <a:p>
-            <a:pPr indent="0" marL="0">
-              <a:buNone/>
-            </a:pPr>
-            <a:r>
-              <a:rPr lang="en-US" sz="1150" dirty="0">
-                <a:solidFill>
-                  <a:srgbClr val="345671"/>
-                </a:solidFill>
-                <a:latin typeface="Calibri" pitchFamily="34" charset="0"/>
-                <a:ea typeface="Calibri" pitchFamily="34" charset="-122"/>
-                <a:cs typeface="Calibri" pitchFamily="34" charset="-120"/>
-              </a:rPr>
-              <a:t>Open Q&amp;A outside class time for clarifying questions and weak areas.</a:t>
-            </a:r>
-            <a:endParaRPr lang="en-US" sz="1150" dirty="0"/>
-          </a:p>
-        </p:txBody>
-      </p:sp>
-      <p:sp>
-        <p:nvSpPr>
-          <p:cNvPr id="39" name="Text 37"/>
           <p:cNvSpPr/>
           <p:nvPr/>
         </p:nvSpPr>
@@ -7662,7 +8533,7 @@
       </p:sp>
       <p:sp>
         <p:nvSpPr>
-          <p:cNvPr id="40" name="Text 38"/>
+          <p:cNvPr id="38" name="Text 36"/>
           <p:cNvSpPr/>
           <p:nvPr/>
         </p:nvSpPr>
@@ -7693,7 +8564,7 @@
                 <a:ea typeface="Calibri" pitchFamily="34" charset="-122"/>
                 <a:cs typeface="Calibri" pitchFamily="34" charset="-120"/>
               </a:rPr>
-              <a:t>5 / 7</a:t>
+              <a:t>5 / 8</a:t>
             </a:r>
             <a:endParaRPr lang="en-US" sz="1000" dirty="0"/>
           </a:p>
@@ -7814,7 +8685,7 @@
                 <a:ea typeface="Calibri" pitchFamily="34" charset="-122"/>
                 <a:cs typeface="Calibri" pitchFamily="34" charset="-120"/>
               </a:rPr>
-              <a:t>HOW THE CLASSES WORK  ·  PART 2</a:t>
+              <a:t>HOW THE CLASSES WORK  ·  PART 1</a:t>
             </a:r>
             <a:endParaRPr lang="en-US" sz="1200" dirty="0"/>
           </a:p>
@@ -7853,7 +8724,7 @@
                 <a:ea typeface="Arial Black" pitchFamily="34" charset="-122"/>
                 <a:cs typeface="Arial Black" pitchFamily="34" charset="-120"/>
               </a:rPr>
-              <a:t>4-month roadmap + end-to-end mentorship</a:t>
+              <a:t>Daily structure — Mon to Sun</a:t>
             </a:r>
             <a:endParaRPr lang="en-US" sz="3200" dirty="0"/>
           </a:p>
@@ -7867,33 +8738,349 @@
         </p:nvSpPr>
         <p:spPr>
           <a:xfrm>
-            <a:off x="502920" y="1874520"/>
-            <a:ext cx="2659304" cy="1417320"/>
+            <a:off x="502920" y="1920240"/>
+            <a:ext cx="3545738" cy="1097280"/>
           </a:xfrm>
           <a:prstGeom prst="rect">
             <a:avLst/>
           </a:prstGeom>
           <a:solidFill>
-            <a:srgbClr val="F5FBFF"/>
+            <a:srgbClr val="E0F2FE"/>
+          </a:solidFill>
+          <a:ln w="12700">
+            <a:solidFill>
+              <a:srgbClr val="E0F2FE"/>
+            </a:solidFill>
+            <a:prstDash val="solid"/>
+          </a:ln>
+        </p:spPr>
+      </p:sp>
+      <p:sp>
+        <p:nvSpPr>
+          <p:cNvPr id="7" name="Text 5"/>
+          <p:cNvSpPr/>
+          <p:nvPr/>
+        </p:nvSpPr>
+        <p:spPr>
+          <a:xfrm>
+            <a:off x="502920" y="2011680"/>
+            <a:ext cx="3545738" cy="594360"/>
+          </a:xfrm>
+          <a:prstGeom prst="rect">
+            <a:avLst/>
+          </a:prstGeom>
+          <a:noFill/>
+          <a:ln/>
+        </p:spPr>
+        <p:txBody>
+          <a:bodyPr wrap="square" lIns="0" tIns="0" rIns="0" bIns="0" rtlCol="0" anchor="ctr"/>
+          <a:lstStyle/>
+          <a:p>
+            <a:pPr algn="ctr" indent="0" marL="0">
+              <a:buNone/>
+            </a:pPr>
+            <a:r>
+              <a:rPr lang="en-US" sz="3000" b="1" dirty="0">
+                <a:solidFill>
+                  <a:srgbClr val="075985"/>
+                </a:solidFill>
+                <a:latin typeface="Arial Black" pitchFamily="34" charset="0"/>
+                <a:ea typeface="Arial Black" pitchFamily="34" charset="-122"/>
+                <a:cs typeface="Arial Black" pitchFamily="34" charset="-120"/>
+              </a:rPr>
+              <a:t>Mon–Sun</a:t>
+            </a:r>
+            <a:endParaRPr lang="en-US" sz="3000" dirty="0"/>
+          </a:p>
+        </p:txBody>
+      </p:sp>
+      <p:sp>
+        <p:nvSpPr>
+          <p:cNvPr id="8" name="Text 6"/>
+          <p:cNvSpPr/>
+          <p:nvPr/>
+        </p:nvSpPr>
+        <p:spPr>
+          <a:xfrm>
+            <a:off x="502920" y="2606040"/>
+            <a:ext cx="3545738" cy="365760"/>
+          </a:xfrm>
+          <a:prstGeom prst="rect">
+            <a:avLst/>
+          </a:prstGeom>
+          <a:noFill/>
+          <a:ln/>
+        </p:spPr>
+        <p:txBody>
+          <a:bodyPr wrap="square" lIns="0" tIns="0" rIns="0" bIns="0" rtlCol="0" anchor="ctr"/>
+          <a:lstStyle/>
+          <a:p>
+            <a:pPr algn="ctr" indent="0" marL="0">
+              <a:buNone/>
+            </a:pPr>
+            <a:r>
+              <a:rPr lang="en-US" sz="1300" b="1" spc="200" kern="0" dirty="0">
+                <a:solidFill>
+                  <a:srgbClr val="345671"/>
+                </a:solidFill>
+                <a:latin typeface="Calibri" pitchFamily="34" charset="0"/>
+                <a:ea typeface="Calibri" pitchFamily="34" charset="-122"/>
+                <a:cs typeface="Calibri" pitchFamily="34" charset="-120"/>
+              </a:rPr>
+              <a:t>Daily classes</a:t>
+            </a:r>
+            <a:endParaRPr lang="en-US" sz="1300" dirty="0"/>
+          </a:p>
+        </p:txBody>
+      </p:sp>
+      <p:sp>
+        <p:nvSpPr>
+          <p:cNvPr id="9" name="Shape 7"/>
+          <p:cNvSpPr/>
+          <p:nvPr/>
+        </p:nvSpPr>
+        <p:spPr>
+          <a:xfrm>
+            <a:off x="4322978" y="1920240"/>
+            <a:ext cx="3545738" cy="1097280"/>
+          </a:xfrm>
+          <a:prstGeom prst="rect">
+            <a:avLst/>
+          </a:prstGeom>
+          <a:solidFill>
+            <a:srgbClr val="E0F2FE"/>
+          </a:solidFill>
+          <a:ln w="12700">
+            <a:solidFill>
+              <a:srgbClr val="E0F2FE"/>
+            </a:solidFill>
+            <a:prstDash val="solid"/>
+          </a:ln>
+        </p:spPr>
+      </p:sp>
+      <p:sp>
+        <p:nvSpPr>
+          <p:cNvPr id="10" name="Text 8"/>
+          <p:cNvSpPr/>
+          <p:nvPr/>
+        </p:nvSpPr>
+        <p:spPr>
+          <a:xfrm>
+            <a:off x="4322978" y="2011680"/>
+            <a:ext cx="3545738" cy="594360"/>
+          </a:xfrm>
+          <a:prstGeom prst="rect">
+            <a:avLst/>
+          </a:prstGeom>
+          <a:noFill/>
+          <a:ln/>
+        </p:spPr>
+        <p:txBody>
+          <a:bodyPr wrap="square" lIns="0" tIns="0" rIns="0" bIns="0" rtlCol="0" anchor="ctr"/>
+          <a:lstStyle/>
+          <a:p>
+            <a:pPr algn="ctr" indent="0" marL="0">
+              <a:buNone/>
+            </a:pPr>
+            <a:r>
+              <a:rPr lang="en-US" sz="3000" b="1" dirty="0">
+                <a:solidFill>
+                  <a:srgbClr val="075985"/>
+                </a:solidFill>
+                <a:latin typeface="Arial Black" pitchFamily="34" charset="0"/>
+                <a:ea typeface="Arial Black" pitchFamily="34" charset="-122"/>
+                <a:cs typeface="Arial Black" pitchFamily="34" charset="-120"/>
+              </a:rPr>
+              <a:t>4 months</a:t>
+            </a:r>
+            <a:endParaRPr lang="en-US" sz="3000" dirty="0"/>
+          </a:p>
+        </p:txBody>
+      </p:sp>
+      <p:sp>
+        <p:nvSpPr>
+          <p:cNvPr id="11" name="Text 9"/>
+          <p:cNvSpPr/>
+          <p:nvPr/>
+        </p:nvSpPr>
+        <p:spPr>
+          <a:xfrm>
+            <a:off x="4322978" y="2606040"/>
+            <a:ext cx="3545738" cy="365760"/>
+          </a:xfrm>
+          <a:prstGeom prst="rect">
+            <a:avLst/>
+          </a:prstGeom>
+          <a:noFill/>
+          <a:ln/>
+        </p:spPr>
+        <p:txBody>
+          <a:bodyPr wrap="square" lIns="0" tIns="0" rIns="0" bIns="0" rtlCol="0" anchor="ctr"/>
+          <a:lstStyle/>
+          <a:p>
+            <a:pPr algn="ctr" indent="0" marL="0">
+              <a:buNone/>
+            </a:pPr>
+            <a:r>
+              <a:rPr lang="en-US" sz="1300" b="1" spc="200" kern="0" dirty="0">
+                <a:solidFill>
+                  <a:srgbClr val="345671"/>
+                </a:solidFill>
+                <a:latin typeface="Calibri" pitchFamily="34" charset="0"/>
+                <a:ea typeface="Calibri" pitchFamily="34" charset="-122"/>
+                <a:cs typeface="Calibri" pitchFamily="34" charset="-120"/>
+              </a:rPr>
+              <a:t>Structured roadmap</a:t>
+            </a:r>
+            <a:endParaRPr lang="en-US" sz="1300" dirty="0"/>
+          </a:p>
+        </p:txBody>
+      </p:sp>
+      <p:sp>
+        <p:nvSpPr>
+          <p:cNvPr id="12" name="Shape 10"/>
+          <p:cNvSpPr/>
+          <p:nvPr/>
+        </p:nvSpPr>
+        <p:spPr>
+          <a:xfrm>
+            <a:off x="8143037" y="1920240"/>
+            <a:ext cx="3545738" cy="1097280"/>
+          </a:xfrm>
+          <a:prstGeom prst="rect">
+            <a:avLst/>
+          </a:prstGeom>
+          <a:solidFill>
+            <a:srgbClr val="E0F2FE"/>
+          </a:solidFill>
+          <a:ln w="12700">
+            <a:solidFill>
+              <a:srgbClr val="E0F2FE"/>
+            </a:solidFill>
+            <a:prstDash val="solid"/>
+          </a:ln>
+        </p:spPr>
+      </p:sp>
+      <p:sp>
+        <p:nvSpPr>
+          <p:cNvPr id="13" name="Text 11"/>
+          <p:cNvSpPr/>
+          <p:nvPr/>
+        </p:nvSpPr>
+        <p:spPr>
+          <a:xfrm>
+            <a:off x="8143037" y="2011680"/>
+            <a:ext cx="3545738" cy="594360"/>
+          </a:xfrm>
+          <a:prstGeom prst="rect">
+            <a:avLst/>
+          </a:prstGeom>
+          <a:noFill/>
+          <a:ln/>
+        </p:spPr>
+        <p:txBody>
+          <a:bodyPr wrap="square" lIns="0" tIns="0" rIns="0" bIns="0" rtlCol="0" anchor="ctr"/>
+          <a:lstStyle/>
+          <a:p>
+            <a:pPr algn="ctr" indent="0" marL="0">
+              <a:buNone/>
+            </a:pPr>
+            <a:r>
+              <a:rPr lang="en-US" sz="3000" b="1" dirty="0">
+                <a:solidFill>
+                  <a:srgbClr val="075985"/>
+                </a:solidFill>
+                <a:latin typeface="Arial Black" pitchFamily="34" charset="0"/>
+                <a:ea typeface="Arial Black" pitchFamily="34" charset="-122"/>
+                <a:cs typeface="Arial Black" pitchFamily="34" charset="-120"/>
+              </a:rPr>
+              <a:t>Step 1 + 2</a:t>
+            </a:r>
+            <a:endParaRPr lang="en-US" sz="3000" dirty="0"/>
+          </a:p>
+        </p:txBody>
+      </p:sp>
+      <p:sp>
+        <p:nvSpPr>
+          <p:cNvPr id="14" name="Text 12"/>
+          <p:cNvSpPr/>
+          <p:nvPr/>
+        </p:nvSpPr>
+        <p:spPr>
+          <a:xfrm>
+            <a:off x="8143037" y="2606040"/>
+            <a:ext cx="3545738" cy="365760"/>
+          </a:xfrm>
+          <a:prstGeom prst="rect">
+            <a:avLst/>
+          </a:prstGeom>
+          <a:noFill/>
+          <a:ln/>
+        </p:spPr>
+        <p:txBody>
+          <a:bodyPr wrap="square" lIns="0" tIns="0" rIns="0" bIns="0" rtlCol="0" anchor="ctr"/>
+          <a:lstStyle/>
+          <a:p>
+            <a:pPr algn="ctr" indent="0" marL="0">
+              <a:buNone/>
+            </a:pPr>
+            <a:r>
+              <a:rPr lang="en-US" sz="1300" b="1" spc="200" kern="0" dirty="0">
+                <a:solidFill>
+                  <a:srgbClr val="345671"/>
+                </a:solidFill>
+                <a:latin typeface="Calibri" pitchFamily="34" charset="0"/>
+                <a:ea typeface="Calibri" pitchFamily="34" charset="-122"/>
+                <a:cs typeface="Calibri" pitchFamily="34" charset="-120"/>
+              </a:rPr>
+              <a:t>Combined option</a:t>
+            </a:r>
+            <a:endParaRPr lang="en-US" sz="1300" dirty="0"/>
+          </a:p>
+        </p:txBody>
+      </p:sp>
+      <p:sp>
+        <p:nvSpPr>
+          <p:cNvPr id="15" name="Shape 13"/>
+          <p:cNvSpPr/>
+          <p:nvPr/>
+        </p:nvSpPr>
+        <p:spPr>
+          <a:xfrm>
+            <a:off x="502920" y="3383280"/>
+            <a:ext cx="2693594" cy="2194560"/>
+          </a:xfrm>
+          <a:prstGeom prst="rect">
+            <a:avLst/>
+          </a:prstGeom>
+          <a:solidFill>
+            <a:srgbClr val="FFFFFF"/>
           </a:solidFill>
           <a:ln w="9525">
             <a:solidFill>
-              <a:srgbClr val="B8D6EC"/>
+              <a:srgbClr val="D6E8F5"/>
             </a:solidFill>
             <a:prstDash val="solid"/>
           </a:ln>
-        </p:spPr>
-      </p:sp>
-      <p:sp>
-        <p:nvSpPr>
-          <p:cNvPr id="7" name="Shape 5"/>
-          <p:cNvSpPr/>
-          <p:nvPr/>
-        </p:nvSpPr>
-        <p:spPr>
-          <a:xfrm>
-            <a:off x="502920" y="1874520"/>
-            <a:ext cx="2659304" cy="329184"/>
+          <a:effectLst>
+            <a:outerShdw sx="100000" sy="100000" kx="0" ky="0" algn="bl" rotWithShape="0" blurRad="127000" dist="12700" dir="5400000">
+              <a:srgbClr val="0C2A3D">
+                <a:alpha val="8000"/>
+              </a:srgbClr>
+            </a:outerShdw>
+          </a:effectLst>
+        </p:spPr>
+      </p:sp>
+      <p:sp>
+        <p:nvSpPr>
+          <p:cNvPr id="16" name="Shape 14"/>
+          <p:cNvSpPr/>
+          <p:nvPr/>
+        </p:nvSpPr>
+        <p:spPr>
+          <a:xfrm>
+            <a:off x="502920" y="3383280"/>
+            <a:ext cx="2693594" cy="73152"/>
           </a:xfrm>
           <a:prstGeom prst="rect">
             <a:avLst/>
@@ -7911,119 +9098,16 @@
       </p:sp>
       <p:sp>
         <p:nvSpPr>
-          <p:cNvPr id="8" name="Text 6"/>
-          <p:cNvSpPr/>
-          <p:nvPr/>
-        </p:nvSpPr>
-        <p:spPr>
-          <a:xfrm>
-            <a:off x="502920" y="1874520"/>
-            <a:ext cx="2659304" cy="329184"/>
-          </a:xfrm>
-          <a:prstGeom prst="rect">
-            <a:avLst/>
-          </a:prstGeom>
-          <a:noFill/>
-          <a:ln/>
-        </p:spPr>
-        <p:txBody>
-          <a:bodyPr wrap="square" lIns="0" tIns="0" rIns="0" bIns="0" rtlCol="0" anchor="ctr"/>
-          <a:lstStyle/>
-          <a:p>
-            <a:pPr algn="ctr" indent="0" marL="0">
-              <a:buNone/>
-            </a:pPr>
-            <a:r>
-              <a:rPr lang="en-US" sz="1300" b="1" spc="300" kern="0" dirty="0">
-                <a:solidFill>
-                  <a:srgbClr val="FFFFFF"/>
-                </a:solidFill>
-                <a:latin typeface="Calibri" pitchFamily="34" charset="0"/>
-                <a:ea typeface="Calibri" pitchFamily="34" charset="-122"/>
-                <a:cs typeface="Calibri" pitchFamily="34" charset="-120"/>
-              </a:rPr>
-              <a:t>Month 1</a:t>
-            </a:r>
-            <a:endParaRPr lang="en-US" sz="1300" dirty="0"/>
-          </a:p>
-        </p:txBody>
-      </p:sp>
-      <p:sp>
-        <p:nvSpPr>
-          <p:cNvPr id="9" name="Text 7"/>
-          <p:cNvSpPr/>
-          <p:nvPr/>
-        </p:nvSpPr>
-        <p:spPr>
-          <a:xfrm>
-            <a:off x="667512" y="2286000"/>
-            <a:ext cx="2330120" cy="960120"/>
-          </a:xfrm>
-          <a:prstGeom prst="rect">
-            <a:avLst/>
-          </a:prstGeom>
-          <a:noFill/>
-          <a:ln/>
-        </p:spPr>
-        <p:txBody>
-          <a:bodyPr wrap="square" lIns="0" tIns="0" rIns="0" bIns="0" rtlCol="0" anchor="ctr"/>
-          <a:lstStyle/>
-          <a:p>
-            <a:pPr algn="l" indent="0" marL="0">
-              <a:buNone/>
-            </a:pPr>
-            <a:r>
-              <a:rPr lang="en-US" sz="1200" dirty="0">
-                <a:solidFill>
-                  <a:srgbClr val="345671"/>
-                </a:solidFill>
-                <a:latin typeface="Calibri" pitchFamily="34" charset="0"/>
-                <a:ea typeface="Calibri" pitchFamily="34" charset="-122"/>
-                <a:cs typeface="Calibri" pitchFamily="34" charset="-120"/>
-              </a:rPr>
-              <a:t>Cardiovascular · Respiratory · General Pathology · Epi/Biostats</a:t>
-            </a:r>
-            <a:endParaRPr lang="en-US" sz="1200" dirty="0"/>
-          </a:p>
-        </p:txBody>
-      </p:sp>
-      <p:sp>
-        <p:nvSpPr>
-          <p:cNvPr id="10" name="Shape 8"/>
-          <p:cNvSpPr/>
-          <p:nvPr/>
-        </p:nvSpPr>
-        <p:spPr>
-          <a:xfrm>
-            <a:off x="3345104" y="1874520"/>
-            <a:ext cx="2659304" cy="1417320"/>
-          </a:xfrm>
-          <a:prstGeom prst="rect">
-            <a:avLst/>
-          </a:prstGeom>
-          <a:solidFill>
-            <a:srgbClr val="F5FBFF"/>
-          </a:solidFill>
-          <a:ln w="9525">
-            <a:solidFill>
-              <a:srgbClr val="B8D6EC"/>
-            </a:solidFill>
-            <a:prstDash val="solid"/>
-          </a:ln>
-        </p:spPr>
-      </p:sp>
-      <p:sp>
-        <p:nvSpPr>
-          <p:cNvPr id="11" name="Shape 9"/>
-          <p:cNvSpPr/>
-          <p:nvPr/>
-        </p:nvSpPr>
-        <p:spPr>
-          <a:xfrm>
-            <a:off x="3345104" y="1874520"/>
-            <a:ext cx="2659304" cy="329184"/>
-          </a:xfrm>
-          <a:prstGeom prst="rect">
+          <p:cNvPr id="17" name="Shape 15"/>
+          <p:cNvSpPr/>
+          <p:nvPr/>
+        </p:nvSpPr>
+        <p:spPr>
+          <a:xfrm>
+            <a:off x="777240" y="3657600"/>
+            <a:ext cx="457200" cy="457200"/>
+          </a:xfrm>
+          <a:prstGeom prst="ellipse">
             <a:avLst/>
           </a:prstGeom>
           <a:solidFill>
@@ -8039,14 +9123,14 @@
       </p:sp>
       <p:sp>
         <p:nvSpPr>
-          <p:cNvPr id="12" name="Text 10"/>
-          <p:cNvSpPr/>
-          <p:nvPr/>
-        </p:nvSpPr>
-        <p:spPr>
-          <a:xfrm>
-            <a:off x="3345104" y="1874520"/>
-            <a:ext cx="2659304" cy="329184"/>
+          <p:cNvPr id="18" name="Text 16"/>
+          <p:cNvSpPr/>
+          <p:nvPr/>
+        </p:nvSpPr>
+        <p:spPr>
+          <a:xfrm>
+            <a:off x="777240" y="3657600"/>
+            <a:ext cx="457200" cy="457200"/>
           </a:xfrm>
           <a:prstGeom prst="rect">
             <a:avLst/>
@@ -8062,46 +9146,85 @@
               <a:buNone/>
             </a:pPr>
             <a:r>
-              <a:rPr lang="en-US" sz="1300" b="1" spc="300" kern="0" dirty="0">
+              <a:rPr lang="en-US" sz="1800" b="1" dirty="0">
                 <a:solidFill>
                   <a:srgbClr val="FFFFFF"/>
                 </a:solidFill>
-                <a:latin typeface="Calibri" pitchFamily="34" charset="0"/>
-                <a:ea typeface="Calibri" pitchFamily="34" charset="-122"/>
-                <a:cs typeface="Calibri" pitchFamily="34" charset="-120"/>
-              </a:rPr>
-              <a:t>Month 2</a:t>
-            </a:r>
-            <a:endParaRPr lang="en-US" sz="1300" dirty="0"/>
-          </a:p>
-        </p:txBody>
-      </p:sp>
-      <p:sp>
-        <p:nvSpPr>
-          <p:cNvPr id="13" name="Text 11"/>
-          <p:cNvSpPr/>
-          <p:nvPr/>
-        </p:nvSpPr>
-        <p:spPr>
-          <a:xfrm>
-            <a:off x="3509696" y="2286000"/>
-            <a:ext cx="2330120" cy="960120"/>
-          </a:xfrm>
-          <a:prstGeom prst="rect">
-            <a:avLst/>
-          </a:prstGeom>
-          <a:noFill/>
-          <a:ln/>
-        </p:spPr>
-        <p:txBody>
-          <a:bodyPr wrap="square" lIns="0" tIns="0" rIns="0" bIns="0" rtlCol="0" anchor="ctr"/>
-          <a:lstStyle/>
-          <a:p>
-            <a:pPr algn="l" indent="0" marL="0">
-              <a:buNone/>
-            </a:pPr>
-            <a:r>
-              <a:rPr lang="en-US" sz="1200" dirty="0">
+                <a:latin typeface="Arial Black" pitchFamily="34" charset="0"/>
+                <a:ea typeface="Arial Black" pitchFamily="34" charset="-122"/>
+                <a:cs typeface="Arial Black" pitchFamily="34" charset="-120"/>
+              </a:rPr>
+              <a:t>1</a:t>
+            </a:r>
+            <a:endParaRPr lang="en-US" sz="1800" dirty="0"/>
+          </a:p>
+        </p:txBody>
+      </p:sp>
+      <p:sp>
+        <p:nvSpPr>
+          <p:cNvPr id="19" name="Text 17"/>
+          <p:cNvSpPr/>
+          <p:nvPr/>
+        </p:nvSpPr>
+        <p:spPr>
+          <a:xfrm>
+            <a:off x="777240" y="4251960"/>
+            <a:ext cx="2144954" cy="365760"/>
+          </a:xfrm>
+          <a:prstGeom prst="rect">
+            <a:avLst/>
+          </a:prstGeom>
+          <a:noFill/>
+          <a:ln/>
+        </p:spPr>
+        <p:txBody>
+          <a:bodyPr wrap="square" lIns="0" tIns="0" rIns="0" bIns="0" rtlCol="0" anchor="ctr"/>
+          <a:lstStyle/>
+          <a:p>
+            <a:pPr indent="0" marL="0">
+              <a:buNone/>
+            </a:pPr>
+            <a:r>
+              <a:rPr lang="en-US" sz="1500" b="1" dirty="0">
+                <a:solidFill>
+                  <a:srgbClr val="0C2A3D"/>
+                </a:solidFill>
+                <a:latin typeface="Calibri" pitchFamily="34" charset="0"/>
+                <a:ea typeface="Calibri" pitchFamily="34" charset="-122"/>
+                <a:cs typeface="Calibri" pitchFamily="34" charset="-120"/>
+              </a:rPr>
+              <a:t>Topic teaching</a:t>
+            </a:r>
+            <a:endParaRPr lang="en-US" sz="1500" dirty="0"/>
+          </a:p>
+        </p:txBody>
+      </p:sp>
+      <p:sp>
+        <p:nvSpPr>
+          <p:cNvPr id="20" name="Text 18"/>
+          <p:cNvSpPr/>
+          <p:nvPr/>
+        </p:nvSpPr>
+        <p:spPr>
+          <a:xfrm>
+            <a:off x="777240" y="4663440"/>
+            <a:ext cx="2144954" cy="822960"/>
+          </a:xfrm>
+          <a:prstGeom prst="rect">
+            <a:avLst/>
+          </a:prstGeom>
+          <a:noFill/>
+          <a:ln/>
+        </p:spPr>
+        <p:txBody>
+          <a:bodyPr wrap="square" lIns="0" tIns="0" rIns="0" bIns="0" rtlCol="0" anchor="ctr"/>
+          <a:lstStyle/>
+          <a:p>
+            <a:pPr indent="0" marL="0">
+              <a:buNone/>
+            </a:pPr>
+            <a:r>
+              <a:rPr lang="en-US" sz="1150" dirty="0">
                 <a:solidFill>
                   <a:srgbClr val="345671"/>
                 </a:solidFill>
@@ -8109,47 +9232,253 @@
                 <a:ea typeface="Calibri" pitchFamily="34" charset="-122"/>
                 <a:cs typeface="Calibri" pitchFamily="34" charset="-120"/>
               </a:rPr>
-              <a:t>Endocrine · GI · Heme/Onc · Renal</a:t>
-            </a:r>
-            <a:endParaRPr lang="en-US" sz="1200" dirty="0"/>
-          </a:p>
-        </p:txBody>
-      </p:sp>
-      <p:sp>
-        <p:nvSpPr>
-          <p:cNvPr id="14" name="Shape 12"/>
-          <p:cNvSpPr/>
-          <p:nvPr/>
-        </p:nvSpPr>
-        <p:spPr>
-          <a:xfrm>
-            <a:off x="6187288" y="1874520"/>
-            <a:ext cx="2659304" cy="1417320"/>
+              <a:t>30–45 min focused teaching mapped page-by-page to First Aid 2025.</a:t>
+            </a:r>
+            <a:endParaRPr lang="en-US" sz="1150" dirty="0"/>
+          </a:p>
+        </p:txBody>
+      </p:sp>
+      <p:sp>
+        <p:nvSpPr>
+          <p:cNvPr id="21" name="Shape 19"/>
+          <p:cNvSpPr/>
+          <p:nvPr/>
+        </p:nvSpPr>
+        <p:spPr>
+          <a:xfrm>
+            <a:off x="3333674" y="3383280"/>
+            <a:ext cx="2693594" cy="2194560"/>
           </a:xfrm>
           <a:prstGeom prst="rect">
             <a:avLst/>
           </a:prstGeom>
           <a:solidFill>
-            <a:srgbClr val="F5FBFF"/>
+            <a:srgbClr val="FFFFFF"/>
           </a:solidFill>
           <a:ln w="9525">
             <a:solidFill>
-              <a:srgbClr val="B8D6EC"/>
+              <a:srgbClr val="D6E8F5"/>
             </a:solidFill>
             <a:prstDash val="solid"/>
           </a:ln>
-        </p:spPr>
-      </p:sp>
-      <p:sp>
-        <p:nvSpPr>
-          <p:cNvPr id="15" name="Shape 13"/>
-          <p:cNvSpPr/>
-          <p:nvPr/>
-        </p:nvSpPr>
-        <p:spPr>
-          <a:xfrm>
-            <a:off x="6187288" y="1874520"/>
-            <a:ext cx="2659304" cy="329184"/>
+          <a:effectLst>
+            <a:outerShdw sx="100000" sy="100000" kx="0" ky="0" algn="bl" rotWithShape="0" blurRad="127000" dist="12700" dir="5400000">
+              <a:srgbClr val="0C2A3D">
+                <a:alpha val="8000"/>
+              </a:srgbClr>
+            </a:outerShdw>
+          </a:effectLst>
+        </p:spPr>
+      </p:sp>
+      <p:sp>
+        <p:nvSpPr>
+          <p:cNvPr id="22" name="Shape 20"/>
+          <p:cNvSpPr/>
+          <p:nvPr/>
+        </p:nvSpPr>
+        <p:spPr>
+          <a:xfrm>
+            <a:off x="3333674" y="3383280"/>
+            <a:ext cx="2693594" cy="73152"/>
+          </a:xfrm>
+          <a:prstGeom prst="rect">
+            <a:avLst/>
+          </a:prstGeom>
+          <a:solidFill>
+            <a:srgbClr val="D97706"/>
+          </a:solidFill>
+          <a:ln w="12700">
+            <a:solidFill>
+              <a:srgbClr val="D97706"/>
+            </a:solidFill>
+            <a:prstDash val="solid"/>
+          </a:ln>
+        </p:spPr>
+      </p:sp>
+      <p:sp>
+        <p:nvSpPr>
+          <p:cNvPr id="23" name="Shape 21"/>
+          <p:cNvSpPr/>
+          <p:nvPr/>
+        </p:nvSpPr>
+        <p:spPr>
+          <a:xfrm>
+            <a:off x="3607994" y="3657600"/>
+            <a:ext cx="457200" cy="457200"/>
+          </a:xfrm>
+          <a:prstGeom prst="ellipse">
+            <a:avLst/>
+          </a:prstGeom>
+          <a:solidFill>
+            <a:srgbClr val="D97706"/>
+          </a:solidFill>
+          <a:ln w="12700">
+            <a:solidFill>
+              <a:srgbClr val="D97706"/>
+            </a:solidFill>
+            <a:prstDash val="solid"/>
+          </a:ln>
+        </p:spPr>
+      </p:sp>
+      <p:sp>
+        <p:nvSpPr>
+          <p:cNvPr id="24" name="Text 22"/>
+          <p:cNvSpPr/>
+          <p:nvPr/>
+        </p:nvSpPr>
+        <p:spPr>
+          <a:xfrm>
+            <a:off x="3607994" y="3657600"/>
+            <a:ext cx="457200" cy="457200"/>
+          </a:xfrm>
+          <a:prstGeom prst="rect">
+            <a:avLst/>
+          </a:prstGeom>
+          <a:noFill/>
+          <a:ln/>
+        </p:spPr>
+        <p:txBody>
+          <a:bodyPr wrap="square" lIns="0" tIns="0" rIns="0" bIns="0" rtlCol="0" anchor="ctr"/>
+          <a:lstStyle/>
+          <a:p>
+            <a:pPr algn="ctr" indent="0" marL="0">
+              <a:buNone/>
+            </a:pPr>
+            <a:r>
+              <a:rPr lang="en-US" sz="1800" b="1" dirty="0">
+                <a:solidFill>
+                  <a:srgbClr val="FFFFFF"/>
+                </a:solidFill>
+                <a:latin typeface="Arial Black" pitchFamily="34" charset="0"/>
+                <a:ea typeface="Arial Black" pitchFamily="34" charset="-122"/>
+                <a:cs typeface="Arial Black" pitchFamily="34" charset="-120"/>
+              </a:rPr>
+              <a:t>2</a:t>
+            </a:r>
+            <a:endParaRPr lang="en-US" sz="1800" dirty="0"/>
+          </a:p>
+        </p:txBody>
+      </p:sp>
+      <p:sp>
+        <p:nvSpPr>
+          <p:cNvPr id="25" name="Text 23"/>
+          <p:cNvSpPr/>
+          <p:nvPr/>
+        </p:nvSpPr>
+        <p:spPr>
+          <a:xfrm>
+            <a:off x="3607994" y="4251960"/>
+            <a:ext cx="2144954" cy="365760"/>
+          </a:xfrm>
+          <a:prstGeom prst="rect">
+            <a:avLst/>
+          </a:prstGeom>
+          <a:noFill/>
+          <a:ln/>
+        </p:spPr>
+        <p:txBody>
+          <a:bodyPr wrap="square" lIns="0" tIns="0" rIns="0" bIns="0" rtlCol="0" anchor="ctr"/>
+          <a:lstStyle/>
+          <a:p>
+            <a:pPr indent="0" marL="0">
+              <a:buNone/>
+            </a:pPr>
+            <a:r>
+              <a:rPr lang="en-US" sz="1500" b="1" dirty="0">
+                <a:solidFill>
+                  <a:srgbClr val="0C2A3D"/>
+                </a:solidFill>
+                <a:latin typeface="Calibri" pitchFamily="34" charset="0"/>
+                <a:ea typeface="Calibri" pitchFamily="34" charset="-122"/>
+                <a:cs typeface="Calibri" pitchFamily="34" charset="-120"/>
+              </a:rPr>
+              <a:t>UWorld debrief</a:t>
+            </a:r>
+            <a:endParaRPr lang="en-US" sz="1500" dirty="0"/>
+          </a:p>
+        </p:txBody>
+      </p:sp>
+      <p:sp>
+        <p:nvSpPr>
+          <p:cNvPr id="26" name="Text 24"/>
+          <p:cNvSpPr/>
+          <p:nvPr/>
+        </p:nvSpPr>
+        <p:spPr>
+          <a:xfrm>
+            <a:off x="3607994" y="4663440"/>
+            <a:ext cx="2144954" cy="822960"/>
+          </a:xfrm>
+          <a:prstGeom prst="rect">
+            <a:avLst/>
+          </a:prstGeom>
+          <a:noFill/>
+          <a:ln/>
+        </p:spPr>
+        <p:txBody>
+          <a:bodyPr wrap="square" lIns="0" tIns="0" rIns="0" bIns="0" rtlCol="0" anchor="ctr"/>
+          <a:lstStyle/>
+          <a:p>
+            <a:pPr indent="0" marL="0">
+              <a:buNone/>
+            </a:pPr>
+            <a:r>
+              <a:rPr lang="en-US" sz="1150" dirty="0">
+                <a:solidFill>
+                  <a:srgbClr val="345671"/>
+                </a:solidFill>
+                <a:latin typeface="Calibri" pitchFamily="34" charset="0"/>
+                <a:ea typeface="Calibri" pitchFamily="34" charset="-122"/>
+                <a:cs typeface="Calibri" pitchFamily="34" charset="-120"/>
+              </a:rPr>
+              <a:t>Walk through the day's UWorld block with reasoning for every option.</a:t>
+            </a:r>
+            <a:endParaRPr lang="en-US" sz="1150" dirty="0"/>
+          </a:p>
+        </p:txBody>
+      </p:sp>
+      <p:sp>
+        <p:nvSpPr>
+          <p:cNvPr id="27" name="Shape 25"/>
+          <p:cNvSpPr/>
+          <p:nvPr/>
+        </p:nvSpPr>
+        <p:spPr>
+          <a:xfrm>
+            <a:off x="6164428" y="3383280"/>
+            <a:ext cx="2693594" cy="2194560"/>
+          </a:xfrm>
+          <a:prstGeom prst="rect">
+            <a:avLst/>
+          </a:prstGeom>
+          <a:solidFill>
+            <a:srgbClr val="FFFFFF"/>
+          </a:solidFill>
+          <a:ln w="9525">
+            <a:solidFill>
+              <a:srgbClr val="D6E8F5"/>
+            </a:solidFill>
+            <a:prstDash val="solid"/>
+          </a:ln>
+          <a:effectLst>
+            <a:outerShdw sx="100000" sy="100000" kx="0" ky="0" algn="bl" rotWithShape="0" blurRad="127000" dist="12700" dir="5400000">
+              <a:srgbClr val="0C2A3D">
+                <a:alpha val="8000"/>
+              </a:srgbClr>
+            </a:outerShdw>
+          </a:effectLst>
+        </p:spPr>
+      </p:sp>
+      <p:sp>
+        <p:nvSpPr>
+          <p:cNvPr id="28" name="Shape 26"/>
+          <p:cNvSpPr/>
+          <p:nvPr/>
+        </p:nvSpPr>
+        <p:spPr>
+          <a:xfrm>
+            <a:off x="6164428" y="3383280"/>
+            <a:ext cx="2693594" cy="73152"/>
           </a:xfrm>
           <a:prstGeom prst="rect">
             <a:avLst/>
@@ -8167,119 +9496,16 @@
       </p:sp>
       <p:sp>
         <p:nvSpPr>
-          <p:cNvPr id="16" name="Text 14"/>
-          <p:cNvSpPr/>
-          <p:nvPr/>
-        </p:nvSpPr>
-        <p:spPr>
-          <a:xfrm>
-            <a:off x="6187288" y="1874520"/>
-            <a:ext cx="2659304" cy="329184"/>
-          </a:xfrm>
-          <a:prstGeom prst="rect">
-            <a:avLst/>
-          </a:prstGeom>
-          <a:noFill/>
-          <a:ln/>
-        </p:spPr>
-        <p:txBody>
-          <a:bodyPr wrap="square" lIns="0" tIns="0" rIns="0" bIns="0" rtlCol="0" anchor="ctr"/>
-          <a:lstStyle/>
-          <a:p>
-            <a:pPr algn="ctr" indent="0" marL="0">
-              <a:buNone/>
-            </a:pPr>
-            <a:r>
-              <a:rPr lang="en-US" sz="1300" b="1" spc="300" kern="0" dirty="0">
-                <a:solidFill>
-                  <a:srgbClr val="FFFFFF"/>
-                </a:solidFill>
-                <a:latin typeface="Calibri" pitchFamily="34" charset="0"/>
-                <a:ea typeface="Calibri" pitchFamily="34" charset="-122"/>
-                <a:cs typeface="Calibri" pitchFamily="34" charset="-120"/>
-              </a:rPr>
-              <a:t>Month 3</a:t>
-            </a:r>
-            <a:endParaRPr lang="en-US" sz="1300" dirty="0"/>
-          </a:p>
-        </p:txBody>
-      </p:sp>
-      <p:sp>
-        <p:nvSpPr>
-          <p:cNvPr id="17" name="Text 15"/>
-          <p:cNvSpPr/>
-          <p:nvPr/>
-        </p:nvSpPr>
-        <p:spPr>
-          <a:xfrm>
-            <a:off x="6351880" y="2286000"/>
-            <a:ext cx="2330120" cy="960120"/>
-          </a:xfrm>
-          <a:prstGeom prst="rect">
-            <a:avLst/>
-          </a:prstGeom>
-          <a:noFill/>
-          <a:ln/>
-        </p:spPr>
-        <p:txBody>
-          <a:bodyPr wrap="square" lIns="0" tIns="0" rIns="0" bIns="0" rtlCol="0" anchor="ctr"/>
-          <a:lstStyle/>
-          <a:p>
-            <a:pPr algn="l" indent="0" marL="0">
-              <a:buNone/>
-            </a:pPr>
-            <a:r>
-              <a:rPr lang="en-US" sz="1200" dirty="0">
-                <a:solidFill>
-                  <a:srgbClr val="345671"/>
-                </a:solidFill>
-                <a:latin typeface="Calibri" pitchFamily="34" charset="0"/>
-                <a:ea typeface="Calibri" pitchFamily="34" charset="-122"/>
-                <a:cs typeface="Calibri" pitchFamily="34" charset="-120"/>
-              </a:rPr>
-              <a:t>Musculoskeletal · Neurology · Psychiatry · Reproductive</a:t>
-            </a:r>
-            <a:endParaRPr lang="en-US" sz="1200" dirty="0"/>
-          </a:p>
-        </p:txBody>
-      </p:sp>
-      <p:sp>
-        <p:nvSpPr>
-          <p:cNvPr id="18" name="Shape 16"/>
-          <p:cNvSpPr/>
-          <p:nvPr/>
-        </p:nvSpPr>
-        <p:spPr>
-          <a:xfrm>
-            <a:off x="9029471" y="1874520"/>
-            <a:ext cx="2659304" cy="1417320"/>
-          </a:xfrm>
-          <a:prstGeom prst="rect">
-            <a:avLst/>
-          </a:prstGeom>
-          <a:solidFill>
-            <a:srgbClr val="F5FBFF"/>
-          </a:solidFill>
-          <a:ln w="9525">
-            <a:solidFill>
-              <a:srgbClr val="B8D6EC"/>
-            </a:solidFill>
-            <a:prstDash val="solid"/>
-          </a:ln>
-        </p:spPr>
-      </p:sp>
-      <p:sp>
-        <p:nvSpPr>
-          <p:cNvPr id="19" name="Shape 17"/>
-          <p:cNvSpPr/>
-          <p:nvPr/>
-        </p:nvSpPr>
-        <p:spPr>
-          <a:xfrm>
-            <a:off x="9029471" y="1874520"/>
-            <a:ext cx="2659304" cy="329184"/>
-          </a:xfrm>
-          <a:prstGeom prst="rect">
+          <p:cNvPr id="29" name="Shape 27"/>
+          <p:cNvSpPr/>
+          <p:nvPr/>
+        </p:nvSpPr>
+        <p:spPr>
+          <a:xfrm>
+            <a:off x="6438748" y="3657600"/>
+            <a:ext cx="457200" cy="457200"/>
+          </a:xfrm>
+          <a:prstGeom prst="ellipse">
             <a:avLst/>
           </a:prstGeom>
           <a:solidFill>
@@ -8295,14 +9521,14 @@
       </p:sp>
       <p:sp>
         <p:nvSpPr>
-          <p:cNvPr id="20" name="Text 18"/>
-          <p:cNvSpPr/>
-          <p:nvPr/>
-        </p:nvSpPr>
-        <p:spPr>
-          <a:xfrm>
-            <a:off x="9029471" y="1874520"/>
-            <a:ext cx="2659304" cy="329184"/>
+          <p:cNvPr id="30" name="Text 28"/>
+          <p:cNvSpPr/>
+          <p:nvPr/>
+        </p:nvSpPr>
+        <p:spPr>
+          <a:xfrm>
+            <a:off x="6438748" y="3657600"/>
+            <a:ext cx="457200" cy="457200"/>
           </a:xfrm>
           <a:prstGeom prst="rect">
             <a:avLst/>
@@ -8318,46 +9544,85 @@
               <a:buNone/>
             </a:pPr>
             <a:r>
-              <a:rPr lang="en-US" sz="1300" b="1" spc="300" kern="0" dirty="0">
+              <a:rPr lang="en-US" sz="1800" b="1" dirty="0">
                 <a:solidFill>
                   <a:srgbClr val="FFFFFF"/>
                 </a:solidFill>
-                <a:latin typeface="Calibri" pitchFamily="34" charset="0"/>
-                <a:ea typeface="Calibri" pitchFamily="34" charset="-122"/>
-                <a:cs typeface="Calibri" pitchFamily="34" charset="-120"/>
-              </a:rPr>
-              <a:t>Month 4</a:t>
-            </a:r>
-            <a:endParaRPr lang="en-US" sz="1300" dirty="0"/>
-          </a:p>
-        </p:txBody>
-      </p:sp>
-      <p:sp>
-        <p:nvSpPr>
-          <p:cNvPr id="21" name="Text 19"/>
-          <p:cNvSpPr/>
-          <p:nvPr/>
-        </p:nvSpPr>
-        <p:spPr>
-          <a:xfrm>
-            <a:off x="9194063" y="2286000"/>
-            <a:ext cx="2330120" cy="960120"/>
-          </a:xfrm>
-          <a:prstGeom prst="rect">
-            <a:avLst/>
-          </a:prstGeom>
-          <a:noFill/>
-          <a:ln/>
-        </p:spPr>
-        <p:txBody>
-          <a:bodyPr wrap="square" lIns="0" tIns="0" rIns="0" bIns="0" rtlCol="0" anchor="ctr"/>
-          <a:lstStyle/>
-          <a:p>
-            <a:pPr algn="l" indent="0" marL="0">
-              <a:buNone/>
-            </a:pPr>
-            <a:r>
-              <a:rPr lang="en-US" sz="1200" dirty="0">
+                <a:latin typeface="Arial Black" pitchFamily="34" charset="0"/>
+                <a:ea typeface="Arial Black" pitchFamily="34" charset="-122"/>
+                <a:cs typeface="Arial Black" pitchFamily="34" charset="-120"/>
+              </a:rPr>
+              <a:t>3</a:t>
+            </a:r>
+            <a:endParaRPr lang="en-US" sz="1800" dirty="0"/>
+          </a:p>
+        </p:txBody>
+      </p:sp>
+      <p:sp>
+        <p:nvSpPr>
+          <p:cNvPr id="31" name="Text 29"/>
+          <p:cNvSpPr/>
+          <p:nvPr/>
+        </p:nvSpPr>
+        <p:spPr>
+          <a:xfrm>
+            <a:off x="6438748" y="4251960"/>
+            <a:ext cx="2144954" cy="365760"/>
+          </a:xfrm>
+          <a:prstGeom prst="rect">
+            <a:avLst/>
+          </a:prstGeom>
+          <a:noFill/>
+          <a:ln/>
+        </p:spPr>
+        <p:txBody>
+          <a:bodyPr wrap="square" lIns="0" tIns="0" rIns="0" bIns="0" rtlCol="0" anchor="ctr"/>
+          <a:lstStyle/>
+          <a:p>
+            <a:pPr indent="0" marL="0">
+              <a:buNone/>
+            </a:pPr>
+            <a:r>
+              <a:rPr lang="en-US" sz="1500" b="1" dirty="0">
+                <a:solidFill>
+                  <a:srgbClr val="0C2A3D"/>
+                </a:solidFill>
+                <a:latin typeface="Calibri" pitchFamily="34" charset="0"/>
+                <a:ea typeface="Calibri" pitchFamily="34" charset="-122"/>
+                <a:cs typeface="Calibri" pitchFamily="34" charset="-120"/>
+              </a:rPr>
+              <a:t>High-yield wrap</a:t>
+            </a:r>
+            <a:endParaRPr lang="en-US" sz="1500" dirty="0"/>
+          </a:p>
+        </p:txBody>
+      </p:sp>
+      <p:sp>
+        <p:nvSpPr>
+          <p:cNvPr id="32" name="Text 30"/>
+          <p:cNvSpPr/>
+          <p:nvPr/>
+        </p:nvSpPr>
+        <p:spPr>
+          <a:xfrm>
+            <a:off x="6438748" y="4663440"/>
+            <a:ext cx="2144954" cy="822960"/>
+          </a:xfrm>
+          <a:prstGeom prst="rect">
+            <a:avLst/>
+          </a:prstGeom>
+          <a:noFill/>
+          <a:ln/>
+        </p:spPr>
+        <p:txBody>
+          <a:bodyPr wrap="square" lIns="0" tIns="0" rIns="0" bIns="0" rtlCol="0" anchor="ctr"/>
+          <a:lstStyle/>
+          <a:p>
+            <a:pPr indent="0" marL="0">
+              <a:buNone/>
+            </a:pPr>
+            <a:r>
+              <a:rPr lang="en-US" sz="1150" dirty="0">
                 <a:solidFill>
                   <a:srgbClr val="345671"/>
                 </a:solidFill>
@@ -8365,63 +9630,56 @@
                 <a:ea typeface="Calibri" pitchFamily="34" charset="-122"/>
                 <a:cs typeface="Calibri" pitchFamily="34" charset="-120"/>
               </a:rPr>
-              <a:t>Immunology / Microbiology · Pharmacology · Behavioral · Mock blocks</a:t>
-            </a:r>
-            <a:endParaRPr lang="en-US" sz="1200" dirty="0"/>
-          </a:p>
-        </p:txBody>
-      </p:sp>
-      <p:sp>
-        <p:nvSpPr>
-          <p:cNvPr id="22" name="Text 20"/>
-          <p:cNvSpPr/>
-          <p:nvPr/>
-        </p:nvSpPr>
-        <p:spPr>
-          <a:xfrm>
-            <a:off x="502920" y="3657600"/>
-            <a:ext cx="11185855" cy="274320"/>
-          </a:xfrm>
-          <a:prstGeom prst="rect">
-            <a:avLst/>
-          </a:prstGeom>
-          <a:noFill/>
-          <a:ln/>
-        </p:spPr>
-        <p:txBody>
-          <a:bodyPr wrap="square" lIns="0" tIns="0" rIns="0" bIns="0" rtlCol="0" anchor="ctr"/>
-          <a:lstStyle/>
-          <a:p>
-            <a:pPr indent="0" marL="0">
-              <a:buNone/>
-            </a:pPr>
-            <a:r>
-              <a:rPr lang="en-US" sz="1200" b="1" spc="400" kern="0" dirty="0">
-                <a:solidFill>
-                  <a:srgbClr val="B45309"/>
-                </a:solidFill>
-                <a:latin typeface="Calibri" pitchFamily="34" charset="0"/>
-                <a:ea typeface="Calibri" pitchFamily="34" charset="-122"/>
-                <a:cs typeface="Calibri" pitchFamily="34" charset="-120"/>
-              </a:rPr>
-              <a:t>END-TO-END MENTORSHIP</a:t>
-            </a:r>
-            <a:endParaRPr lang="en-US" sz="1200" dirty="0"/>
-          </a:p>
-        </p:txBody>
-      </p:sp>
-      <p:sp>
-        <p:nvSpPr>
-          <p:cNvPr id="23" name="Shape 21"/>
-          <p:cNvSpPr/>
-          <p:nvPr/>
-        </p:nvSpPr>
-        <p:spPr>
-          <a:xfrm>
-            <a:off x="502920" y="4023360"/>
-            <a:ext cx="164592" cy="164592"/>
-          </a:xfrm>
-          <a:prstGeom prst="ellipse">
+              <a:t>5-minute mnemonic / pearls recap that you take into the next day.</a:t>
+            </a:r>
+            <a:endParaRPr lang="en-US" sz="1150" dirty="0"/>
+          </a:p>
+        </p:txBody>
+      </p:sp>
+      <p:sp>
+        <p:nvSpPr>
+          <p:cNvPr id="33" name="Shape 31"/>
+          <p:cNvSpPr/>
+          <p:nvPr/>
+        </p:nvSpPr>
+        <p:spPr>
+          <a:xfrm>
+            <a:off x="8995181" y="3383280"/>
+            <a:ext cx="2693594" cy="2194560"/>
+          </a:xfrm>
+          <a:prstGeom prst="rect">
+            <a:avLst/>
+          </a:prstGeom>
+          <a:solidFill>
+            <a:srgbClr val="FFFFFF"/>
+          </a:solidFill>
+          <a:ln w="9525">
+            <a:solidFill>
+              <a:srgbClr val="D6E8F5"/>
+            </a:solidFill>
+            <a:prstDash val="solid"/>
+          </a:ln>
+          <a:effectLst>
+            <a:outerShdw sx="100000" sy="100000" kx="0" ky="0" algn="bl" rotWithShape="0" blurRad="127000" dist="12700" dir="5400000">
+              <a:srgbClr val="0C2A3D">
+                <a:alpha val="8000"/>
+              </a:srgbClr>
+            </a:outerShdw>
+          </a:effectLst>
+        </p:spPr>
+      </p:sp>
+      <p:sp>
+        <p:nvSpPr>
+          <p:cNvPr id="34" name="Shape 32"/>
+          <p:cNvSpPr/>
+          <p:nvPr/>
+        </p:nvSpPr>
+        <p:spPr>
+          <a:xfrm>
+            <a:off x="8995181" y="3383280"/>
+            <a:ext cx="2693594" cy="73152"/>
+          </a:xfrm>
+          <a:prstGeom prst="rect">
             <a:avLst/>
           </a:prstGeom>
           <a:solidFill>
@@ -8437,53 +9695,14 @@
       </p:sp>
       <p:sp>
         <p:nvSpPr>
-          <p:cNvPr id="24" name="Text 22"/>
-          <p:cNvSpPr/>
-          <p:nvPr/>
-        </p:nvSpPr>
-        <p:spPr>
-          <a:xfrm>
-            <a:off x="777240" y="3968496"/>
-            <a:ext cx="10911535" cy="329184"/>
-          </a:xfrm>
-          <a:prstGeom prst="rect">
-            <a:avLst/>
-          </a:prstGeom>
-          <a:noFill/>
-          <a:ln/>
-        </p:spPr>
-        <p:txBody>
-          <a:bodyPr wrap="square" lIns="0" tIns="0" rIns="0" bIns="0" rtlCol="0" anchor="ctr"/>
-          <a:lstStyle/>
-          <a:p>
-            <a:pPr indent="0" marL="0">
-              <a:buNone/>
-            </a:pPr>
-            <a:r>
-              <a:rPr lang="en-US" sz="1300" dirty="0">
-                <a:solidFill>
-                  <a:srgbClr val="0C2A3D"/>
-                </a:solidFill>
-                <a:latin typeface="Calibri" pitchFamily="34" charset="0"/>
-                <a:ea typeface="Calibri" pitchFamily="34" charset="-122"/>
-                <a:cs typeface="Calibri" pitchFamily="34" charset="-120"/>
-              </a:rPr>
-              <a:t>ECFMG application — credentials submission, sponsor notes, EPIC.</a:t>
-            </a:r>
-            <a:endParaRPr lang="en-US" sz="1300" dirty="0"/>
-          </a:p>
-        </p:txBody>
-      </p:sp>
-      <p:sp>
-        <p:nvSpPr>
-          <p:cNvPr id="25" name="Shape 23"/>
-          <p:cNvSpPr/>
-          <p:nvPr/>
-        </p:nvSpPr>
-        <p:spPr>
-          <a:xfrm>
-            <a:off x="502920" y="4407408"/>
-            <a:ext cx="164592" cy="164592"/>
+          <p:cNvPr id="35" name="Shape 33"/>
+          <p:cNvSpPr/>
+          <p:nvPr/>
+        </p:nvSpPr>
+        <p:spPr>
+          <a:xfrm>
+            <a:off x="9269501" y="3657600"/>
+            <a:ext cx="457200" cy="457200"/>
           </a:xfrm>
           <a:prstGeom prst="ellipse">
             <a:avLst/>
@@ -8501,14 +9720,53 @@
       </p:sp>
       <p:sp>
         <p:nvSpPr>
-          <p:cNvPr id="26" name="Text 24"/>
-          <p:cNvSpPr/>
-          <p:nvPr/>
-        </p:nvSpPr>
-        <p:spPr>
-          <a:xfrm>
-            <a:off x="777240" y="4352544"/>
-            <a:ext cx="10911535" cy="329184"/>
+          <p:cNvPr id="36" name="Text 34"/>
+          <p:cNvSpPr/>
+          <p:nvPr/>
+        </p:nvSpPr>
+        <p:spPr>
+          <a:xfrm>
+            <a:off x="9269501" y="3657600"/>
+            <a:ext cx="457200" cy="457200"/>
+          </a:xfrm>
+          <a:prstGeom prst="rect">
+            <a:avLst/>
+          </a:prstGeom>
+          <a:noFill/>
+          <a:ln/>
+        </p:spPr>
+        <p:txBody>
+          <a:bodyPr wrap="square" lIns="0" tIns="0" rIns="0" bIns="0" rtlCol="0" anchor="ctr"/>
+          <a:lstStyle/>
+          <a:p>
+            <a:pPr algn="ctr" indent="0" marL="0">
+              <a:buNone/>
+            </a:pPr>
+            <a:r>
+              <a:rPr lang="en-US" sz="1800" b="1" dirty="0">
+                <a:solidFill>
+                  <a:srgbClr val="FFFFFF"/>
+                </a:solidFill>
+                <a:latin typeface="Arial Black" pitchFamily="34" charset="0"/>
+                <a:ea typeface="Arial Black" pitchFamily="34" charset="-122"/>
+                <a:cs typeface="Arial Black" pitchFamily="34" charset="-120"/>
+              </a:rPr>
+              <a:t>4</a:t>
+            </a:r>
+            <a:endParaRPr lang="en-US" sz="1800" dirty="0"/>
+          </a:p>
+        </p:txBody>
+      </p:sp>
+      <p:sp>
+        <p:nvSpPr>
+          <p:cNvPr id="37" name="Text 35"/>
+          <p:cNvSpPr/>
+          <p:nvPr/>
+        </p:nvSpPr>
+        <p:spPr>
+          <a:xfrm>
+            <a:off x="9269501" y="4251960"/>
+            <a:ext cx="2144954" cy="365760"/>
           </a:xfrm>
           <a:prstGeom prst="rect">
             <a:avLst/>
@@ -8524,7 +9782,7 @@
               <a:buNone/>
             </a:pPr>
             <a:r>
-              <a:rPr lang="en-US" sz="1300" dirty="0">
+              <a:rPr lang="en-US" sz="1500" b="1" dirty="0">
                 <a:solidFill>
                   <a:srgbClr val="0C2A3D"/>
                 </a:solidFill>
@@ -8532,47 +9790,22 @@
                 <a:ea typeface="Calibri" pitchFamily="34" charset="-122"/>
                 <a:cs typeface="Calibri" pitchFamily="34" charset="-120"/>
               </a:rPr>
-              <a:t>Personal statement &amp; CV review, with iterative drafts.</a:t>
-            </a:r>
-            <a:endParaRPr lang="en-US" sz="1300" dirty="0"/>
-          </a:p>
-        </p:txBody>
-      </p:sp>
-      <p:sp>
-        <p:nvSpPr>
-          <p:cNvPr id="27" name="Shape 25"/>
-          <p:cNvSpPr/>
-          <p:nvPr/>
-        </p:nvSpPr>
-        <p:spPr>
-          <a:xfrm>
-            <a:off x="502920" y="4791456"/>
-            <a:ext cx="164592" cy="164592"/>
-          </a:xfrm>
-          <a:prstGeom prst="ellipse">
-            <a:avLst/>
-          </a:prstGeom>
-          <a:solidFill>
-            <a:srgbClr val="D97706"/>
-          </a:solidFill>
-          <a:ln w="12700">
-            <a:solidFill>
-              <a:srgbClr val="D97706"/>
-            </a:solidFill>
-            <a:prstDash val="solid"/>
-          </a:ln>
-        </p:spPr>
-      </p:sp>
-      <p:sp>
-        <p:nvSpPr>
-          <p:cNvPr id="28" name="Text 26"/>
-          <p:cNvSpPr/>
-          <p:nvPr/>
-        </p:nvSpPr>
-        <p:spPr>
-          <a:xfrm>
-            <a:off x="777240" y="4736592"/>
-            <a:ext cx="10911535" cy="329184"/>
+              <a:t>Office hours</a:t>
+            </a:r>
+            <a:endParaRPr lang="en-US" sz="1500" dirty="0"/>
+          </a:p>
+        </p:txBody>
+      </p:sp>
+      <p:sp>
+        <p:nvSpPr>
+          <p:cNvPr id="38" name="Text 36"/>
+          <p:cNvSpPr/>
+          <p:nvPr/>
+        </p:nvSpPr>
+        <p:spPr>
+          <a:xfrm>
+            <a:off x="9269501" y="4663440"/>
+            <a:ext cx="2144954" cy="822960"/>
           </a:xfrm>
           <a:prstGeom prst="rect">
             <a:avLst/>
@@ -8588,151 +9821,23 @@
               <a:buNone/>
             </a:pPr>
             <a:r>
-              <a:rPr lang="en-US" sz="1300" dirty="0">
-                <a:solidFill>
-                  <a:srgbClr val="0C2A3D"/>
-                </a:solidFill>
-                <a:latin typeface="Calibri" pitchFamily="34" charset="0"/>
-                <a:ea typeface="Calibri" pitchFamily="34" charset="-122"/>
-                <a:cs typeface="Calibri" pitchFamily="34" charset="-120"/>
-              </a:rPr>
-              <a:t>Interview prep — mock interviews, IMG-specific Q&amp;A, programs by signal.</a:t>
-            </a:r>
-            <a:endParaRPr lang="en-US" sz="1300" dirty="0"/>
-          </a:p>
-        </p:txBody>
-      </p:sp>
-      <p:sp>
-        <p:nvSpPr>
-          <p:cNvPr id="29" name="Shape 27"/>
-          <p:cNvSpPr/>
-          <p:nvPr/>
-        </p:nvSpPr>
-        <p:spPr>
-          <a:xfrm>
-            <a:off x="502920" y="5175504"/>
-            <a:ext cx="164592" cy="164592"/>
-          </a:xfrm>
-          <a:prstGeom prst="ellipse">
-            <a:avLst/>
-          </a:prstGeom>
-          <a:solidFill>
-            <a:srgbClr val="D97706"/>
-          </a:solidFill>
-          <a:ln w="12700">
-            <a:solidFill>
-              <a:srgbClr val="D97706"/>
-            </a:solidFill>
-            <a:prstDash val="solid"/>
-          </a:ln>
-        </p:spPr>
-      </p:sp>
-      <p:sp>
-        <p:nvSpPr>
-          <p:cNvPr id="30" name="Text 28"/>
-          <p:cNvSpPr/>
-          <p:nvPr/>
-        </p:nvSpPr>
-        <p:spPr>
-          <a:xfrm>
-            <a:off x="777240" y="5120640"/>
-            <a:ext cx="10911535" cy="329184"/>
-          </a:xfrm>
-          <a:prstGeom prst="rect">
-            <a:avLst/>
-          </a:prstGeom>
-          <a:noFill/>
-          <a:ln/>
-        </p:spPr>
-        <p:txBody>
-          <a:bodyPr wrap="square" lIns="0" tIns="0" rIns="0" bIns="0" rtlCol="0" anchor="ctr"/>
-          <a:lstStyle/>
-          <a:p>
-            <a:pPr indent="0" marL="0">
-              <a:buNone/>
-            </a:pPr>
-            <a:r>
-              <a:rPr lang="en-US" sz="1300" dirty="0">
-                <a:solidFill>
-                  <a:srgbClr val="0C2A3D"/>
-                </a:solidFill>
-                <a:latin typeface="Calibri" pitchFamily="34" charset="0"/>
-                <a:ea typeface="Calibri" pitchFamily="34" charset="-122"/>
-                <a:cs typeface="Calibri" pitchFamily="34" charset="-120"/>
-              </a:rPr>
-              <a:t>ERAS / NRMP timeline coaching from application to rank list.</a:t>
-            </a:r>
-            <a:endParaRPr lang="en-US" sz="1300" dirty="0"/>
-          </a:p>
-        </p:txBody>
-      </p:sp>
-      <p:sp>
-        <p:nvSpPr>
-          <p:cNvPr id="31" name="Shape 29"/>
-          <p:cNvSpPr/>
-          <p:nvPr/>
-        </p:nvSpPr>
-        <p:spPr>
-          <a:xfrm>
-            <a:off x="502920" y="5559552"/>
-            <a:ext cx="164592" cy="164592"/>
-          </a:xfrm>
-          <a:prstGeom prst="ellipse">
-            <a:avLst/>
-          </a:prstGeom>
-          <a:solidFill>
-            <a:srgbClr val="D97706"/>
-          </a:solidFill>
-          <a:ln w="12700">
-            <a:solidFill>
-              <a:srgbClr val="D97706"/>
-            </a:solidFill>
-            <a:prstDash val="solid"/>
-          </a:ln>
-        </p:spPr>
-      </p:sp>
-      <p:sp>
-        <p:nvSpPr>
-          <p:cNvPr id="32" name="Text 30"/>
-          <p:cNvSpPr/>
-          <p:nvPr/>
-        </p:nvSpPr>
-        <p:spPr>
-          <a:xfrm>
-            <a:off x="777240" y="5504688"/>
-            <a:ext cx="10911535" cy="329184"/>
-          </a:xfrm>
-          <a:prstGeom prst="rect">
-            <a:avLst/>
-          </a:prstGeom>
-          <a:noFill/>
-          <a:ln/>
-        </p:spPr>
-        <p:txBody>
-          <a:bodyPr wrap="square" lIns="0" tIns="0" rIns="0" bIns="0" rtlCol="0" anchor="ctr"/>
-          <a:lstStyle/>
-          <a:p>
-            <a:pPr indent="0" marL="0">
-              <a:buNone/>
-            </a:pPr>
-            <a:r>
-              <a:rPr lang="en-US" sz="1300" dirty="0">
-                <a:solidFill>
-                  <a:srgbClr val="0C2A3D"/>
-                </a:solidFill>
-                <a:latin typeface="Calibri" pitchFamily="34" charset="0"/>
-                <a:ea typeface="Calibri" pitchFamily="34" charset="-122"/>
-                <a:cs typeface="Calibri" pitchFamily="34" charset="-120"/>
-              </a:rPr>
-              <a:t>Combined Step 1 + Step 2 expedited track for efficient overlap.</a:t>
-            </a:r>
-            <a:endParaRPr lang="en-US" sz="1300" dirty="0"/>
-          </a:p>
-        </p:txBody>
-      </p:sp>
-      <p:sp>
-        <p:nvSpPr>
-          <p:cNvPr id="33" name="Text 31"/>
+              <a:rPr lang="en-US" sz="1150" dirty="0">
+                <a:solidFill>
+                  <a:srgbClr val="345671"/>
+                </a:solidFill>
+                <a:latin typeface="Calibri" pitchFamily="34" charset="0"/>
+                <a:ea typeface="Calibri" pitchFamily="34" charset="-122"/>
+                <a:cs typeface="Calibri" pitchFamily="34" charset="-120"/>
+              </a:rPr>
+              <a:t>Open Q&amp;A outside class time for clarifying questions and weak areas.</a:t>
+            </a:r>
+            <a:endParaRPr lang="en-US" sz="1150" dirty="0"/>
+          </a:p>
+        </p:txBody>
+      </p:sp>
+      <p:sp>
+        <p:nvSpPr>
+          <p:cNvPr id="39" name="Text 37"/>
           <p:cNvSpPr/>
           <p:nvPr/>
         </p:nvSpPr>
@@ -8771,7 +9876,7 @@
       </p:sp>
       <p:sp>
         <p:nvSpPr>
-          <p:cNvPr id="34" name="Text 32"/>
+          <p:cNvPr id="40" name="Text 38"/>
           <p:cNvSpPr/>
           <p:nvPr/>
         </p:nvSpPr>
@@ -8802,7 +9907,7 @@
                 <a:ea typeface="Calibri" pitchFamily="34" charset="-122"/>
                 <a:cs typeface="Calibri" pitchFamily="34" charset="-120"/>
               </a:rPr>
-              <a:t>6 / 7</a:t>
+              <a:t>6 / 8</a:t>
             </a:r>
             <a:endParaRPr lang="en-US" sz="1000" dirty="0"/>
           </a:p>
@@ -8819,6 +9924,1115 @@
 <file path=ppt/slides/slide7.xml><?xml version="1.0" encoding="utf-8"?>
 <p:sld xmlns:a="http://schemas.openxmlformats.org/drawingml/2006/main" xmlns:r="http://schemas.openxmlformats.org/officeDocument/2006/relationships" xmlns:p="http://schemas.openxmlformats.org/presentationml/2006/main">
   <p:cSld name="Slide 7">
+    <p:bg>
+      <p:bgPr>
+        <a:solidFill>
+          <a:srgbClr val="FFFFFF"/>
+        </a:solidFill>
+      </p:bgPr>
+    </p:bg>
+    <p:spTree>
+      <p:nvGrpSpPr>
+        <p:cNvPr id="1" name=""/>
+        <p:cNvGrpSpPr/>
+        <p:nvPr/>
+      </p:nvGrpSpPr>
+      <p:grpSpPr>
+        <a:xfrm>
+          <a:off x="0" y="0"/>
+          <a:ext cx="0" cy="0"/>
+          <a:chOff x="0" y="0"/>
+          <a:chExt cx="0" cy="0"/>
+        </a:xfrm>
+      </p:grpSpPr>
+      <p:sp>
+        <p:nvSpPr>
+          <p:cNvPr id="2" name="Shape 0"/>
+          <p:cNvSpPr/>
+          <p:nvPr/>
+        </p:nvSpPr>
+        <p:spPr>
+          <a:xfrm>
+            <a:off x="0" y="0"/>
+            <a:ext cx="7315017" cy="411480"/>
+          </a:xfrm>
+          <a:prstGeom prst="rect">
+            <a:avLst/>
+          </a:prstGeom>
+          <a:solidFill>
+            <a:srgbClr val="0284C7"/>
+          </a:solidFill>
+          <a:ln w="12700">
+            <a:solidFill>
+              <a:srgbClr val="0284C7"/>
+            </a:solidFill>
+            <a:prstDash val="solid"/>
+          </a:ln>
+        </p:spPr>
+      </p:sp>
+      <p:sp>
+        <p:nvSpPr>
+          <p:cNvPr id="3" name="Shape 1"/>
+          <p:cNvSpPr/>
+          <p:nvPr/>
+        </p:nvSpPr>
+        <p:spPr>
+          <a:xfrm>
+            <a:off x="7315017" y="0"/>
+            <a:ext cx="4876678" cy="411480"/>
+          </a:xfrm>
+          <a:prstGeom prst="rect">
+            <a:avLst/>
+          </a:prstGeom>
+          <a:solidFill>
+            <a:srgbClr val="D97706"/>
+          </a:solidFill>
+          <a:ln w="12700">
+            <a:solidFill>
+              <a:srgbClr val="D97706"/>
+            </a:solidFill>
+            <a:prstDash val="solid"/>
+          </a:ln>
+        </p:spPr>
+      </p:sp>
+      <p:sp>
+        <p:nvSpPr>
+          <p:cNvPr id="4" name="Text 2"/>
+          <p:cNvSpPr/>
+          <p:nvPr/>
+        </p:nvSpPr>
+        <p:spPr>
+          <a:xfrm>
+            <a:off x="502920" y="640080"/>
+            <a:ext cx="11185855" cy="274320"/>
+          </a:xfrm>
+          <a:prstGeom prst="rect">
+            <a:avLst/>
+          </a:prstGeom>
+          <a:noFill/>
+          <a:ln/>
+        </p:spPr>
+        <p:txBody>
+          <a:bodyPr wrap="square" lIns="0" tIns="0" rIns="0" bIns="0" rtlCol="0" anchor="ctr"/>
+          <a:lstStyle/>
+          <a:p>
+            <a:pPr indent="0" marL="0">
+              <a:buNone/>
+            </a:pPr>
+            <a:r>
+              <a:rPr lang="en-US" sz="1200" b="1" spc="400" kern="0" dirty="0">
+                <a:solidFill>
+                  <a:srgbClr val="0284C7"/>
+                </a:solidFill>
+                <a:latin typeface="Calibri" pitchFamily="34" charset="0"/>
+                <a:ea typeface="Calibri" pitchFamily="34" charset="-122"/>
+                <a:cs typeface="Calibri" pitchFamily="34" charset="-120"/>
+              </a:rPr>
+              <a:t>HOW THE CLASSES WORK  ·  PART 2</a:t>
+            </a:r>
+            <a:endParaRPr lang="en-US" sz="1200" dirty="0"/>
+          </a:p>
+        </p:txBody>
+      </p:sp>
+      <p:sp>
+        <p:nvSpPr>
+          <p:cNvPr id="5" name="Text 3"/>
+          <p:cNvSpPr/>
+          <p:nvPr/>
+        </p:nvSpPr>
+        <p:spPr>
+          <a:xfrm>
+            <a:off x="502920" y="914400"/>
+            <a:ext cx="11185855" cy="731520"/>
+          </a:xfrm>
+          <a:prstGeom prst="rect">
+            <a:avLst/>
+          </a:prstGeom>
+          <a:noFill/>
+          <a:ln/>
+        </p:spPr>
+        <p:txBody>
+          <a:bodyPr wrap="square" lIns="0" tIns="0" rIns="0" bIns="0" rtlCol="0" anchor="ctr"/>
+          <a:lstStyle/>
+          <a:p>
+            <a:pPr indent="0" marL="0">
+              <a:buNone/>
+            </a:pPr>
+            <a:r>
+              <a:rPr lang="en-US" sz="3200" b="1" dirty="0">
+                <a:solidFill>
+                  <a:srgbClr val="0C2A3D"/>
+                </a:solidFill>
+                <a:latin typeface="Arial Black" pitchFamily="34" charset="0"/>
+                <a:ea typeface="Arial Black" pitchFamily="34" charset="-122"/>
+                <a:cs typeface="Arial Black" pitchFamily="34" charset="-120"/>
+              </a:rPr>
+              <a:t>4-month roadmap + end-to-end mentorship</a:t>
+            </a:r>
+            <a:endParaRPr lang="en-US" sz="3200" dirty="0"/>
+          </a:p>
+        </p:txBody>
+      </p:sp>
+      <p:sp>
+        <p:nvSpPr>
+          <p:cNvPr id="6" name="Shape 4"/>
+          <p:cNvSpPr/>
+          <p:nvPr/>
+        </p:nvSpPr>
+        <p:spPr>
+          <a:xfrm>
+            <a:off x="502920" y="1874520"/>
+            <a:ext cx="2659304" cy="1417320"/>
+          </a:xfrm>
+          <a:prstGeom prst="rect">
+            <a:avLst/>
+          </a:prstGeom>
+          <a:solidFill>
+            <a:srgbClr val="F5FBFF"/>
+          </a:solidFill>
+          <a:ln w="9525">
+            <a:solidFill>
+              <a:srgbClr val="B8D6EC"/>
+            </a:solidFill>
+            <a:prstDash val="solid"/>
+          </a:ln>
+        </p:spPr>
+      </p:sp>
+      <p:sp>
+        <p:nvSpPr>
+          <p:cNvPr id="7" name="Shape 5"/>
+          <p:cNvSpPr/>
+          <p:nvPr/>
+        </p:nvSpPr>
+        <p:spPr>
+          <a:xfrm>
+            <a:off x="502920" y="1874520"/>
+            <a:ext cx="2659304" cy="329184"/>
+          </a:xfrm>
+          <a:prstGeom prst="rect">
+            <a:avLst/>
+          </a:prstGeom>
+          <a:solidFill>
+            <a:srgbClr val="0284C7"/>
+          </a:solidFill>
+          <a:ln w="12700">
+            <a:solidFill>
+              <a:srgbClr val="0284C7"/>
+            </a:solidFill>
+            <a:prstDash val="solid"/>
+          </a:ln>
+        </p:spPr>
+      </p:sp>
+      <p:sp>
+        <p:nvSpPr>
+          <p:cNvPr id="8" name="Text 6"/>
+          <p:cNvSpPr/>
+          <p:nvPr/>
+        </p:nvSpPr>
+        <p:spPr>
+          <a:xfrm>
+            <a:off x="502920" y="1874520"/>
+            <a:ext cx="2659304" cy="329184"/>
+          </a:xfrm>
+          <a:prstGeom prst="rect">
+            <a:avLst/>
+          </a:prstGeom>
+          <a:noFill/>
+          <a:ln/>
+        </p:spPr>
+        <p:txBody>
+          <a:bodyPr wrap="square" lIns="0" tIns="0" rIns="0" bIns="0" rtlCol="0" anchor="ctr"/>
+          <a:lstStyle/>
+          <a:p>
+            <a:pPr algn="ctr" indent="0" marL="0">
+              <a:buNone/>
+            </a:pPr>
+            <a:r>
+              <a:rPr lang="en-US" sz="1300" b="1" spc="300" kern="0" dirty="0">
+                <a:solidFill>
+                  <a:srgbClr val="FFFFFF"/>
+                </a:solidFill>
+                <a:latin typeface="Calibri" pitchFamily="34" charset="0"/>
+                <a:ea typeface="Calibri" pitchFamily="34" charset="-122"/>
+                <a:cs typeface="Calibri" pitchFamily="34" charset="-120"/>
+              </a:rPr>
+              <a:t>Month 1</a:t>
+            </a:r>
+            <a:endParaRPr lang="en-US" sz="1300" dirty="0"/>
+          </a:p>
+        </p:txBody>
+      </p:sp>
+      <p:sp>
+        <p:nvSpPr>
+          <p:cNvPr id="9" name="Text 7"/>
+          <p:cNvSpPr/>
+          <p:nvPr/>
+        </p:nvSpPr>
+        <p:spPr>
+          <a:xfrm>
+            <a:off x="667512" y="2286000"/>
+            <a:ext cx="2330120" cy="960120"/>
+          </a:xfrm>
+          <a:prstGeom prst="rect">
+            <a:avLst/>
+          </a:prstGeom>
+          <a:noFill/>
+          <a:ln/>
+        </p:spPr>
+        <p:txBody>
+          <a:bodyPr wrap="square" lIns="0" tIns="0" rIns="0" bIns="0" rtlCol="0" anchor="ctr"/>
+          <a:lstStyle/>
+          <a:p>
+            <a:pPr algn="l" indent="0" marL="0">
+              <a:buNone/>
+            </a:pPr>
+            <a:r>
+              <a:rPr lang="en-US" sz="1200" dirty="0">
+                <a:solidFill>
+                  <a:srgbClr val="345671"/>
+                </a:solidFill>
+                <a:latin typeface="Calibri" pitchFamily="34" charset="0"/>
+                <a:ea typeface="Calibri" pitchFamily="34" charset="-122"/>
+                <a:cs typeface="Calibri" pitchFamily="34" charset="-120"/>
+              </a:rPr>
+              <a:t>Cardiovascular · Respiratory · General Pathology · Epi/Biostats</a:t>
+            </a:r>
+            <a:endParaRPr lang="en-US" sz="1200" dirty="0"/>
+          </a:p>
+        </p:txBody>
+      </p:sp>
+      <p:sp>
+        <p:nvSpPr>
+          <p:cNvPr id="10" name="Shape 8"/>
+          <p:cNvSpPr/>
+          <p:nvPr/>
+        </p:nvSpPr>
+        <p:spPr>
+          <a:xfrm>
+            <a:off x="3345104" y="1874520"/>
+            <a:ext cx="2659304" cy="1417320"/>
+          </a:xfrm>
+          <a:prstGeom prst="rect">
+            <a:avLst/>
+          </a:prstGeom>
+          <a:solidFill>
+            <a:srgbClr val="F5FBFF"/>
+          </a:solidFill>
+          <a:ln w="9525">
+            <a:solidFill>
+              <a:srgbClr val="B8D6EC"/>
+            </a:solidFill>
+            <a:prstDash val="solid"/>
+          </a:ln>
+        </p:spPr>
+      </p:sp>
+      <p:sp>
+        <p:nvSpPr>
+          <p:cNvPr id="11" name="Shape 9"/>
+          <p:cNvSpPr/>
+          <p:nvPr/>
+        </p:nvSpPr>
+        <p:spPr>
+          <a:xfrm>
+            <a:off x="3345104" y="1874520"/>
+            <a:ext cx="2659304" cy="329184"/>
+          </a:xfrm>
+          <a:prstGeom prst="rect">
+            <a:avLst/>
+          </a:prstGeom>
+          <a:solidFill>
+            <a:srgbClr val="0284C7"/>
+          </a:solidFill>
+          <a:ln w="12700">
+            <a:solidFill>
+              <a:srgbClr val="0284C7"/>
+            </a:solidFill>
+            <a:prstDash val="solid"/>
+          </a:ln>
+        </p:spPr>
+      </p:sp>
+      <p:sp>
+        <p:nvSpPr>
+          <p:cNvPr id="12" name="Text 10"/>
+          <p:cNvSpPr/>
+          <p:nvPr/>
+        </p:nvSpPr>
+        <p:spPr>
+          <a:xfrm>
+            <a:off x="3345104" y="1874520"/>
+            <a:ext cx="2659304" cy="329184"/>
+          </a:xfrm>
+          <a:prstGeom prst="rect">
+            <a:avLst/>
+          </a:prstGeom>
+          <a:noFill/>
+          <a:ln/>
+        </p:spPr>
+        <p:txBody>
+          <a:bodyPr wrap="square" lIns="0" tIns="0" rIns="0" bIns="0" rtlCol="0" anchor="ctr"/>
+          <a:lstStyle/>
+          <a:p>
+            <a:pPr algn="ctr" indent="0" marL="0">
+              <a:buNone/>
+            </a:pPr>
+            <a:r>
+              <a:rPr lang="en-US" sz="1300" b="1" spc="300" kern="0" dirty="0">
+                <a:solidFill>
+                  <a:srgbClr val="FFFFFF"/>
+                </a:solidFill>
+                <a:latin typeface="Calibri" pitchFamily="34" charset="0"/>
+                <a:ea typeface="Calibri" pitchFamily="34" charset="-122"/>
+                <a:cs typeface="Calibri" pitchFamily="34" charset="-120"/>
+              </a:rPr>
+              <a:t>Month 2</a:t>
+            </a:r>
+            <a:endParaRPr lang="en-US" sz="1300" dirty="0"/>
+          </a:p>
+        </p:txBody>
+      </p:sp>
+      <p:sp>
+        <p:nvSpPr>
+          <p:cNvPr id="13" name="Text 11"/>
+          <p:cNvSpPr/>
+          <p:nvPr/>
+        </p:nvSpPr>
+        <p:spPr>
+          <a:xfrm>
+            <a:off x="3509696" y="2286000"/>
+            <a:ext cx="2330120" cy="960120"/>
+          </a:xfrm>
+          <a:prstGeom prst="rect">
+            <a:avLst/>
+          </a:prstGeom>
+          <a:noFill/>
+          <a:ln/>
+        </p:spPr>
+        <p:txBody>
+          <a:bodyPr wrap="square" lIns="0" tIns="0" rIns="0" bIns="0" rtlCol="0" anchor="ctr"/>
+          <a:lstStyle/>
+          <a:p>
+            <a:pPr algn="l" indent="0" marL="0">
+              <a:buNone/>
+            </a:pPr>
+            <a:r>
+              <a:rPr lang="en-US" sz="1200" dirty="0">
+                <a:solidFill>
+                  <a:srgbClr val="345671"/>
+                </a:solidFill>
+                <a:latin typeface="Calibri" pitchFamily="34" charset="0"/>
+                <a:ea typeface="Calibri" pitchFamily="34" charset="-122"/>
+                <a:cs typeface="Calibri" pitchFamily="34" charset="-120"/>
+              </a:rPr>
+              <a:t>Endocrine · GI · Heme/Onc · Renal</a:t>
+            </a:r>
+            <a:endParaRPr lang="en-US" sz="1200" dirty="0"/>
+          </a:p>
+        </p:txBody>
+      </p:sp>
+      <p:sp>
+        <p:nvSpPr>
+          <p:cNvPr id="14" name="Shape 12"/>
+          <p:cNvSpPr/>
+          <p:nvPr/>
+        </p:nvSpPr>
+        <p:spPr>
+          <a:xfrm>
+            <a:off x="6187288" y="1874520"/>
+            <a:ext cx="2659304" cy="1417320"/>
+          </a:xfrm>
+          <a:prstGeom prst="rect">
+            <a:avLst/>
+          </a:prstGeom>
+          <a:solidFill>
+            <a:srgbClr val="F5FBFF"/>
+          </a:solidFill>
+          <a:ln w="9525">
+            <a:solidFill>
+              <a:srgbClr val="B8D6EC"/>
+            </a:solidFill>
+            <a:prstDash val="solid"/>
+          </a:ln>
+        </p:spPr>
+      </p:sp>
+      <p:sp>
+        <p:nvSpPr>
+          <p:cNvPr id="15" name="Shape 13"/>
+          <p:cNvSpPr/>
+          <p:nvPr/>
+        </p:nvSpPr>
+        <p:spPr>
+          <a:xfrm>
+            <a:off x="6187288" y="1874520"/>
+            <a:ext cx="2659304" cy="329184"/>
+          </a:xfrm>
+          <a:prstGeom prst="rect">
+            <a:avLst/>
+          </a:prstGeom>
+          <a:solidFill>
+            <a:srgbClr val="0284C7"/>
+          </a:solidFill>
+          <a:ln w="12700">
+            <a:solidFill>
+              <a:srgbClr val="0284C7"/>
+            </a:solidFill>
+            <a:prstDash val="solid"/>
+          </a:ln>
+        </p:spPr>
+      </p:sp>
+      <p:sp>
+        <p:nvSpPr>
+          <p:cNvPr id="16" name="Text 14"/>
+          <p:cNvSpPr/>
+          <p:nvPr/>
+        </p:nvSpPr>
+        <p:spPr>
+          <a:xfrm>
+            <a:off x="6187288" y="1874520"/>
+            <a:ext cx="2659304" cy="329184"/>
+          </a:xfrm>
+          <a:prstGeom prst="rect">
+            <a:avLst/>
+          </a:prstGeom>
+          <a:noFill/>
+          <a:ln/>
+        </p:spPr>
+        <p:txBody>
+          <a:bodyPr wrap="square" lIns="0" tIns="0" rIns="0" bIns="0" rtlCol="0" anchor="ctr"/>
+          <a:lstStyle/>
+          <a:p>
+            <a:pPr algn="ctr" indent="0" marL="0">
+              <a:buNone/>
+            </a:pPr>
+            <a:r>
+              <a:rPr lang="en-US" sz="1300" b="1" spc="300" kern="0" dirty="0">
+                <a:solidFill>
+                  <a:srgbClr val="FFFFFF"/>
+                </a:solidFill>
+                <a:latin typeface="Calibri" pitchFamily="34" charset="0"/>
+                <a:ea typeface="Calibri" pitchFamily="34" charset="-122"/>
+                <a:cs typeface="Calibri" pitchFamily="34" charset="-120"/>
+              </a:rPr>
+              <a:t>Month 3</a:t>
+            </a:r>
+            <a:endParaRPr lang="en-US" sz="1300" dirty="0"/>
+          </a:p>
+        </p:txBody>
+      </p:sp>
+      <p:sp>
+        <p:nvSpPr>
+          <p:cNvPr id="17" name="Text 15"/>
+          <p:cNvSpPr/>
+          <p:nvPr/>
+        </p:nvSpPr>
+        <p:spPr>
+          <a:xfrm>
+            <a:off x="6351880" y="2286000"/>
+            <a:ext cx="2330120" cy="960120"/>
+          </a:xfrm>
+          <a:prstGeom prst="rect">
+            <a:avLst/>
+          </a:prstGeom>
+          <a:noFill/>
+          <a:ln/>
+        </p:spPr>
+        <p:txBody>
+          <a:bodyPr wrap="square" lIns="0" tIns="0" rIns="0" bIns="0" rtlCol="0" anchor="ctr"/>
+          <a:lstStyle/>
+          <a:p>
+            <a:pPr algn="l" indent="0" marL="0">
+              <a:buNone/>
+            </a:pPr>
+            <a:r>
+              <a:rPr lang="en-US" sz="1200" dirty="0">
+                <a:solidFill>
+                  <a:srgbClr val="345671"/>
+                </a:solidFill>
+                <a:latin typeface="Calibri" pitchFamily="34" charset="0"/>
+                <a:ea typeface="Calibri" pitchFamily="34" charset="-122"/>
+                <a:cs typeface="Calibri" pitchFamily="34" charset="-120"/>
+              </a:rPr>
+              <a:t>Musculoskeletal · Neurology · Psychiatry · Reproductive</a:t>
+            </a:r>
+            <a:endParaRPr lang="en-US" sz="1200" dirty="0"/>
+          </a:p>
+        </p:txBody>
+      </p:sp>
+      <p:sp>
+        <p:nvSpPr>
+          <p:cNvPr id="18" name="Shape 16"/>
+          <p:cNvSpPr/>
+          <p:nvPr/>
+        </p:nvSpPr>
+        <p:spPr>
+          <a:xfrm>
+            <a:off x="9029471" y="1874520"/>
+            <a:ext cx="2659304" cy="1417320"/>
+          </a:xfrm>
+          <a:prstGeom prst="rect">
+            <a:avLst/>
+          </a:prstGeom>
+          <a:solidFill>
+            <a:srgbClr val="F5FBFF"/>
+          </a:solidFill>
+          <a:ln w="9525">
+            <a:solidFill>
+              <a:srgbClr val="B8D6EC"/>
+            </a:solidFill>
+            <a:prstDash val="solid"/>
+          </a:ln>
+        </p:spPr>
+      </p:sp>
+      <p:sp>
+        <p:nvSpPr>
+          <p:cNvPr id="19" name="Shape 17"/>
+          <p:cNvSpPr/>
+          <p:nvPr/>
+        </p:nvSpPr>
+        <p:spPr>
+          <a:xfrm>
+            <a:off x="9029471" y="1874520"/>
+            <a:ext cx="2659304" cy="329184"/>
+          </a:xfrm>
+          <a:prstGeom prst="rect">
+            <a:avLst/>
+          </a:prstGeom>
+          <a:solidFill>
+            <a:srgbClr val="0284C7"/>
+          </a:solidFill>
+          <a:ln w="12700">
+            <a:solidFill>
+              <a:srgbClr val="0284C7"/>
+            </a:solidFill>
+            <a:prstDash val="solid"/>
+          </a:ln>
+        </p:spPr>
+      </p:sp>
+      <p:sp>
+        <p:nvSpPr>
+          <p:cNvPr id="20" name="Text 18"/>
+          <p:cNvSpPr/>
+          <p:nvPr/>
+        </p:nvSpPr>
+        <p:spPr>
+          <a:xfrm>
+            <a:off x="9029471" y="1874520"/>
+            <a:ext cx="2659304" cy="329184"/>
+          </a:xfrm>
+          <a:prstGeom prst="rect">
+            <a:avLst/>
+          </a:prstGeom>
+          <a:noFill/>
+          <a:ln/>
+        </p:spPr>
+        <p:txBody>
+          <a:bodyPr wrap="square" lIns="0" tIns="0" rIns="0" bIns="0" rtlCol="0" anchor="ctr"/>
+          <a:lstStyle/>
+          <a:p>
+            <a:pPr algn="ctr" indent="0" marL="0">
+              <a:buNone/>
+            </a:pPr>
+            <a:r>
+              <a:rPr lang="en-US" sz="1300" b="1" spc="300" kern="0" dirty="0">
+                <a:solidFill>
+                  <a:srgbClr val="FFFFFF"/>
+                </a:solidFill>
+                <a:latin typeface="Calibri" pitchFamily="34" charset="0"/>
+                <a:ea typeface="Calibri" pitchFamily="34" charset="-122"/>
+                <a:cs typeface="Calibri" pitchFamily="34" charset="-120"/>
+              </a:rPr>
+              <a:t>Month 4</a:t>
+            </a:r>
+            <a:endParaRPr lang="en-US" sz="1300" dirty="0"/>
+          </a:p>
+        </p:txBody>
+      </p:sp>
+      <p:sp>
+        <p:nvSpPr>
+          <p:cNvPr id="21" name="Text 19"/>
+          <p:cNvSpPr/>
+          <p:nvPr/>
+        </p:nvSpPr>
+        <p:spPr>
+          <a:xfrm>
+            <a:off x="9194063" y="2286000"/>
+            <a:ext cx="2330120" cy="960120"/>
+          </a:xfrm>
+          <a:prstGeom prst="rect">
+            <a:avLst/>
+          </a:prstGeom>
+          <a:noFill/>
+          <a:ln/>
+        </p:spPr>
+        <p:txBody>
+          <a:bodyPr wrap="square" lIns="0" tIns="0" rIns="0" bIns="0" rtlCol="0" anchor="ctr"/>
+          <a:lstStyle/>
+          <a:p>
+            <a:pPr algn="l" indent="0" marL="0">
+              <a:buNone/>
+            </a:pPr>
+            <a:r>
+              <a:rPr lang="en-US" sz="1200" dirty="0">
+                <a:solidFill>
+                  <a:srgbClr val="345671"/>
+                </a:solidFill>
+                <a:latin typeface="Calibri" pitchFamily="34" charset="0"/>
+                <a:ea typeface="Calibri" pitchFamily="34" charset="-122"/>
+                <a:cs typeface="Calibri" pitchFamily="34" charset="-120"/>
+              </a:rPr>
+              <a:t>Immunology / Microbiology · Pharmacology · Behavioral · Mock blocks</a:t>
+            </a:r>
+            <a:endParaRPr lang="en-US" sz="1200" dirty="0"/>
+          </a:p>
+        </p:txBody>
+      </p:sp>
+      <p:sp>
+        <p:nvSpPr>
+          <p:cNvPr id="22" name="Text 20"/>
+          <p:cNvSpPr/>
+          <p:nvPr/>
+        </p:nvSpPr>
+        <p:spPr>
+          <a:xfrm>
+            <a:off x="502920" y="3657600"/>
+            <a:ext cx="11185855" cy="274320"/>
+          </a:xfrm>
+          <a:prstGeom prst="rect">
+            <a:avLst/>
+          </a:prstGeom>
+          <a:noFill/>
+          <a:ln/>
+        </p:spPr>
+        <p:txBody>
+          <a:bodyPr wrap="square" lIns="0" tIns="0" rIns="0" bIns="0" rtlCol="0" anchor="ctr"/>
+          <a:lstStyle/>
+          <a:p>
+            <a:pPr indent="0" marL="0">
+              <a:buNone/>
+            </a:pPr>
+            <a:r>
+              <a:rPr lang="en-US" sz="1200" b="1" spc="400" kern="0" dirty="0">
+                <a:solidFill>
+                  <a:srgbClr val="B45309"/>
+                </a:solidFill>
+                <a:latin typeface="Calibri" pitchFamily="34" charset="0"/>
+                <a:ea typeface="Calibri" pitchFamily="34" charset="-122"/>
+                <a:cs typeface="Calibri" pitchFamily="34" charset="-120"/>
+              </a:rPr>
+              <a:t>END-TO-END MENTORSHIP</a:t>
+            </a:r>
+            <a:endParaRPr lang="en-US" sz="1200" dirty="0"/>
+          </a:p>
+        </p:txBody>
+      </p:sp>
+      <p:sp>
+        <p:nvSpPr>
+          <p:cNvPr id="23" name="Shape 21"/>
+          <p:cNvSpPr/>
+          <p:nvPr/>
+        </p:nvSpPr>
+        <p:spPr>
+          <a:xfrm>
+            <a:off x="502920" y="4023360"/>
+            <a:ext cx="164592" cy="164592"/>
+          </a:xfrm>
+          <a:prstGeom prst="ellipse">
+            <a:avLst/>
+          </a:prstGeom>
+          <a:solidFill>
+            <a:srgbClr val="D97706"/>
+          </a:solidFill>
+          <a:ln w="12700">
+            <a:solidFill>
+              <a:srgbClr val="D97706"/>
+            </a:solidFill>
+            <a:prstDash val="solid"/>
+          </a:ln>
+        </p:spPr>
+      </p:sp>
+      <p:sp>
+        <p:nvSpPr>
+          <p:cNvPr id="24" name="Text 22"/>
+          <p:cNvSpPr/>
+          <p:nvPr/>
+        </p:nvSpPr>
+        <p:spPr>
+          <a:xfrm>
+            <a:off x="777240" y="3968496"/>
+            <a:ext cx="10911535" cy="329184"/>
+          </a:xfrm>
+          <a:prstGeom prst="rect">
+            <a:avLst/>
+          </a:prstGeom>
+          <a:noFill/>
+          <a:ln/>
+        </p:spPr>
+        <p:txBody>
+          <a:bodyPr wrap="square" lIns="0" tIns="0" rIns="0" bIns="0" rtlCol="0" anchor="ctr"/>
+          <a:lstStyle/>
+          <a:p>
+            <a:pPr indent="0" marL="0">
+              <a:buNone/>
+            </a:pPr>
+            <a:r>
+              <a:rPr lang="en-US" sz="1300" dirty="0">
+                <a:solidFill>
+                  <a:srgbClr val="0C2A3D"/>
+                </a:solidFill>
+                <a:latin typeface="Calibri" pitchFamily="34" charset="0"/>
+                <a:ea typeface="Calibri" pitchFamily="34" charset="-122"/>
+                <a:cs typeface="Calibri" pitchFamily="34" charset="-120"/>
+              </a:rPr>
+              <a:t>ECFMG application — credentials submission, sponsor notes, EPIC.</a:t>
+            </a:r>
+            <a:endParaRPr lang="en-US" sz="1300" dirty="0"/>
+          </a:p>
+        </p:txBody>
+      </p:sp>
+      <p:sp>
+        <p:nvSpPr>
+          <p:cNvPr id="25" name="Shape 23"/>
+          <p:cNvSpPr/>
+          <p:nvPr/>
+        </p:nvSpPr>
+        <p:spPr>
+          <a:xfrm>
+            <a:off x="502920" y="4407408"/>
+            <a:ext cx="164592" cy="164592"/>
+          </a:xfrm>
+          <a:prstGeom prst="ellipse">
+            <a:avLst/>
+          </a:prstGeom>
+          <a:solidFill>
+            <a:srgbClr val="D97706"/>
+          </a:solidFill>
+          <a:ln w="12700">
+            <a:solidFill>
+              <a:srgbClr val="D97706"/>
+            </a:solidFill>
+            <a:prstDash val="solid"/>
+          </a:ln>
+        </p:spPr>
+      </p:sp>
+      <p:sp>
+        <p:nvSpPr>
+          <p:cNvPr id="26" name="Text 24"/>
+          <p:cNvSpPr/>
+          <p:nvPr/>
+        </p:nvSpPr>
+        <p:spPr>
+          <a:xfrm>
+            <a:off x="777240" y="4352544"/>
+            <a:ext cx="10911535" cy="329184"/>
+          </a:xfrm>
+          <a:prstGeom prst="rect">
+            <a:avLst/>
+          </a:prstGeom>
+          <a:noFill/>
+          <a:ln/>
+        </p:spPr>
+        <p:txBody>
+          <a:bodyPr wrap="square" lIns="0" tIns="0" rIns="0" bIns="0" rtlCol="0" anchor="ctr"/>
+          <a:lstStyle/>
+          <a:p>
+            <a:pPr indent="0" marL="0">
+              <a:buNone/>
+            </a:pPr>
+            <a:r>
+              <a:rPr lang="en-US" sz="1300" dirty="0">
+                <a:solidFill>
+                  <a:srgbClr val="0C2A3D"/>
+                </a:solidFill>
+                <a:latin typeface="Calibri" pitchFamily="34" charset="0"/>
+                <a:ea typeface="Calibri" pitchFamily="34" charset="-122"/>
+                <a:cs typeface="Calibri" pitchFamily="34" charset="-120"/>
+              </a:rPr>
+              <a:t>Personal statement &amp; CV review, with iterative drafts.</a:t>
+            </a:r>
+            <a:endParaRPr lang="en-US" sz="1300" dirty="0"/>
+          </a:p>
+        </p:txBody>
+      </p:sp>
+      <p:sp>
+        <p:nvSpPr>
+          <p:cNvPr id="27" name="Shape 25"/>
+          <p:cNvSpPr/>
+          <p:nvPr/>
+        </p:nvSpPr>
+        <p:spPr>
+          <a:xfrm>
+            <a:off x="502920" y="4791456"/>
+            <a:ext cx="164592" cy="164592"/>
+          </a:xfrm>
+          <a:prstGeom prst="ellipse">
+            <a:avLst/>
+          </a:prstGeom>
+          <a:solidFill>
+            <a:srgbClr val="D97706"/>
+          </a:solidFill>
+          <a:ln w="12700">
+            <a:solidFill>
+              <a:srgbClr val="D97706"/>
+            </a:solidFill>
+            <a:prstDash val="solid"/>
+          </a:ln>
+        </p:spPr>
+      </p:sp>
+      <p:sp>
+        <p:nvSpPr>
+          <p:cNvPr id="28" name="Text 26"/>
+          <p:cNvSpPr/>
+          <p:nvPr/>
+        </p:nvSpPr>
+        <p:spPr>
+          <a:xfrm>
+            <a:off x="777240" y="4736592"/>
+            <a:ext cx="10911535" cy="329184"/>
+          </a:xfrm>
+          <a:prstGeom prst="rect">
+            <a:avLst/>
+          </a:prstGeom>
+          <a:noFill/>
+          <a:ln/>
+        </p:spPr>
+        <p:txBody>
+          <a:bodyPr wrap="square" lIns="0" tIns="0" rIns="0" bIns="0" rtlCol="0" anchor="ctr"/>
+          <a:lstStyle/>
+          <a:p>
+            <a:pPr indent="0" marL="0">
+              <a:buNone/>
+            </a:pPr>
+            <a:r>
+              <a:rPr lang="en-US" sz="1300" dirty="0">
+                <a:solidFill>
+                  <a:srgbClr val="0C2A3D"/>
+                </a:solidFill>
+                <a:latin typeface="Calibri" pitchFamily="34" charset="0"/>
+                <a:ea typeface="Calibri" pitchFamily="34" charset="-122"/>
+                <a:cs typeface="Calibri" pitchFamily="34" charset="-120"/>
+              </a:rPr>
+              <a:t>Interview prep — mock interviews, IMG-specific Q&amp;A, programs by signal.</a:t>
+            </a:r>
+            <a:endParaRPr lang="en-US" sz="1300" dirty="0"/>
+          </a:p>
+        </p:txBody>
+      </p:sp>
+      <p:sp>
+        <p:nvSpPr>
+          <p:cNvPr id="29" name="Shape 27"/>
+          <p:cNvSpPr/>
+          <p:nvPr/>
+        </p:nvSpPr>
+        <p:spPr>
+          <a:xfrm>
+            <a:off x="502920" y="5175504"/>
+            <a:ext cx="164592" cy="164592"/>
+          </a:xfrm>
+          <a:prstGeom prst="ellipse">
+            <a:avLst/>
+          </a:prstGeom>
+          <a:solidFill>
+            <a:srgbClr val="D97706"/>
+          </a:solidFill>
+          <a:ln w="12700">
+            <a:solidFill>
+              <a:srgbClr val="D97706"/>
+            </a:solidFill>
+            <a:prstDash val="solid"/>
+          </a:ln>
+        </p:spPr>
+      </p:sp>
+      <p:sp>
+        <p:nvSpPr>
+          <p:cNvPr id="30" name="Text 28"/>
+          <p:cNvSpPr/>
+          <p:nvPr/>
+        </p:nvSpPr>
+        <p:spPr>
+          <a:xfrm>
+            <a:off x="777240" y="5120640"/>
+            <a:ext cx="10911535" cy="329184"/>
+          </a:xfrm>
+          <a:prstGeom prst="rect">
+            <a:avLst/>
+          </a:prstGeom>
+          <a:noFill/>
+          <a:ln/>
+        </p:spPr>
+        <p:txBody>
+          <a:bodyPr wrap="square" lIns="0" tIns="0" rIns="0" bIns="0" rtlCol="0" anchor="ctr"/>
+          <a:lstStyle/>
+          <a:p>
+            <a:pPr indent="0" marL="0">
+              <a:buNone/>
+            </a:pPr>
+            <a:r>
+              <a:rPr lang="en-US" sz="1300" dirty="0">
+                <a:solidFill>
+                  <a:srgbClr val="0C2A3D"/>
+                </a:solidFill>
+                <a:latin typeface="Calibri" pitchFamily="34" charset="0"/>
+                <a:ea typeface="Calibri" pitchFamily="34" charset="-122"/>
+                <a:cs typeface="Calibri" pitchFamily="34" charset="-120"/>
+              </a:rPr>
+              <a:t>ERAS / NRMP timeline coaching from application to rank list.</a:t>
+            </a:r>
+            <a:endParaRPr lang="en-US" sz="1300" dirty="0"/>
+          </a:p>
+        </p:txBody>
+      </p:sp>
+      <p:sp>
+        <p:nvSpPr>
+          <p:cNvPr id="31" name="Shape 29"/>
+          <p:cNvSpPr/>
+          <p:nvPr/>
+        </p:nvSpPr>
+        <p:spPr>
+          <a:xfrm>
+            <a:off x="502920" y="5559552"/>
+            <a:ext cx="164592" cy="164592"/>
+          </a:xfrm>
+          <a:prstGeom prst="ellipse">
+            <a:avLst/>
+          </a:prstGeom>
+          <a:solidFill>
+            <a:srgbClr val="D97706"/>
+          </a:solidFill>
+          <a:ln w="12700">
+            <a:solidFill>
+              <a:srgbClr val="D97706"/>
+            </a:solidFill>
+            <a:prstDash val="solid"/>
+          </a:ln>
+        </p:spPr>
+      </p:sp>
+      <p:sp>
+        <p:nvSpPr>
+          <p:cNvPr id="32" name="Text 30"/>
+          <p:cNvSpPr/>
+          <p:nvPr/>
+        </p:nvSpPr>
+        <p:spPr>
+          <a:xfrm>
+            <a:off x="777240" y="5504688"/>
+            <a:ext cx="10911535" cy="329184"/>
+          </a:xfrm>
+          <a:prstGeom prst="rect">
+            <a:avLst/>
+          </a:prstGeom>
+          <a:noFill/>
+          <a:ln/>
+        </p:spPr>
+        <p:txBody>
+          <a:bodyPr wrap="square" lIns="0" tIns="0" rIns="0" bIns="0" rtlCol="0" anchor="ctr"/>
+          <a:lstStyle/>
+          <a:p>
+            <a:pPr indent="0" marL="0">
+              <a:buNone/>
+            </a:pPr>
+            <a:r>
+              <a:rPr lang="en-US" sz="1300" dirty="0">
+                <a:solidFill>
+                  <a:srgbClr val="0C2A3D"/>
+                </a:solidFill>
+                <a:latin typeface="Calibri" pitchFamily="34" charset="0"/>
+                <a:ea typeface="Calibri" pitchFamily="34" charset="-122"/>
+                <a:cs typeface="Calibri" pitchFamily="34" charset="-120"/>
+              </a:rPr>
+              <a:t>Combined Step 1 + Step 2 expedited track for efficient overlap.</a:t>
+            </a:r>
+            <a:endParaRPr lang="en-US" sz="1300" dirty="0"/>
+          </a:p>
+        </p:txBody>
+      </p:sp>
+      <p:sp>
+        <p:nvSpPr>
+          <p:cNvPr id="33" name="Text 31"/>
+          <p:cNvSpPr/>
+          <p:nvPr/>
+        </p:nvSpPr>
+        <p:spPr>
+          <a:xfrm>
+            <a:off x="502920" y="6492240"/>
+            <a:ext cx="7830099" cy="274320"/>
+          </a:xfrm>
+          <a:prstGeom prst="rect">
+            <a:avLst/>
+          </a:prstGeom>
+          <a:noFill/>
+          <a:ln/>
+        </p:spPr>
+        <p:txBody>
+          <a:bodyPr wrap="square" lIns="0" tIns="0" rIns="0" bIns="0" rtlCol="0" anchor="ctr"/>
+          <a:lstStyle/>
+          <a:p>
+            <a:pPr indent="0" marL="0">
+              <a:buNone/>
+            </a:pPr>
+            <a:r>
+              <a:rPr lang="en-US" sz="1000" i="1" dirty="0">
+                <a:solidFill>
+                  <a:srgbClr val="6B87A3"/>
+                </a:solidFill>
+                <a:latin typeface="Calibri" pitchFamily="34" charset="0"/>
+                <a:ea typeface="Calibri" pitchFamily="34" charset="-122"/>
+                <a:cs typeface="Calibri" pitchFamily="34" charset="-120"/>
+              </a:rPr>
+              <a:t>Allan's USMLE Class · June Cohort</a:t>
+            </a:r>
+            <a:endParaRPr lang="en-US" sz="1000" dirty="0"/>
+          </a:p>
+        </p:txBody>
+      </p:sp>
+      <p:sp>
+        <p:nvSpPr>
+          <p:cNvPr id="34" name="Text 32"/>
+          <p:cNvSpPr/>
+          <p:nvPr/>
+        </p:nvSpPr>
+        <p:spPr>
+          <a:xfrm>
+            <a:off x="11140135" y="6492240"/>
+            <a:ext cx="548640" cy="274320"/>
+          </a:xfrm>
+          <a:prstGeom prst="rect">
+            <a:avLst/>
+          </a:prstGeom>
+          <a:noFill/>
+          <a:ln/>
+        </p:spPr>
+        <p:txBody>
+          <a:bodyPr wrap="square" lIns="0" tIns="0" rIns="0" bIns="0" rtlCol="0" anchor="ctr"/>
+          <a:lstStyle/>
+          <a:p>
+            <a:pPr algn="r" indent="0" marL="0">
+              <a:buNone/>
+            </a:pPr>
+            <a:r>
+              <a:rPr lang="en-US" sz="1000" dirty="0">
+                <a:solidFill>
+                  <a:srgbClr val="6B87A3"/>
+                </a:solidFill>
+                <a:latin typeface="Calibri" pitchFamily="34" charset="0"/>
+                <a:ea typeface="Calibri" pitchFamily="34" charset="-122"/>
+                <a:cs typeface="Calibri" pitchFamily="34" charset="-120"/>
+              </a:rPr>
+              <a:t>7 / 8</a:t>
+            </a:r>
+            <a:endParaRPr lang="en-US" sz="1000" dirty="0"/>
+          </a:p>
+        </p:txBody>
+      </p:sp>
+    </p:spTree>
+  </p:cSld>
+  <p:clrMapOvr>
+    <a:masterClrMapping/>
+  </p:clrMapOvr>
+</p:sld>
+</file>
+
+<file path=ppt/slides/slide8.xml><?xml version="1.0" encoding="utf-8"?>
+<p:sld xmlns:a="http://schemas.openxmlformats.org/drawingml/2006/main" xmlns:r="http://schemas.openxmlformats.org/officeDocument/2006/relationships" xmlns:p="http://schemas.openxmlformats.org/presentationml/2006/main">
+  <p:cSld name="Slide 8">
     <p:bg>
       <p:bgPr>
         <a:solidFill>
@@ -9156,7 +11370,7 @@
                 <a:ea typeface="Calibri" pitchFamily="34" charset="-122"/>
                 <a:cs typeface="Calibri" pitchFamily="34" charset="-120"/>
               </a:rPr>
-              <a:t>7 / 7</a:t>
+              <a:t>8 / 8</a:t>
             </a:r>
             <a:endParaRPr lang="en-US" sz="1000" dirty="0"/>
           </a:p>

--- a/outputs/flyers/USMLE_Info_Session_Deck.pptx
+++ b/outputs/flyers/USMLE_Info_Session_Deck.pptx
@@ -12,9 +12,10 @@
     <p:sldId id="260" r:id="rId6"/>
     <p:sldId id="261" r:id="rId7"/>
     <p:sldId id="262" r:id="rId8"/>
+    <p:sldId id="263" r:id="rId9"/>
   </p:sldIdLst>
   <p:notesMasterIdLst>
-    <p:notesMasterId r:id="rId9"/>
+    <p:notesMasterId r:id="rId10"/>
   </p:notesMasterIdLst>
   <p:sldSz cx="12192000" cy="6858000"/>
   <p:notesSz cx="6858000" cy="12192000"/>
@@ -1078,6 +1079,94 @@
 </p:notes>
 </file>
 
+<file path=ppt/notesSlides/notesSlide8.xml><?xml version="1.0" encoding="utf-8"?>
+<p:notes xmlns:a="http://schemas.openxmlformats.org/drawingml/2006/main" xmlns:r="http://schemas.openxmlformats.org/officeDocument/2006/relationships" xmlns:p="http://schemas.openxmlformats.org/presentationml/2006/main">
+  <p:cSld>
+    <p:spTree>
+      <p:nvGrpSpPr>
+        <p:cNvPr id="1" name=""/>
+        <p:cNvGrpSpPr/>
+        <p:nvPr/>
+      </p:nvGrpSpPr>
+      <p:grpSpPr>
+        <a:xfrm>
+          <a:off x="0" y="0"/>
+          <a:ext cx="0" cy="0"/>
+          <a:chOff x="0" y="0"/>
+          <a:chExt cx="0" cy="0"/>
+        </a:xfrm>
+      </p:grpSpPr>
+      <p:sp>
+        <p:nvSpPr>
+          <p:cNvPr id="2" name="Slide Image Placeholder 1"/>
+          <p:cNvSpPr>
+            <a:spLocks noGrp="1" noRot="1" noChangeAspect="1"/>
+          </p:cNvSpPr>
+          <p:nvPr>
+            <p:ph type="sldImg"/>
+          </p:nvPr>
+        </p:nvSpPr>
+        <p:spPr/>
+      </p:sp>
+      <p:sp>
+        <p:nvSpPr>
+          <p:cNvPr id="3" name="Notes Placeholder 2"/>
+          <p:cNvSpPr>
+            <a:spLocks noGrp="1"/>
+          </p:cNvSpPr>
+          <p:nvPr>
+            <p:ph type="body" idx="1"/>
+          </p:nvPr>
+        </p:nvSpPr>
+        <p:spPr/>
+        <p:txBody>
+          <a:bodyPr/>
+          <a:lstStyle/>
+          <a:p>
+            <a:r>
+              <a:rPr lang="en-US" dirty="0"/>
+              <a:t/>
+            </a:r>
+            <a:endParaRPr lang="en-US" dirty="0"/>
+          </a:p>
+        </p:txBody>
+      </p:sp>
+      <p:sp>
+        <p:nvSpPr>
+          <p:cNvPr id="4" name="Slide Number Placeholder 3"/>
+          <p:cNvSpPr>
+            <a:spLocks noGrp="1"/>
+          </p:cNvSpPr>
+          <p:nvPr>
+            <p:ph type="sldNum" sz="quarter" idx="10"/>
+          </p:nvPr>
+        </p:nvSpPr>
+        <p:spPr/>
+        <p:txBody>
+          <a:bodyPr/>
+          <a:lstStyle/>
+          <a:p>
+            <a:fld id="{F7021451-1387-4CA6-816F-3879F97B5CBC}" type="slidenum">
+              <a:rPr lang="en-US"/>
+              <a:t>8</a:t>
+            </a:fld>
+            <a:endParaRPr lang="en-US"/>
+          </a:p>
+        </p:txBody>
+      </p:sp>
+    </p:spTree>
+    <p:extLst>
+      <p:ext uri="{BB962C8B-B14F-4D97-AF65-F5344CB8AC3E}">
+        <p14:creationId xmlns:p14="http://schemas.microsoft.com/office/powerpoint/2010/main" val="1024086991"/>
+      </p:ext>
+    </p:extLst>
+  </p:cSld>
+  <p:clrMapOvr>
+    <a:masterClrMapping/>
+  </p:clrMapOvr>
+</p:notes>
+</file>
+
 <file path=ppt/slideLayouts/slideLayout1.xml><?xml version="1.0" encoding="utf-8"?>
 <p:sldLayout xmlns:a="http://schemas.openxmlformats.org/drawingml/2006/main" xmlns:r="http://schemas.openxmlformats.org/officeDocument/2006/relationships" xmlns:p="http://schemas.openxmlformats.org/presentationml/2006/main" preserve="1">
   <p:cSld name="DEFAULT">
@@ -2033,7 +2122,7 @@
                 <a:ea typeface="Calibri" pitchFamily="34" charset="-122"/>
                 <a:cs typeface="Calibri" pitchFamily="34" charset="-120"/>
               </a:rPr>
-              <a:t>1 / 7</a:t>
+              <a:t>1 / 8</a:t>
             </a:r>
             <a:endParaRPr lang="en-US" sz="1000" dirty="0"/>
           </a:p>
@@ -4158,7 +4247,7 @@
                 <a:ea typeface="Calibri" pitchFamily="34" charset="-122"/>
                 <a:cs typeface="Calibri" pitchFamily="34" charset="-120"/>
               </a:rPr>
-              <a:t>2 / 7</a:t>
+              <a:t>2 / 8</a:t>
             </a:r>
             <a:endParaRPr lang="en-US" sz="1000" dirty="0"/>
           </a:p>
@@ -5471,7 +5560,7 @@
                 <a:ea typeface="Calibri" pitchFamily="34" charset="-122"/>
                 <a:cs typeface="Calibri" pitchFamily="34" charset="-120"/>
               </a:rPr>
-              <a:t>3 / 7</a:t>
+              <a:t>3 / 8</a:t>
             </a:r>
             <a:endParaRPr lang="en-US" sz="1000" dirty="0"/>
           </a:p>
@@ -5524,11 +5613,11 @@
             <a:avLst/>
           </a:prstGeom>
           <a:solidFill>
-            <a:srgbClr val="D97706"/>
+            <a:srgbClr val="0284C7"/>
           </a:solidFill>
           <a:ln w="12700">
             <a:solidFill>
-              <a:srgbClr val="D97706"/>
+              <a:srgbClr val="0284C7"/>
             </a:solidFill>
             <a:prstDash val="solid"/>
           </a:ln>
@@ -5549,11 +5638,11 @@
             <a:avLst/>
           </a:prstGeom>
           <a:solidFill>
-            <a:srgbClr val="D97706"/>
+            <a:srgbClr val="059669"/>
           </a:solidFill>
           <a:ln w="12700">
             <a:solidFill>
-              <a:srgbClr val="D97706"/>
+              <a:srgbClr val="059669"/>
             </a:solidFill>
             <a:prstDash val="solid"/>
           </a:ln>
@@ -5586,13 +5675,13 @@
             <a:r>
               <a:rPr lang="en-US" sz="1200" b="1" spc="400" kern="0" dirty="0">
                 <a:solidFill>
-                  <a:srgbClr val="D97706"/>
-                </a:solidFill>
-                <a:latin typeface="Calibri" pitchFamily="34" charset="0"/>
-                <a:ea typeface="Calibri" pitchFamily="34" charset="-122"/>
-                <a:cs typeface="Calibri" pitchFamily="34" charset="-120"/>
-              </a:rPr>
-              <a:t>STEP 2 CK PREP</a:t>
+                  <a:srgbClr val="0284C7"/>
+                </a:solidFill>
+                <a:latin typeface="Calibri" pitchFamily="34" charset="0"/>
+                <a:ea typeface="Calibri" pitchFamily="34" charset="-122"/>
+                <a:cs typeface="Calibri" pitchFamily="34" charset="-120"/>
+              </a:rPr>
+              <a:t>WHAT WE'LL COVER IN JUNE  ·  STEP 1</a:t>
             </a:r>
             <a:endParaRPr lang="en-US" sz="1200" dirty="0"/>
           </a:p>
@@ -5631,7 +5720,7 @@
                 <a:ea typeface="Arial Black" pitchFamily="34" charset="-122"/>
                 <a:cs typeface="Arial Black" pitchFamily="34" charset="-120"/>
               </a:rPr>
-              <a:t>Clinical knowledge. Scaled score 1–300.</a:t>
+              <a:t>30 days, 3 chapters, mapped page-by-page to FA 2025</a:t>
             </a:r>
             <a:endParaRPr lang="en-US" sz="3200" dirty="0"/>
           </a:p>
@@ -5639,868 +5728,56 @@
       </p:sp>
       <p:sp>
         <p:nvSpPr>
-          <p:cNvPr id="6" name="Text 4"/>
+          <p:cNvPr id="6" name="Shape 4"/>
           <p:cNvSpPr/>
           <p:nvPr/>
         </p:nvSpPr>
         <p:spPr>
           <a:xfrm>
             <a:off x="502920" y="1874520"/>
-            <a:ext cx="4698059" cy="256032"/>
-          </a:xfrm>
-          <a:prstGeom prst="rect">
-            <a:avLst/>
-          </a:prstGeom>
-          <a:noFill/>
-          <a:ln/>
-        </p:spPr>
-        <p:txBody>
-          <a:bodyPr wrap="square" lIns="0" tIns="0" rIns="0" bIns="0" rtlCol="0" anchor="ctr"/>
-          <a:lstStyle/>
-          <a:p>
-            <a:pPr indent="0" marL="0">
-              <a:buNone/>
-            </a:pPr>
-            <a:r>
-              <a:rPr lang="en-US" sz="1100" b="1" spc="300" kern="0" dirty="0">
-                <a:solidFill>
-                  <a:srgbClr val="B45309"/>
-                </a:solidFill>
-                <a:latin typeface="Calibri" pitchFamily="34" charset="0"/>
-                <a:ea typeface="Calibri" pitchFamily="34" charset="-122"/>
-                <a:cs typeface="Calibri" pitchFamily="34" charset="-120"/>
-              </a:rPr>
-              <a:t>WHAT'S TESTED</a:t>
-            </a:r>
-            <a:endParaRPr lang="en-US" sz="1100" dirty="0"/>
-          </a:p>
-        </p:txBody>
-      </p:sp>
-      <p:sp>
-        <p:nvSpPr>
-          <p:cNvPr id="7" name="Text 5"/>
-          <p:cNvSpPr/>
-          <p:nvPr/>
-        </p:nvSpPr>
-        <p:spPr>
-          <a:xfrm>
-            <a:off x="502920" y="2194560"/>
-            <a:ext cx="3783659" cy="274320"/>
-          </a:xfrm>
-          <a:prstGeom prst="rect">
-            <a:avLst/>
-          </a:prstGeom>
-          <a:noFill/>
-          <a:ln/>
-        </p:spPr>
-        <p:txBody>
-          <a:bodyPr wrap="square" lIns="0" tIns="0" rIns="0" bIns="0" rtlCol="0" anchor="ctr"/>
-          <a:lstStyle/>
-          <a:p>
-            <a:pPr indent="0" marL="0">
-              <a:buNone/>
-            </a:pPr>
-            <a:r>
-              <a:rPr lang="en-US" sz="1200" dirty="0">
-                <a:solidFill>
-                  <a:srgbClr val="0C2A3D"/>
-                </a:solidFill>
-                <a:latin typeface="Calibri" pitchFamily="34" charset="0"/>
-                <a:ea typeface="Calibri" pitchFamily="34" charset="-122"/>
-                <a:cs typeface="Calibri" pitchFamily="34" charset="-120"/>
-              </a:rPr>
-              <a:t>Diagnosis</a:t>
-            </a:r>
-            <a:endParaRPr lang="en-US" sz="1200" dirty="0"/>
-          </a:p>
-        </p:txBody>
-      </p:sp>
-      <p:sp>
-        <p:nvSpPr>
-          <p:cNvPr id="8" name="Text 6"/>
-          <p:cNvSpPr/>
-          <p:nvPr/>
-        </p:nvSpPr>
-        <p:spPr>
-          <a:xfrm>
-            <a:off x="4286579" y="2194560"/>
-            <a:ext cx="914400" cy="274320"/>
-          </a:xfrm>
-          <a:prstGeom prst="rect">
-            <a:avLst/>
-          </a:prstGeom>
-          <a:noFill/>
-          <a:ln/>
-        </p:spPr>
-        <p:txBody>
-          <a:bodyPr wrap="square" lIns="0" tIns="0" rIns="0" bIns="0" rtlCol="0" anchor="ctr"/>
-          <a:lstStyle/>
-          <a:p>
-            <a:pPr algn="r" indent="0" marL="0">
-              <a:buNone/>
-            </a:pPr>
-            <a:r>
-              <a:rPr lang="en-US" sz="1200" b="1" dirty="0">
-                <a:solidFill>
-                  <a:srgbClr val="D97706"/>
-                </a:solidFill>
-                <a:latin typeface="Calibri" pitchFamily="34" charset="0"/>
-                <a:ea typeface="Calibri" pitchFamily="34" charset="-122"/>
-                <a:cs typeface="Calibri" pitchFamily="34" charset="-120"/>
-              </a:rPr>
-              <a:t>34–46%</a:t>
-            </a:r>
-            <a:endParaRPr lang="en-US" sz="1200" dirty="0"/>
-          </a:p>
-        </p:txBody>
-      </p:sp>
-      <p:sp>
-        <p:nvSpPr>
-          <p:cNvPr id="9" name="Text 7"/>
-          <p:cNvSpPr/>
-          <p:nvPr/>
-        </p:nvSpPr>
-        <p:spPr>
-          <a:xfrm>
-            <a:off x="502920" y="2523744"/>
-            <a:ext cx="3783659" cy="274320"/>
-          </a:xfrm>
-          <a:prstGeom prst="rect">
-            <a:avLst/>
-          </a:prstGeom>
-          <a:noFill/>
-          <a:ln/>
-        </p:spPr>
-        <p:txBody>
-          <a:bodyPr wrap="square" lIns="0" tIns="0" rIns="0" bIns="0" rtlCol="0" anchor="ctr"/>
-          <a:lstStyle/>
-          <a:p>
-            <a:pPr indent="0" marL="0">
-              <a:buNone/>
-            </a:pPr>
-            <a:r>
-              <a:rPr lang="en-US" sz="1200" dirty="0">
-                <a:solidFill>
-                  <a:srgbClr val="0C2A3D"/>
-                </a:solidFill>
-                <a:latin typeface="Calibri" pitchFamily="34" charset="0"/>
-                <a:ea typeface="Calibri" pitchFamily="34" charset="-122"/>
-                <a:cs typeface="Calibri" pitchFamily="34" charset="-120"/>
-              </a:rPr>
-              <a:t>Pharmacotherapy &amp; management</a:t>
-            </a:r>
-            <a:endParaRPr lang="en-US" sz="1200" dirty="0"/>
-          </a:p>
-        </p:txBody>
-      </p:sp>
-      <p:sp>
-        <p:nvSpPr>
-          <p:cNvPr id="10" name="Text 8"/>
-          <p:cNvSpPr/>
-          <p:nvPr/>
-        </p:nvSpPr>
-        <p:spPr>
-          <a:xfrm>
-            <a:off x="4286579" y="2523744"/>
-            <a:ext cx="914400" cy="274320"/>
-          </a:xfrm>
-          <a:prstGeom prst="rect">
-            <a:avLst/>
-          </a:prstGeom>
-          <a:noFill/>
-          <a:ln/>
-        </p:spPr>
-        <p:txBody>
-          <a:bodyPr wrap="square" lIns="0" tIns="0" rIns="0" bIns="0" rtlCol="0" anchor="ctr"/>
-          <a:lstStyle/>
-          <a:p>
-            <a:pPr algn="r" indent="0" marL="0">
-              <a:buNone/>
-            </a:pPr>
-            <a:r>
-              <a:rPr lang="en-US" sz="1200" b="1" dirty="0">
-                <a:solidFill>
-                  <a:srgbClr val="D97706"/>
-                </a:solidFill>
-                <a:latin typeface="Calibri" pitchFamily="34" charset="0"/>
-                <a:ea typeface="Calibri" pitchFamily="34" charset="-122"/>
-                <a:cs typeface="Calibri" pitchFamily="34" charset="-120"/>
-              </a:rPr>
-              <a:t>26–38%</a:t>
-            </a:r>
-            <a:endParaRPr lang="en-US" sz="1200" dirty="0"/>
-          </a:p>
-        </p:txBody>
-      </p:sp>
-      <p:sp>
-        <p:nvSpPr>
-          <p:cNvPr id="11" name="Text 9"/>
-          <p:cNvSpPr/>
-          <p:nvPr/>
-        </p:nvSpPr>
-        <p:spPr>
-          <a:xfrm>
-            <a:off x="502920" y="2852928"/>
-            <a:ext cx="3783659" cy="274320"/>
-          </a:xfrm>
-          <a:prstGeom prst="rect">
-            <a:avLst/>
-          </a:prstGeom>
-          <a:noFill/>
-          <a:ln/>
-        </p:spPr>
-        <p:txBody>
-          <a:bodyPr wrap="square" lIns="0" tIns="0" rIns="0" bIns="0" rtlCol="0" anchor="ctr"/>
-          <a:lstStyle/>
-          <a:p>
-            <a:pPr indent="0" marL="0">
-              <a:buNone/>
-            </a:pPr>
-            <a:r>
-              <a:rPr lang="en-US" sz="1200" dirty="0">
-                <a:solidFill>
-                  <a:srgbClr val="0C2A3D"/>
-                </a:solidFill>
-                <a:latin typeface="Calibri" pitchFamily="34" charset="0"/>
-                <a:ea typeface="Calibri" pitchFamily="34" charset="-122"/>
-                <a:cs typeface="Calibri" pitchFamily="34" charset="-120"/>
-              </a:rPr>
-              <a:t>Health maintenance &amp; prevention</a:t>
-            </a:r>
-            <a:endParaRPr lang="en-US" sz="1200" dirty="0"/>
-          </a:p>
-        </p:txBody>
-      </p:sp>
-      <p:sp>
-        <p:nvSpPr>
-          <p:cNvPr id="12" name="Text 10"/>
-          <p:cNvSpPr/>
-          <p:nvPr/>
-        </p:nvSpPr>
-        <p:spPr>
-          <a:xfrm>
-            <a:off x="4286579" y="2852928"/>
-            <a:ext cx="914400" cy="274320"/>
-          </a:xfrm>
-          <a:prstGeom prst="rect">
-            <a:avLst/>
-          </a:prstGeom>
-          <a:noFill/>
-          <a:ln/>
-        </p:spPr>
-        <p:txBody>
-          <a:bodyPr wrap="square" lIns="0" tIns="0" rIns="0" bIns="0" rtlCol="0" anchor="ctr"/>
-          <a:lstStyle/>
-          <a:p>
-            <a:pPr algn="r" indent="0" marL="0">
-              <a:buNone/>
-            </a:pPr>
-            <a:r>
-              <a:rPr lang="en-US" sz="1200" b="1" dirty="0">
-                <a:solidFill>
-                  <a:srgbClr val="D97706"/>
-                </a:solidFill>
-                <a:latin typeface="Calibri" pitchFamily="34" charset="0"/>
-                <a:ea typeface="Calibri" pitchFamily="34" charset="-122"/>
-                <a:cs typeface="Calibri" pitchFamily="34" charset="-120"/>
-              </a:rPr>
-              <a:t>8–12%</a:t>
-            </a:r>
-            <a:endParaRPr lang="en-US" sz="1200" dirty="0"/>
-          </a:p>
-        </p:txBody>
-      </p:sp>
-      <p:sp>
-        <p:nvSpPr>
-          <p:cNvPr id="13" name="Text 11"/>
-          <p:cNvSpPr/>
-          <p:nvPr/>
-        </p:nvSpPr>
-        <p:spPr>
-          <a:xfrm>
-            <a:off x="502920" y="3182112"/>
-            <a:ext cx="3783659" cy="274320"/>
-          </a:xfrm>
-          <a:prstGeom prst="rect">
-            <a:avLst/>
-          </a:prstGeom>
-          <a:noFill/>
-          <a:ln/>
-        </p:spPr>
-        <p:txBody>
-          <a:bodyPr wrap="square" lIns="0" tIns="0" rIns="0" bIns="0" rtlCol="0" anchor="ctr"/>
-          <a:lstStyle/>
-          <a:p>
-            <a:pPr indent="0" marL="0">
-              <a:buNone/>
-            </a:pPr>
-            <a:r>
-              <a:rPr lang="en-US" sz="1200" dirty="0">
-                <a:solidFill>
-                  <a:srgbClr val="0C2A3D"/>
-                </a:solidFill>
-                <a:latin typeface="Calibri" pitchFamily="34" charset="0"/>
-                <a:ea typeface="Calibri" pitchFamily="34" charset="-122"/>
-                <a:cs typeface="Calibri" pitchFamily="34" charset="-120"/>
-              </a:rPr>
-              <a:t>Ethics / professionalism</a:t>
-            </a:r>
-            <a:endParaRPr lang="en-US" sz="1200" dirty="0"/>
-          </a:p>
-        </p:txBody>
-      </p:sp>
-      <p:sp>
-        <p:nvSpPr>
-          <p:cNvPr id="14" name="Text 12"/>
-          <p:cNvSpPr/>
-          <p:nvPr/>
-        </p:nvSpPr>
-        <p:spPr>
-          <a:xfrm>
-            <a:off x="4286579" y="3182112"/>
-            <a:ext cx="914400" cy="274320"/>
-          </a:xfrm>
-          <a:prstGeom prst="rect">
-            <a:avLst/>
-          </a:prstGeom>
-          <a:noFill/>
-          <a:ln/>
-        </p:spPr>
-        <p:txBody>
-          <a:bodyPr wrap="square" lIns="0" tIns="0" rIns="0" bIns="0" rtlCol="0" anchor="ctr"/>
-          <a:lstStyle/>
-          <a:p>
-            <a:pPr algn="r" indent="0" marL="0">
-              <a:buNone/>
-            </a:pPr>
-            <a:r>
-              <a:rPr lang="en-US" sz="1200" b="1" dirty="0">
-                <a:solidFill>
-                  <a:srgbClr val="D97706"/>
-                </a:solidFill>
-                <a:latin typeface="Calibri" pitchFamily="34" charset="0"/>
-                <a:ea typeface="Calibri" pitchFamily="34" charset="-122"/>
-                <a:cs typeface="Calibri" pitchFamily="34" charset="-120"/>
-              </a:rPr>
-              <a:t>5–7%</a:t>
-            </a:r>
-            <a:endParaRPr lang="en-US" sz="1200" dirty="0"/>
-          </a:p>
-        </p:txBody>
-      </p:sp>
-      <p:sp>
-        <p:nvSpPr>
-          <p:cNvPr id="15" name="Text 13"/>
-          <p:cNvSpPr/>
-          <p:nvPr/>
-        </p:nvSpPr>
-        <p:spPr>
-          <a:xfrm>
-            <a:off x="502920" y="3511296"/>
-            <a:ext cx="3783659" cy="274320"/>
-          </a:xfrm>
-          <a:prstGeom prst="rect">
-            <a:avLst/>
-          </a:prstGeom>
-          <a:noFill/>
-          <a:ln/>
-        </p:spPr>
-        <p:txBody>
-          <a:bodyPr wrap="square" lIns="0" tIns="0" rIns="0" bIns="0" rtlCol="0" anchor="ctr"/>
-          <a:lstStyle/>
-          <a:p>
-            <a:pPr indent="0" marL="0">
-              <a:buNone/>
-            </a:pPr>
-            <a:r>
-              <a:rPr lang="en-US" sz="1200" dirty="0">
-                <a:solidFill>
-                  <a:srgbClr val="0C2A3D"/>
-                </a:solidFill>
-                <a:latin typeface="Calibri" pitchFamily="34" charset="0"/>
-                <a:ea typeface="Calibri" pitchFamily="34" charset="-122"/>
-                <a:cs typeface="Calibri" pitchFamily="34" charset="-120"/>
-              </a:rPr>
-              <a:t>Patient safety / systems-based practice</a:t>
-            </a:r>
-            <a:endParaRPr lang="en-US" sz="1200" dirty="0"/>
-          </a:p>
-        </p:txBody>
-      </p:sp>
-      <p:sp>
-        <p:nvSpPr>
-          <p:cNvPr id="16" name="Text 14"/>
-          <p:cNvSpPr/>
-          <p:nvPr/>
-        </p:nvSpPr>
-        <p:spPr>
-          <a:xfrm>
-            <a:off x="4286579" y="3511296"/>
-            <a:ext cx="914400" cy="274320"/>
-          </a:xfrm>
-          <a:prstGeom prst="rect">
-            <a:avLst/>
-          </a:prstGeom>
-          <a:noFill/>
-          <a:ln/>
-        </p:spPr>
-        <p:txBody>
-          <a:bodyPr wrap="square" lIns="0" tIns="0" rIns="0" bIns="0" rtlCol="0" anchor="ctr"/>
-          <a:lstStyle/>
-          <a:p>
-            <a:pPr algn="r" indent="0" marL="0">
-              <a:buNone/>
-            </a:pPr>
-            <a:r>
-              <a:rPr lang="en-US" sz="1200" b="1" dirty="0">
-                <a:solidFill>
-                  <a:srgbClr val="D97706"/>
-                </a:solidFill>
-                <a:latin typeface="Calibri" pitchFamily="34" charset="0"/>
-                <a:ea typeface="Calibri" pitchFamily="34" charset="-122"/>
-                <a:cs typeface="Calibri" pitchFamily="34" charset="-120"/>
-              </a:rPr>
-              <a:t>5–7%</a:t>
-            </a:r>
-            <a:endParaRPr lang="en-US" sz="1200" dirty="0"/>
-          </a:p>
-        </p:txBody>
-      </p:sp>
-      <p:sp>
-        <p:nvSpPr>
-          <p:cNvPr id="17" name="Text 15"/>
-          <p:cNvSpPr/>
-          <p:nvPr/>
-        </p:nvSpPr>
-        <p:spPr>
-          <a:xfrm>
-            <a:off x="502920" y="4023360"/>
-            <a:ext cx="4698059" cy="256032"/>
-          </a:xfrm>
-          <a:prstGeom prst="rect">
-            <a:avLst/>
-          </a:prstGeom>
-          <a:noFill/>
-          <a:ln/>
-        </p:spPr>
-        <p:txBody>
-          <a:bodyPr wrap="square" lIns="0" tIns="0" rIns="0" bIns="0" rtlCol="0" anchor="ctr"/>
-          <a:lstStyle/>
-          <a:p>
-            <a:pPr indent="0" marL="0">
-              <a:buNone/>
-            </a:pPr>
-            <a:r>
-              <a:rPr lang="en-US" sz="1100" b="1" spc="300" kern="0" dirty="0">
-                <a:solidFill>
-                  <a:srgbClr val="B45309"/>
-                </a:solidFill>
-                <a:latin typeface="Calibri" pitchFamily="34" charset="0"/>
-                <a:ea typeface="Calibri" pitchFamily="34" charset="-122"/>
-                <a:cs typeface="Calibri" pitchFamily="34" charset="-120"/>
-              </a:rPr>
-              <a:t>FORMAT</a:t>
-            </a:r>
-            <a:endParaRPr lang="en-US" sz="1100" dirty="0"/>
-          </a:p>
-        </p:txBody>
-      </p:sp>
-      <p:sp>
-        <p:nvSpPr>
-          <p:cNvPr id="18" name="Text 16"/>
-          <p:cNvSpPr/>
-          <p:nvPr/>
-        </p:nvSpPr>
-        <p:spPr>
-          <a:xfrm>
-            <a:off x="502920" y="4343400"/>
-            <a:ext cx="3326459" cy="274320"/>
-          </a:xfrm>
-          <a:prstGeom prst="rect">
-            <a:avLst/>
-          </a:prstGeom>
-          <a:noFill/>
-          <a:ln/>
-        </p:spPr>
-        <p:txBody>
-          <a:bodyPr wrap="square" lIns="0" tIns="0" rIns="0" bIns="0" rtlCol="0" anchor="ctr"/>
-          <a:lstStyle/>
-          <a:p>
-            <a:pPr indent="0" marL="0">
-              <a:buNone/>
-            </a:pPr>
-            <a:r>
-              <a:rPr lang="en-US" sz="1200" dirty="0">
-                <a:solidFill>
-                  <a:srgbClr val="345671"/>
-                </a:solidFill>
-                <a:latin typeface="Calibri" pitchFamily="34" charset="0"/>
-                <a:ea typeface="Calibri" pitchFamily="34" charset="-122"/>
-                <a:cs typeface="Calibri" pitchFamily="34" charset="-120"/>
-              </a:rPr>
-              <a:t>Question blocks</a:t>
-            </a:r>
-            <a:endParaRPr lang="en-US" sz="1200" dirty="0"/>
-          </a:p>
-        </p:txBody>
-      </p:sp>
-      <p:sp>
-        <p:nvSpPr>
-          <p:cNvPr id="19" name="Text 17"/>
-          <p:cNvSpPr/>
-          <p:nvPr/>
-        </p:nvSpPr>
-        <p:spPr>
-          <a:xfrm>
-            <a:off x="3829379" y="4343400"/>
-            <a:ext cx="1371600" cy="274320"/>
-          </a:xfrm>
-          <a:prstGeom prst="rect">
-            <a:avLst/>
-          </a:prstGeom>
-          <a:noFill/>
-          <a:ln/>
-        </p:spPr>
-        <p:txBody>
-          <a:bodyPr wrap="square" lIns="0" tIns="0" rIns="0" bIns="0" rtlCol="0" anchor="ctr"/>
-          <a:lstStyle/>
-          <a:p>
-            <a:pPr algn="r" indent="0" marL="0">
-              <a:buNone/>
-            </a:pPr>
-            <a:r>
-              <a:rPr lang="en-US" sz="1200" b="1" dirty="0">
-                <a:solidFill>
-                  <a:srgbClr val="0C2A3D"/>
-                </a:solidFill>
-                <a:latin typeface="Calibri" pitchFamily="34" charset="0"/>
-                <a:ea typeface="Calibri" pitchFamily="34" charset="-122"/>
-                <a:cs typeface="Calibri" pitchFamily="34" charset="-120"/>
-              </a:rPr>
-              <a:t>8</a:t>
-            </a:r>
-            <a:endParaRPr lang="en-US" sz="1200" dirty="0"/>
-          </a:p>
-        </p:txBody>
-      </p:sp>
-      <p:sp>
-        <p:nvSpPr>
-          <p:cNvPr id="20" name="Text 18"/>
-          <p:cNvSpPr/>
-          <p:nvPr/>
-        </p:nvSpPr>
-        <p:spPr>
-          <a:xfrm>
-            <a:off x="502920" y="4672584"/>
-            <a:ext cx="3326459" cy="274320"/>
-          </a:xfrm>
-          <a:prstGeom prst="rect">
-            <a:avLst/>
-          </a:prstGeom>
-          <a:noFill/>
-          <a:ln/>
-        </p:spPr>
-        <p:txBody>
-          <a:bodyPr wrap="square" lIns="0" tIns="0" rIns="0" bIns="0" rtlCol="0" anchor="ctr"/>
-          <a:lstStyle/>
-          <a:p>
-            <a:pPr indent="0" marL="0">
-              <a:buNone/>
-            </a:pPr>
-            <a:r>
-              <a:rPr lang="en-US" sz="1200" dirty="0">
-                <a:solidFill>
-                  <a:srgbClr val="345671"/>
-                </a:solidFill>
-                <a:latin typeface="Calibri" pitchFamily="34" charset="0"/>
-                <a:ea typeface="Calibri" pitchFamily="34" charset="-122"/>
-                <a:cs typeface="Calibri" pitchFamily="34" charset="-120"/>
-              </a:rPr>
-              <a:t>Items (max)</a:t>
-            </a:r>
-            <a:endParaRPr lang="en-US" sz="1200" dirty="0"/>
-          </a:p>
-        </p:txBody>
-      </p:sp>
-      <p:sp>
-        <p:nvSpPr>
-          <p:cNvPr id="21" name="Text 19"/>
-          <p:cNvSpPr/>
-          <p:nvPr/>
-        </p:nvSpPr>
-        <p:spPr>
-          <a:xfrm>
-            <a:off x="3829379" y="4672584"/>
-            <a:ext cx="1371600" cy="274320"/>
-          </a:xfrm>
-          <a:prstGeom prst="rect">
-            <a:avLst/>
-          </a:prstGeom>
-          <a:noFill/>
-          <a:ln/>
-        </p:spPr>
-        <p:txBody>
-          <a:bodyPr wrap="square" lIns="0" tIns="0" rIns="0" bIns="0" rtlCol="0" anchor="ctr"/>
-          <a:lstStyle/>
-          <a:p>
-            <a:pPr algn="r" indent="0" marL="0">
-              <a:buNone/>
-            </a:pPr>
-            <a:r>
-              <a:rPr lang="en-US" sz="1200" b="1" dirty="0">
-                <a:solidFill>
-                  <a:srgbClr val="0C2A3D"/>
-                </a:solidFill>
-                <a:latin typeface="Calibri" pitchFamily="34" charset="0"/>
-                <a:ea typeface="Calibri" pitchFamily="34" charset="-122"/>
-                <a:cs typeface="Calibri" pitchFamily="34" charset="-120"/>
-              </a:rPr>
-              <a:t>318</a:t>
-            </a:r>
-            <a:endParaRPr lang="en-US" sz="1200" dirty="0"/>
-          </a:p>
-        </p:txBody>
-      </p:sp>
-      <p:sp>
-        <p:nvSpPr>
-          <p:cNvPr id="22" name="Text 20"/>
-          <p:cNvSpPr/>
-          <p:nvPr/>
-        </p:nvSpPr>
-        <p:spPr>
-          <a:xfrm>
-            <a:off x="502920" y="5001768"/>
-            <a:ext cx="3326459" cy="274320"/>
-          </a:xfrm>
-          <a:prstGeom prst="rect">
-            <a:avLst/>
-          </a:prstGeom>
-          <a:noFill/>
-          <a:ln/>
-        </p:spPr>
-        <p:txBody>
-          <a:bodyPr wrap="square" lIns="0" tIns="0" rIns="0" bIns="0" rtlCol="0" anchor="ctr"/>
-          <a:lstStyle/>
-          <a:p>
-            <a:pPr indent="0" marL="0">
-              <a:buNone/>
-            </a:pPr>
-            <a:r>
-              <a:rPr lang="en-US" sz="1200" dirty="0">
-                <a:solidFill>
-                  <a:srgbClr val="345671"/>
-                </a:solidFill>
-                <a:latin typeface="Calibri" pitchFamily="34" charset="0"/>
-                <a:ea typeface="Calibri" pitchFamily="34" charset="-122"/>
-                <a:cs typeface="Calibri" pitchFamily="34" charset="-120"/>
-              </a:rPr>
-              <a:t>Test day length</a:t>
-            </a:r>
-            <a:endParaRPr lang="en-US" sz="1200" dirty="0"/>
-          </a:p>
-        </p:txBody>
-      </p:sp>
-      <p:sp>
-        <p:nvSpPr>
-          <p:cNvPr id="23" name="Text 21"/>
-          <p:cNvSpPr/>
-          <p:nvPr/>
-        </p:nvSpPr>
-        <p:spPr>
-          <a:xfrm>
-            <a:off x="3829379" y="5001768"/>
-            <a:ext cx="1371600" cy="274320"/>
-          </a:xfrm>
-          <a:prstGeom prst="rect">
-            <a:avLst/>
-          </a:prstGeom>
-          <a:noFill/>
-          <a:ln/>
-        </p:spPr>
-        <p:txBody>
-          <a:bodyPr wrap="square" lIns="0" tIns="0" rIns="0" bIns="0" rtlCol="0" anchor="ctr"/>
-          <a:lstStyle/>
-          <a:p>
-            <a:pPr algn="r" indent="0" marL="0">
-              <a:buNone/>
-            </a:pPr>
-            <a:r>
-              <a:rPr lang="en-US" sz="1200" b="1" dirty="0">
-                <a:solidFill>
-                  <a:srgbClr val="0C2A3D"/>
-                </a:solidFill>
-                <a:latin typeface="Calibri" pitchFamily="34" charset="0"/>
-                <a:ea typeface="Calibri" pitchFamily="34" charset="-122"/>
-                <a:cs typeface="Calibri" pitchFamily="34" charset="-120"/>
-              </a:rPr>
-              <a:t>9 hours</a:t>
-            </a:r>
-            <a:endParaRPr lang="en-US" sz="1200" dirty="0"/>
-          </a:p>
-        </p:txBody>
-      </p:sp>
-      <p:sp>
-        <p:nvSpPr>
-          <p:cNvPr id="24" name="Text 22"/>
-          <p:cNvSpPr/>
-          <p:nvPr/>
-        </p:nvSpPr>
-        <p:spPr>
-          <a:xfrm>
-            <a:off x="502920" y="5330952"/>
-            <a:ext cx="3326459" cy="274320"/>
-          </a:xfrm>
-          <a:prstGeom prst="rect">
-            <a:avLst/>
-          </a:prstGeom>
-          <a:noFill/>
-          <a:ln/>
-        </p:spPr>
-        <p:txBody>
-          <a:bodyPr wrap="square" lIns="0" tIns="0" rIns="0" bIns="0" rtlCol="0" anchor="ctr"/>
-          <a:lstStyle/>
-          <a:p>
-            <a:pPr indent="0" marL="0">
-              <a:buNone/>
-            </a:pPr>
-            <a:r>
-              <a:rPr lang="en-US" sz="1200" dirty="0">
-                <a:solidFill>
-                  <a:srgbClr val="345671"/>
-                </a:solidFill>
-                <a:latin typeface="Calibri" pitchFamily="34" charset="0"/>
-                <a:ea typeface="Calibri" pitchFamily="34" charset="-122"/>
-                <a:cs typeface="Calibri" pitchFamily="34" charset="-120"/>
-              </a:rPr>
-              <a:t>Score scale</a:t>
-            </a:r>
-            <a:endParaRPr lang="en-US" sz="1200" dirty="0"/>
-          </a:p>
-        </p:txBody>
-      </p:sp>
-      <p:sp>
-        <p:nvSpPr>
-          <p:cNvPr id="25" name="Text 23"/>
-          <p:cNvSpPr/>
-          <p:nvPr/>
-        </p:nvSpPr>
-        <p:spPr>
-          <a:xfrm>
-            <a:off x="3829379" y="5330952"/>
-            <a:ext cx="1371600" cy="274320"/>
-          </a:xfrm>
-          <a:prstGeom prst="rect">
-            <a:avLst/>
-          </a:prstGeom>
-          <a:noFill/>
-          <a:ln/>
-        </p:spPr>
-        <p:txBody>
-          <a:bodyPr wrap="square" lIns="0" tIns="0" rIns="0" bIns="0" rtlCol="0" anchor="ctr"/>
-          <a:lstStyle/>
-          <a:p>
-            <a:pPr algn="r" indent="0" marL="0">
-              <a:buNone/>
-            </a:pPr>
-            <a:r>
-              <a:rPr lang="en-US" sz="1200" b="1" dirty="0">
-                <a:solidFill>
-                  <a:srgbClr val="0C2A3D"/>
-                </a:solidFill>
-                <a:latin typeface="Calibri" pitchFamily="34" charset="0"/>
-                <a:ea typeface="Calibri" pitchFamily="34" charset="-122"/>
-                <a:cs typeface="Calibri" pitchFamily="34" charset="-120"/>
-              </a:rPr>
-              <a:t>1 – 300 (mean ≈ 248)</a:t>
-            </a:r>
-            <a:endParaRPr lang="en-US" sz="1200" dirty="0"/>
-          </a:p>
-        </p:txBody>
-      </p:sp>
-      <p:sp>
-        <p:nvSpPr>
-          <p:cNvPr id="26" name="Text 24"/>
-          <p:cNvSpPr/>
-          <p:nvPr/>
-        </p:nvSpPr>
-        <p:spPr>
-          <a:xfrm>
-            <a:off x="5475299" y="1874520"/>
-            <a:ext cx="6213476" cy="256032"/>
-          </a:xfrm>
-          <a:prstGeom prst="rect">
-            <a:avLst/>
-          </a:prstGeom>
-          <a:noFill/>
-          <a:ln/>
-        </p:spPr>
-        <p:txBody>
-          <a:bodyPr wrap="square" lIns="0" tIns="0" rIns="0" bIns="0" rtlCol="0" anchor="ctr"/>
-          <a:lstStyle/>
-          <a:p>
-            <a:pPr indent="0" marL="0">
-              <a:buNone/>
-            </a:pPr>
-            <a:r>
-              <a:rPr lang="en-US" sz="1100" b="1" spc="300" kern="0" dirty="0">
-                <a:solidFill>
-                  <a:srgbClr val="B45309"/>
-                </a:solidFill>
-                <a:latin typeface="Calibri" pitchFamily="34" charset="0"/>
-                <a:ea typeface="Calibri" pitchFamily="34" charset="-122"/>
-                <a:cs typeface="Calibri" pitchFamily="34" charset="-120"/>
-              </a:rPr>
-              <a:t>HIGH-YIELD CONTENT</a:t>
-            </a:r>
-            <a:endParaRPr lang="en-US" sz="1100" dirty="0"/>
-          </a:p>
-        </p:txBody>
-      </p:sp>
-      <p:sp>
-        <p:nvSpPr>
-          <p:cNvPr id="27" name="Shape 25"/>
-          <p:cNvSpPr/>
-          <p:nvPr/>
-        </p:nvSpPr>
-        <p:spPr>
-          <a:xfrm>
-            <a:off x="5475299" y="2194560"/>
-            <a:ext cx="6213476" cy="1508760"/>
-          </a:xfrm>
-          <a:prstGeom prst="rect">
-            <a:avLst/>
-          </a:prstGeom>
-          <a:solidFill>
-            <a:srgbClr val="FEF3C7"/>
+            <a:ext cx="3545738" cy="4251960"/>
+          </a:xfrm>
+          <a:prstGeom prst="rect">
+            <a:avLst/>
+          </a:prstGeom>
+          <a:solidFill>
+            <a:srgbClr val="FFFFFF"/>
           </a:solidFill>
           <a:ln w="9525">
             <a:solidFill>
-              <a:srgbClr val="EAB308"/>
+              <a:srgbClr val="D6E8F5"/>
             </a:solidFill>
             <a:prstDash val="solid"/>
           </a:ln>
-        </p:spPr>
-      </p:sp>
-      <p:sp>
-        <p:nvSpPr>
-          <p:cNvPr id="28" name="Shape 26"/>
-          <p:cNvSpPr/>
-          <p:nvPr/>
-        </p:nvSpPr>
-        <p:spPr>
-          <a:xfrm>
-            <a:off x="5475299" y="2194560"/>
-            <a:ext cx="91440" cy="1508760"/>
-          </a:xfrm>
-          <a:prstGeom prst="rect">
-            <a:avLst/>
-          </a:prstGeom>
-          <a:solidFill>
-            <a:srgbClr val="D97706"/>
+          <a:effectLst>
+            <a:outerShdw sx="100000" sy="100000" kx="0" ky="0" algn="bl" rotWithShape="0" blurRad="127000" dist="12700" dir="5400000">
+              <a:srgbClr val="0C2A3D">
+                <a:alpha val="8000"/>
+              </a:srgbClr>
+            </a:outerShdw>
+          </a:effectLst>
+        </p:spPr>
+      </p:sp>
+      <p:sp>
+        <p:nvSpPr>
+          <p:cNvPr id="7" name="Shape 5"/>
+          <p:cNvSpPr/>
+          <p:nvPr/>
+        </p:nvSpPr>
+        <p:spPr>
+          <a:xfrm>
+            <a:off x="502920" y="1874520"/>
+            <a:ext cx="3545738" cy="91440"/>
+          </a:xfrm>
+          <a:prstGeom prst="rect">
+            <a:avLst/>
+          </a:prstGeom>
+          <a:solidFill>
+            <a:srgbClr val="0284C7"/>
           </a:solidFill>
           <a:ln w="12700">
             <a:solidFill>
-              <a:srgbClr val="D97706"/>
+              <a:srgbClr val="0284C7"/>
             </a:solidFill>
             <a:prstDash val="solid"/>
           </a:ln>
@@ -6508,14 +5785,14 @@
       </p:sp>
       <p:sp>
         <p:nvSpPr>
-          <p:cNvPr id="29" name="Text 27"/>
-          <p:cNvSpPr/>
-          <p:nvPr/>
-        </p:nvSpPr>
-        <p:spPr>
-          <a:xfrm>
-            <a:off x="5749619" y="2331720"/>
-            <a:ext cx="5847716" cy="310896"/>
+          <p:cNvPr id="8" name="Text 6"/>
+          <p:cNvSpPr/>
+          <p:nvPr/>
+        </p:nvSpPr>
+        <p:spPr>
+          <a:xfrm>
+            <a:off x="685800" y="2057400"/>
+            <a:ext cx="3179978" cy="365760"/>
           </a:xfrm>
           <a:prstGeom prst="rect">
             <a:avLst/>
@@ -6531,30 +5808,30 @@
               <a:buNone/>
             </a:pPr>
             <a:r>
-              <a:rPr lang="en-US" sz="1400" b="1" dirty="0">
-                <a:solidFill>
-                  <a:srgbClr val="0C2A3D"/>
-                </a:solidFill>
-                <a:latin typeface="Calibri" pitchFamily="34" charset="0"/>
-                <a:ea typeface="Calibri" pitchFamily="34" charset="-122"/>
-                <a:cs typeface="Calibri" pitchFamily="34" charset="-120"/>
-              </a:rPr>
-              <a:t>Disciplines</a:t>
-            </a:r>
-            <a:endParaRPr lang="en-US" sz="1400" dirty="0"/>
-          </a:p>
-        </p:txBody>
-      </p:sp>
-      <p:sp>
-        <p:nvSpPr>
-          <p:cNvPr id="30" name="Text 28"/>
-          <p:cNvSpPr/>
-          <p:nvPr/>
-        </p:nvSpPr>
-        <p:spPr>
-          <a:xfrm>
-            <a:off x="5749619" y="2651760"/>
-            <a:ext cx="5847716" cy="960120"/>
+              <a:rPr lang="en-US" sz="1800" b="1" dirty="0">
+                <a:solidFill>
+                  <a:srgbClr val="075985"/>
+                </a:solidFill>
+                <a:latin typeface="Calibri" pitchFamily="34" charset="0"/>
+                <a:ea typeface="Calibri" pitchFamily="34" charset="-122"/>
+                <a:cs typeface="Calibri" pitchFamily="34" charset="-120"/>
+              </a:rPr>
+              <a:t>Cardiovascular</a:t>
+            </a:r>
+            <a:endParaRPr lang="en-US" sz="1800" dirty="0"/>
+          </a:p>
+        </p:txBody>
+      </p:sp>
+      <p:sp>
+        <p:nvSpPr>
+          <p:cNvPr id="9" name="Text 7"/>
+          <p:cNvSpPr/>
+          <p:nvPr/>
+        </p:nvSpPr>
+        <p:spPr>
+          <a:xfrm>
+            <a:off x="685800" y="2423160"/>
+            <a:ext cx="3179978" cy="256032"/>
           </a:xfrm>
           <a:prstGeom prst="rect">
             <a:avLst/>
@@ -6570,40 +5847,40 @@
               <a:buNone/>
             </a:pPr>
             <a:r>
-              <a:rPr lang="en-US" sz="1200" dirty="0">
-                <a:solidFill>
-                  <a:srgbClr val="345671"/>
-                </a:solidFill>
-                <a:latin typeface="Calibri" pitchFamily="34" charset="0"/>
-                <a:ea typeface="Calibri" pitchFamily="34" charset="-122"/>
-                <a:cs typeface="Calibri" pitchFamily="34" charset="-120"/>
-              </a:rPr>
-              <a:t>Internal Medicine (50–60%) · Surgery (25–30%) · Pediatrics (20–25%) · OB-GYN (10–20%) · Psychiatry (10–15%) · Family Medicine</a:t>
-            </a:r>
-            <a:endParaRPr lang="en-US" sz="1200" dirty="0"/>
-          </a:p>
-        </p:txBody>
-      </p:sp>
-      <p:sp>
-        <p:nvSpPr>
-          <p:cNvPr id="31" name="Shape 29"/>
-          <p:cNvSpPr/>
-          <p:nvPr/>
-        </p:nvSpPr>
-        <p:spPr>
-          <a:xfrm>
-            <a:off x="5475299" y="3886200"/>
-            <a:ext cx="6213476" cy="1508760"/>
-          </a:xfrm>
-          <a:prstGeom prst="rect">
-            <a:avLst/>
-          </a:prstGeom>
-          <a:solidFill>
-            <a:srgbClr val="FEF3C7"/>
-          </a:solidFill>
-          <a:ln w="9525">
+              <a:rPr lang="en-US" sz="1100" i="1" dirty="0">
+                <a:solidFill>
+                  <a:srgbClr val="6B87A3"/>
+                </a:solidFill>
+                <a:latin typeface="Calibri" pitchFamily="34" charset="0"/>
+                <a:ea typeface="Calibri" pitchFamily="34" charset="-122"/>
+                <a:cs typeface="Calibri" pitchFamily="34" charset="-120"/>
+              </a:rPr>
+              <a:t>12 days  ·  Jun 1–12</a:t>
+            </a:r>
+            <a:endParaRPr lang="en-US" sz="1100" dirty="0"/>
+          </a:p>
+        </p:txBody>
+      </p:sp>
+      <p:sp>
+        <p:nvSpPr>
+          <p:cNvPr id="10" name="Shape 8"/>
+          <p:cNvSpPr/>
+          <p:nvPr/>
+        </p:nvSpPr>
+        <p:spPr>
+          <a:xfrm>
+            <a:off x="667512" y="2878455"/>
+            <a:ext cx="54864" cy="54864"/>
+          </a:xfrm>
+          <a:prstGeom prst="rect">
+            <a:avLst/>
+          </a:prstGeom>
+          <a:solidFill>
+            <a:srgbClr val="0284C7"/>
+          </a:solidFill>
+          <a:ln w="12700">
             <a:solidFill>
-              <a:srgbClr val="EAB308"/>
+              <a:srgbClr val="0284C7"/>
             </a:solidFill>
             <a:prstDash val="solid"/>
           </a:ln>
@@ -6611,24 +5888,63 @@
       </p:sp>
       <p:sp>
         <p:nvSpPr>
-          <p:cNvPr id="32" name="Shape 30"/>
-          <p:cNvSpPr/>
-          <p:nvPr/>
-        </p:nvSpPr>
-        <p:spPr>
-          <a:xfrm>
-            <a:off x="5475299" y="3886200"/>
-            <a:ext cx="91440" cy="1508760"/>
-          </a:xfrm>
-          <a:prstGeom prst="rect">
-            <a:avLst/>
-          </a:prstGeom>
-          <a:solidFill>
-            <a:srgbClr val="D97706"/>
+          <p:cNvPr id="11" name="Text 9"/>
+          <p:cNvSpPr/>
+          <p:nvPr/>
+        </p:nvSpPr>
+        <p:spPr>
+          <a:xfrm>
+            <a:off x="795528" y="2788920"/>
+            <a:ext cx="3179978" cy="270510"/>
+          </a:xfrm>
+          <a:prstGeom prst="rect">
+            <a:avLst/>
+          </a:prstGeom>
+          <a:noFill/>
+          <a:ln/>
+        </p:spPr>
+        <p:txBody>
+          <a:bodyPr wrap="square" lIns="0" tIns="0" rIns="0" bIns="0" rtlCol="0" anchor="ctr"/>
+          <a:lstStyle/>
+          <a:p>
+            <a:pPr indent="0" marL="0">
+              <a:buNone/>
+            </a:pPr>
+            <a:r>
+              <a:rPr lang="en-US" sz="1100" dirty="0">
+                <a:solidFill>
+                  <a:srgbClr val="0C2A3D"/>
+                </a:solidFill>
+                <a:latin typeface="Calibri" pitchFamily="34" charset="0"/>
+                <a:ea typeface="Calibri" pitchFamily="34" charset="-122"/>
+                <a:cs typeface="Calibri" pitchFamily="34" charset="-120"/>
+              </a:rPr>
+              <a:t>1  · Orientation &amp; overview</a:t>
+            </a:r>
+            <a:endParaRPr lang="en-US" sz="1100" dirty="0"/>
+          </a:p>
+        </p:txBody>
+      </p:sp>
+      <p:sp>
+        <p:nvSpPr>
+          <p:cNvPr id="12" name="Shape 10"/>
+          <p:cNvSpPr/>
+          <p:nvPr/>
+        </p:nvSpPr>
+        <p:spPr>
+          <a:xfrm>
+            <a:off x="667512" y="3148965"/>
+            <a:ext cx="54864" cy="54864"/>
+          </a:xfrm>
+          <a:prstGeom prst="rect">
+            <a:avLst/>
+          </a:prstGeom>
+          <a:solidFill>
+            <a:srgbClr val="0284C7"/>
           </a:solidFill>
           <a:ln w="12700">
             <a:solidFill>
-              <a:srgbClr val="D97706"/>
+              <a:srgbClr val="0284C7"/>
             </a:solidFill>
             <a:prstDash val="solid"/>
           </a:ln>
@@ -6636,14 +5952,654 @@
       </p:sp>
       <p:sp>
         <p:nvSpPr>
+          <p:cNvPr id="13" name="Text 11"/>
+          <p:cNvSpPr/>
+          <p:nvPr/>
+        </p:nvSpPr>
+        <p:spPr>
+          <a:xfrm>
+            <a:off x="795528" y="3059430"/>
+            <a:ext cx="3179978" cy="270510"/>
+          </a:xfrm>
+          <a:prstGeom prst="rect">
+            <a:avLst/>
+          </a:prstGeom>
+          <a:noFill/>
+          <a:ln/>
+        </p:spPr>
+        <p:txBody>
+          <a:bodyPr wrap="square" lIns="0" tIns="0" rIns="0" bIns="0" rtlCol="0" anchor="ctr"/>
+          <a:lstStyle/>
+          <a:p>
+            <a:pPr indent="0" marL="0">
+              <a:buNone/>
+            </a:pPr>
+            <a:r>
+              <a:rPr lang="en-US" sz="1100" dirty="0">
+                <a:solidFill>
+                  <a:srgbClr val="0C2A3D"/>
+                </a:solidFill>
+                <a:latin typeface="Calibri" pitchFamily="34" charset="0"/>
+                <a:ea typeface="Calibri" pitchFamily="34" charset="-122"/>
+                <a:cs typeface="Calibri" pitchFamily="34" charset="-120"/>
+              </a:rPr>
+              <a:t>2  · Embryology, fetal circulation, CHDs</a:t>
+            </a:r>
+            <a:endParaRPr lang="en-US" sz="1100" dirty="0"/>
+          </a:p>
+        </p:txBody>
+      </p:sp>
+      <p:sp>
+        <p:nvSpPr>
+          <p:cNvPr id="14" name="Shape 12"/>
+          <p:cNvSpPr/>
+          <p:nvPr/>
+        </p:nvSpPr>
+        <p:spPr>
+          <a:xfrm>
+            <a:off x="667512" y="3419475"/>
+            <a:ext cx="54864" cy="54864"/>
+          </a:xfrm>
+          <a:prstGeom prst="rect">
+            <a:avLst/>
+          </a:prstGeom>
+          <a:solidFill>
+            <a:srgbClr val="0284C7"/>
+          </a:solidFill>
+          <a:ln w="12700">
+            <a:solidFill>
+              <a:srgbClr val="0284C7"/>
+            </a:solidFill>
+            <a:prstDash val="solid"/>
+          </a:ln>
+        </p:spPr>
+      </p:sp>
+      <p:sp>
+        <p:nvSpPr>
+          <p:cNvPr id="15" name="Text 13"/>
+          <p:cNvSpPr/>
+          <p:nvPr/>
+        </p:nvSpPr>
+        <p:spPr>
+          <a:xfrm>
+            <a:off x="795528" y="3329940"/>
+            <a:ext cx="3179978" cy="270510"/>
+          </a:xfrm>
+          <a:prstGeom prst="rect">
+            <a:avLst/>
+          </a:prstGeom>
+          <a:noFill/>
+          <a:ln/>
+        </p:spPr>
+        <p:txBody>
+          <a:bodyPr wrap="square" lIns="0" tIns="0" rIns="0" bIns="0" rtlCol="0" anchor="ctr"/>
+          <a:lstStyle/>
+          <a:p>
+            <a:pPr indent="0" marL="0">
+              <a:buNone/>
+            </a:pPr>
+            <a:r>
+              <a:rPr lang="en-US" sz="1100" dirty="0">
+                <a:solidFill>
+                  <a:srgbClr val="0C2A3D"/>
+                </a:solidFill>
+                <a:latin typeface="Calibri" pitchFamily="34" charset="0"/>
+                <a:ea typeface="Calibri" pitchFamily="34" charset="-122"/>
+                <a:cs typeface="Calibri" pitchFamily="34" charset="-120"/>
+              </a:rPr>
+              <a:t>3  · Anatomy: CT, CXR, pericardium</a:t>
+            </a:r>
+            <a:endParaRPr lang="en-US" sz="1100" dirty="0"/>
+          </a:p>
+        </p:txBody>
+      </p:sp>
+      <p:sp>
+        <p:nvSpPr>
+          <p:cNvPr id="16" name="Shape 14"/>
+          <p:cNvSpPr/>
+          <p:nvPr/>
+        </p:nvSpPr>
+        <p:spPr>
+          <a:xfrm>
+            <a:off x="667512" y="3689985"/>
+            <a:ext cx="54864" cy="54864"/>
+          </a:xfrm>
+          <a:prstGeom prst="rect">
+            <a:avLst/>
+          </a:prstGeom>
+          <a:solidFill>
+            <a:srgbClr val="0284C7"/>
+          </a:solidFill>
+          <a:ln w="12700">
+            <a:solidFill>
+              <a:srgbClr val="0284C7"/>
+            </a:solidFill>
+            <a:prstDash val="solid"/>
+          </a:ln>
+        </p:spPr>
+      </p:sp>
+      <p:sp>
+        <p:nvSpPr>
+          <p:cNvPr id="17" name="Text 15"/>
+          <p:cNvSpPr/>
+          <p:nvPr/>
+        </p:nvSpPr>
+        <p:spPr>
+          <a:xfrm>
+            <a:off x="795528" y="3600450"/>
+            <a:ext cx="3179978" cy="270510"/>
+          </a:xfrm>
+          <a:prstGeom prst="rect">
+            <a:avLst/>
+          </a:prstGeom>
+          <a:noFill/>
+          <a:ln/>
+        </p:spPr>
+        <p:txBody>
+          <a:bodyPr wrap="square" lIns="0" tIns="0" rIns="0" bIns="0" rtlCol="0" anchor="ctr"/>
+          <a:lstStyle/>
+          <a:p>
+            <a:pPr indent="0" marL="0">
+              <a:buNone/>
+            </a:pPr>
+            <a:r>
+              <a:rPr lang="en-US" sz="1100" dirty="0">
+                <a:solidFill>
+                  <a:srgbClr val="0C2A3D"/>
+                </a:solidFill>
+                <a:latin typeface="Calibri" pitchFamily="34" charset="0"/>
+                <a:ea typeface="Calibri" pitchFamily="34" charset="-122"/>
+                <a:cs typeface="Calibri" pitchFamily="34" charset="-120"/>
+              </a:rPr>
+              <a:t>4  · Pump physiology, PV loops, cycle</a:t>
+            </a:r>
+            <a:endParaRPr lang="en-US" sz="1100" dirty="0"/>
+          </a:p>
+        </p:txBody>
+      </p:sp>
+      <p:sp>
+        <p:nvSpPr>
+          <p:cNvPr id="18" name="Shape 16"/>
+          <p:cNvSpPr/>
+          <p:nvPr/>
+        </p:nvSpPr>
+        <p:spPr>
+          <a:xfrm>
+            <a:off x="667512" y="3960495"/>
+            <a:ext cx="54864" cy="54864"/>
+          </a:xfrm>
+          <a:prstGeom prst="rect">
+            <a:avLst/>
+          </a:prstGeom>
+          <a:solidFill>
+            <a:srgbClr val="0284C7"/>
+          </a:solidFill>
+          <a:ln w="12700">
+            <a:solidFill>
+              <a:srgbClr val="0284C7"/>
+            </a:solidFill>
+            <a:prstDash val="solid"/>
+          </a:ln>
+        </p:spPr>
+      </p:sp>
+      <p:sp>
+        <p:nvSpPr>
+          <p:cNvPr id="19" name="Text 17"/>
+          <p:cNvSpPr/>
+          <p:nvPr/>
+        </p:nvSpPr>
+        <p:spPr>
+          <a:xfrm>
+            <a:off x="795528" y="3870960"/>
+            <a:ext cx="3179978" cy="270510"/>
+          </a:xfrm>
+          <a:prstGeom prst="rect">
+            <a:avLst/>
+          </a:prstGeom>
+          <a:noFill/>
+          <a:ln/>
+        </p:spPr>
+        <p:txBody>
+          <a:bodyPr wrap="square" lIns="0" tIns="0" rIns="0" bIns="0" rtlCol="0" anchor="ctr"/>
+          <a:lstStyle/>
+          <a:p>
+            <a:pPr indent="0" marL="0">
+              <a:buNone/>
+            </a:pPr>
+            <a:r>
+              <a:rPr lang="en-US" sz="1100" dirty="0">
+                <a:solidFill>
+                  <a:srgbClr val="0C2A3D"/>
+                </a:solidFill>
+                <a:latin typeface="Calibri" pitchFamily="34" charset="0"/>
+                <a:ea typeface="Calibri" pitchFamily="34" charset="-122"/>
+                <a:cs typeface="Calibri" pitchFamily="34" charset="-120"/>
+              </a:rPr>
+              <a:t>5  · Heart sounds, splitting, murmurs</a:t>
+            </a:r>
+            <a:endParaRPr lang="en-US" sz="1100" dirty="0"/>
+          </a:p>
+        </p:txBody>
+      </p:sp>
+      <p:sp>
+        <p:nvSpPr>
+          <p:cNvPr id="20" name="Shape 18"/>
+          <p:cNvSpPr/>
+          <p:nvPr/>
+        </p:nvSpPr>
+        <p:spPr>
+          <a:xfrm>
+            <a:off x="667512" y="4231005"/>
+            <a:ext cx="54864" cy="54864"/>
+          </a:xfrm>
+          <a:prstGeom prst="rect">
+            <a:avLst/>
+          </a:prstGeom>
+          <a:solidFill>
+            <a:srgbClr val="0284C7"/>
+          </a:solidFill>
+          <a:ln w="12700">
+            <a:solidFill>
+              <a:srgbClr val="0284C7"/>
+            </a:solidFill>
+            <a:prstDash val="solid"/>
+          </a:ln>
+        </p:spPr>
+      </p:sp>
+      <p:sp>
+        <p:nvSpPr>
+          <p:cNvPr id="21" name="Text 19"/>
+          <p:cNvSpPr/>
+          <p:nvPr/>
+        </p:nvSpPr>
+        <p:spPr>
+          <a:xfrm>
+            <a:off x="795528" y="4141470"/>
+            <a:ext cx="3179978" cy="270510"/>
+          </a:xfrm>
+          <a:prstGeom prst="rect">
+            <a:avLst/>
+          </a:prstGeom>
+          <a:noFill/>
+          <a:ln/>
+        </p:spPr>
+        <p:txBody>
+          <a:bodyPr wrap="square" lIns="0" tIns="0" rIns="0" bIns="0" rtlCol="0" anchor="ctr"/>
+          <a:lstStyle/>
+          <a:p>
+            <a:pPr indent="0" marL="0">
+              <a:buNone/>
+            </a:pPr>
+            <a:r>
+              <a:rPr lang="en-US" sz="1100" dirty="0">
+                <a:solidFill>
+                  <a:srgbClr val="0C2A3D"/>
+                </a:solidFill>
+                <a:latin typeface="Calibri" pitchFamily="34" charset="0"/>
+                <a:ea typeface="Calibri" pitchFamily="34" charset="-122"/>
+                <a:cs typeface="Calibri" pitchFamily="34" charset="-120"/>
+              </a:rPr>
+              <a:t>6  · Action potentials, ECG, BP control</a:t>
+            </a:r>
+            <a:endParaRPr lang="en-US" sz="1100" dirty="0"/>
+          </a:p>
+        </p:txBody>
+      </p:sp>
+      <p:sp>
+        <p:nvSpPr>
+          <p:cNvPr id="22" name="Shape 20"/>
+          <p:cNvSpPr/>
+          <p:nvPr/>
+        </p:nvSpPr>
+        <p:spPr>
+          <a:xfrm>
+            <a:off x="667512" y="4501515"/>
+            <a:ext cx="54864" cy="54864"/>
+          </a:xfrm>
+          <a:prstGeom prst="rect">
+            <a:avLst/>
+          </a:prstGeom>
+          <a:solidFill>
+            <a:srgbClr val="0284C7"/>
+          </a:solidFill>
+          <a:ln w="12700">
+            <a:solidFill>
+              <a:srgbClr val="0284C7"/>
+            </a:solidFill>
+            <a:prstDash val="solid"/>
+          </a:ln>
+        </p:spPr>
+      </p:sp>
+      <p:sp>
+        <p:nvSpPr>
+          <p:cNvPr id="23" name="Text 21"/>
+          <p:cNvSpPr/>
+          <p:nvPr/>
+        </p:nvSpPr>
+        <p:spPr>
+          <a:xfrm>
+            <a:off x="795528" y="4411980"/>
+            <a:ext cx="3179978" cy="270510"/>
+          </a:xfrm>
+          <a:prstGeom prst="rect">
+            <a:avLst/>
+          </a:prstGeom>
+          <a:noFill/>
+          <a:ln/>
+        </p:spPr>
+        <p:txBody>
+          <a:bodyPr wrap="square" lIns="0" tIns="0" rIns="0" bIns="0" rtlCol="0" anchor="ctr"/>
+          <a:lstStyle/>
+          <a:p>
+            <a:pPr indent="0" marL="0">
+              <a:buNone/>
+            </a:pPr>
+            <a:r>
+              <a:rPr lang="en-US" sz="1100" dirty="0">
+                <a:solidFill>
+                  <a:srgbClr val="0C2A3D"/>
+                </a:solidFill>
+                <a:latin typeface="Calibri" pitchFamily="34" charset="0"/>
+                <a:ea typeface="Calibri" pitchFamily="34" charset="-122"/>
+                <a:cs typeface="Calibri" pitchFamily="34" charset="-120"/>
+              </a:rPr>
+              <a:t>7  · CAD, IHD, MI evolution + complications</a:t>
+            </a:r>
+            <a:endParaRPr lang="en-US" sz="1100" dirty="0"/>
+          </a:p>
+        </p:txBody>
+      </p:sp>
+      <p:sp>
+        <p:nvSpPr>
+          <p:cNvPr id="24" name="Shape 22"/>
+          <p:cNvSpPr/>
+          <p:nvPr/>
+        </p:nvSpPr>
+        <p:spPr>
+          <a:xfrm>
+            <a:off x="667512" y="4772025"/>
+            <a:ext cx="54864" cy="54864"/>
+          </a:xfrm>
+          <a:prstGeom prst="rect">
+            <a:avLst/>
+          </a:prstGeom>
+          <a:solidFill>
+            <a:srgbClr val="0284C7"/>
+          </a:solidFill>
+          <a:ln w="12700">
+            <a:solidFill>
+              <a:srgbClr val="0284C7"/>
+            </a:solidFill>
+            <a:prstDash val="solid"/>
+          </a:ln>
+        </p:spPr>
+      </p:sp>
+      <p:sp>
+        <p:nvSpPr>
+          <p:cNvPr id="25" name="Text 23"/>
+          <p:cNvSpPr/>
+          <p:nvPr/>
+        </p:nvSpPr>
+        <p:spPr>
+          <a:xfrm>
+            <a:off x="795528" y="4682490"/>
+            <a:ext cx="3179978" cy="270510"/>
+          </a:xfrm>
+          <a:prstGeom prst="rect">
+            <a:avLst/>
+          </a:prstGeom>
+          <a:noFill/>
+          <a:ln/>
+        </p:spPr>
+        <p:txBody>
+          <a:bodyPr wrap="square" lIns="0" tIns="0" rIns="0" bIns="0" rtlCol="0" anchor="ctr"/>
+          <a:lstStyle/>
+          <a:p>
+            <a:pPr indent="0" marL="0">
+              <a:buNone/>
+            </a:pPr>
+            <a:r>
+              <a:rPr lang="en-US" sz="1100" dirty="0">
+                <a:solidFill>
+                  <a:srgbClr val="0C2A3D"/>
+                </a:solidFill>
+                <a:latin typeface="Calibri" pitchFamily="34" charset="0"/>
+                <a:ea typeface="Calibri" pitchFamily="34" charset="-122"/>
+                <a:cs typeface="Calibri" pitchFamily="34" charset="-120"/>
+              </a:rPr>
+              <a:t>8  · HTN, atherosclerosis, aneurysms</a:t>
+            </a:r>
+            <a:endParaRPr lang="en-US" sz="1100" dirty="0"/>
+          </a:p>
+        </p:txBody>
+      </p:sp>
+      <p:sp>
+        <p:nvSpPr>
+          <p:cNvPr id="26" name="Shape 24"/>
+          <p:cNvSpPr/>
+          <p:nvPr/>
+        </p:nvSpPr>
+        <p:spPr>
+          <a:xfrm>
+            <a:off x="667512" y="5042535"/>
+            <a:ext cx="54864" cy="54864"/>
+          </a:xfrm>
+          <a:prstGeom prst="rect">
+            <a:avLst/>
+          </a:prstGeom>
+          <a:solidFill>
+            <a:srgbClr val="0284C7"/>
+          </a:solidFill>
+          <a:ln w="12700">
+            <a:solidFill>
+              <a:srgbClr val="0284C7"/>
+            </a:solidFill>
+            <a:prstDash val="solid"/>
+          </a:ln>
+        </p:spPr>
+      </p:sp>
+      <p:sp>
+        <p:nvSpPr>
+          <p:cNvPr id="27" name="Text 25"/>
+          <p:cNvSpPr/>
+          <p:nvPr/>
+        </p:nvSpPr>
+        <p:spPr>
+          <a:xfrm>
+            <a:off x="795528" y="4953000"/>
+            <a:ext cx="3179978" cy="270510"/>
+          </a:xfrm>
+          <a:prstGeom prst="rect">
+            <a:avLst/>
+          </a:prstGeom>
+          <a:noFill/>
+          <a:ln/>
+        </p:spPr>
+        <p:txBody>
+          <a:bodyPr wrap="square" lIns="0" tIns="0" rIns="0" bIns="0" rtlCol="0" anchor="ctr"/>
+          <a:lstStyle/>
+          <a:p>
+            <a:pPr indent="0" marL="0">
+              <a:buNone/>
+            </a:pPr>
+            <a:r>
+              <a:rPr lang="en-US" sz="1100" dirty="0">
+                <a:solidFill>
+                  <a:srgbClr val="0C2A3D"/>
+                </a:solidFill>
+                <a:latin typeface="Calibri" pitchFamily="34" charset="0"/>
+                <a:ea typeface="Calibri" pitchFamily="34" charset="-122"/>
+                <a:cs typeface="Calibri" pitchFamily="34" charset="-120"/>
+              </a:rPr>
+              <a:t>9  · Cardiomyopathies, HF, shock</a:t>
+            </a:r>
+            <a:endParaRPr lang="en-US" sz="1100" dirty="0"/>
+          </a:p>
+        </p:txBody>
+      </p:sp>
+      <p:sp>
+        <p:nvSpPr>
+          <p:cNvPr id="28" name="Shape 26"/>
+          <p:cNvSpPr/>
+          <p:nvPr/>
+        </p:nvSpPr>
+        <p:spPr>
+          <a:xfrm>
+            <a:off x="667512" y="5313045"/>
+            <a:ext cx="54864" cy="54864"/>
+          </a:xfrm>
+          <a:prstGeom prst="rect">
+            <a:avLst/>
+          </a:prstGeom>
+          <a:solidFill>
+            <a:srgbClr val="0284C7"/>
+          </a:solidFill>
+          <a:ln w="12700">
+            <a:solidFill>
+              <a:srgbClr val="0284C7"/>
+            </a:solidFill>
+            <a:prstDash val="solid"/>
+          </a:ln>
+        </p:spPr>
+      </p:sp>
+      <p:sp>
+        <p:nvSpPr>
+          <p:cNvPr id="29" name="Text 27"/>
+          <p:cNvSpPr/>
+          <p:nvPr/>
+        </p:nvSpPr>
+        <p:spPr>
+          <a:xfrm>
+            <a:off x="795528" y="5223510"/>
+            <a:ext cx="3179978" cy="270510"/>
+          </a:xfrm>
+          <a:prstGeom prst="rect">
+            <a:avLst/>
+          </a:prstGeom>
+          <a:noFill/>
+          <a:ln/>
+        </p:spPr>
+        <p:txBody>
+          <a:bodyPr wrap="square" lIns="0" tIns="0" rIns="0" bIns="0" rtlCol="0" anchor="ctr"/>
+          <a:lstStyle/>
+          <a:p>
+            <a:pPr indent="0" marL="0">
+              <a:buNone/>
+            </a:pPr>
+            <a:r>
+              <a:rPr lang="en-US" sz="1100" dirty="0">
+                <a:solidFill>
+                  <a:srgbClr val="0C2A3D"/>
+                </a:solidFill>
+                <a:latin typeface="Calibri" pitchFamily="34" charset="0"/>
+                <a:ea typeface="Calibri" pitchFamily="34" charset="-122"/>
+                <a:cs typeface="Calibri" pitchFamily="34" charset="-120"/>
+              </a:rPr>
+              <a:t>10 · Rheumatic, IE, myocarditis, vasculitis</a:t>
+            </a:r>
+            <a:endParaRPr lang="en-US" sz="1100" dirty="0"/>
+          </a:p>
+        </p:txBody>
+      </p:sp>
+      <p:sp>
+        <p:nvSpPr>
+          <p:cNvPr id="30" name="Shape 28"/>
+          <p:cNvSpPr/>
+          <p:nvPr/>
+        </p:nvSpPr>
+        <p:spPr>
+          <a:xfrm>
+            <a:off x="667512" y="5583555"/>
+            <a:ext cx="54864" cy="54864"/>
+          </a:xfrm>
+          <a:prstGeom prst="rect">
+            <a:avLst/>
+          </a:prstGeom>
+          <a:solidFill>
+            <a:srgbClr val="0284C7"/>
+          </a:solidFill>
+          <a:ln w="12700">
+            <a:solidFill>
+              <a:srgbClr val="0284C7"/>
+            </a:solidFill>
+            <a:prstDash val="solid"/>
+          </a:ln>
+        </p:spPr>
+      </p:sp>
+      <p:sp>
+        <p:nvSpPr>
+          <p:cNvPr id="31" name="Text 29"/>
+          <p:cNvSpPr/>
+          <p:nvPr/>
+        </p:nvSpPr>
+        <p:spPr>
+          <a:xfrm>
+            <a:off x="795528" y="5494020"/>
+            <a:ext cx="3179978" cy="270510"/>
+          </a:xfrm>
+          <a:prstGeom prst="rect">
+            <a:avLst/>
+          </a:prstGeom>
+          <a:noFill/>
+          <a:ln/>
+        </p:spPr>
+        <p:txBody>
+          <a:bodyPr wrap="square" lIns="0" tIns="0" rIns="0" bIns="0" rtlCol="0" anchor="ctr"/>
+          <a:lstStyle/>
+          <a:p>
+            <a:pPr indent="0" marL="0">
+              <a:buNone/>
+            </a:pPr>
+            <a:r>
+              <a:rPr lang="en-US" sz="1100" dirty="0">
+                <a:solidFill>
+                  <a:srgbClr val="0C2A3D"/>
+                </a:solidFill>
+                <a:latin typeface="Calibri" pitchFamily="34" charset="0"/>
+                <a:ea typeface="Calibri" pitchFamily="34" charset="-122"/>
+                <a:cs typeface="Calibri" pitchFamily="34" charset="-120"/>
+              </a:rPr>
+              <a:t>11 · Cardiovascular pharmacology</a:t>
+            </a:r>
+            <a:endParaRPr lang="en-US" sz="1100" dirty="0"/>
+          </a:p>
+        </p:txBody>
+      </p:sp>
+      <p:sp>
+        <p:nvSpPr>
+          <p:cNvPr id="32" name="Shape 30"/>
+          <p:cNvSpPr/>
+          <p:nvPr/>
+        </p:nvSpPr>
+        <p:spPr>
+          <a:xfrm>
+            <a:off x="667512" y="5854065"/>
+            <a:ext cx="54864" cy="54864"/>
+          </a:xfrm>
+          <a:prstGeom prst="rect">
+            <a:avLst/>
+          </a:prstGeom>
+          <a:solidFill>
+            <a:srgbClr val="0284C7"/>
+          </a:solidFill>
+          <a:ln w="12700">
+            <a:solidFill>
+              <a:srgbClr val="0284C7"/>
+            </a:solidFill>
+            <a:prstDash val="solid"/>
+          </a:ln>
+        </p:spPr>
+      </p:sp>
+      <p:sp>
+        <p:nvSpPr>
           <p:cNvPr id="33" name="Text 31"/>
           <p:cNvSpPr/>
           <p:nvPr/>
         </p:nvSpPr>
         <p:spPr>
           <a:xfrm>
-            <a:off x="5749619" y="4023360"/>
-            <a:ext cx="5847716" cy="310896"/>
+            <a:off x="795528" y="5764530"/>
+            <a:ext cx="3179978" cy="270510"/>
           </a:xfrm>
           <a:prstGeom prst="rect">
             <a:avLst/>
@@ -6659,7 +6615,7 @@
               <a:buNone/>
             </a:pPr>
             <a:r>
-              <a:rPr lang="en-US" sz="1400" b="1" dirty="0">
+              <a:rPr lang="en-US" sz="1100" dirty="0">
                 <a:solidFill>
                   <a:srgbClr val="0C2A3D"/>
                 </a:solidFill>
@@ -6667,22 +6623,79 @@
                 <a:ea typeface="Calibri" pitchFamily="34" charset="-122"/>
                 <a:cs typeface="Calibri" pitchFamily="34" charset="-120"/>
               </a:rPr>
-              <a:t>Organ systems &amp; cross-cutting</a:t>
-            </a:r>
-            <a:endParaRPr lang="en-US" sz="1400" dirty="0"/>
-          </a:p>
-        </p:txBody>
-      </p:sp>
-      <p:sp>
-        <p:nvSpPr>
-          <p:cNvPr id="34" name="Text 32"/>
-          <p:cNvSpPr/>
-          <p:nvPr/>
-        </p:nvSpPr>
-        <p:spPr>
-          <a:xfrm>
-            <a:off x="5749619" y="4343400"/>
-            <a:ext cx="5847716" cy="960120"/>
+              <a:t>12 · Epi/Biostats applied to CV</a:t>
+            </a:r>
+            <a:endParaRPr lang="en-US" sz="1100" dirty="0"/>
+          </a:p>
+        </p:txBody>
+      </p:sp>
+      <p:sp>
+        <p:nvSpPr>
+          <p:cNvPr id="34" name="Shape 32"/>
+          <p:cNvSpPr/>
+          <p:nvPr/>
+        </p:nvSpPr>
+        <p:spPr>
+          <a:xfrm>
+            <a:off x="4322978" y="1874520"/>
+            <a:ext cx="3545738" cy="4251960"/>
+          </a:xfrm>
+          <a:prstGeom prst="rect">
+            <a:avLst/>
+          </a:prstGeom>
+          <a:solidFill>
+            <a:srgbClr val="FFFFFF"/>
+          </a:solidFill>
+          <a:ln w="9525">
+            <a:solidFill>
+              <a:srgbClr val="D6E8F5"/>
+            </a:solidFill>
+            <a:prstDash val="solid"/>
+          </a:ln>
+          <a:effectLst>
+            <a:outerShdw sx="100000" sy="100000" kx="0" ky="0" algn="bl" rotWithShape="0" blurRad="127000" dist="12700" dir="5400000">
+              <a:srgbClr val="0C2A3D">
+                <a:alpha val="8000"/>
+              </a:srgbClr>
+            </a:outerShdw>
+          </a:effectLst>
+        </p:spPr>
+      </p:sp>
+      <p:sp>
+        <p:nvSpPr>
+          <p:cNvPr id="35" name="Shape 33"/>
+          <p:cNvSpPr/>
+          <p:nvPr/>
+        </p:nvSpPr>
+        <p:spPr>
+          <a:xfrm>
+            <a:off x="4322978" y="1874520"/>
+            <a:ext cx="3545738" cy="91440"/>
+          </a:xfrm>
+          <a:prstGeom prst="rect">
+            <a:avLst/>
+          </a:prstGeom>
+          <a:solidFill>
+            <a:srgbClr val="059669"/>
+          </a:solidFill>
+          <a:ln w="12700">
+            <a:solidFill>
+              <a:srgbClr val="059669"/>
+            </a:solidFill>
+            <a:prstDash val="solid"/>
+          </a:ln>
+        </p:spPr>
+      </p:sp>
+      <p:sp>
+        <p:nvSpPr>
+          <p:cNvPr id="36" name="Text 34"/>
+          <p:cNvSpPr/>
+          <p:nvPr/>
+        </p:nvSpPr>
+        <p:spPr>
+          <a:xfrm>
+            <a:off x="4505858" y="2057400"/>
+            <a:ext cx="3179978" cy="365760"/>
           </a:xfrm>
           <a:prstGeom prst="rect">
             <a:avLst/>
@@ -6698,30 +6711,30 @@
               <a:buNone/>
             </a:pPr>
             <a:r>
-              <a:rPr lang="en-US" sz="1200" dirty="0">
-                <a:solidFill>
-                  <a:srgbClr val="345671"/>
-                </a:solidFill>
-                <a:latin typeface="Calibri" pitchFamily="34" charset="0"/>
-                <a:ea typeface="Calibri" pitchFamily="34" charset="-122"/>
-                <a:cs typeface="Calibri" pitchFamily="34" charset="-120"/>
-              </a:rPr>
-              <a:t>Cardiovascular · GI · Respiratory · MSK &amp; Skin · Nervous &amp; Behavioral · Endocrine · Reproductive &amp; Pregnancy · Renal · Heme &amp; Immune · Multisystem · Ethics &amp; Patient Safety</a:t>
-            </a:r>
-            <a:endParaRPr lang="en-US" sz="1200" dirty="0"/>
-          </a:p>
-        </p:txBody>
-      </p:sp>
-      <p:sp>
-        <p:nvSpPr>
-          <p:cNvPr id="35" name="Text 33"/>
-          <p:cNvSpPr/>
-          <p:nvPr/>
-        </p:nvSpPr>
-        <p:spPr>
-          <a:xfrm>
-            <a:off x="502920" y="5989320"/>
-            <a:ext cx="11185855" cy="292608"/>
+              <a:rPr lang="en-US" sz="1800" b="1" dirty="0">
+                <a:solidFill>
+                  <a:srgbClr val="065F46"/>
+                </a:solidFill>
+                <a:latin typeface="Calibri" pitchFamily="34" charset="0"/>
+                <a:ea typeface="Calibri" pitchFamily="34" charset="-122"/>
+                <a:cs typeface="Calibri" pitchFamily="34" charset="-120"/>
+              </a:rPr>
+              <a:t>Respiratory</a:t>
+            </a:r>
+            <a:endParaRPr lang="en-US" sz="1800" dirty="0"/>
+          </a:p>
+        </p:txBody>
+      </p:sp>
+      <p:sp>
+        <p:nvSpPr>
+          <p:cNvPr id="37" name="Text 35"/>
+          <p:cNvSpPr/>
+          <p:nvPr/>
+        </p:nvSpPr>
+        <p:spPr>
+          <a:xfrm>
+            <a:off x="4505858" y="2423160"/>
+            <a:ext cx="3179978" cy="256032"/>
           </a:xfrm>
           <a:prstGeom prst="rect">
             <a:avLst/>
@@ -6737,29 +6750,1316 @@
               <a:buNone/>
             </a:pPr>
             <a:r>
-              <a:rPr lang="en-US" sz="1200" b="1" i="1" dirty="0">
-                <a:solidFill>
-                  <a:srgbClr val="B45309"/>
-                </a:solidFill>
-                <a:latin typeface="Calibri" pitchFamily="34" charset="0"/>
-                <a:ea typeface="Calibri" pitchFamily="34" charset="-122"/>
-                <a:cs typeface="Calibri" pitchFamily="34" charset="-120"/>
-              </a:rPr>
-              <a:t>Our approach: case-based teaching across all disciplines, daily UWorld blocks, full FA 2025 mapping.</a:t>
-            </a:r>
-            <a:endParaRPr lang="en-US" sz="1200" dirty="0"/>
-          </a:p>
-        </p:txBody>
-      </p:sp>
-      <p:sp>
-        <p:nvSpPr>
-          <p:cNvPr id="36" name="Text 34"/>
-          <p:cNvSpPr/>
-          <p:nvPr/>
-        </p:nvSpPr>
-        <p:spPr>
-          <a:xfrm>
-            <a:off x="502920" y="6263640"/>
+              <a:rPr lang="en-US" sz="1100" i="1" dirty="0">
+                <a:solidFill>
+                  <a:srgbClr val="6B87A3"/>
+                </a:solidFill>
+                <a:latin typeface="Calibri" pitchFamily="34" charset="0"/>
+                <a:ea typeface="Calibri" pitchFamily="34" charset="-122"/>
+                <a:cs typeface="Calibri" pitchFamily="34" charset="-120"/>
+              </a:rPr>
+              <a:t>10 days  ·  Jun 13–22</a:t>
+            </a:r>
+            <a:endParaRPr lang="en-US" sz="1100" dirty="0"/>
+          </a:p>
+        </p:txBody>
+      </p:sp>
+      <p:sp>
+        <p:nvSpPr>
+          <p:cNvPr id="38" name="Shape 36"/>
+          <p:cNvSpPr/>
+          <p:nvPr/>
+        </p:nvSpPr>
+        <p:spPr>
+          <a:xfrm>
+            <a:off x="4487570" y="2905506"/>
+            <a:ext cx="54864" cy="54864"/>
+          </a:xfrm>
+          <a:prstGeom prst="rect">
+            <a:avLst/>
+          </a:prstGeom>
+          <a:solidFill>
+            <a:srgbClr val="059669"/>
+          </a:solidFill>
+          <a:ln w="12700">
+            <a:solidFill>
+              <a:srgbClr val="059669"/>
+            </a:solidFill>
+            <a:prstDash val="solid"/>
+          </a:ln>
+        </p:spPr>
+      </p:sp>
+      <p:sp>
+        <p:nvSpPr>
+          <p:cNvPr id="39" name="Text 37"/>
+          <p:cNvSpPr/>
+          <p:nvPr/>
+        </p:nvSpPr>
+        <p:spPr>
+          <a:xfrm>
+            <a:off x="4615586" y="2788920"/>
+            <a:ext cx="3179978" cy="324612"/>
+          </a:xfrm>
+          <a:prstGeom prst="rect">
+            <a:avLst/>
+          </a:prstGeom>
+          <a:noFill/>
+          <a:ln/>
+        </p:spPr>
+        <p:txBody>
+          <a:bodyPr wrap="square" lIns="0" tIns="0" rIns="0" bIns="0" rtlCol="0" anchor="ctr"/>
+          <a:lstStyle/>
+          <a:p>
+            <a:pPr indent="0" marL="0">
+              <a:buNone/>
+            </a:pPr>
+            <a:r>
+              <a:rPr lang="en-US" sz="1100" dirty="0">
+                <a:solidFill>
+                  <a:srgbClr val="0C2A3D"/>
+                </a:solidFill>
+                <a:latin typeface="Calibri" pitchFamily="34" charset="0"/>
+                <a:ea typeface="Calibri" pitchFamily="34" charset="-122"/>
+                <a:cs typeface="Calibri" pitchFamily="34" charset="-120"/>
+              </a:rPr>
+              <a:t>1  · Embryology, surfactant, anomalies</a:t>
+            </a:r>
+            <a:endParaRPr lang="en-US" sz="1100" dirty="0"/>
+          </a:p>
+        </p:txBody>
+      </p:sp>
+      <p:sp>
+        <p:nvSpPr>
+          <p:cNvPr id="40" name="Shape 38"/>
+          <p:cNvSpPr/>
+          <p:nvPr/>
+        </p:nvSpPr>
+        <p:spPr>
+          <a:xfrm>
+            <a:off x="4487570" y="3230118"/>
+            <a:ext cx="54864" cy="54864"/>
+          </a:xfrm>
+          <a:prstGeom prst="rect">
+            <a:avLst/>
+          </a:prstGeom>
+          <a:solidFill>
+            <a:srgbClr val="059669"/>
+          </a:solidFill>
+          <a:ln w="12700">
+            <a:solidFill>
+              <a:srgbClr val="059669"/>
+            </a:solidFill>
+            <a:prstDash val="solid"/>
+          </a:ln>
+        </p:spPr>
+      </p:sp>
+      <p:sp>
+        <p:nvSpPr>
+          <p:cNvPr id="41" name="Text 39"/>
+          <p:cNvSpPr/>
+          <p:nvPr/>
+        </p:nvSpPr>
+        <p:spPr>
+          <a:xfrm>
+            <a:off x="4615586" y="3113532"/>
+            <a:ext cx="3179978" cy="324612"/>
+          </a:xfrm>
+          <a:prstGeom prst="rect">
+            <a:avLst/>
+          </a:prstGeom>
+          <a:noFill/>
+          <a:ln/>
+        </p:spPr>
+        <p:txBody>
+          <a:bodyPr wrap="square" lIns="0" tIns="0" rIns="0" bIns="0" rtlCol="0" anchor="ctr"/>
+          <a:lstStyle/>
+          <a:p>
+            <a:pPr indent="0" marL="0">
+              <a:buNone/>
+            </a:pPr>
+            <a:r>
+              <a:rPr lang="en-US" sz="1100" dirty="0">
+                <a:solidFill>
+                  <a:srgbClr val="0C2A3D"/>
+                </a:solidFill>
+                <a:latin typeface="Calibri" pitchFamily="34" charset="0"/>
+                <a:ea typeface="Calibri" pitchFamily="34" charset="-122"/>
+                <a:cs typeface="Calibri" pitchFamily="34" charset="-120"/>
+              </a:rPr>
+              <a:t>2  · Anatomy: tree, segments, diaphragm</a:t>
+            </a:r>
+            <a:endParaRPr lang="en-US" sz="1100" dirty="0"/>
+          </a:p>
+        </p:txBody>
+      </p:sp>
+      <p:sp>
+        <p:nvSpPr>
+          <p:cNvPr id="42" name="Shape 40"/>
+          <p:cNvSpPr/>
+          <p:nvPr/>
+        </p:nvSpPr>
+        <p:spPr>
+          <a:xfrm>
+            <a:off x="4487570" y="3554730"/>
+            <a:ext cx="54864" cy="54864"/>
+          </a:xfrm>
+          <a:prstGeom prst="rect">
+            <a:avLst/>
+          </a:prstGeom>
+          <a:solidFill>
+            <a:srgbClr val="059669"/>
+          </a:solidFill>
+          <a:ln w="12700">
+            <a:solidFill>
+              <a:srgbClr val="059669"/>
+            </a:solidFill>
+            <a:prstDash val="solid"/>
+          </a:ln>
+        </p:spPr>
+      </p:sp>
+      <p:sp>
+        <p:nvSpPr>
+          <p:cNvPr id="43" name="Text 41"/>
+          <p:cNvSpPr/>
+          <p:nvPr/>
+        </p:nvSpPr>
+        <p:spPr>
+          <a:xfrm>
+            <a:off x="4615586" y="3438144"/>
+            <a:ext cx="3179978" cy="324612"/>
+          </a:xfrm>
+          <a:prstGeom prst="rect">
+            <a:avLst/>
+          </a:prstGeom>
+          <a:noFill/>
+          <a:ln/>
+        </p:spPr>
+        <p:txBody>
+          <a:bodyPr wrap="square" lIns="0" tIns="0" rIns="0" bIns="0" rtlCol="0" anchor="ctr"/>
+          <a:lstStyle/>
+          <a:p>
+            <a:pPr indent="0" marL="0">
+              <a:buNone/>
+            </a:pPr>
+            <a:r>
+              <a:rPr lang="en-US" sz="1100" dirty="0">
+                <a:solidFill>
+                  <a:srgbClr val="0C2A3D"/>
+                </a:solidFill>
+                <a:latin typeface="Calibri" pitchFamily="34" charset="0"/>
+                <a:ea typeface="Calibri" pitchFamily="34" charset="-122"/>
+                <a:cs typeface="Calibri" pitchFamily="34" charset="-120"/>
+              </a:rPr>
+              <a:t>3  · Volumes, mechanics, O₂–Hb curve</a:t>
+            </a:r>
+            <a:endParaRPr lang="en-US" sz="1100" dirty="0"/>
+          </a:p>
+        </p:txBody>
+      </p:sp>
+      <p:sp>
+        <p:nvSpPr>
+          <p:cNvPr id="44" name="Shape 42"/>
+          <p:cNvSpPr/>
+          <p:nvPr/>
+        </p:nvSpPr>
+        <p:spPr>
+          <a:xfrm>
+            <a:off x="4487570" y="3879342"/>
+            <a:ext cx="54864" cy="54864"/>
+          </a:xfrm>
+          <a:prstGeom prst="rect">
+            <a:avLst/>
+          </a:prstGeom>
+          <a:solidFill>
+            <a:srgbClr val="059669"/>
+          </a:solidFill>
+          <a:ln w="12700">
+            <a:solidFill>
+              <a:srgbClr val="059669"/>
+            </a:solidFill>
+            <a:prstDash val="solid"/>
+          </a:ln>
+        </p:spPr>
+      </p:sp>
+      <p:sp>
+        <p:nvSpPr>
+          <p:cNvPr id="45" name="Text 43"/>
+          <p:cNvSpPr/>
+          <p:nvPr/>
+        </p:nvSpPr>
+        <p:spPr>
+          <a:xfrm>
+            <a:off x="4615586" y="3762756"/>
+            <a:ext cx="3179978" cy="324612"/>
+          </a:xfrm>
+          <a:prstGeom prst="rect">
+            <a:avLst/>
+          </a:prstGeom>
+          <a:noFill/>
+          <a:ln/>
+        </p:spPr>
+        <p:txBody>
+          <a:bodyPr wrap="square" lIns="0" tIns="0" rIns="0" bIns="0" rtlCol="0" anchor="ctr"/>
+          <a:lstStyle/>
+          <a:p>
+            <a:pPr indent="0" marL="0">
+              <a:buNone/>
+            </a:pPr>
+            <a:r>
+              <a:rPr lang="en-US" sz="1100" dirty="0">
+                <a:solidFill>
+                  <a:srgbClr val="0C2A3D"/>
+                </a:solidFill>
+                <a:latin typeface="Calibri" pitchFamily="34" charset="0"/>
+                <a:ea typeface="Calibri" pitchFamily="34" charset="-122"/>
+                <a:cs typeface="Calibri" pitchFamily="34" charset="-120"/>
+              </a:rPr>
+              <a:t>4  · A–a gradient, V/Q, pulmonary circ</a:t>
+            </a:r>
+            <a:endParaRPr lang="en-US" sz="1100" dirty="0"/>
+          </a:p>
+        </p:txBody>
+      </p:sp>
+      <p:sp>
+        <p:nvSpPr>
+          <p:cNvPr id="46" name="Shape 44"/>
+          <p:cNvSpPr/>
+          <p:nvPr/>
+        </p:nvSpPr>
+        <p:spPr>
+          <a:xfrm>
+            <a:off x="4487570" y="4203954"/>
+            <a:ext cx="54864" cy="54864"/>
+          </a:xfrm>
+          <a:prstGeom prst="rect">
+            <a:avLst/>
+          </a:prstGeom>
+          <a:solidFill>
+            <a:srgbClr val="059669"/>
+          </a:solidFill>
+          <a:ln w="12700">
+            <a:solidFill>
+              <a:srgbClr val="059669"/>
+            </a:solidFill>
+            <a:prstDash val="solid"/>
+          </a:ln>
+        </p:spPr>
+      </p:sp>
+      <p:sp>
+        <p:nvSpPr>
+          <p:cNvPr id="47" name="Text 45"/>
+          <p:cNvSpPr/>
+          <p:nvPr/>
+        </p:nvSpPr>
+        <p:spPr>
+          <a:xfrm>
+            <a:off x="4615586" y="4087368"/>
+            <a:ext cx="3179978" cy="324612"/>
+          </a:xfrm>
+          <a:prstGeom prst="rect">
+            <a:avLst/>
+          </a:prstGeom>
+          <a:noFill/>
+          <a:ln/>
+        </p:spPr>
+        <p:txBody>
+          <a:bodyPr wrap="square" lIns="0" tIns="0" rIns="0" bIns="0" rtlCol="0" anchor="ctr"/>
+          <a:lstStyle/>
+          <a:p>
+            <a:pPr indent="0" marL="0">
+              <a:buNone/>
+            </a:pPr>
+            <a:r>
+              <a:rPr lang="en-US" sz="1100" dirty="0">
+                <a:solidFill>
+                  <a:srgbClr val="0C2A3D"/>
+                </a:solidFill>
+                <a:latin typeface="Calibri" pitchFamily="34" charset="0"/>
+                <a:ea typeface="Calibri" pitchFamily="34" charset="-122"/>
+                <a:cs typeface="Calibri" pitchFamily="34" charset="-120"/>
+              </a:rPr>
+              <a:t>5  · Control of breathing, sleep apnea</a:t>
+            </a:r>
+            <a:endParaRPr lang="en-US" sz="1100" dirty="0"/>
+          </a:p>
+        </p:txBody>
+      </p:sp>
+      <p:sp>
+        <p:nvSpPr>
+          <p:cNvPr id="48" name="Shape 46"/>
+          <p:cNvSpPr/>
+          <p:nvPr/>
+        </p:nvSpPr>
+        <p:spPr>
+          <a:xfrm>
+            <a:off x="4487570" y="4528566"/>
+            <a:ext cx="54864" cy="54864"/>
+          </a:xfrm>
+          <a:prstGeom prst="rect">
+            <a:avLst/>
+          </a:prstGeom>
+          <a:solidFill>
+            <a:srgbClr val="059669"/>
+          </a:solidFill>
+          <a:ln w="12700">
+            <a:solidFill>
+              <a:srgbClr val="059669"/>
+            </a:solidFill>
+            <a:prstDash val="solid"/>
+          </a:ln>
+        </p:spPr>
+      </p:sp>
+      <p:sp>
+        <p:nvSpPr>
+          <p:cNvPr id="49" name="Text 47"/>
+          <p:cNvSpPr/>
+          <p:nvPr/>
+        </p:nvSpPr>
+        <p:spPr>
+          <a:xfrm>
+            <a:off x="4615586" y="4411980"/>
+            <a:ext cx="3179978" cy="324612"/>
+          </a:xfrm>
+          <a:prstGeom prst="rect">
+            <a:avLst/>
+          </a:prstGeom>
+          <a:noFill/>
+          <a:ln/>
+        </p:spPr>
+        <p:txBody>
+          <a:bodyPr wrap="square" lIns="0" tIns="0" rIns="0" bIns="0" rtlCol="0" anchor="ctr"/>
+          <a:lstStyle/>
+          <a:p>
+            <a:pPr indent="0" marL="0">
+              <a:buNone/>
+            </a:pPr>
+            <a:r>
+              <a:rPr lang="en-US" sz="1100" dirty="0">
+                <a:solidFill>
+                  <a:srgbClr val="0C2A3D"/>
+                </a:solidFill>
+                <a:latin typeface="Calibri" pitchFamily="34" charset="0"/>
+                <a:ea typeface="Calibri" pitchFamily="34" charset="-122"/>
+                <a:cs typeface="Calibri" pitchFamily="34" charset="-120"/>
+              </a:rPr>
+              <a:t>6  · Upper airway + obstructive disease</a:t>
+            </a:r>
+            <a:endParaRPr lang="en-US" sz="1100" dirty="0"/>
+          </a:p>
+        </p:txBody>
+      </p:sp>
+      <p:sp>
+        <p:nvSpPr>
+          <p:cNvPr id="50" name="Shape 48"/>
+          <p:cNvSpPr/>
+          <p:nvPr/>
+        </p:nvSpPr>
+        <p:spPr>
+          <a:xfrm>
+            <a:off x="4487570" y="4853178"/>
+            <a:ext cx="54864" cy="54864"/>
+          </a:xfrm>
+          <a:prstGeom prst="rect">
+            <a:avLst/>
+          </a:prstGeom>
+          <a:solidFill>
+            <a:srgbClr val="059669"/>
+          </a:solidFill>
+          <a:ln w="12700">
+            <a:solidFill>
+              <a:srgbClr val="059669"/>
+            </a:solidFill>
+            <a:prstDash val="solid"/>
+          </a:ln>
+        </p:spPr>
+      </p:sp>
+      <p:sp>
+        <p:nvSpPr>
+          <p:cNvPr id="51" name="Text 49"/>
+          <p:cNvSpPr/>
+          <p:nvPr/>
+        </p:nvSpPr>
+        <p:spPr>
+          <a:xfrm>
+            <a:off x="4615586" y="4736592"/>
+            <a:ext cx="3179978" cy="324612"/>
+          </a:xfrm>
+          <a:prstGeom prst="rect">
+            <a:avLst/>
+          </a:prstGeom>
+          <a:noFill/>
+          <a:ln/>
+        </p:spPr>
+        <p:txBody>
+          <a:bodyPr wrap="square" lIns="0" tIns="0" rIns="0" bIns="0" rtlCol="0" anchor="ctr"/>
+          <a:lstStyle/>
+          <a:p>
+            <a:pPr indent="0" marL="0">
+              <a:buNone/>
+            </a:pPr>
+            <a:r>
+              <a:rPr lang="en-US" sz="1100" dirty="0">
+                <a:solidFill>
+                  <a:srgbClr val="0C2A3D"/>
+                </a:solidFill>
+                <a:latin typeface="Calibri" pitchFamily="34" charset="0"/>
+                <a:ea typeface="Calibri" pitchFamily="34" charset="-122"/>
+                <a:cs typeface="Calibri" pitchFamily="34" charset="-120"/>
+              </a:rPr>
+              <a:t>7  · Restrictive, ARDS, vascular, pneumonia</a:t>
+            </a:r>
+            <a:endParaRPr lang="en-US" sz="1100" dirty="0"/>
+          </a:p>
+        </p:txBody>
+      </p:sp>
+      <p:sp>
+        <p:nvSpPr>
+          <p:cNvPr id="52" name="Shape 50"/>
+          <p:cNvSpPr/>
+          <p:nvPr/>
+        </p:nvSpPr>
+        <p:spPr>
+          <a:xfrm>
+            <a:off x="4487570" y="5177790"/>
+            <a:ext cx="54864" cy="54864"/>
+          </a:xfrm>
+          <a:prstGeom prst="rect">
+            <a:avLst/>
+          </a:prstGeom>
+          <a:solidFill>
+            <a:srgbClr val="059669"/>
+          </a:solidFill>
+          <a:ln w="12700">
+            <a:solidFill>
+              <a:srgbClr val="059669"/>
+            </a:solidFill>
+            <a:prstDash val="solid"/>
+          </a:ln>
+        </p:spPr>
+      </p:sp>
+      <p:sp>
+        <p:nvSpPr>
+          <p:cNvPr id="53" name="Text 51"/>
+          <p:cNvSpPr/>
+          <p:nvPr/>
+        </p:nvSpPr>
+        <p:spPr>
+          <a:xfrm>
+            <a:off x="4615586" y="5061204"/>
+            <a:ext cx="3179978" cy="324612"/>
+          </a:xfrm>
+          <a:prstGeom prst="rect">
+            <a:avLst/>
+          </a:prstGeom>
+          <a:noFill/>
+          <a:ln/>
+        </p:spPr>
+        <p:txBody>
+          <a:bodyPr wrap="square" lIns="0" tIns="0" rIns="0" bIns="0" rtlCol="0" anchor="ctr"/>
+          <a:lstStyle/>
+          <a:p>
+            <a:pPr indent="0" marL="0">
+              <a:buNone/>
+            </a:pPr>
+            <a:r>
+              <a:rPr lang="en-US" sz="1100" dirty="0">
+                <a:solidFill>
+                  <a:srgbClr val="0C2A3D"/>
+                </a:solidFill>
+                <a:latin typeface="Calibri" pitchFamily="34" charset="0"/>
+                <a:ea typeface="Calibri" pitchFamily="34" charset="-122"/>
+                <a:cs typeface="Calibri" pitchFamily="34" charset="-120"/>
+              </a:rPr>
+              <a:t>8  · TB, pleural, lung cancer, pharm</a:t>
+            </a:r>
+            <a:endParaRPr lang="en-US" sz="1100" dirty="0"/>
+          </a:p>
+        </p:txBody>
+      </p:sp>
+      <p:sp>
+        <p:nvSpPr>
+          <p:cNvPr id="54" name="Shape 52"/>
+          <p:cNvSpPr/>
+          <p:nvPr/>
+        </p:nvSpPr>
+        <p:spPr>
+          <a:xfrm>
+            <a:off x="4487570" y="5502402"/>
+            <a:ext cx="54864" cy="54864"/>
+          </a:xfrm>
+          <a:prstGeom prst="rect">
+            <a:avLst/>
+          </a:prstGeom>
+          <a:solidFill>
+            <a:srgbClr val="059669"/>
+          </a:solidFill>
+          <a:ln w="12700">
+            <a:solidFill>
+              <a:srgbClr val="059669"/>
+            </a:solidFill>
+            <a:prstDash val="solid"/>
+          </a:ln>
+        </p:spPr>
+      </p:sp>
+      <p:sp>
+        <p:nvSpPr>
+          <p:cNvPr id="55" name="Text 53"/>
+          <p:cNvSpPr/>
+          <p:nvPr/>
+        </p:nvSpPr>
+        <p:spPr>
+          <a:xfrm>
+            <a:off x="4615586" y="5385816"/>
+            <a:ext cx="3179978" cy="324612"/>
+          </a:xfrm>
+          <a:prstGeom prst="rect">
+            <a:avLst/>
+          </a:prstGeom>
+          <a:noFill/>
+          <a:ln/>
+        </p:spPr>
+        <p:txBody>
+          <a:bodyPr wrap="square" lIns="0" tIns="0" rIns="0" bIns="0" rtlCol="0" anchor="ctr"/>
+          <a:lstStyle/>
+          <a:p>
+            <a:pPr indent="0" marL="0">
+              <a:buNone/>
+            </a:pPr>
+            <a:r>
+              <a:rPr lang="en-US" sz="1100" dirty="0">
+                <a:solidFill>
+                  <a:srgbClr val="0C2A3D"/>
+                </a:solidFill>
+                <a:latin typeface="Calibri" pitchFamily="34" charset="0"/>
+                <a:ea typeface="Calibri" pitchFamily="34" charset="-122"/>
+                <a:cs typeface="Calibri" pitchFamily="34" charset="-120"/>
+              </a:rPr>
+              <a:t>9  · Epi/Biostats applied to Respiratory</a:t>
+            </a:r>
+            <a:endParaRPr lang="en-US" sz="1100" dirty="0"/>
+          </a:p>
+        </p:txBody>
+      </p:sp>
+      <p:sp>
+        <p:nvSpPr>
+          <p:cNvPr id="56" name="Shape 54"/>
+          <p:cNvSpPr/>
+          <p:nvPr/>
+        </p:nvSpPr>
+        <p:spPr>
+          <a:xfrm>
+            <a:off x="4487570" y="5827014"/>
+            <a:ext cx="54864" cy="54864"/>
+          </a:xfrm>
+          <a:prstGeom prst="rect">
+            <a:avLst/>
+          </a:prstGeom>
+          <a:solidFill>
+            <a:srgbClr val="059669"/>
+          </a:solidFill>
+          <a:ln w="12700">
+            <a:solidFill>
+              <a:srgbClr val="059669"/>
+            </a:solidFill>
+            <a:prstDash val="solid"/>
+          </a:ln>
+        </p:spPr>
+      </p:sp>
+      <p:sp>
+        <p:nvSpPr>
+          <p:cNvPr id="57" name="Text 55"/>
+          <p:cNvSpPr/>
+          <p:nvPr/>
+        </p:nvSpPr>
+        <p:spPr>
+          <a:xfrm>
+            <a:off x="4615586" y="5710428"/>
+            <a:ext cx="3179978" cy="324612"/>
+          </a:xfrm>
+          <a:prstGeom prst="rect">
+            <a:avLst/>
+          </a:prstGeom>
+          <a:noFill/>
+          <a:ln/>
+        </p:spPr>
+        <p:txBody>
+          <a:bodyPr wrap="square" lIns="0" tIns="0" rIns="0" bIns="0" rtlCol="0" anchor="ctr"/>
+          <a:lstStyle/>
+          <a:p>
+            <a:pPr indent="0" marL="0">
+              <a:buNone/>
+            </a:pPr>
+            <a:r>
+              <a:rPr lang="en-US" sz="1100" dirty="0">
+                <a:solidFill>
+                  <a:srgbClr val="0C2A3D"/>
+                </a:solidFill>
+                <a:latin typeface="Calibri" pitchFamily="34" charset="0"/>
+                <a:ea typeface="Calibri" pitchFamily="34" charset="-122"/>
+                <a:cs typeface="Calibri" pitchFamily="34" charset="-120"/>
+              </a:rPr>
+              <a:t>10 · Chapter review + practice</a:t>
+            </a:r>
+            <a:endParaRPr lang="en-US" sz="1100" dirty="0"/>
+          </a:p>
+        </p:txBody>
+      </p:sp>
+      <p:sp>
+        <p:nvSpPr>
+          <p:cNvPr id="58" name="Shape 56"/>
+          <p:cNvSpPr/>
+          <p:nvPr/>
+        </p:nvSpPr>
+        <p:spPr>
+          <a:xfrm>
+            <a:off x="8143037" y="1874520"/>
+            <a:ext cx="3545738" cy="4251960"/>
+          </a:xfrm>
+          <a:prstGeom prst="rect">
+            <a:avLst/>
+          </a:prstGeom>
+          <a:solidFill>
+            <a:srgbClr val="FFFFFF"/>
+          </a:solidFill>
+          <a:ln w="9525">
+            <a:solidFill>
+              <a:srgbClr val="D6E8F5"/>
+            </a:solidFill>
+            <a:prstDash val="solid"/>
+          </a:ln>
+          <a:effectLst>
+            <a:outerShdw sx="100000" sy="100000" kx="0" ky="0" algn="bl" rotWithShape="0" blurRad="127000" dist="12700" dir="5400000">
+              <a:srgbClr val="0C2A3D">
+                <a:alpha val="8000"/>
+              </a:srgbClr>
+            </a:outerShdw>
+          </a:effectLst>
+        </p:spPr>
+      </p:sp>
+      <p:sp>
+        <p:nvSpPr>
+          <p:cNvPr id="59" name="Shape 57"/>
+          <p:cNvSpPr/>
+          <p:nvPr/>
+        </p:nvSpPr>
+        <p:spPr>
+          <a:xfrm>
+            <a:off x="8143037" y="1874520"/>
+            <a:ext cx="3545738" cy="91440"/>
+          </a:xfrm>
+          <a:prstGeom prst="rect">
+            <a:avLst/>
+          </a:prstGeom>
+          <a:solidFill>
+            <a:srgbClr val="7C3AED"/>
+          </a:solidFill>
+          <a:ln w="12700">
+            <a:solidFill>
+              <a:srgbClr val="7C3AED"/>
+            </a:solidFill>
+            <a:prstDash val="solid"/>
+          </a:ln>
+        </p:spPr>
+      </p:sp>
+      <p:sp>
+        <p:nvSpPr>
+          <p:cNvPr id="60" name="Text 58"/>
+          <p:cNvSpPr/>
+          <p:nvPr/>
+        </p:nvSpPr>
+        <p:spPr>
+          <a:xfrm>
+            <a:off x="8325917" y="2057400"/>
+            <a:ext cx="3179978" cy="365760"/>
+          </a:xfrm>
+          <a:prstGeom prst="rect">
+            <a:avLst/>
+          </a:prstGeom>
+          <a:noFill/>
+          <a:ln/>
+        </p:spPr>
+        <p:txBody>
+          <a:bodyPr wrap="square" lIns="0" tIns="0" rIns="0" bIns="0" rtlCol="0" anchor="ctr"/>
+          <a:lstStyle/>
+          <a:p>
+            <a:pPr indent="0" marL="0">
+              <a:buNone/>
+            </a:pPr>
+            <a:r>
+              <a:rPr lang="en-US" sz="1800" b="1" dirty="0">
+                <a:solidFill>
+                  <a:srgbClr val="5B21B6"/>
+                </a:solidFill>
+                <a:latin typeface="Calibri" pitchFamily="34" charset="0"/>
+                <a:ea typeface="Calibri" pitchFamily="34" charset="-122"/>
+                <a:cs typeface="Calibri" pitchFamily="34" charset="-120"/>
+              </a:rPr>
+              <a:t>General Pathology</a:t>
+            </a:r>
+            <a:endParaRPr lang="en-US" sz="1800" dirty="0"/>
+          </a:p>
+        </p:txBody>
+      </p:sp>
+      <p:sp>
+        <p:nvSpPr>
+          <p:cNvPr id="61" name="Text 59"/>
+          <p:cNvSpPr/>
+          <p:nvPr/>
+        </p:nvSpPr>
+        <p:spPr>
+          <a:xfrm>
+            <a:off x="8325917" y="2423160"/>
+            <a:ext cx="3179978" cy="256032"/>
+          </a:xfrm>
+          <a:prstGeom prst="rect">
+            <a:avLst/>
+          </a:prstGeom>
+          <a:noFill/>
+          <a:ln/>
+        </p:spPr>
+        <p:txBody>
+          <a:bodyPr wrap="square" lIns="0" tIns="0" rIns="0" bIns="0" rtlCol="0" anchor="ctr"/>
+          <a:lstStyle/>
+          <a:p>
+            <a:pPr indent="0" marL="0">
+              <a:buNone/>
+            </a:pPr>
+            <a:r>
+              <a:rPr lang="en-US" sz="1100" i="1" dirty="0">
+                <a:solidFill>
+                  <a:srgbClr val="6B87A3"/>
+                </a:solidFill>
+                <a:latin typeface="Calibri" pitchFamily="34" charset="0"/>
+                <a:ea typeface="Calibri" pitchFamily="34" charset="-122"/>
+                <a:cs typeface="Calibri" pitchFamily="34" charset="-120"/>
+              </a:rPr>
+              <a:t>8 days  ·  Jun 23–30</a:t>
+            </a:r>
+            <a:endParaRPr lang="en-US" sz="1100" dirty="0"/>
+          </a:p>
+        </p:txBody>
+      </p:sp>
+      <p:sp>
+        <p:nvSpPr>
+          <p:cNvPr id="62" name="Shape 60"/>
+          <p:cNvSpPr/>
+          <p:nvPr/>
+        </p:nvSpPr>
+        <p:spPr>
+          <a:xfrm>
+            <a:off x="8307629" y="2946083"/>
+            <a:ext cx="54864" cy="54864"/>
+          </a:xfrm>
+          <a:prstGeom prst="rect">
+            <a:avLst/>
+          </a:prstGeom>
+          <a:solidFill>
+            <a:srgbClr val="7C3AED"/>
+          </a:solidFill>
+          <a:ln w="12700">
+            <a:solidFill>
+              <a:srgbClr val="7C3AED"/>
+            </a:solidFill>
+            <a:prstDash val="solid"/>
+          </a:ln>
+        </p:spPr>
+      </p:sp>
+      <p:sp>
+        <p:nvSpPr>
+          <p:cNvPr id="63" name="Text 61"/>
+          <p:cNvSpPr/>
+          <p:nvPr/>
+        </p:nvSpPr>
+        <p:spPr>
+          <a:xfrm>
+            <a:off x="8435645" y="2788920"/>
+            <a:ext cx="3179978" cy="405765"/>
+          </a:xfrm>
+          <a:prstGeom prst="rect">
+            <a:avLst/>
+          </a:prstGeom>
+          <a:noFill/>
+          <a:ln/>
+        </p:spPr>
+        <p:txBody>
+          <a:bodyPr wrap="square" lIns="0" tIns="0" rIns="0" bIns="0" rtlCol="0" anchor="ctr"/>
+          <a:lstStyle/>
+          <a:p>
+            <a:pPr indent="0" marL="0">
+              <a:buNone/>
+            </a:pPr>
+            <a:r>
+              <a:rPr lang="en-US" sz="1100" dirty="0">
+                <a:solidFill>
+                  <a:srgbClr val="0C2A3D"/>
+                </a:solidFill>
+                <a:latin typeface="Calibri" pitchFamily="34" charset="0"/>
+                <a:ea typeface="Calibri" pitchFamily="34" charset="-122"/>
+                <a:cs typeface="Calibri" pitchFamily="34" charset="-120"/>
+              </a:rPr>
+              <a:t>1 · Cellular adaptations, apoptosis</a:t>
+            </a:r>
+            <a:endParaRPr lang="en-US" sz="1100" dirty="0"/>
+          </a:p>
+        </p:txBody>
+      </p:sp>
+      <p:sp>
+        <p:nvSpPr>
+          <p:cNvPr id="64" name="Shape 62"/>
+          <p:cNvSpPr/>
+          <p:nvPr/>
+        </p:nvSpPr>
+        <p:spPr>
+          <a:xfrm>
+            <a:off x="8307629" y="3351848"/>
+            <a:ext cx="54864" cy="54864"/>
+          </a:xfrm>
+          <a:prstGeom prst="rect">
+            <a:avLst/>
+          </a:prstGeom>
+          <a:solidFill>
+            <a:srgbClr val="7C3AED"/>
+          </a:solidFill>
+          <a:ln w="12700">
+            <a:solidFill>
+              <a:srgbClr val="7C3AED"/>
+            </a:solidFill>
+            <a:prstDash val="solid"/>
+          </a:ln>
+        </p:spPr>
+      </p:sp>
+      <p:sp>
+        <p:nvSpPr>
+          <p:cNvPr id="65" name="Text 63"/>
+          <p:cNvSpPr/>
+          <p:nvPr/>
+        </p:nvSpPr>
+        <p:spPr>
+          <a:xfrm>
+            <a:off x="8435645" y="3194685"/>
+            <a:ext cx="3179978" cy="405765"/>
+          </a:xfrm>
+          <a:prstGeom prst="rect">
+            <a:avLst/>
+          </a:prstGeom>
+          <a:noFill/>
+          <a:ln/>
+        </p:spPr>
+        <p:txBody>
+          <a:bodyPr wrap="square" lIns="0" tIns="0" rIns="0" bIns="0" rtlCol="0" anchor="ctr"/>
+          <a:lstStyle/>
+          <a:p>
+            <a:pPr indent="0" marL="0">
+              <a:buNone/>
+            </a:pPr>
+            <a:r>
+              <a:rPr lang="en-US" sz="1100" dirty="0">
+                <a:solidFill>
+                  <a:srgbClr val="0C2A3D"/>
+                </a:solidFill>
+                <a:latin typeface="Calibri" pitchFamily="34" charset="0"/>
+                <a:ea typeface="Calibri" pitchFamily="34" charset="-122"/>
+                <a:cs typeface="Calibri" pitchFamily="34" charset="-120"/>
+              </a:rPr>
+              <a:t>2 · Necrosis, ischemia, free radicals</a:t>
+            </a:r>
+            <a:endParaRPr lang="en-US" sz="1100" dirty="0"/>
+          </a:p>
+        </p:txBody>
+      </p:sp>
+      <p:sp>
+        <p:nvSpPr>
+          <p:cNvPr id="66" name="Shape 64"/>
+          <p:cNvSpPr/>
+          <p:nvPr/>
+        </p:nvSpPr>
+        <p:spPr>
+          <a:xfrm>
+            <a:off x="8307629" y="3757613"/>
+            <a:ext cx="54864" cy="54864"/>
+          </a:xfrm>
+          <a:prstGeom prst="rect">
+            <a:avLst/>
+          </a:prstGeom>
+          <a:solidFill>
+            <a:srgbClr val="7C3AED"/>
+          </a:solidFill>
+          <a:ln w="12700">
+            <a:solidFill>
+              <a:srgbClr val="7C3AED"/>
+            </a:solidFill>
+            <a:prstDash val="solid"/>
+          </a:ln>
+        </p:spPr>
+      </p:sp>
+      <p:sp>
+        <p:nvSpPr>
+          <p:cNvPr id="67" name="Text 65"/>
+          <p:cNvSpPr/>
+          <p:nvPr/>
+        </p:nvSpPr>
+        <p:spPr>
+          <a:xfrm>
+            <a:off x="8435645" y="3600450"/>
+            <a:ext cx="3179978" cy="405765"/>
+          </a:xfrm>
+          <a:prstGeom prst="rect">
+            <a:avLst/>
+          </a:prstGeom>
+          <a:noFill/>
+          <a:ln/>
+        </p:spPr>
+        <p:txBody>
+          <a:bodyPr wrap="square" lIns="0" tIns="0" rIns="0" bIns="0" rtlCol="0" anchor="ctr"/>
+          <a:lstStyle/>
+          <a:p>
+            <a:pPr indent="0" marL="0">
+              <a:buNone/>
+            </a:pPr>
+            <a:r>
+              <a:rPr lang="en-US" sz="1100" dirty="0">
+                <a:solidFill>
+                  <a:srgbClr val="0C2A3D"/>
+                </a:solidFill>
+                <a:latin typeface="Calibri" pitchFamily="34" charset="0"/>
+                <a:ea typeface="Calibri" pitchFamily="34" charset="-122"/>
+                <a:cs typeface="Calibri" pitchFamily="34" charset="-120"/>
+              </a:rPr>
+              <a:t>3 · Acute inflammation</a:t>
+            </a:r>
+            <a:endParaRPr lang="en-US" sz="1100" dirty="0"/>
+          </a:p>
+        </p:txBody>
+      </p:sp>
+      <p:sp>
+        <p:nvSpPr>
+          <p:cNvPr id="68" name="Shape 66"/>
+          <p:cNvSpPr/>
+          <p:nvPr/>
+        </p:nvSpPr>
+        <p:spPr>
+          <a:xfrm>
+            <a:off x="8307629" y="4163377"/>
+            <a:ext cx="54864" cy="54864"/>
+          </a:xfrm>
+          <a:prstGeom prst="rect">
+            <a:avLst/>
+          </a:prstGeom>
+          <a:solidFill>
+            <a:srgbClr val="7C3AED"/>
+          </a:solidFill>
+          <a:ln w="12700">
+            <a:solidFill>
+              <a:srgbClr val="7C3AED"/>
+            </a:solidFill>
+            <a:prstDash val="solid"/>
+          </a:ln>
+        </p:spPr>
+      </p:sp>
+      <p:sp>
+        <p:nvSpPr>
+          <p:cNvPr id="69" name="Text 67"/>
+          <p:cNvSpPr/>
+          <p:nvPr/>
+        </p:nvSpPr>
+        <p:spPr>
+          <a:xfrm>
+            <a:off x="8435645" y="4006215"/>
+            <a:ext cx="3179978" cy="405765"/>
+          </a:xfrm>
+          <a:prstGeom prst="rect">
+            <a:avLst/>
+          </a:prstGeom>
+          <a:noFill/>
+          <a:ln/>
+        </p:spPr>
+        <p:txBody>
+          <a:bodyPr wrap="square" lIns="0" tIns="0" rIns="0" bIns="0" rtlCol="0" anchor="ctr"/>
+          <a:lstStyle/>
+          <a:p>
+            <a:pPr indent="0" marL="0">
+              <a:buNone/>
+            </a:pPr>
+            <a:r>
+              <a:rPr lang="en-US" sz="1100" dirty="0">
+                <a:solidFill>
+                  <a:srgbClr val="0C2A3D"/>
+                </a:solidFill>
+                <a:latin typeface="Calibri" pitchFamily="34" charset="0"/>
+                <a:ea typeface="Calibri" pitchFamily="34" charset="-122"/>
+                <a:cs typeface="Calibri" pitchFamily="34" charset="-120"/>
+              </a:rPr>
+              <a:t>4 · Chronic inflammation, tissue repair</a:t>
+            </a:r>
+            <a:endParaRPr lang="en-US" sz="1100" dirty="0"/>
+          </a:p>
+        </p:txBody>
+      </p:sp>
+      <p:sp>
+        <p:nvSpPr>
+          <p:cNvPr id="70" name="Shape 68"/>
+          <p:cNvSpPr/>
+          <p:nvPr/>
+        </p:nvSpPr>
+        <p:spPr>
+          <a:xfrm>
+            <a:off x="8307629" y="4569143"/>
+            <a:ext cx="54864" cy="54864"/>
+          </a:xfrm>
+          <a:prstGeom prst="rect">
+            <a:avLst/>
+          </a:prstGeom>
+          <a:solidFill>
+            <a:srgbClr val="7C3AED"/>
+          </a:solidFill>
+          <a:ln w="12700">
+            <a:solidFill>
+              <a:srgbClr val="7C3AED"/>
+            </a:solidFill>
+            <a:prstDash val="solid"/>
+          </a:ln>
+        </p:spPr>
+      </p:sp>
+      <p:sp>
+        <p:nvSpPr>
+          <p:cNvPr id="71" name="Text 69"/>
+          <p:cNvSpPr/>
+          <p:nvPr/>
+        </p:nvSpPr>
+        <p:spPr>
+          <a:xfrm>
+            <a:off x="8435645" y="4411980"/>
+            <a:ext cx="3179978" cy="405765"/>
+          </a:xfrm>
+          <a:prstGeom prst="rect">
+            <a:avLst/>
+          </a:prstGeom>
+          <a:noFill/>
+          <a:ln/>
+        </p:spPr>
+        <p:txBody>
+          <a:bodyPr wrap="square" lIns="0" tIns="0" rIns="0" bIns="0" rtlCol="0" anchor="ctr"/>
+          <a:lstStyle/>
+          <a:p>
+            <a:pPr indent="0" marL="0">
+              <a:buNone/>
+            </a:pPr>
+            <a:r>
+              <a:rPr lang="en-US" sz="1100" dirty="0">
+                <a:solidFill>
+                  <a:srgbClr val="0C2A3D"/>
+                </a:solidFill>
+                <a:latin typeface="Calibri" pitchFamily="34" charset="0"/>
+                <a:ea typeface="Calibri" pitchFamily="34" charset="-122"/>
+                <a:cs typeface="Calibri" pitchFamily="34" charset="-120"/>
+              </a:rPr>
+              <a:t>5 · Neoplasia I — hallmarks, grade/stage</a:t>
+            </a:r>
+            <a:endParaRPr lang="en-US" sz="1100" dirty="0"/>
+          </a:p>
+        </p:txBody>
+      </p:sp>
+      <p:sp>
+        <p:nvSpPr>
+          <p:cNvPr id="72" name="Shape 70"/>
+          <p:cNvSpPr/>
+          <p:nvPr/>
+        </p:nvSpPr>
+        <p:spPr>
+          <a:xfrm>
+            <a:off x="8307629" y="4974908"/>
+            <a:ext cx="54864" cy="54864"/>
+          </a:xfrm>
+          <a:prstGeom prst="rect">
+            <a:avLst/>
+          </a:prstGeom>
+          <a:solidFill>
+            <a:srgbClr val="7C3AED"/>
+          </a:solidFill>
+          <a:ln w="12700">
+            <a:solidFill>
+              <a:srgbClr val="7C3AED"/>
+            </a:solidFill>
+            <a:prstDash val="solid"/>
+          </a:ln>
+        </p:spPr>
+      </p:sp>
+      <p:sp>
+        <p:nvSpPr>
+          <p:cNvPr id="73" name="Text 71"/>
+          <p:cNvSpPr/>
+          <p:nvPr/>
+        </p:nvSpPr>
+        <p:spPr>
+          <a:xfrm>
+            <a:off x="8435645" y="4817745"/>
+            <a:ext cx="3179978" cy="405765"/>
+          </a:xfrm>
+          <a:prstGeom prst="rect">
+            <a:avLst/>
+          </a:prstGeom>
+          <a:noFill/>
+          <a:ln/>
+        </p:spPr>
+        <p:txBody>
+          <a:bodyPr wrap="square" lIns="0" tIns="0" rIns="0" bIns="0" rtlCol="0" anchor="ctr"/>
+          <a:lstStyle/>
+          <a:p>
+            <a:pPr indent="0" marL="0">
+              <a:buNone/>
+            </a:pPr>
+            <a:r>
+              <a:rPr lang="en-US" sz="1100" dirty="0">
+                <a:solidFill>
+                  <a:srgbClr val="0C2A3D"/>
+                </a:solidFill>
+                <a:latin typeface="Calibri" pitchFamily="34" charset="0"/>
+                <a:ea typeface="Calibri" pitchFamily="34" charset="-122"/>
+                <a:cs typeface="Calibri" pitchFamily="34" charset="-120"/>
+              </a:rPr>
+              <a:t>6 · Neoplasia II — oncogenes, TSGs</a:t>
+            </a:r>
+            <a:endParaRPr lang="en-US" sz="1100" dirty="0"/>
+          </a:p>
+        </p:txBody>
+      </p:sp>
+      <p:sp>
+        <p:nvSpPr>
+          <p:cNvPr id="74" name="Shape 72"/>
+          <p:cNvSpPr/>
+          <p:nvPr/>
+        </p:nvSpPr>
+        <p:spPr>
+          <a:xfrm>
+            <a:off x="8307629" y="5380673"/>
+            <a:ext cx="54864" cy="54864"/>
+          </a:xfrm>
+          <a:prstGeom prst="rect">
+            <a:avLst/>
+          </a:prstGeom>
+          <a:solidFill>
+            <a:srgbClr val="7C3AED"/>
+          </a:solidFill>
+          <a:ln w="12700">
+            <a:solidFill>
+              <a:srgbClr val="7C3AED"/>
+            </a:solidFill>
+            <a:prstDash val="solid"/>
+          </a:ln>
+        </p:spPr>
+      </p:sp>
+      <p:sp>
+        <p:nvSpPr>
+          <p:cNvPr id="75" name="Text 73"/>
+          <p:cNvSpPr/>
+          <p:nvPr/>
+        </p:nvSpPr>
+        <p:spPr>
+          <a:xfrm>
+            <a:off x="8435645" y="5223510"/>
+            <a:ext cx="3179978" cy="405765"/>
+          </a:xfrm>
+          <a:prstGeom prst="rect">
+            <a:avLst/>
+          </a:prstGeom>
+          <a:noFill/>
+          <a:ln/>
+        </p:spPr>
+        <p:txBody>
+          <a:bodyPr wrap="square" lIns="0" tIns="0" rIns="0" bIns="0" rtlCol="0" anchor="ctr"/>
+          <a:lstStyle/>
+          <a:p>
+            <a:pPr indent="0" marL="0">
+              <a:buNone/>
+            </a:pPr>
+            <a:r>
+              <a:rPr lang="en-US" sz="1100" dirty="0">
+                <a:solidFill>
+                  <a:srgbClr val="0C2A3D"/>
+                </a:solidFill>
+                <a:latin typeface="Calibri" pitchFamily="34" charset="0"/>
+                <a:ea typeface="Calibri" pitchFamily="34" charset="-122"/>
+                <a:cs typeface="Calibri" pitchFamily="34" charset="-120"/>
+              </a:rPr>
+              <a:t>7 · Neoplasia III + Aging</a:t>
+            </a:r>
+            <a:endParaRPr lang="en-US" sz="1100" dirty="0"/>
+          </a:p>
+        </p:txBody>
+      </p:sp>
+      <p:sp>
+        <p:nvSpPr>
+          <p:cNvPr id="76" name="Shape 74"/>
+          <p:cNvSpPr/>
+          <p:nvPr/>
+        </p:nvSpPr>
+        <p:spPr>
+          <a:xfrm>
+            <a:off x="8307629" y="5786438"/>
+            <a:ext cx="54864" cy="54864"/>
+          </a:xfrm>
+          <a:prstGeom prst="rect">
+            <a:avLst/>
+          </a:prstGeom>
+          <a:solidFill>
+            <a:srgbClr val="7C3AED"/>
+          </a:solidFill>
+          <a:ln w="12700">
+            <a:solidFill>
+              <a:srgbClr val="7C3AED"/>
+            </a:solidFill>
+            <a:prstDash val="solid"/>
+          </a:ln>
+        </p:spPr>
+      </p:sp>
+      <p:sp>
+        <p:nvSpPr>
+          <p:cNvPr id="77" name="Text 75"/>
+          <p:cNvSpPr/>
+          <p:nvPr/>
+        </p:nvSpPr>
+        <p:spPr>
+          <a:xfrm>
+            <a:off x="8435645" y="5629275"/>
+            <a:ext cx="3179978" cy="405765"/>
+          </a:xfrm>
+          <a:prstGeom prst="rect">
+            <a:avLst/>
+          </a:prstGeom>
+          <a:noFill/>
+          <a:ln/>
+        </p:spPr>
+        <p:txBody>
+          <a:bodyPr wrap="square" lIns="0" tIns="0" rIns="0" bIns="0" rtlCol="0" anchor="ctr"/>
+          <a:lstStyle/>
+          <a:p>
+            <a:pPr indent="0" marL="0">
+              <a:buNone/>
+            </a:pPr>
+            <a:r>
+              <a:rPr lang="en-US" sz="1100" dirty="0">
+                <a:solidFill>
+                  <a:srgbClr val="0C2A3D"/>
+                </a:solidFill>
+                <a:latin typeface="Calibri" pitchFamily="34" charset="0"/>
+                <a:ea typeface="Calibri" pitchFamily="34" charset="-122"/>
+                <a:cs typeface="Calibri" pitchFamily="34" charset="-120"/>
+              </a:rPr>
+              <a:t>8 · Chapter review + practice</a:t>
+            </a:r>
+            <a:endParaRPr lang="en-US" sz="1100" dirty="0"/>
+          </a:p>
+        </p:txBody>
+      </p:sp>
+      <p:sp>
+        <p:nvSpPr>
+          <p:cNvPr id="78" name="Text 76"/>
+          <p:cNvSpPr/>
+          <p:nvPr/>
+        </p:nvSpPr>
+        <p:spPr>
+          <a:xfrm>
+            <a:off x="502920" y="6217920"/>
             <a:ext cx="11185855" cy="219456"/>
           </a:xfrm>
           <a:prstGeom prst="rect">
@@ -6784,7 +8084,7 @@
                 <a:ea typeface="Calibri" pitchFamily="34" charset="-122"/>
                 <a:cs typeface="Calibri" pitchFamily="34" charset="-120"/>
               </a:rPr>
-              <a:t>Source: usmle.org Step 2 CK content outline + FA 2025</a:t>
+              <a:t>Each day comes with the relevant FA 2025 pages and a UWorld block. Recordings and summaries land on the dashboard.</a:t>
             </a:r>
             <a:endParaRPr lang="en-US" sz="1000" dirty="0"/>
           </a:p>
@@ -6792,7 +8092,7 @@
       </p:sp>
       <p:sp>
         <p:nvSpPr>
-          <p:cNvPr id="37" name="Text 35"/>
+          <p:cNvPr id="79" name="Text 77"/>
           <p:cNvSpPr/>
           <p:nvPr/>
         </p:nvSpPr>
@@ -6831,7 +8131,7 @@
       </p:sp>
       <p:sp>
         <p:nvSpPr>
-          <p:cNvPr id="38" name="Text 36"/>
+          <p:cNvPr id="80" name="Text 78"/>
           <p:cNvSpPr/>
           <p:nvPr/>
         </p:nvSpPr>
@@ -6862,7 +8162,7 @@
                 <a:ea typeface="Calibri" pitchFamily="34" charset="-122"/>
                 <a:cs typeface="Calibri" pitchFamily="34" charset="-120"/>
               </a:rPr>
-              <a:t>4 / 7</a:t>
+              <a:t>4 / 8</a:t>
             </a:r>
             <a:endParaRPr lang="en-US" sz="1000" dirty="0"/>
           </a:p>
@@ -6915,31 +8215,6 @@
             <a:avLst/>
           </a:prstGeom>
           <a:solidFill>
-            <a:srgbClr val="0284C7"/>
-          </a:solidFill>
-          <a:ln w="12700">
-            <a:solidFill>
-              <a:srgbClr val="0284C7"/>
-            </a:solidFill>
-            <a:prstDash val="solid"/>
-          </a:ln>
-        </p:spPr>
-      </p:sp>
-      <p:sp>
-        <p:nvSpPr>
-          <p:cNvPr id="3" name="Shape 1"/>
-          <p:cNvSpPr/>
-          <p:nvPr/>
-        </p:nvSpPr>
-        <p:spPr>
-          <a:xfrm>
-            <a:off x="7315017" y="0"/>
-            <a:ext cx="4876678" cy="411480"/>
-          </a:xfrm>
-          <a:prstGeom prst="rect">
-            <a:avLst/>
-          </a:prstGeom>
-          <a:solidFill>
             <a:srgbClr val="D97706"/>
           </a:solidFill>
           <a:ln w="12700">
@@ -6952,632 +8227,14 @@
       </p:sp>
       <p:sp>
         <p:nvSpPr>
-          <p:cNvPr id="4" name="Text 2"/>
-          <p:cNvSpPr/>
-          <p:nvPr/>
-        </p:nvSpPr>
-        <p:spPr>
-          <a:xfrm>
-            <a:off x="502920" y="640080"/>
-            <a:ext cx="11185855" cy="274320"/>
-          </a:xfrm>
-          <a:prstGeom prst="rect">
-            <a:avLst/>
-          </a:prstGeom>
-          <a:noFill/>
-          <a:ln/>
-        </p:spPr>
-        <p:txBody>
-          <a:bodyPr wrap="square" lIns="0" tIns="0" rIns="0" bIns="0" rtlCol="0" anchor="ctr"/>
-          <a:lstStyle/>
-          <a:p>
-            <a:pPr indent="0" marL="0">
-              <a:buNone/>
-            </a:pPr>
-            <a:r>
-              <a:rPr lang="en-US" sz="1200" b="1" spc="400" kern="0" dirty="0">
-                <a:solidFill>
-                  <a:srgbClr val="0284C7"/>
-                </a:solidFill>
-                <a:latin typeface="Calibri" pitchFamily="34" charset="0"/>
-                <a:ea typeface="Calibri" pitchFamily="34" charset="-122"/>
-                <a:cs typeface="Calibri" pitchFamily="34" charset="-120"/>
-              </a:rPr>
-              <a:t>HOW THE CLASSES WORK  ·  PART 1</a:t>
-            </a:r>
-            <a:endParaRPr lang="en-US" sz="1200" dirty="0"/>
-          </a:p>
-        </p:txBody>
-      </p:sp>
-      <p:sp>
-        <p:nvSpPr>
-          <p:cNvPr id="5" name="Text 3"/>
-          <p:cNvSpPr/>
-          <p:nvPr/>
-        </p:nvSpPr>
-        <p:spPr>
-          <a:xfrm>
-            <a:off x="502920" y="914400"/>
-            <a:ext cx="11185855" cy="731520"/>
-          </a:xfrm>
-          <a:prstGeom prst="rect">
-            <a:avLst/>
-          </a:prstGeom>
-          <a:noFill/>
-          <a:ln/>
-        </p:spPr>
-        <p:txBody>
-          <a:bodyPr wrap="square" lIns="0" tIns="0" rIns="0" bIns="0" rtlCol="0" anchor="ctr"/>
-          <a:lstStyle/>
-          <a:p>
-            <a:pPr indent="0" marL="0">
-              <a:buNone/>
-            </a:pPr>
-            <a:r>
-              <a:rPr lang="en-US" sz="3200" b="1" dirty="0">
-                <a:solidFill>
-                  <a:srgbClr val="0C2A3D"/>
-                </a:solidFill>
-                <a:latin typeface="Arial Black" pitchFamily="34" charset="0"/>
-                <a:ea typeface="Arial Black" pitchFamily="34" charset="-122"/>
-                <a:cs typeface="Arial Black" pitchFamily="34" charset="-120"/>
-              </a:rPr>
-              <a:t>Daily structure — Mon to Sun</a:t>
-            </a:r>
-            <a:endParaRPr lang="en-US" sz="3200" dirty="0"/>
-          </a:p>
-        </p:txBody>
-      </p:sp>
-      <p:sp>
-        <p:nvSpPr>
-          <p:cNvPr id="6" name="Shape 4"/>
-          <p:cNvSpPr/>
-          <p:nvPr/>
-        </p:nvSpPr>
-        <p:spPr>
-          <a:xfrm>
-            <a:off x="502920" y="1920240"/>
-            <a:ext cx="3545738" cy="1097280"/>
-          </a:xfrm>
-          <a:prstGeom prst="rect">
-            <a:avLst/>
-          </a:prstGeom>
-          <a:solidFill>
-            <a:srgbClr val="E0F2FE"/>
-          </a:solidFill>
-          <a:ln w="12700">
-            <a:solidFill>
-              <a:srgbClr val="E0F2FE"/>
-            </a:solidFill>
-            <a:prstDash val="solid"/>
-          </a:ln>
-        </p:spPr>
-      </p:sp>
-      <p:sp>
-        <p:nvSpPr>
-          <p:cNvPr id="7" name="Text 5"/>
-          <p:cNvSpPr/>
-          <p:nvPr/>
-        </p:nvSpPr>
-        <p:spPr>
-          <a:xfrm>
-            <a:off x="502920" y="2011680"/>
-            <a:ext cx="3545738" cy="594360"/>
-          </a:xfrm>
-          <a:prstGeom prst="rect">
-            <a:avLst/>
-          </a:prstGeom>
-          <a:noFill/>
-          <a:ln/>
-        </p:spPr>
-        <p:txBody>
-          <a:bodyPr wrap="square" lIns="0" tIns="0" rIns="0" bIns="0" rtlCol="0" anchor="ctr"/>
-          <a:lstStyle/>
-          <a:p>
-            <a:pPr algn="ctr" indent="0" marL="0">
-              <a:buNone/>
-            </a:pPr>
-            <a:r>
-              <a:rPr lang="en-US" sz="3000" b="1" dirty="0">
-                <a:solidFill>
-                  <a:srgbClr val="075985"/>
-                </a:solidFill>
-                <a:latin typeface="Arial Black" pitchFamily="34" charset="0"/>
-                <a:ea typeface="Arial Black" pitchFamily="34" charset="-122"/>
-                <a:cs typeface="Arial Black" pitchFamily="34" charset="-120"/>
-              </a:rPr>
-              <a:t>Mon–Sun</a:t>
-            </a:r>
-            <a:endParaRPr lang="en-US" sz="3000" dirty="0"/>
-          </a:p>
-        </p:txBody>
-      </p:sp>
-      <p:sp>
-        <p:nvSpPr>
-          <p:cNvPr id="8" name="Text 6"/>
-          <p:cNvSpPr/>
-          <p:nvPr/>
-        </p:nvSpPr>
-        <p:spPr>
-          <a:xfrm>
-            <a:off x="502920" y="2606040"/>
-            <a:ext cx="3545738" cy="365760"/>
-          </a:xfrm>
-          <a:prstGeom prst="rect">
-            <a:avLst/>
-          </a:prstGeom>
-          <a:noFill/>
-          <a:ln/>
-        </p:spPr>
-        <p:txBody>
-          <a:bodyPr wrap="square" lIns="0" tIns="0" rIns="0" bIns="0" rtlCol="0" anchor="ctr"/>
-          <a:lstStyle/>
-          <a:p>
-            <a:pPr algn="ctr" indent="0" marL="0">
-              <a:buNone/>
-            </a:pPr>
-            <a:r>
-              <a:rPr lang="en-US" sz="1300" b="1" spc="200" kern="0" dirty="0">
-                <a:solidFill>
-                  <a:srgbClr val="345671"/>
-                </a:solidFill>
-                <a:latin typeface="Calibri" pitchFamily="34" charset="0"/>
-                <a:ea typeface="Calibri" pitchFamily="34" charset="-122"/>
-                <a:cs typeface="Calibri" pitchFamily="34" charset="-120"/>
-              </a:rPr>
-              <a:t>Daily classes</a:t>
-            </a:r>
-            <a:endParaRPr lang="en-US" sz="1300" dirty="0"/>
-          </a:p>
-        </p:txBody>
-      </p:sp>
-      <p:sp>
-        <p:nvSpPr>
-          <p:cNvPr id="9" name="Shape 7"/>
-          <p:cNvSpPr/>
-          <p:nvPr/>
-        </p:nvSpPr>
-        <p:spPr>
-          <a:xfrm>
-            <a:off x="4322978" y="1920240"/>
-            <a:ext cx="3545738" cy="1097280"/>
-          </a:xfrm>
-          <a:prstGeom prst="rect">
-            <a:avLst/>
-          </a:prstGeom>
-          <a:solidFill>
-            <a:srgbClr val="E0F2FE"/>
-          </a:solidFill>
-          <a:ln w="12700">
-            <a:solidFill>
-              <a:srgbClr val="E0F2FE"/>
-            </a:solidFill>
-            <a:prstDash val="solid"/>
-          </a:ln>
-        </p:spPr>
-      </p:sp>
-      <p:sp>
-        <p:nvSpPr>
-          <p:cNvPr id="10" name="Text 8"/>
-          <p:cNvSpPr/>
-          <p:nvPr/>
-        </p:nvSpPr>
-        <p:spPr>
-          <a:xfrm>
-            <a:off x="4322978" y="2011680"/>
-            <a:ext cx="3545738" cy="594360"/>
-          </a:xfrm>
-          <a:prstGeom prst="rect">
-            <a:avLst/>
-          </a:prstGeom>
-          <a:noFill/>
-          <a:ln/>
-        </p:spPr>
-        <p:txBody>
-          <a:bodyPr wrap="square" lIns="0" tIns="0" rIns="0" bIns="0" rtlCol="0" anchor="ctr"/>
-          <a:lstStyle/>
-          <a:p>
-            <a:pPr algn="ctr" indent="0" marL="0">
-              <a:buNone/>
-            </a:pPr>
-            <a:r>
-              <a:rPr lang="en-US" sz="3000" b="1" dirty="0">
-                <a:solidFill>
-                  <a:srgbClr val="075985"/>
-                </a:solidFill>
-                <a:latin typeface="Arial Black" pitchFamily="34" charset="0"/>
-                <a:ea typeface="Arial Black" pitchFamily="34" charset="-122"/>
-                <a:cs typeface="Arial Black" pitchFamily="34" charset="-120"/>
-              </a:rPr>
-              <a:t>4 months</a:t>
-            </a:r>
-            <a:endParaRPr lang="en-US" sz="3000" dirty="0"/>
-          </a:p>
-        </p:txBody>
-      </p:sp>
-      <p:sp>
-        <p:nvSpPr>
-          <p:cNvPr id="11" name="Text 9"/>
-          <p:cNvSpPr/>
-          <p:nvPr/>
-        </p:nvSpPr>
-        <p:spPr>
-          <a:xfrm>
-            <a:off x="4322978" y="2606040"/>
-            <a:ext cx="3545738" cy="365760"/>
-          </a:xfrm>
-          <a:prstGeom prst="rect">
-            <a:avLst/>
-          </a:prstGeom>
-          <a:noFill/>
-          <a:ln/>
-        </p:spPr>
-        <p:txBody>
-          <a:bodyPr wrap="square" lIns="0" tIns="0" rIns="0" bIns="0" rtlCol="0" anchor="ctr"/>
-          <a:lstStyle/>
-          <a:p>
-            <a:pPr algn="ctr" indent="0" marL="0">
-              <a:buNone/>
-            </a:pPr>
-            <a:r>
-              <a:rPr lang="en-US" sz="1300" b="1" spc="200" kern="0" dirty="0">
-                <a:solidFill>
-                  <a:srgbClr val="345671"/>
-                </a:solidFill>
-                <a:latin typeface="Calibri" pitchFamily="34" charset="0"/>
-                <a:ea typeface="Calibri" pitchFamily="34" charset="-122"/>
-                <a:cs typeface="Calibri" pitchFamily="34" charset="-120"/>
-              </a:rPr>
-              <a:t>Structured roadmap</a:t>
-            </a:r>
-            <a:endParaRPr lang="en-US" sz="1300" dirty="0"/>
-          </a:p>
-        </p:txBody>
-      </p:sp>
-      <p:sp>
-        <p:nvSpPr>
-          <p:cNvPr id="12" name="Shape 10"/>
-          <p:cNvSpPr/>
-          <p:nvPr/>
-        </p:nvSpPr>
-        <p:spPr>
-          <a:xfrm>
-            <a:off x="8143037" y="1920240"/>
-            <a:ext cx="3545738" cy="1097280"/>
-          </a:xfrm>
-          <a:prstGeom prst="rect">
-            <a:avLst/>
-          </a:prstGeom>
-          <a:solidFill>
-            <a:srgbClr val="E0F2FE"/>
-          </a:solidFill>
-          <a:ln w="12700">
-            <a:solidFill>
-              <a:srgbClr val="E0F2FE"/>
-            </a:solidFill>
-            <a:prstDash val="solid"/>
-          </a:ln>
-        </p:spPr>
-      </p:sp>
-      <p:sp>
-        <p:nvSpPr>
-          <p:cNvPr id="13" name="Text 11"/>
-          <p:cNvSpPr/>
-          <p:nvPr/>
-        </p:nvSpPr>
-        <p:spPr>
-          <a:xfrm>
-            <a:off x="8143037" y="2011680"/>
-            <a:ext cx="3545738" cy="594360"/>
-          </a:xfrm>
-          <a:prstGeom prst="rect">
-            <a:avLst/>
-          </a:prstGeom>
-          <a:noFill/>
-          <a:ln/>
-        </p:spPr>
-        <p:txBody>
-          <a:bodyPr wrap="square" lIns="0" tIns="0" rIns="0" bIns="0" rtlCol="0" anchor="ctr"/>
-          <a:lstStyle/>
-          <a:p>
-            <a:pPr algn="ctr" indent="0" marL="0">
-              <a:buNone/>
-            </a:pPr>
-            <a:r>
-              <a:rPr lang="en-US" sz="3000" b="1" dirty="0">
-                <a:solidFill>
-                  <a:srgbClr val="075985"/>
-                </a:solidFill>
-                <a:latin typeface="Arial Black" pitchFamily="34" charset="0"/>
-                <a:ea typeface="Arial Black" pitchFamily="34" charset="-122"/>
-                <a:cs typeface="Arial Black" pitchFamily="34" charset="-120"/>
-              </a:rPr>
-              <a:t>Step 1 + 2</a:t>
-            </a:r>
-            <a:endParaRPr lang="en-US" sz="3000" dirty="0"/>
-          </a:p>
-        </p:txBody>
-      </p:sp>
-      <p:sp>
-        <p:nvSpPr>
-          <p:cNvPr id="14" name="Text 12"/>
-          <p:cNvSpPr/>
-          <p:nvPr/>
-        </p:nvSpPr>
-        <p:spPr>
-          <a:xfrm>
-            <a:off x="8143037" y="2606040"/>
-            <a:ext cx="3545738" cy="365760"/>
-          </a:xfrm>
-          <a:prstGeom prst="rect">
-            <a:avLst/>
-          </a:prstGeom>
-          <a:noFill/>
-          <a:ln/>
-        </p:spPr>
-        <p:txBody>
-          <a:bodyPr wrap="square" lIns="0" tIns="0" rIns="0" bIns="0" rtlCol="0" anchor="ctr"/>
-          <a:lstStyle/>
-          <a:p>
-            <a:pPr algn="ctr" indent="0" marL="0">
-              <a:buNone/>
-            </a:pPr>
-            <a:r>
-              <a:rPr lang="en-US" sz="1300" b="1" spc="200" kern="0" dirty="0">
-                <a:solidFill>
-                  <a:srgbClr val="345671"/>
-                </a:solidFill>
-                <a:latin typeface="Calibri" pitchFamily="34" charset="0"/>
-                <a:ea typeface="Calibri" pitchFamily="34" charset="-122"/>
-                <a:cs typeface="Calibri" pitchFamily="34" charset="-120"/>
-              </a:rPr>
-              <a:t>Combined option</a:t>
-            </a:r>
-            <a:endParaRPr lang="en-US" sz="1300" dirty="0"/>
-          </a:p>
-        </p:txBody>
-      </p:sp>
-      <p:sp>
-        <p:nvSpPr>
-          <p:cNvPr id="15" name="Shape 13"/>
-          <p:cNvSpPr/>
-          <p:nvPr/>
-        </p:nvSpPr>
-        <p:spPr>
-          <a:xfrm>
-            <a:off x="502920" y="3383280"/>
-            <a:ext cx="2693594" cy="2194560"/>
-          </a:xfrm>
-          <a:prstGeom prst="rect">
-            <a:avLst/>
-          </a:prstGeom>
-          <a:solidFill>
-            <a:srgbClr val="FFFFFF"/>
-          </a:solidFill>
-          <a:ln w="9525">
-            <a:solidFill>
-              <a:srgbClr val="D6E8F5"/>
-            </a:solidFill>
-            <a:prstDash val="solid"/>
-          </a:ln>
-          <a:effectLst>
-            <a:outerShdw sx="100000" sy="100000" kx="0" ky="0" algn="bl" rotWithShape="0" blurRad="127000" dist="12700" dir="5400000">
-              <a:srgbClr val="0C2A3D">
-                <a:alpha val="8000"/>
-              </a:srgbClr>
-            </a:outerShdw>
-          </a:effectLst>
-        </p:spPr>
-      </p:sp>
-      <p:sp>
-        <p:nvSpPr>
-          <p:cNvPr id="16" name="Shape 14"/>
-          <p:cNvSpPr/>
-          <p:nvPr/>
-        </p:nvSpPr>
-        <p:spPr>
-          <a:xfrm>
-            <a:off x="502920" y="3383280"/>
-            <a:ext cx="2693594" cy="73152"/>
-          </a:xfrm>
-          <a:prstGeom prst="rect">
-            <a:avLst/>
-          </a:prstGeom>
-          <a:solidFill>
-            <a:srgbClr val="0284C7"/>
-          </a:solidFill>
-          <a:ln w="12700">
-            <a:solidFill>
-              <a:srgbClr val="0284C7"/>
-            </a:solidFill>
-            <a:prstDash val="solid"/>
-          </a:ln>
-        </p:spPr>
-      </p:sp>
-      <p:sp>
-        <p:nvSpPr>
-          <p:cNvPr id="17" name="Shape 15"/>
-          <p:cNvSpPr/>
-          <p:nvPr/>
-        </p:nvSpPr>
-        <p:spPr>
-          <a:xfrm>
-            <a:off x="777240" y="3657600"/>
-            <a:ext cx="457200" cy="457200"/>
-          </a:xfrm>
-          <a:prstGeom prst="ellipse">
-            <a:avLst/>
-          </a:prstGeom>
-          <a:solidFill>
-            <a:srgbClr val="0284C7"/>
-          </a:solidFill>
-          <a:ln w="12700">
-            <a:solidFill>
-              <a:srgbClr val="0284C7"/>
-            </a:solidFill>
-            <a:prstDash val="solid"/>
-          </a:ln>
-        </p:spPr>
-      </p:sp>
-      <p:sp>
-        <p:nvSpPr>
-          <p:cNvPr id="18" name="Text 16"/>
-          <p:cNvSpPr/>
-          <p:nvPr/>
-        </p:nvSpPr>
-        <p:spPr>
-          <a:xfrm>
-            <a:off x="777240" y="3657600"/>
-            <a:ext cx="457200" cy="457200"/>
-          </a:xfrm>
-          <a:prstGeom prst="rect">
-            <a:avLst/>
-          </a:prstGeom>
-          <a:noFill/>
-          <a:ln/>
-        </p:spPr>
-        <p:txBody>
-          <a:bodyPr wrap="square" lIns="0" tIns="0" rIns="0" bIns="0" rtlCol="0" anchor="ctr"/>
-          <a:lstStyle/>
-          <a:p>
-            <a:pPr algn="ctr" indent="0" marL="0">
-              <a:buNone/>
-            </a:pPr>
-            <a:r>
-              <a:rPr lang="en-US" sz="1800" b="1" dirty="0">
-                <a:solidFill>
-                  <a:srgbClr val="FFFFFF"/>
-                </a:solidFill>
-                <a:latin typeface="Arial Black" pitchFamily="34" charset="0"/>
-                <a:ea typeface="Arial Black" pitchFamily="34" charset="-122"/>
-                <a:cs typeface="Arial Black" pitchFamily="34" charset="-120"/>
-              </a:rPr>
-              <a:t>1</a:t>
-            </a:r>
-            <a:endParaRPr lang="en-US" sz="1800" dirty="0"/>
-          </a:p>
-        </p:txBody>
-      </p:sp>
-      <p:sp>
-        <p:nvSpPr>
-          <p:cNvPr id="19" name="Text 17"/>
-          <p:cNvSpPr/>
-          <p:nvPr/>
-        </p:nvSpPr>
-        <p:spPr>
-          <a:xfrm>
-            <a:off x="777240" y="4251960"/>
-            <a:ext cx="2144954" cy="365760"/>
-          </a:xfrm>
-          <a:prstGeom prst="rect">
-            <a:avLst/>
-          </a:prstGeom>
-          <a:noFill/>
-          <a:ln/>
-        </p:spPr>
-        <p:txBody>
-          <a:bodyPr wrap="square" lIns="0" tIns="0" rIns="0" bIns="0" rtlCol="0" anchor="ctr"/>
-          <a:lstStyle/>
-          <a:p>
-            <a:pPr indent="0" marL="0">
-              <a:buNone/>
-            </a:pPr>
-            <a:r>
-              <a:rPr lang="en-US" sz="1500" b="1" dirty="0">
-                <a:solidFill>
-                  <a:srgbClr val="0C2A3D"/>
-                </a:solidFill>
-                <a:latin typeface="Calibri" pitchFamily="34" charset="0"/>
-                <a:ea typeface="Calibri" pitchFamily="34" charset="-122"/>
-                <a:cs typeface="Calibri" pitchFamily="34" charset="-120"/>
-              </a:rPr>
-              <a:t>Topic teaching</a:t>
-            </a:r>
-            <a:endParaRPr lang="en-US" sz="1500" dirty="0"/>
-          </a:p>
-        </p:txBody>
-      </p:sp>
-      <p:sp>
-        <p:nvSpPr>
-          <p:cNvPr id="20" name="Text 18"/>
-          <p:cNvSpPr/>
-          <p:nvPr/>
-        </p:nvSpPr>
-        <p:spPr>
-          <a:xfrm>
-            <a:off x="777240" y="4663440"/>
-            <a:ext cx="2144954" cy="822960"/>
-          </a:xfrm>
-          <a:prstGeom prst="rect">
-            <a:avLst/>
-          </a:prstGeom>
-          <a:noFill/>
-          <a:ln/>
-        </p:spPr>
-        <p:txBody>
-          <a:bodyPr wrap="square" lIns="0" tIns="0" rIns="0" bIns="0" rtlCol="0" anchor="ctr"/>
-          <a:lstStyle/>
-          <a:p>
-            <a:pPr indent="0" marL="0">
-              <a:buNone/>
-            </a:pPr>
-            <a:r>
-              <a:rPr lang="en-US" sz="1150" dirty="0">
-                <a:solidFill>
-                  <a:srgbClr val="345671"/>
-                </a:solidFill>
-                <a:latin typeface="Calibri" pitchFamily="34" charset="0"/>
-                <a:ea typeface="Calibri" pitchFamily="34" charset="-122"/>
-                <a:cs typeface="Calibri" pitchFamily="34" charset="-120"/>
-              </a:rPr>
-              <a:t>30–45 min focused teaching mapped page-by-page to First Aid 2025.</a:t>
-            </a:r>
-            <a:endParaRPr lang="en-US" sz="1150" dirty="0"/>
-          </a:p>
-        </p:txBody>
-      </p:sp>
-      <p:sp>
-        <p:nvSpPr>
-          <p:cNvPr id="21" name="Shape 19"/>
-          <p:cNvSpPr/>
-          <p:nvPr/>
-        </p:nvSpPr>
-        <p:spPr>
-          <a:xfrm>
-            <a:off x="3333674" y="3383280"/>
-            <a:ext cx="2693594" cy="2194560"/>
-          </a:xfrm>
-          <a:prstGeom prst="rect">
-            <a:avLst/>
-          </a:prstGeom>
-          <a:solidFill>
-            <a:srgbClr val="FFFFFF"/>
-          </a:solidFill>
-          <a:ln w="9525">
-            <a:solidFill>
-              <a:srgbClr val="D6E8F5"/>
-            </a:solidFill>
-            <a:prstDash val="solid"/>
-          </a:ln>
-          <a:effectLst>
-            <a:outerShdw sx="100000" sy="100000" kx="0" ky="0" algn="bl" rotWithShape="0" blurRad="127000" dist="12700" dir="5400000">
-              <a:srgbClr val="0C2A3D">
-                <a:alpha val="8000"/>
-              </a:srgbClr>
-            </a:outerShdw>
-          </a:effectLst>
-        </p:spPr>
-      </p:sp>
-      <p:sp>
-        <p:nvSpPr>
-          <p:cNvPr id="22" name="Shape 20"/>
-          <p:cNvSpPr/>
-          <p:nvPr/>
-        </p:nvSpPr>
-        <p:spPr>
-          <a:xfrm>
-            <a:off x="3333674" y="3383280"/>
-            <a:ext cx="2693594" cy="73152"/>
+          <p:cNvPr id="3" name="Shape 1"/>
+          <p:cNvSpPr/>
+          <p:nvPr/>
+        </p:nvSpPr>
+        <p:spPr>
+          <a:xfrm>
+            <a:off x="7315017" y="0"/>
+            <a:ext cx="4876678" cy="411480"/>
           </a:xfrm>
           <a:prstGeom prst="rect">
             <a:avLst/>
@@ -7595,16 +8252,938 @@
       </p:sp>
       <p:sp>
         <p:nvSpPr>
-          <p:cNvPr id="23" name="Shape 21"/>
-          <p:cNvSpPr/>
-          <p:nvPr/>
-        </p:nvSpPr>
-        <p:spPr>
-          <a:xfrm>
-            <a:off x="3607994" y="3657600"/>
-            <a:ext cx="457200" cy="457200"/>
-          </a:xfrm>
-          <a:prstGeom prst="ellipse">
+          <p:cNvPr id="4" name="Text 2"/>
+          <p:cNvSpPr/>
+          <p:nvPr/>
+        </p:nvSpPr>
+        <p:spPr>
+          <a:xfrm>
+            <a:off x="502920" y="640080"/>
+            <a:ext cx="11185855" cy="274320"/>
+          </a:xfrm>
+          <a:prstGeom prst="rect">
+            <a:avLst/>
+          </a:prstGeom>
+          <a:noFill/>
+          <a:ln/>
+        </p:spPr>
+        <p:txBody>
+          <a:bodyPr wrap="square" lIns="0" tIns="0" rIns="0" bIns="0" rtlCol="0" anchor="ctr"/>
+          <a:lstStyle/>
+          <a:p>
+            <a:pPr indent="0" marL="0">
+              <a:buNone/>
+            </a:pPr>
+            <a:r>
+              <a:rPr lang="en-US" sz="1200" b="1" spc="400" kern="0" dirty="0">
+                <a:solidFill>
+                  <a:srgbClr val="D97706"/>
+                </a:solidFill>
+                <a:latin typeface="Calibri" pitchFamily="34" charset="0"/>
+                <a:ea typeface="Calibri" pitchFamily="34" charset="-122"/>
+                <a:cs typeface="Calibri" pitchFamily="34" charset="-120"/>
+              </a:rPr>
+              <a:t>STEP 2 CK PREP</a:t>
+            </a:r>
+            <a:endParaRPr lang="en-US" sz="1200" dirty="0"/>
+          </a:p>
+        </p:txBody>
+      </p:sp>
+      <p:sp>
+        <p:nvSpPr>
+          <p:cNvPr id="5" name="Text 3"/>
+          <p:cNvSpPr/>
+          <p:nvPr/>
+        </p:nvSpPr>
+        <p:spPr>
+          <a:xfrm>
+            <a:off x="502920" y="914400"/>
+            <a:ext cx="11185855" cy="731520"/>
+          </a:xfrm>
+          <a:prstGeom prst="rect">
+            <a:avLst/>
+          </a:prstGeom>
+          <a:noFill/>
+          <a:ln/>
+        </p:spPr>
+        <p:txBody>
+          <a:bodyPr wrap="square" lIns="0" tIns="0" rIns="0" bIns="0" rtlCol="0" anchor="ctr"/>
+          <a:lstStyle/>
+          <a:p>
+            <a:pPr indent="0" marL="0">
+              <a:buNone/>
+            </a:pPr>
+            <a:r>
+              <a:rPr lang="en-US" sz="3200" b="1" dirty="0">
+                <a:solidFill>
+                  <a:srgbClr val="0C2A3D"/>
+                </a:solidFill>
+                <a:latin typeface="Arial Black" pitchFamily="34" charset="0"/>
+                <a:ea typeface="Arial Black" pitchFamily="34" charset="-122"/>
+                <a:cs typeface="Arial Black" pitchFamily="34" charset="-120"/>
+              </a:rPr>
+              <a:t>Clinical knowledge. Scaled score 1–300.</a:t>
+            </a:r>
+            <a:endParaRPr lang="en-US" sz="3200" dirty="0"/>
+          </a:p>
+        </p:txBody>
+      </p:sp>
+      <p:sp>
+        <p:nvSpPr>
+          <p:cNvPr id="6" name="Text 4"/>
+          <p:cNvSpPr/>
+          <p:nvPr/>
+        </p:nvSpPr>
+        <p:spPr>
+          <a:xfrm>
+            <a:off x="502920" y="1874520"/>
+            <a:ext cx="4698059" cy="256032"/>
+          </a:xfrm>
+          <a:prstGeom prst="rect">
+            <a:avLst/>
+          </a:prstGeom>
+          <a:noFill/>
+          <a:ln/>
+        </p:spPr>
+        <p:txBody>
+          <a:bodyPr wrap="square" lIns="0" tIns="0" rIns="0" bIns="0" rtlCol="0" anchor="ctr"/>
+          <a:lstStyle/>
+          <a:p>
+            <a:pPr indent="0" marL="0">
+              <a:buNone/>
+            </a:pPr>
+            <a:r>
+              <a:rPr lang="en-US" sz="1100" b="1" spc="300" kern="0" dirty="0">
+                <a:solidFill>
+                  <a:srgbClr val="B45309"/>
+                </a:solidFill>
+                <a:latin typeface="Calibri" pitchFamily="34" charset="0"/>
+                <a:ea typeface="Calibri" pitchFamily="34" charset="-122"/>
+                <a:cs typeface="Calibri" pitchFamily="34" charset="-120"/>
+              </a:rPr>
+              <a:t>WHAT'S TESTED</a:t>
+            </a:r>
+            <a:endParaRPr lang="en-US" sz="1100" dirty="0"/>
+          </a:p>
+        </p:txBody>
+      </p:sp>
+      <p:sp>
+        <p:nvSpPr>
+          <p:cNvPr id="7" name="Text 5"/>
+          <p:cNvSpPr/>
+          <p:nvPr/>
+        </p:nvSpPr>
+        <p:spPr>
+          <a:xfrm>
+            <a:off x="502920" y="2194560"/>
+            <a:ext cx="3783659" cy="274320"/>
+          </a:xfrm>
+          <a:prstGeom prst="rect">
+            <a:avLst/>
+          </a:prstGeom>
+          <a:noFill/>
+          <a:ln/>
+        </p:spPr>
+        <p:txBody>
+          <a:bodyPr wrap="square" lIns="0" tIns="0" rIns="0" bIns="0" rtlCol="0" anchor="ctr"/>
+          <a:lstStyle/>
+          <a:p>
+            <a:pPr indent="0" marL="0">
+              <a:buNone/>
+            </a:pPr>
+            <a:r>
+              <a:rPr lang="en-US" sz="1200" dirty="0">
+                <a:solidFill>
+                  <a:srgbClr val="0C2A3D"/>
+                </a:solidFill>
+                <a:latin typeface="Calibri" pitchFamily="34" charset="0"/>
+                <a:ea typeface="Calibri" pitchFamily="34" charset="-122"/>
+                <a:cs typeface="Calibri" pitchFamily="34" charset="-120"/>
+              </a:rPr>
+              <a:t>Diagnosis</a:t>
+            </a:r>
+            <a:endParaRPr lang="en-US" sz="1200" dirty="0"/>
+          </a:p>
+        </p:txBody>
+      </p:sp>
+      <p:sp>
+        <p:nvSpPr>
+          <p:cNvPr id="8" name="Text 6"/>
+          <p:cNvSpPr/>
+          <p:nvPr/>
+        </p:nvSpPr>
+        <p:spPr>
+          <a:xfrm>
+            <a:off x="4286579" y="2194560"/>
+            <a:ext cx="914400" cy="274320"/>
+          </a:xfrm>
+          <a:prstGeom prst="rect">
+            <a:avLst/>
+          </a:prstGeom>
+          <a:noFill/>
+          <a:ln/>
+        </p:spPr>
+        <p:txBody>
+          <a:bodyPr wrap="square" lIns="0" tIns="0" rIns="0" bIns="0" rtlCol="0" anchor="ctr"/>
+          <a:lstStyle/>
+          <a:p>
+            <a:pPr algn="r" indent="0" marL="0">
+              <a:buNone/>
+            </a:pPr>
+            <a:r>
+              <a:rPr lang="en-US" sz="1200" b="1" dirty="0">
+                <a:solidFill>
+                  <a:srgbClr val="D97706"/>
+                </a:solidFill>
+                <a:latin typeface="Calibri" pitchFamily="34" charset="0"/>
+                <a:ea typeface="Calibri" pitchFamily="34" charset="-122"/>
+                <a:cs typeface="Calibri" pitchFamily="34" charset="-120"/>
+              </a:rPr>
+              <a:t>34–46%</a:t>
+            </a:r>
+            <a:endParaRPr lang="en-US" sz="1200" dirty="0"/>
+          </a:p>
+        </p:txBody>
+      </p:sp>
+      <p:sp>
+        <p:nvSpPr>
+          <p:cNvPr id="9" name="Text 7"/>
+          <p:cNvSpPr/>
+          <p:nvPr/>
+        </p:nvSpPr>
+        <p:spPr>
+          <a:xfrm>
+            <a:off x="502920" y="2523744"/>
+            <a:ext cx="3783659" cy="274320"/>
+          </a:xfrm>
+          <a:prstGeom prst="rect">
+            <a:avLst/>
+          </a:prstGeom>
+          <a:noFill/>
+          <a:ln/>
+        </p:spPr>
+        <p:txBody>
+          <a:bodyPr wrap="square" lIns="0" tIns="0" rIns="0" bIns="0" rtlCol="0" anchor="ctr"/>
+          <a:lstStyle/>
+          <a:p>
+            <a:pPr indent="0" marL="0">
+              <a:buNone/>
+            </a:pPr>
+            <a:r>
+              <a:rPr lang="en-US" sz="1200" dirty="0">
+                <a:solidFill>
+                  <a:srgbClr val="0C2A3D"/>
+                </a:solidFill>
+                <a:latin typeface="Calibri" pitchFamily="34" charset="0"/>
+                <a:ea typeface="Calibri" pitchFamily="34" charset="-122"/>
+                <a:cs typeface="Calibri" pitchFamily="34" charset="-120"/>
+              </a:rPr>
+              <a:t>Pharmacotherapy &amp; management</a:t>
+            </a:r>
+            <a:endParaRPr lang="en-US" sz="1200" dirty="0"/>
+          </a:p>
+        </p:txBody>
+      </p:sp>
+      <p:sp>
+        <p:nvSpPr>
+          <p:cNvPr id="10" name="Text 8"/>
+          <p:cNvSpPr/>
+          <p:nvPr/>
+        </p:nvSpPr>
+        <p:spPr>
+          <a:xfrm>
+            <a:off x="4286579" y="2523744"/>
+            <a:ext cx="914400" cy="274320"/>
+          </a:xfrm>
+          <a:prstGeom prst="rect">
+            <a:avLst/>
+          </a:prstGeom>
+          <a:noFill/>
+          <a:ln/>
+        </p:spPr>
+        <p:txBody>
+          <a:bodyPr wrap="square" lIns="0" tIns="0" rIns="0" bIns="0" rtlCol="0" anchor="ctr"/>
+          <a:lstStyle/>
+          <a:p>
+            <a:pPr algn="r" indent="0" marL="0">
+              <a:buNone/>
+            </a:pPr>
+            <a:r>
+              <a:rPr lang="en-US" sz="1200" b="1" dirty="0">
+                <a:solidFill>
+                  <a:srgbClr val="D97706"/>
+                </a:solidFill>
+                <a:latin typeface="Calibri" pitchFamily="34" charset="0"/>
+                <a:ea typeface="Calibri" pitchFamily="34" charset="-122"/>
+                <a:cs typeface="Calibri" pitchFamily="34" charset="-120"/>
+              </a:rPr>
+              <a:t>26–38%</a:t>
+            </a:r>
+            <a:endParaRPr lang="en-US" sz="1200" dirty="0"/>
+          </a:p>
+        </p:txBody>
+      </p:sp>
+      <p:sp>
+        <p:nvSpPr>
+          <p:cNvPr id="11" name="Text 9"/>
+          <p:cNvSpPr/>
+          <p:nvPr/>
+        </p:nvSpPr>
+        <p:spPr>
+          <a:xfrm>
+            <a:off x="502920" y="2852928"/>
+            <a:ext cx="3783659" cy="274320"/>
+          </a:xfrm>
+          <a:prstGeom prst="rect">
+            <a:avLst/>
+          </a:prstGeom>
+          <a:noFill/>
+          <a:ln/>
+        </p:spPr>
+        <p:txBody>
+          <a:bodyPr wrap="square" lIns="0" tIns="0" rIns="0" bIns="0" rtlCol="0" anchor="ctr"/>
+          <a:lstStyle/>
+          <a:p>
+            <a:pPr indent="0" marL="0">
+              <a:buNone/>
+            </a:pPr>
+            <a:r>
+              <a:rPr lang="en-US" sz="1200" dirty="0">
+                <a:solidFill>
+                  <a:srgbClr val="0C2A3D"/>
+                </a:solidFill>
+                <a:latin typeface="Calibri" pitchFamily="34" charset="0"/>
+                <a:ea typeface="Calibri" pitchFamily="34" charset="-122"/>
+                <a:cs typeface="Calibri" pitchFamily="34" charset="-120"/>
+              </a:rPr>
+              <a:t>Health maintenance &amp; prevention</a:t>
+            </a:r>
+            <a:endParaRPr lang="en-US" sz="1200" dirty="0"/>
+          </a:p>
+        </p:txBody>
+      </p:sp>
+      <p:sp>
+        <p:nvSpPr>
+          <p:cNvPr id="12" name="Text 10"/>
+          <p:cNvSpPr/>
+          <p:nvPr/>
+        </p:nvSpPr>
+        <p:spPr>
+          <a:xfrm>
+            <a:off x="4286579" y="2852928"/>
+            <a:ext cx="914400" cy="274320"/>
+          </a:xfrm>
+          <a:prstGeom prst="rect">
+            <a:avLst/>
+          </a:prstGeom>
+          <a:noFill/>
+          <a:ln/>
+        </p:spPr>
+        <p:txBody>
+          <a:bodyPr wrap="square" lIns="0" tIns="0" rIns="0" bIns="0" rtlCol="0" anchor="ctr"/>
+          <a:lstStyle/>
+          <a:p>
+            <a:pPr algn="r" indent="0" marL="0">
+              <a:buNone/>
+            </a:pPr>
+            <a:r>
+              <a:rPr lang="en-US" sz="1200" b="1" dirty="0">
+                <a:solidFill>
+                  <a:srgbClr val="D97706"/>
+                </a:solidFill>
+                <a:latin typeface="Calibri" pitchFamily="34" charset="0"/>
+                <a:ea typeface="Calibri" pitchFamily="34" charset="-122"/>
+                <a:cs typeface="Calibri" pitchFamily="34" charset="-120"/>
+              </a:rPr>
+              <a:t>8–12%</a:t>
+            </a:r>
+            <a:endParaRPr lang="en-US" sz="1200" dirty="0"/>
+          </a:p>
+        </p:txBody>
+      </p:sp>
+      <p:sp>
+        <p:nvSpPr>
+          <p:cNvPr id="13" name="Text 11"/>
+          <p:cNvSpPr/>
+          <p:nvPr/>
+        </p:nvSpPr>
+        <p:spPr>
+          <a:xfrm>
+            <a:off x="502920" y="3182112"/>
+            <a:ext cx="3783659" cy="274320"/>
+          </a:xfrm>
+          <a:prstGeom prst="rect">
+            <a:avLst/>
+          </a:prstGeom>
+          <a:noFill/>
+          <a:ln/>
+        </p:spPr>
+        <p:txBody>
+          <a:bodyPr wrap="square" lIns="0" tIns="0" rIns="0" bIns="0" rtlCol="0" anchor="ctr"/>
+          <a:lstStyle/>
+          <a:p>
+            <a:pPr indent="0" marL="0">
+              <a:buNone/>
+            </a:pPr>
+            <a:r>
+              <a:rPr lang="en-US" sz="1200" dirty="0">
+                <a:solidFill>
+                  <a:srgbClr val="0C2A3D"/>
+                </a:solidFill>
+                <a:latin typeface="Calibri" pitchFamily="34" charset="0"/>
+                <a:ea typeface="Calibri" pitchFamily="34" charset="-122"/>
+                <a:cs typeface="Calibri" pitchFamily="34" charset="-120"/>
+              </a:rPr>
+              <a:t>Ethics / professionalism</a:t>
+            </a:r>
+            <a:endParaRPr lang="en-US" sz="1200" dirty="0"/>
+          </a:p>
+        </p:txBody>
+      </p:sp>
+      <p:sp>
+        <p:nvSpPr>
+          <p:cNvPr id="14" name="Text 12"/>
+          <p:cNvSpPr/>
+          <p:nvPr/>
+        </p:nvSpPr>
+        <p:spPr>
+          <a:xfrm>
+            <a:off x="4286579" y="3182112"/>
+            <a:ext cx="914400" cy="274320"/>
+          </a:xfrm>
+          <a:prstGeom prst="rect">
+            <a:avLst/>
+          </a:prstGeom>
+          <a:noFill/>
+          <a:ln/>
+        </p:spPr>
+        <p:txBody>
+          <a:bodyPr wrap="square" lIns="0" tIns="0" rIns="0" bIns="0" rtlCol="0" anchor="ctr"/>
+          <a:lstStyle/>
+          <a:p>
+            <a:pPr algn="r" indent="0" marL="0">
+              <a:buNone/>
+            </a:pPr>
+            <a:r>
+              <a:rPr lang="en-US" sz="1200" b="1" dirty="0">
+                <a:solidFill>
+                  <a:srgbClr val="D97706"/>
+                </a:solidFill>
+                <a:latin typeface="Calibri" pitchFamily="34" charset="0"/>
+                <a:ea typeface="Calibri" pitchFamily="34" charset="-122"/>
+                <a:cs typeface="Calibri" pitchFamily="34" charset="-120"/>
+              </a:rPr>
+              <a:t>5–7%</a:t>
+            </a:r>
+            <a:endParaRPr lang="en-US" sz="1200" dirty="0"/>
+          </a:p>
+        </p:txBody>
+      </p:sp>
+      <p:sp>
+        <p:nvSpPr>
+          <p:cNvPr id="15" name="Text 13"/>
+          <p:cNvSpPr/>
+          <p:nvPr/>
+        </p:nvSpPr>
+        <p:spPr>
+          <a:xfrm>
+            <a:off x="502920" y="3511296"/>
+            <a:ext cx="3783659" cy="274320"/>
+          </a:xfrm>
+          <a:prstGeom prst="rect">
+            <a:avLst/>
+          </a:prstGeom>
+          <a:noFill/>
+          <a:ln/>
+        </p:spPr>
+        <p:txBody>
+          <a:bodyPr wrap="square" lIns="0" tIns="0" rIns="0" bIns="0" rtlCol="0" anchor="ctr"/>
+          <a:lstStyle/>
+          <a:p>
+            <a:pPr indent="0" marL="0">
+              <a:buNone/>
+            </a:pPr>
+            <a:r>
+              <a:rPr lang="en-US" sz="1200" dirty="0">
+                <a:solidFill>
+                  <a:srgbClr val="0C2A3D"/>
+                </a:solidFill>
+                <a:latin typeface="Calibri" pitchFamily="34" charset="0"/>
+                <a:ea typeface="Calibri" pitchFamily="34" charset="-122"/>
+                <a:cs typeface="Calibri" pitchFamily="34" charset="-120"/>
+              </a:rPr>
+              <a:t>Patient safety / systems-based practice</a:t>
+            </a:r>
+            <a:endParaRPr lang="en-US" sz="1200" dirty="0"/>
+          </a:p>
+        </p:txBody>
+      </p:sp>
+      <p:sp>
+        <p:nvSpPr>
+          <p:cNvPr id="16" name="Text 14"/>
+          <p:cNvSpPr/>
+          <p:nvPr/>
+        </p:nvSpPr>
+        <p:spPr>
+          <a:xfrm>
+            <a:off x="4286579" y="3511296"/>
+            <a:ext cx="914400" cy="274320"/>
+          </a:xfrm>
+          <a:prstGeom prst="rect">
+            <a:avLst/>
+          </a:prstGeom>
+          <a:noFill/>
+          <a:ln/>
+        </p:spPr>
+        <p:txBody>
+          <a:bodyPr wrap="square" lIns="0" tIns="0" rIns="0" bIns="0" rtlCol="0" anchor="ctr"/>
+          <a:lstStyle/>
+          <a:p>
+            <a:pPr algn="r" indent="0" marL="0">
+              <a:buNone/>
+            </a:pPr>
+            <a:r>
+              <a:rPr lang="en-US" sz="1200" b="1" dirty="0">
+                <a:solidFill>
+                  <a:srgbClr val="D97706"/>
+                </a:solidFill>
+                <a:latin typeface="Calibri" pitchFamily="34" charset="0"/>
+                <a:ea typeface="Calibri" pitchFamily="34" charset="-122"/>
+                <a:cs typeface="Calibri" pitchFamily="34" charset="-120"/>
+              </a:rPr>
+              <a:t>5–7%</a:t>
+            </a:r>
+            <a:endParaRPr lang="en-US" sz="1200" dirty="0"/>
+          </a:p>
+        </p:txBody>
+      </p:sp>
+      <p:sp>
+        <p:nvSpPr>
+          <p:cNvPr id="17" name="Text 15"/>
+          <p:cNvSpPr/>
+          <p:nvPr/>
+        </p:nvSpPr>
+        <p:spPr>
+          <a:xfrm>
+            <a:off x="502920" y="4023360"/>
+            <a:ext cx="4698059" cy="256032"/>
+          </a:xfrm>
+          <a:prstGeom prst="rect">
+            <a:avLst/>
+          </a:prstGeom>
+          <a:noFill/>
+          <a:ln/>
+        </p:spPr>
+        <p:txBody>
+          <a:bodyPr wrap="square" lIns="0" tIns="0" rIns="0" bIns="0" rtlCol="0" anchor="ctr"/>
+          <a:lstStyle/>
+          <a:p>
+            <a:pPr indent="0" marL="0">
+              <a:buNone/>
+            </a:pPr>
+            <a:r>
+              <a:rPr lang="en-US" sz="1100" b="1" spc="300" kern="0" dirty="0">
+                <a:solidFill>
+                  <a:srgbClr val="B45309"/>
+                </a:solidFill>
+                <a:latin typeface="Calibri" pitchFamily="34" charset="0"/>
+                <a:ea typeface="Calibri" pitchFamily="34" charset="-122"/>
+                <a:cs typeface="Calibri" pitchFamily="34" charset="-120"/>
+              </a:rPr>
+              <a:t>FORMAT</a:t>
+            </a:r>
+            <a:endParaRPr lang="en-US" sz="1100" dirty="0"/>
+          </a:p>
+        </p:txBody>
+      </p:sp>
+      <p:sp>
+        <p:nvSpPr>
+          <p:cNvPr id="18" name="Text 16"/>
+          <p:cNvSpPr/>
+          <p:nvPr/>
+        </p:nvSpPr>
+        <p:spPr>
+          <a:xfrm>
+            <a:off x="502920" y="4343400"/>
+            <a:ext cx="3326459" cy="274320"/>
+          </a:xfrm>
+          <a:prstGeom prst="rect">
+            <a:avLst/>
+          </a:prstGeom>
+          <a:noFill/>
+          <a:ln/>
+        </p:spPr>
+        <p:txBody>
+          <a:bodyPr wrap="square" lIns="0" tIns="0" rIns="0" bIns="0" rtlCol="0" anchor="ctr"/>
+          <a:lstStyle/>
+          <a:p>
+            <a:pPr indent="0" marL="0">
+              <a:buNone/>
+            </a:pPr>
+            <a:r>
+              <a:rPr lang="en-US" sz="1200" dirty="0">
+                <a:solidFill>
+                  <a:srgbClr val="345671"/>
+                </a:solidFill>
+                <a:latin typeface="Calibri" pitchFamily="34" charset="0"/>
+                <a:ea typeface="Calibri" pitchFamily="34" charset="-122"/>
+                <a:cs typeface="Calibri" pitchFamily="34" charset="-120"/>
+              </a:rPr>
+              <a:t>Question blocks</a:t>
+            </a:r>
+            <a:endParaRPr lang="en-US" sz="1200" dirty="0"/>
+          </a:p>
+        </p:txBody>
+      </p:sp>
+      <p:sp>
+        <p:nvSpPr>
+          <p:cNvPr id="19" name="Text 17"/>
+          <p:cNvSpPr/>
+          <p:nvPr/>
+        </p:nvSpPr>
+        <p:spPr>
+          <a:xfrm>
+            <a:off x="3829379" y="4343400"/>
+            <a:ext cx="1371600" cy="274320"/>
+          </a:xfrm>
+          <a:prstGeom prst="rect">
+            <a:avLst/>
+          </a:prstGeom>
+          <a:noFill/>
+          <a:ln/>
+        </p:spPr>
+        <p:txBody>
+          <a:bodyPr wrap="square" lIns="0" tIns="0" rIns="0" bIns="0" rtlCol="0" anchor="ctr"/>
+          <a:lstStyle/>
+          <a:p>
+            <a:pPr algn="r" indent="0" marL="0">
+              <a:buNone/>
+            </a:pPr>
+            <a:r>
+              <a:rPr lang="en-US" sz="1200" b="1" dirty="0">
+                <a:solidFill>
+                  <a:srgbClr val="0C2A3D"/>
+                </a:solidFill>
+                <a:latin typeface="Calibri" pitchFamily="34" charset="0"/>
+                <a:ea typeface="Calibri" pitchFamily="34" charset="-122"/>
+                <a:cs typeface="Calibri" pitchFamily="34" charset="-120"/>
+              </a:rPr>
+              <a:t>8</a:t>
+            </a:r>
+            <a:endParaRPr lang="en-US" sz="1200" dirty="0"/>
+          </a:p>
+        </p:txBody>
+      </p:sp>
+      <p:sp>
+        <p:nvSpPr>
+          <p:cNvPr id="20" name="Text 18"/>
+          <p:cNvSpPr/>
+          <p:nvPr/>
+        </p:nvSpPr>
+        <p:spPr>
+          <a:xfrm>
+            <a:off x="502920" y="4672584"/>
+            <a:ext cx="3326459" cy="274320"/>
+          </a:xfrm>
+          <a:prstGeom prst="rect">
+            <a:avLst/>
+          </a:prstGeom>
+          <a:noFill/>
+          <a:ln/>
+        </p:spPr>
+        <p:txBody>
+          <a:bodyPr wrap="square" lIns="0" tIns="0" rIns="0" bIns="0" rtlCol="0" anchor="ctr"/>
+          <a:lstStyle/>
+          <a:p>
+            <a:pPr indent="0" marL="0">
+              <a:buNone/>
+            </a:pPr>
+            <a:r>
+              <a:rPr lang="en-US" sz="1200" dirty="0">
+                <a:solidFill>
+                  <a:srgbClr val="345671"/>
+                </a:solidFill>
+                <a:latin typeface="Calibri" pitchFamily="34" charset="0"/>
+                <a:ea typeface="Calibri" pitchFamily="34" charset="-122"/>
+                <a:cs typeface="Calibri" pitchFamily="34" charset="-120"/>
+              </a:rPr>
+              <a:t>Items (max)</a:t>
+            </a:r>
+            <a:endParaRPr lang="en-US" sz="1200" dirty="0"/>
+          </a:p>
+        </p:txBody>
+      </p:sp>
+      <p:sp>
+        <p:nvSpPr>
+          <p:cNvPr id="21" name="Text 19"/>
+          <p:cNvSpPr/>
+          <p:nvPr/>
+        </p:nvSpPr>
+        <p:spPr>
+          <a:xfrm>
+            <a:off x="3829379" y="4672584"/>
+            <a:ext cx="1371600" cy="274320"/>
+          </a:xfrm>
+          <a:prstGeom prst="rect">
+            <a:avLst/>
+          </a:prstGeom>
+          <a:noFill/>
+          <a:ln/>
+        </p:spPr>
+        <p:txBody>
+          <a:bodyPr wrap="square" lIns="0" tIns="0" rIns="0" bIns="0" rtlCol="0" anchor="ctr"/>
+          <a:lstStyle/>
+          <a:p>
+            <a:pPr algn="r" indent="0" marL="0">
+              <a:buNone/>
+            </a:pPr>
+            <a:r>
+              <a:rPr lang="en-US" sz="1200" b="1" dirty="0">
+                <a:solidFill>
+                  <a:srgbClr val="0C2A3D"/>
+                </a:solidFill>
+                <a:latin typeface="Calibri" pitchFamily="34" charset="0"/>
+                <a:ea typeface="Calibri" pitchFamily="34" charset="-122"/>
+                <a:cs typeface="Calibri" pitchFamily="34" charset="-120"/>
+              </a:rPr>
+              <a:t>318</a:t>
+            </a:r>
+            <a:endParaRPr lang="en-US" sz="1200" dirty="0"/>
+          </a:p>
+        </p:txBody>
+      </p:sp>
+      <p:sp>
+        <p:nvSpPr>
+          <p:cNvPr id="22" name="Text 20"/>
+          <p:cNvSpPr/>
+          <p:nvPr/>
+        </p:nvSpPr>
+        <p:spPr>
+          <a:xfrm>
+            <a:off x="502920" y="5001768"/>
+            <a:ext cx="3326459" cy="274320"/>
+          </a:xfrm>
+          <a:prstGeom prst="rect">
+            <a:avLst/>
+          </a:prstGeom>
+          <a:noFill/>
+          <a:ln/>
+        </p:spPr>
+        <p:txBody>
+          <a:bodyPr wrap="square" lIns="0" tIns="0" rIns="0" bIns="0" rtlCol="0" anchor="ctr"/>
+          <a:lstStyle/>
+          <a:p>
+            <a:pPr indent="0" marL="0">
+              <a:buNone/>
+            </a:pPr>
+            <a:r>
+              <a:rPr lang="en-US" sz="1200" dirty="0">
+                <a:solidFill>
+                  <a:srgbClr val="345671"/>
+                </a:solidFill>
+                <a:latin typeface="Calibri" pitchFamily="34" charset="0"/>
+                <a:ea typeface="Calibri" pitchFamily="34" charset="-122"/>
+                <a:cs typeface="Calibri" pitchFamily="34" charset="-120"/>
+              </a:rPr>
+              <a:t>Test day length</a:t>
+            </a:r>
+            <a:endParaRPr lang="en-US" sz="1200" dirty="0"/>
+          </a:p>
+        </p:txBody>
+      </p:sp>
+      <p:sp>
+        <p:nvSpPr>
+          <p:cNvPr id="23" name="Text 21"/>
+          <p:cNvSpPr/>
+          <p:nvPr/>
+        </p:nvSpPr>
+        <p:spPr>
+          <a:xfrm>
+            <a:off x="3829379" y="5001768"/>
+            <a:ext cx="1371600" cy="274320"/>
+          </a:xfrm>
+          <a:prstGeom prst="rect">
+            <a:avLst/>
+          </a:prstGeom>
+          <a:noFill/>
+          <a:ln/>
+        </p:spPr>
+        <p:txBody>
+          <a:bodyPr wrap="square" lIns="0" tIns="0" rIns="0" bIns="0" rtlCol="0" anchor="ctr"/>
+          <a:lstStyle/>
+          <a:p>
+            <a:pPr algn="r" indent="0" marL="0">
+              <a:buNone/>
+            </a:pPr>
+            <a:r>
+              <a:rPr lang="en-US" sz="1200" b="1" dirty="0">
+                <a:solidFill>
+                  <a:srgbClr val="0C2A3D"/>
+                </a:solidFill>
+                <a:latin typeface="Calibri" pitchFamily="34" charset="0"/>
+                <a:ea typeface="Calibri" pitchFamily="34" charset="-122"/>
+                <a:cs typeface="Calibri" pitchFamily="34" charset="-120"/>
+              </a:rPr>
+              <a:t>9 hours</a:t>
+            </a:r>
+            <a:endParaRPr lang="en-US" sz="1200" dirty="0"/>
+          </a:p>
+        </p:txBody>
+      </p:sp>
+      <p:sp>
+        <p:nvSpPr>
+          <p:cNvPr id="24" name="Text 22"/>
+          <p:cNvSpPr/>
+          <p:nvPr/>
+        </p:nvSpPr>
+        <p:spPr>
+          <a:xfrm>
+            <a:off x="502920" y="5330952"/>
+            <a:ext cx="3326459" cy="274320"/>
+          </a:xfrm>
+          <a:prstGeom prst="rect">
+            <a:avLst/>
+          </a:prstGeom>
+          <a:noFill/>
+          <a:ln/>
+        </p:spPr>
+        <p:txBody>
+          <a:bodyPr wrap="square" lIns="0" tIns="0" rIns="0" bIns="0" rtlCol="0" anchor="ctr"/>
+          <a:lstStyle/>
+          <a:p>
+            <a:pPr indent="0" marL="0">
+              <a:buNone/>
+            </a:pPr>
+            <a:r>
+              <a:rPr lang="en-US" sz="1200" dirty="0">
+                <a:solidFill>
+                  <a:srgbClr val="345671"/>
+                </a:solidFill>
+                <a:latin typeface="Calibri" pitchFamily="34" charset="0"/>
+                <a:ea typeface="Calibri" pitchFamily="34" charset="-122"/>
+                <a:cs typeface="Calibri" pitchFamily="34" charset="-120"/>
+              </a:rPr>
+              <a:t>Score scale</a:t>
+            </a:r>
+            <a:endParaRPr lang="en-US" sz="1200" dirty="0"/>
+          </a:p>
+        </p:txBody>
+      </p:sp>
+      <p:sp>
+        <p:nvSpPr>
+          <p:cNvPr id="25" name="Text 23"/>
+          <p:cNvSpPr/>
+          <p:nvPr/>
+        </p:nvSpPr>
+        <p:spPr>
+          <a:xfrm>
+            <a:off x="3829379" y="5330952"/>
+            <a:ext cx="1371600" cy="274320"/>
+          </a:xfrm>
+          <a:prstGeom prst="rect">
+            <a:avLst/>
+          </a:prstGeom>
+          <a:noFill/>
+          <a:ln/>
+        </p:spPr>
+        <p:txBody>
+          <a:bodyPr wrap="square" lIns="0" tIns="0" rIns="0" bIns="0" rtlCol="0" anchor="ctr"/>
+          <a:lstStyle/>
+          <a:p>
+            <a:pPr algn="r" indent="0" marL="0">
+              <a:buNone/>
+            </a:pPr>
+            <a:r>
+              <a:rPr lang="en-US" sz="1200" b="1" dirty="0">
+                <a:solidFill>
+                  <a:srgbClr val="0C2A3D"/>
+                </a:solidFill>
+                <a:latin typeface="Calibri" pitchFamily="34" charset="0"/>
+                <a:ea typeface="Calibri" pitchFamily="34" charset="-122"/>
+                <a:cs typeface="Calibri" pitchFamily="34" charset="-120"/>
+              </a:rPr>
+              <a:t>1 – 300 (mean ≈ 248)</a:t>
+            </a:r>
+            <a:endParaRPr lang="en-US" sz="1200" dirty="0"/>
+          </a:p>
+        </p:txBody>
+      </p:sp>
+      <p:sp>
+        <p:nvSpPr>
+          <p:cNvPr id="26" name="Text 24"/>
+          <p:cNvSpPr/>
+          <p:nvPr/>
+        </p:nvSpPr>
+        <p:spPr>
+          <a:xfrm>
+            <a:off x="5475299" y="1874520"/>
+            <a:ext cx="6213476" cy="256032"/>
+          </a:xfrm>
+          <a:prstGeom prst="rect">
+            <a:avLst/>
+          </a:prstGeom>
+          <a:noFill/>
+          <a:ln/>
+        </p:spPr>
+        <p:txBody>
+          <a:bodyPr wrap="square" lIns="0" tIns="0" rIns="0" bIns="0" rtlCol="0" anchor="ctr"/>
+          <a:lstStyle/>
+          <a:p>
+            <a:pPr indent="0" marL="0">
+              <a:buNone/>
+            </a:pPr>
+            <a:r>
+              <a:rPr lang="en-US" sz="1100" b="1" spc="300" kern="0" dirty="0">
+                <a:solidFill>
+                  <a:srgbClr val="B45309"/>
+                </a:solidFill>
+                <a:latin typeface="Calibri" pitchFamily="34" charset="0"/>
+                <a:ea typeface="Calibri" pitchFamily="34" charset="-122"/>
+                <a:cs typeface="Calibri" pitchFamily="34" charset="-120"/>
+              </a:rPr>
+              <a:t>HIGH-YIELD CONTENT</a:t>
+            </a:r>
+            <a:endParaRPr lang="en-US" sz="1100" dirty="0"/>
+          </a:p>
+        </p:txBody>
+      </p:sp>
+      <p:sp>
+        <p:nvSpPr>
+          <p:cNvPr id="27" name="Shape 25"/>
+          <p:cNvSpPr/>
+          <p:nvPr/>
+        </p:nvSpPr>
+        <p:spPr>
+          <a:xfrm>
+            <a:off x="5475299" y="2194560"/>
+            <a:ext cx="6213476" cy="1508760"/>
+          </a:xfrm>
+          <a:prstGeom prst="rect">
+            <a:avLst/>
+          </a:prstGeom>
+          <a:solidFill>
+            <a:srgbClr val="FEF3C7"/>
+          </a:solidFill>
+          <a:ln w="9525">
+            <a:solidFill>
+              <a:srgbClr val="EAB308"/>
+            </a:solidFill>
+            <a:prstDash val="solid"/>
+          </a:ln>
+        </p:spPr>
+      </p:sp>
+      <p:sp>
+        <p:nvSpPr>
+          <p:cNvPr id="28" name="Shape 26"/>
+          <p:cNvSpPr/>
+          <p:nvPr/>
+        </p:nvSpPr>
+        <p:spPr>
+          <a:xfrm>
+            <a:off x="5475299" y="2194560"/>
+            <a:ext cx="91440" cy="1508760"/>
+          </a:xfrm>
+          <a:prstGeom prst="rect">
             <a:avLst/>
           </a:prstGeom>
           <a:solidFill>
@@ -7620,53 +9199,14 @@
       </p:sp>
       <p:sp>
         <p:nvSpPr>
-          <p:cNvPr id="24" name="Text 22"/>
-          <p:cNvSpPr/>
-          <p:nvPr/>
-        </p:nvSpPr>
-        <p:spPr>
-          <a:xfrm>
-            <a:off x="3607994" y="3657600"/>
-            <a:ext cx="457200" cy="457200"/>
-          </a:xfrm>
-          <a:prstGeom prst="rect">
-            <a:avLst/>
-          </a:prstGeom>
-          <a:noFill/>
-          <a:ln/>
-        </p:spPr>
-        <p:txBody>
-          <a:bodyPr wrap="square" lIns="0" tIns="0" rIns="0" bIns="0" rtlCol="0" anchor="ctr"/>
-          <a:lstStyle/>
-          <a:p>
-            <a:pPr algn="ctr" indent="0" marL="0">
-              <a:buNone/>
-            </a:pPr>
-            <a:r>
-              <a:rPr lang="en-US" sz="1800" b="1" dirty="0">
-                <a:solidFill>
-                  <a:srgbClr val="FFFFFF"/>
-                </a:solidFill>
-                <a:latin typeface="Arial Black" pitchFamily="34" charset="0"/>
-                <a:ea typeface="Arial Black" pitchFamily="34" charset="-122"/>
-                <a:cs typeface="Arial Black" pitchFamily="34" charset="-120"/>
-              </a:rPr>
-              <a:t>2</a:t>
-            </a:r>
-            <a:endParaRPr lang="en-US" sz="1800" dirty="0"/>
-          </a:p>
-        </p:txBody>
-      </p:sp>
-      <p:sp>
-        <p:nvSpPr>
-          <p:cNvPr id="25" name="Text 23"/>
-          <p:cNvSpPr/>
-          <p:nvPr/>
-        </p:nvSpPr>
-        <p:spPr>
-          <a:xfrm>
-            <a:off x="3607994" y="4251960"/>
-            <a:ext cx="2144954" cy="365760"/>
+          <p:cNvPr id="29" name="Text 27"/>
+          <p:cNvSpPr/>
+          <p:nvPr/>
+        </p:nvSpPr>
+        <p:spPr>
+          <a:xfrm>
+            <a:off x="5749619" y="2331720"/>
+            <a:ext cx="5847716" cy="310896"/>
           </a:xfrm>
           <a:prstGeom prst="rect">
             <a:avLst/>
@@ -7682,7 +9222,7 @@
               <a:buNone/>
             </a:pPr>
             <a:r>
-              <a:rPr lang="en-US" sz="1500" b="1" dirty="0">
+              <a:rPr lang="en-US" sz="1400" b="1" dirty="0">
                 <a:solidFill>
                   <a:srgbClr val="0C2A3D"/>
                 </a:solidFill>
@@ -7690,22 +9230,22 @@
                 <a:ea typeface="Calibri" pitchFamily="34" charset="-122"/>
                 <a:cs typeface="Calibri" pitchFamily="34" charset="-120"/>
               </a:rPr>
-              <a:t>UWorld debrief</a:t>
-            </a:r>
-            <a:endParaRPr lang="en-US" sz="1500" dirty="0"/>
-          </a:p>
-        </p:txBody>
-      </p:sp>
-      <p:sp>
-        <p:nvSpPr>
-          <p:cNvPr id="26" name="Text 24"/>
-          <p:cNvSpPr/>
-          <p:nvPr/>
-        </p:nvSpPr>
-        <p:spPr>
-          <a:xfrm>
-            <a:off x="3607994" y="4663440"/>
-            <a:ext cx="2144954" cy="822960"/>
+              <a:t>Disciplines</a:t>
+            </a:r>
+            <a:endParaRPr lang="en-US" sz="1400" dirty="0"/>
+          </a:p>
+        </p:txBody>
+      </p:sp>
+      <p:sp>
+        <p:nvSpPr>
+          <p:cNvPr id="30" name="Text 28"/>
+          <p:cNvSpPr/>
+          <p:nvPr/>
+        </p:nvSpPr>
+        <p:spPr>
+          <a:xfrm>
+            <a:off x="5749619" y="2651760"/>
+            <a:ext cx="5847716" cy="960120"/>
           </a:xfrm>
           <a:prstGeom prst="rect">
             <a:avLst/>
@@ -7721,7 +9261,7 @@
               <a:buNone/>
             </a:pPr>
             <a:r>
-              <a:rPr lang="en-US" sz="1150" dirty="0">
+              <a:rPr lang="en-US" sz="1200" dirty="0">
                 <a:solidFill>
                   <a:srgbClr val="345671"/>
                 </a:solidFill>
@@ -7729,253 +9269,47 @@
                 <a:ea typeface="Calibri" pitchFamily="34" charset="-122"/>
                 <a:cs typeface="Calibri" pitchFamily="34" charset="-120"/>
               </a:rPr>
-              <a:t>Walk through the day's UWorld block with reasoning for every option.</a:t>
-            </a:r>
-            <a:endParaRPr lang="en-US" sz="1150" dirty="0"/>
-          </a:p>
-        </p:txBody>
-      </p:sp>
-      <p:sp>
-        <p:nvSpPr>
-          <p:cNvPr id="27" name="Shape 25"/>
-          <p:cNvSpPr/>
-          <p:nvPr/>
-        </p:nvSpPr>
-        <p:spPr>
-          <a:xfrm>
-            <a:off x="6164428" y="3383280"/>
-            <a:ext cx="2693594" cy="2194560"/>
-          </a:xfrm>
-          <a:prstGeom prst="rect">
-            <a:avLst/>
-          </a:prstGeom>
-          <a:solidFill>
-            <a:srgbClr val="FFFFFF"/>
+              <a:t>Internal Medicine (50–60%) · Surgery (25–30%) · Pediatrics (20–25%) · OB-GYN (10–20%) · Psychiatry (10–15%) · Family Medicine</a:t>
+            </a:r>
+            <a:endParaRPr lang="en-US" sz="1200" dirty="0"/>
+          </a:p>
+        </p:txBody>
+      </p:sp>
+      <p:sp>
+        <p:nvSpPr>
+          <p:cNvPr id="31" name="Shape 29"/>
+          <p:cNvSpPr/>
+          <p:nvPr/>
+        </p:nvSpPr>
+        <p:spPr>
+          <a:xfrm>
+            <a:off x="5475299" y="3886200"/>
+            <a:ext cx="6213476" cy="1508760"/>
+          </a:xfrm>
+          <a:prstGeom prst="rect">
+            <a:avLst/>
+          </a:prstGeom>
+          <a:solidFill>
+            <a:srgbClr val="FEF3C7"/>
           </a:solidFill>
           <a:ln w="9525">
             <a:solidFill>
-              <a:srgbClr val="D6E8F5"/>
+              <a:srgbClr val="EAB308"/>
             </a:solidFill>
             <a:prstDash val="solid"/>
           </a:ln>
-          <a:effectLst>
-            <a:outerShdw sx="100000" sy="100000" kx="0" ky="0" algn="bl" rotWithShape="0" blurRad="127000" dist="12700" dir="5400000">
-              <a:srgbClr val="0C2A3D">
-                <a:alpha val="8000"/>
-              </a:srgbClr>
-            </a:outerShdw>
-          </a:effectLst>
-        </p:spPr>
-      </p:sp>
-      <p:sp>
-        <p:nvSpPr>
-          <p:cNvPr id="28" name="Shape 26"/>
-          <p:cNvSpPr/>
-          <p:nvPr/>
-        </p:nvSpPr>
-        <p:spPr>
-          <a:xfrm>
-            <a:off x="6164428" y="3383280"/>
-            <a:ext cx="2693594" cy="73152"/>
-          </a:xfrm>
-          <a:prstGeom prst="rect">
-            <a:avLst/>
-          </a:prstGeom>
-          <a:solidFill>
-            <a:srgbClr val="0284C7"/>
-          </a:solidFill>
-          <a:ln w="12700">
-            <a:solidFill>
-              <a:srgbClr val="0284C7"/>
-            </a:solidFill>
-            <a:prstDash val="solid"/>
-          </a:ln>
-        </p:spPr>
-      </p:sp>
-      <p:sp>
-        <p:nvSpPr>
-          <p:cNvPr id="29" name="Shape 27"/>
-          <p:cNvSpPr/>
-          <p:nvPr/>
-        </p:nvSpPr>
-        <p:spPr>
-          <a:xfrm>
-            <a:off x="6438748" y="3657600"/>
-            <a:ext cx="457200" cy="457200"/>
-          </a:xfrm>
-          <a:prstGeom prst="ellipse">
-            <a:avLst/>
-          </a:prstGeom>
-          <a:solidFill>
-            <a:srgbClr val="0284C7"/>
-          </a:solidFill>
-          <a:ln w="12700">
-            <a:solidFill>
-              <a:srgbClr val="0284C7"/>
-            </a:solidFill>
-            <a:prstDash val="solid"/>
-          </a:ln>
-        </p:spPr>
-      </p:sp>
-      <p:sp>
-        <p:nvSpPr>
-          <p:cNvPr id="30" name="Text 28"/>
-          <p:cNvSpPr/>
-          <p:nvPr/>
-        </p:nvSpPr>
-        <p:spPr>
-          <a:xfrm>
-            <a:off x="6438748" y="3657600"/>
-            <a:ext cx="457200" cy="457200"/>
-          </a:xfrm>
-          <a:prstGeom prst="rect">
-            <a:avLst/>
-          </a:prstGeom>
-          <a:noFill/>
-          <a:ln/>
-        </p:spPr>
-        <p:txBody>
-          <a:bodyPr wrap="square" lIns="0" tIns="0" rIns="0" bIns="0" rtlCol="0" anchor="ctr"/>
-          <a:lstStyle/>
-          <a:p>
-            <a:pPr algn="ctr" indent="0" marL="0">
-              <a:buNone/>
-            </a:pPr>
-            <a:r>
-              <a:rPr lang="en-US" sz="1800" b="1" dirty="0">
-                <a:solidFill>
-                  <a:srgbClr val="FFFFFF"/>
-                </a:solidFill>
-                <a:latin typeface="Arial Black" pitchFamily="34" charset="0"/>
-                <a:ea typeface="Arial Black" pitchFamily="34" charset="-122"/>
-                <a:cs typeface="Arial Black" pitchFamily="34" charset="-120"/>
-              </a:rPr>
-              <a:t>3</a:t>
-            </a:r>
-            <a:endParaRPr lang="en-US" sz="1800" dirty="0"/>
-          </a:p>
-        </p:txBody>
-      </p:sp>
-      <p:sp>
-        <p:nvSpPr>
-          <p:cNvPr id="31" name="Text 29"/>
-          <p:cNvSpPr/>
-          <p:nvPr/>
-        </p:nvSpPr>
-        <p:spPr>
-          <a:xfrm>
-            <a:off x="6438748" y="4251960"/>
-            <a:ext cx="2144954" cy="365760"/>
-          </a:xfrm>
-          <a:prstGeom prst="rect">
-            <a:avLst/>
-          </a:prstGeom>
-          <a:noFill/>
-          <a:ln/>
-        </p:spPr>
-        <p:txBody>
-          <a:bodyPr wrap="square" lIns="0" tIns="0" rIns="0" bIns="0" rtlCol="0" anchor="ctr"/>
-          <a:lstStyle/>
-          <a:p>
-            <a:pPr indent="0" marL="0">
-              <a:buNone/>
-            </a:pPr>
-            <a:r>
-              <a:rPr lang="en-US" sz="1500" b="1" dirty="0">
-                <a:solidFill>
-                  <a:srgbClr val="0C2A3D"/>
-                </a:solidFill>
-                <a:latin typeface="Calibri" pitchFamily="34" charset="0"/>
-                <a:ea typeface="Calibri" pitchFamily="34" charset="-122"/>
-                <a:cs typeface="Calibri" pitchFamily="34" charset="-120"/>
-              </a:rPr>
-              <a:t>High-yield wrap</a:t>
-            </a:r>
-            <a:endParaRPr lang="en-US" sz="1500" dirty="0"/>
-          </a:p>
-        </p:txBody>
-      </p:sp>
-      <p:sp>
-        <p:nvSpPr>
-          <p:cNvPr id="32" name="Text 30"/>
-          <p:cNvSpPr/>
-          <p:nvPr/>
-        </p:nvSpPr>
-        <p:spPr>
-          <a:xfrm>
-            <a:off x="6438748" y="4663440"/>
-            <a:ext cx="2144954" cy="822960"/>
-          </a:xfrm>
-          <a:prstGeom prst="rect">
-            <a:avLst/>
-          </a:prstGeom>
-          <a:noFill/>
-          <a:ln/>
-        </p:spPr>
-        <p:txBody>
-          <a:bodyPr wrap="square" lIns="0" tIns="0" rIns="0" bIns="0" rtlCol="0" anchor="ctr"/>
-          <a:lstStyle/>
-          <a:p>
-            <a:pPr indent="0" marL="0">
-              <a:buNone/>
-            </a:pPr>
-            <a:r>
-              <a:rPr lang="en-US" sz="1150" dirty="0">
-                <a:solidFill>
-                  <a:srgbClr val="345671"/>
-                </a:solidFill>
-                <a:latin typeface="Calibri" pitchFamily="34" charset="0"/>
-                <a:ea typeface="Calibri" pitchFamily="34" charset="-122"/>
-                <a:cs typeface="Calibri" pitchFamily="34" charset="-120"/>
-              </a:rPr>
-              <a:t>5-minute mnemonic / pearls recap that you take into the next day.</a:t>
-            </a:r>
-            <a:endParaRPr lang="en-US" sz="1150" dirty="0"/>
-          </a:p>
-        </p:txBody>
-      </p:sp>
-      <p:sp>
-        <p:nvSpPr>
-          <p:cNvPr id="33" name="Shape 31"/>
-          <p:cNvSpPr/>
-          <p:nvPr/>
-        </p:nvSpPr>
-        <p:spPr>
-          <a:xfrm>
-            <a:off x="8995181" y="3383280"/>
-            <a:ext cx="2693594" cy="2194560"/>
-          </a:xfrm>
-          <a:prstGeom prst="rect">
-            <a:avLst/>
-          </a:prstGeom>
-          <a:solidFill>
-            <a:srgbClr val="FFFFFF"/>
-          </a:solidFill>
-          <a:ln w="9525">
-            <a:solidFill>
-              <a:srgbClr val="D6E8F5"/>
-            </a:solidFill>
-            <a:prstDash val="solid"/>
-          </a:ln>
-          <a:effectLst>
-            <a:outerShdw sx="100000" sy="100000" kx="0" ky="0" algn="bl" rotWithShape="0" blurRad="127000" dist="12700" dir="5400000">
-              <a:srgbClr val="0C2A3D">
-                <a:alpha val="8000"/>
-              </a:srgbClr>
-            </a:outerShdw>
-          </a:effectLst>
-        </p:spPr>
-      </p:sp>
-      <p:sp>
-        <p:nvSpPr>
-          <p:cNvPr id="34" name="Shape 32"/>
-          <p:cNvSpPr/>
-          <p:nvPr/>
-        </p:nvSpPr>
-        <p:spPr>
-          <a:xfrm>
-            <a:off x="8995181" y="3383280"/>
-            <a:ext cx="2693594" cy="73152"/>
+        </p:spPr>
+      </p:sp>
+      <p:sp>
+        <p:nvSpPr>
+          <p:cNvPr id="32" name="Shape 30"/>
+          <p:cNvSpPr/>
+          <p:nvPr/>
+        </p:nvSpPr>
+        <p:spPr>
+          <a:xfrm>
+            <a:off x="5475299" y="3886200"/>
+            <a:ext cx="91440" cy="1508760"/>
           </a:xfrm>
           <a:prstGeom prst="rect">
             <a:avLst/>
@@ -7993,28 +9327,120 @@
       </p:sp>
       <p:sp>
         <p:nvSpPr>
-          <p:cNvPr id="35" name="Shape 33"/>
-          <p:cNvSpPr/>
-          <p:nvPr/>
-        </p:nvSpPr>
-        <p:spPr>
-          <a:xfrm>
-            <a:off x="9269501" y="3657600"/>
-            <a:ext cx="457200" cy="457200"/>
-          </a:xfrm>
-          <a:prstGeom prst="ellipse">
-            <a:avLst/>
-          </a:prstGeom>
-          <a:solidFill>
-            <a:srgbClr val="D97706"/>
-          </a:solidFill>
-          <a:ln w="12700">
-            <a:solidFill>
-              <a:srgbClr val="D97706"/>
-            </a:solidFill>
-            <a:prstDash val="solid"/>
-          </a:ln>
-        </p:spPr>
+          <p:cNvPr id="33" name="Text 31"/>
+          <p:cNvSpPr/>
+          <p:nvPr/>
+        </p:nvSpPr>
+        <p:spPr>
+          <a:xfrm>
+            <a:off x="5749619" y="4023360"/>
+            <a:ext cx="5847716" cy="310896"/>
+          </a:xfrm>
+          <a:prstGeom prst="rect">
+            <a:avLst/>
+          </a:prstGeom>
+          <a:noFill/>
+          <a:ln/>
+        </p:spPr>
+        <p:txBody>
+          <a:bodyPr wrap="square" lIns="0" tIns="0" rIns="0" bIns="0" rtlCol="0" anchor="ctr"/>
+          <a:lstStyle/>
+          <a:p>
+            <a:pPr indent="0" marL="0">
+              <a:buNone/>
+            </a:pPr>
+            <a:r>
+              <a:rPr lang="en-US" sz="1400" b="1" dirty="0">
+                <a:solidFill>
+                  <a:srgbClr val="0C2A3D"/>
+                </a:solidFill>
+                <a:latin typeface="Calibri" pitchFamily="34" charset="0"/>
+                <a:ea typeface="Calibri" pitchFamily="34" charset="-122"/>
+                <a:cs typeface="Calibri" pitchFamily="34" charset="-120"/>
+              </a:rPr>
+              <a:t>Organ systems &amp; cross-cutting</a:t>
+            </a:r>
+            <a:endParaRPr lang="en-US" sz="1400" dirty="0"/>
+          </a:p>
+        </p:txBody>
+      </p:sp>
+      <p:sp>
+        <p:nvSpPr>
+          <p:cNvPr id="34" name="Text 32"/>
+          <p:cNvSpPr/>
+          <p:nvPr/>
+        </p:nvSpPr>
+        <p:spPr>
+          <a:xfrm>
+            <a:off x="5749619" y="4343400"/>
+            <a:ext cx="5847716" cy="960120"/>
+          </a:xfrm>
+          <a:prstGeom prst="rect">
+            <a:avLst/>
+          </a:prstGeom>
+          <a:noFill/>
+          <a:ln/>
+        </p:spPr>
+        <p:txBody>
+          <a:bodyPr wrap="square" lIns="0" tIns="0" rIns="0" bIns="0" rtlCol="0" anchor="ctr"/>
+          <a:lstStyle/>
+          <a:p>
+            <a:pPr indent="0" marL="0">
+              <a:buNone/>
+            </a:pPr>
+            <a:r>
+              <a:rPr lang="en-US" sz="1200" dirty="0">
+                <a:solidFill>
+                  <a:srgbClr val="345671"/>
+                </a:solidFill>
+                <a:latin typeface="Calibri" pitchFamily="34" charset="0"/>
+                <a:ea typeface="Calibri" pitchFamily="34" charset="-122"/>
+                <a:cs typeface="Calibri" pitchFamily="34" charset="-120"/>
+              </a:rPr>
+              <a:t>Cardiovascular · GI · Respiratory · MSK &amp; Skin · Nervous &amp; Behavioral · Endocrine · Reproductive &amp; Pregnancy · Renal · Heme &amp; Immune · Multisystem · Ethics &amp; Patient Safety</a:t>
+            </a:r>
+            <a:endParaRPr lang="en-US" sz="1200" dirty="0"/>
+          </a:p>
+        </p:txBody>
+      </p:sp>
+      <p:sp>
+        <p:nvSpPr>
+          <p:cNvPr id="35" name="Text 33"/>
+          <p:cNvSpPr/>
+          <p:nvPr/>
+        </p:nvSpPr>
+        <p:spPr>
+          <a:xfrm>
+            <a:off x="502920" y="5989320"/>
+            <a:ext cx="11185855" cy="292608"/>
+          </a:xfrm>
+          <a:prstGeom prst="rect">
+            <a:avLst/>
+          </a:prstGeom>
+          <a:noFill/>
+          <a:ln/>
+        </p:spPr>
+        <p:txBody>
+          <a:bodyPr wrap="square" lIns="0" tIns="0" rIns="0" bIns="0" rtlCol="0" anchor="ctr"/>
+          <a:lstStyle/>
+          <a:p>
+            <a:pPr indent="0" marL="0">
+              <a:buNone/>
+            </a:pPr>
+            <a:r>
+              <a:rPr lang="en-US" sz="1200" b="1" i="1" dirty="0">
+                <a:solidFill>
+                  <a:srgbClr val="B45309"/>
+                </a:solidFill>
+                <a:latin typeface="Calibri" pitchFamily="34" charset="0"/>
+                <a:ea typeface="Calibri" pitchFamily="34" charset="-122"/>
+                <a:cs typeface="Calibri" pitchFamily="34" charset="-120"/>
+              </a:rPr>
+              <a:t>Our approach: case-based teaching across all disciplines, daily UWorld blocks, full FA 2025 mapping.</a:t>
+            </a:r>
+            <a:endParaRPr lang="en-US" sz="1200" dirty="0"/>
+          </a:p>
+        </p:txBody>
       </p:sp>
       <p:sp>
         <p:nvSpPr>
@@ -8024,118 +9450,40 @@
         </p:nvSpPr>
         <p:spPr>
           <a:xfrm>
-            <a:off x="9269501" y="3657600"/>
-            <a:ext cx="457200" cy="457200"/>
-          </a:xfrm>
-          <a:prstGeom prst="rect">
-            <a:avLst/>
-          </a:prstGeom>
-          <a:noFill/>
-          <a:ln/>
-        </p:spPr>
-        <p:txBody>
-          <a:bodyPr wrap="square" lIns="0" tIns="0" rIns="0" bIns="0" rtlCol="0" anchor="ctr"/>
-          <a:lstStyle/>
-          <a:p>
-            <a:pPr algn="ctr" indent="0" marL="0">
-              <a:buNone/>
-            </a:pPr>
-            <a:r>
-              <a:rPr lang="en-US" sz="1800" b="1" dirty="0">
-                <a:solidFill>
-                  <a:srgbClr val="FFFFFF"/>
-                </a:solidFill>
-                <a:latin typeface="Arial Black" pitchFamily="34" charset="0"/>
-                <a:ea typeface="Arial Black" pitchFamily="34" charset="-122"/>
-                <a:cs typeface="Arial Black" pitchFamily="34" charset="-120"/>
-              </a:rPr>
-              <a:t>4</a:t>
-            </a:r>
-            <a:endParaRPr lang="en-US" sz="1800" dirty="0"/>
+            <a:off x="502920" y="6263640"/>
+            <a:ext cx="11185855" cy="219456"/>
+          </a:xfrm>
+          <a:prstGeom prst="rect">
+            <a:avLst/>
+          </a:prstGeom>
+          <a:noFill/>
+          <a:ln/>
+        </p:spPr>
+        <p:txBody>
+          <a:bodyPr wrap="square" lIns="0" tIns="0" rIns="0" bIns="0" rtlCol="0" anchor="ctr"/>
+          <a:lstStyle/>
+          <a:p>
+            <a:pPr indent="0" marL="0">
+              <a:buNone/>
+            </a:pPr>
+            <a:r>
+              <a:rPr lang="en-US" sz="1000" i="1" dirty="0">
+                <a:solidFill>
+                  <a:srgbClr val="6B87A3"/>
+                </a:solidFill>
+                <a:latin typeface="Calibri" pitchFamily="34" charset="0"/>
+                <a:ea typeface="Calibri" pitchFamily="34" charset="-122"/>
+                <a:cs typeface="Calibri" pitchFamily="34" charset="-120"/>
+              </a:rPr>
+              <a:t>Source: usmle.org Step 2 CK content outline + FA 2025</a:t>
+            </a:r>
+            <a:endParaRPr lang="en-US" sz="1000" dirty="0"/>
           </a:p>
         </p:txBody>
       </p:sp>
       <p:sp>
         <p:nvSpPr>
           <p:cNvPr id="37" name="Text 35"/>
-          <p:cNvSpPr/>
-          <p:nvPr/>
-        </p:nvSpPr>
-        <p:spPr>
-          <a:xfrm>
-            <a:off x="9269501" y="4251960"/>
-            <a:ext cx="2144954" cy="365760"/>
-          </a:xfrm>
-          <a:prstGeom prst="rect">
-            <a:avLst/>
-          </a:prstGeom>
-          <a:noFill/>
-          <a:ln/>
-        </p:spPr>
-        <p:txBody>
-          <a:bodyPr wrap="square" lIns="0" tIns="0" rIns="0" bIns="0" rtlCol="0" anchor="ctr"/>
-          <a:lstStyle/>
-          <a:p>
-            <a:pPr indent="0" marL="0">
-              <a:buNone/>
-            </a:pPr>
-            <a:r>
-              <a:rPr lang="en-US" sz="1500" b="1" dirty="0">
-                <a:solidFill>
-                  <a:srgbClr val="0C2A3D"/>
-                </a:solidFill>
-                <a:latin typeface="Calibri" pitchFamily="34" charset="0"/>
-                <a:ea typeface="Calibri" pitchFamily="34" charset="-122"/>
-                <a:cs typeface="Calibri" pitchFamily="34" charset="-120"/>
-              </a:rPr>
-              <a:t>Office hours</a:t>
-            </a:r>
-            <a:endParaRPr lang="en-US" sz="1500" dirty="0"/>
-          </a:p>
-        </p:txBody>
-      </p:sp>
-      <p:sp>
-        <p:nvSpPr>
-          <p:cNvPr id="38" name="Text 36"/>
-          <p:cNvSpPr/>
-          <p:nvPr/>
-        </p:nvSpPr>
-        <p:spPr>
-          <a:xfrm>
-            <a:off x="9269501" y="4663440"/>
-            <a:ext cx="2144954" cy="822960"/>
-          </a:xfrm>
-          <a:prstGeom prst="rect">
-            <a:avLst/>
-          </a:prstGeom>
-          <a:noFill/>
-          <a:ln/>
-        </p:spPr>
-        <p:txBody>
-          <a:bodyPr wrap="square" lIns="0" tIns="0" rIns="0" bIns="0" rtlCol="0" anchor="ctr"/>
-          <a:lstStyle/>
-          <a:p>
-            <a:pPr indent="0" marL="0">
-              <a:buNone/>
-            </a:pPr>
-            <a:r>
-              <a:rPr lang="en-US" sz="1150" dirty="0">
-                <a:solidFill>
-                  <a:srgbClr val="345671"/>
-                </a:solidFill>
-                <a:latin typeface="Calibri" pitchFamily="34" charset="0"/>
-                <a:ea typeface="Calibri" pitchFamily="34" charset="-122"/>
-                <a:cs typeface="Calibri" pitchFamily="34" charset="-120"/>
-              </a:rPr>
-              <a:t>Open Q&amp;A outside class time for clarifying questions and weak areas.</a:t>
-            </a:r>
-            <a:endParaRPr lang="en-US" sz="1150" dirty="0"/>
-          </a:p>
-        </p:txBody>
-      </p:sp>
-      <p:sp>
-        <p:nvSpPr>
-          <p:cNvPr id="39" name="Text 37"/>
           <p:cNvSpPr/>
           <p:nvPr/>
         </p:nvSpPr>
@@ -8174,7 +9522,7 @@
       </p:sp>
       <p:sp>
         <p:nvSpPr>
-          <p:cNvPr id="40" name="Text 38"/>
+          <p:cNvPr id="38" name="Text 36"/>
           <p:cNvSpPr/>
           <p:nvPr/>
         </p:nvSpPr>
@@ -8205,7 +9553,7 @@
                 <a:ea typeface="Calibri" pitchFamily="34" charset="-122"/>
                 <a:cs typeface="Calibri" pitchFamily="34" charset="-120"/>
               </a:rPr>
-              <a:t>5 / 7</a:t>
+              <a:t>5 / 8</a:t>
             </a:r>
             <a:endParaRPr lang="en-US" sz="1000" dirty="0"/>
           </a:p>
@@ -8326,7 +9674,7 @@
                 <a:ea typeface="Calibri" pitchFamily="34" charset="-122"/>
                 <a:cs typeface="Calibri" pitchFamily="34" charset="-120"/>
               </a:rPr>
-              <a:t>HOW THE CLASSES WORK  ·  PART 2</a:t>
+              <a:t>HOW THE CLASSES WORK  ·  PART 1</a:t>
             </a:r>
             <a:endParaRPr lang="en-US" sz="1200" dirty="0"/>
           </a:p>
@@ -8365,7 +9713,7 @@
                 <a:ea typeface="Arial Black" pitchFamily="34" charset="-122"/>
                 <a:cs typeface="Arial Black" pitchFamily="34" charset="-120"/>
               </a:rPr>
-              <a:t>4-month roadmap + end-to-end mentorship</a:t>
+              <a:t>Daily structure — Mon to Sun</a:t>
             </a:r>
             <a:endParaRPr lang="en-US" sz="3200" dirty="0"/>
           </a:p>
@@ -8379,18 +9727,18 @@
         </p:nvSpPr>
         <p:spPr>
           <a:xfrm>
-            <a:off x="502920" y="1874520"/>
-            <a:ext cx="2659304" cy="1417320"/>
-          </a:xfrm>
-          <a:prstGeom prst="rect">
-            <a:avLst/>
-          </a:prstGeom>
-          <a:solidFill>
-            <a:srgbClr val="F5FBFF"/>
-          </a:solidFill>
-          <a:ln w="9525">
+            <a:off x="502920" y="1920240"/>
+            <a:ext cx="3545738" cy="1097280"/>
+          </a:xfrm>
+          <a:prstGeom prst="rect">
+            <a:avLst/>
+          </a:prstGeom>
+          <a:solidFill>
+            <a:srgbClr val="E0F2FE"/>
+          </a:solidFill>
+          <a:ln w="12700">
             <a:solidFill>
-              <a:srgbClr val="B8D6EC"/>
+              <a:srgbClr val="E0F2FE"/>
             </a:solidFill>
             <a:prstDash val="solid"/>
           </a:ln>
@@ -8398,14 +9746,330 @@
       </p:sp>
       <p:sp>
         <p:nvSpPr>
-          <p:cNvPr id="7" name="Shape 5"/>
-          <p:cNvSpPr/>
-          <p:nvPr/>
-        </p:nvSpPr>
-        <p:spPr>
-          <a:xfrm>
-            <a:off x="502920" y="1874520"/>
-            <a:ext cx="2659304" cy="329184"/>
+          <p:cNvPr id="7" name="Text 5"/>
+          <p:cNvSpPr/>
+          <p:nvPr/>
+        </p:nvSpPr>
+        <p:spPr>
+          <a:xfrm>
+            <a:off x="502920" y="2011680"/>
+            <a:ext cx="3545738" cy="594360"/>
+          </a:xfrm>
+          <a:prstGeom prst="rect">
+            <a:avLst/>
+          </a:prstGeom>
+          <a:noFill/>
+          <a:ln/>
+        </p:spPr>
+        <p:txBody>
+          <a:bodyPr wrap="square" lIns="0" tIns="0" rIns="0" bIns="0" rtlCol="0" anchor="ctr"/>
+          <a:lstStyle/>
+          <a:p>
+            <a:pPr algn="ctr" indent="0" marL="0">
+              <a:buNone/>
+            </a:pPr>
+            <a:r>
+              <a:rPr lang="en-US" sz="3000" b="1" dirty="0">
+                <a:solidFill>
+                  <a:srgbClr val="075985"/>
+                </a:solidFill>
+                <a:latin typeface="Arial Black" pitchFamily="34" charset="0"/>
+                <a:ea typeface="Arial Black" pitchFamily="34" charset="-122"/>
+                <a:cs typeface="Arial Black" pitchFamily="34" charset="-120"/>
+              </a:rPr>
+              <a:t>Mon–Sun</a:t>
+            </a:r>
+            <a:endParaRPr lang="en-US" sz="3000" dirty="0"/>
+          </a:p>
+        </p:txBody>
+      </p:sp>
+      <p:sp>
+        <p:nvSpPr>
+          <p:cNvPr id="8" name="Text 6"/>
+          <p:cNvSpPr/>
+          <p:nvPr/>
+        </p:nvSpPr>
+        <p:spPr>
+          <a:xfrm>
+            <a:off x="502920" y="2606040"/>
+            <a:ext cx="3545738" cy="365760"/>
+          </a:xfrm>
+          <a:prstGeom prst="rect">
+            <a:avLst/>
+          </a:prstGeom>
+          <a:noFill/>
+          <a:ln/>
+        </p:spPr>
+        <p:txBody>
+          <a:bodyPr wrap="square" lIns="0" tIns="0" rIns="0" bIns="0" rtlCol="0" anchor="ctr"/>
+          <a:lstStyle/>
+          <a:p>
+            <a:pPr algn="ctr" indent="0" marL="0">
+              <a:buNone/>
+            </a:pPr>
+            <a:r>
+              <a:rPr lang="en-US" sz="1300" b="1" spc="200" kern="0" dirty="0">
+                <a:solidFill>
+                  <a:srgbClr val="345671"/>
+                </a:solidFill>
+                <a:latin typeface="Calibri" pitchFamily="34" charset="0"/>
+                <a:ea typeface="Calibri" pitchFamily="34" charset="-122"/>
+                <a:cs typeface="Calibri" pitchFamily="34" charset="-120"/>
+              </a:rPr>
+              <a:t>Daily classes</a:t>
+            </a:r>
+            <a:endParaRPr lang="en-US" sz="1300" dirty="0"/>
+          </a:p>
+        </p:txBody>
+      </p:sp>
+      <p:sp>
+        <p:nvSpPr>
+          <p:cNvPr id="9" name="Shape 7"/>
+          <p:cNvSpPr/>
+          <p:nvPr/>
+        </p:nvSpPr>
+        <p:spPr>
+          <a:xfrm>
+            <a:off x="4322978" y="1920240"/>
+            <a:ext cx="3545738" cy="1097280"/>
+          </a:xfrm>
+          <a:prstGeom prst="rect">
+            <a:avLst/>
+          </a:prstGeom>
+          <a:solidFill>
+            <a:srgbClr val="E0F2FE"/>
+          </a:solidFill>
+          <a:ln w="12700">
+            <a:solidFill>
+              <a:srgbClr val="E0F2FE"/>
+            </a:solidFill>
+            <a:prstDash val="solid"/>
+          </a:ln>
+        </p:spPr>
+      </p:sp>
+      <p:sp>
+        <p:nvSpPr>
+          <p:cNvPr id="10" name="Text 8"/>
+          <p:cNvSpPr/>
+          <p:nvPr/>
+        </p:nvSpPr>
+        <p:spPr>
+          <a:xfrm>
+            <a:off x="4322978" y="2011680"/>
+            <a:ext cx="3545738" cy="594360"/>
+          </a:xfrm>
+          <a:prstGeom prst="rect">
+            <a:avLst/>
+          </a:prstGeom>
+          <a:noFill/>
+          <a:ln/>
+        </p:spPr>
+        <p:txBody>
+          <a:bodyPr wrap="square" lIns="0" tIns="0" rIns="0" bIns="0" rtlCol="0" anchor="ctr"/>
+          <a:lstStyle/>
+          <a:p>
+            <a:pPr algn="ctr" indent="0" marL="0">
+              <a:buNone/>
+            </a:pPr>
+            <a:r>
+              <a:rPr lang="en-US" sz="3000" b="1" dirty="0">
+                <a:solidFill>
+                  <a:srgbClr val="075985"/>
+                </a:solidFill>
+                <a:latin typeface="Arial Black" pitchFamily="34" charset="0"/>
+                <a:ea typeface="Arial Black" pitchFamily="34" charset="-122"/>
+                <a:cs typeface="Arial Black" pitchFamily="34" charset="-120"/>
+              </a:rPr>
+              <a:t>4 months</a:t>
+            </a:r>
+            <a:endParaRPr lang="en-US" sz="3000" dirty="0"/>
+          </a:p>
+        </p:txBody>
+      </p:sp>
+      <p:sp>
+        <p:nvSpPr>
+          <p:cNvPr id="11" name="Text 9"/>
+          <p:cNvSpPr/>
+          <p:nvPr/>
+        </p:nvSpPr>
+        <p:spPr>
+          <a:xfrm>
+            <a:off x="4322978" y="2606040"/>
+            <a:ext cx="3545738" cy="365760"/>
+          </a:xfrm>
+          <a:prstGeom prst="rect">
+            <a:avLst/>
+          </a:prstGeom>
+          <a:noFill/>
+          <a:ln/>
+        </p:spPr>
+        <p:txBody>
+          <a:bodyPr wrap="square" lIns="0" tIns="0" rIns="0" bIns="0" rtlCol="0" anchor="ctr"/>
+          <a:lstStyle/>
+          <a:p>
+            <a:pPr algn="ctr" indent="0" marL="0">
+              <a:buNone/>
+            </a:pPr>
+            <a:r>
+              <a:rPr lang="en-US" sz="1300" b="1" spc="200" kern="0" dirty="0">
+                <a:solidFill>
+                  <a:srgbClr val="345671"/>
+                </a:solidFill>
+                <a:latin typeface="Calibri" pitchFamily="34" charset="0"/>
+                <a:ea typeface="Calibri" pitchFamily="34" charset="-122"/>
+                <a:cs typeface="Calibri" pitchFamily="34" charset="-120"/>
+              </a:rPr>
+              <a:t>Structured roadmap</a:t>
+            </a:r>
+            <a:endParaRPr lang="en-US" sz="1300" dirty="0"/>
+          </a:p>
+        </p:txBody>
+      </p:sp>
+      <p:sp>
+        <p:nvSpPr>
+          <p:cNvPr id="12" name="Shape 10"/>
+          <p:cNvSpPr/>
+          <p:nvPr/>
+        </p:nvSpPr>
+        <p:spPr>
+          <a:xfrm>
+            <a:off x="8143037" y="1920240"/>
+            <a:ext cx="3545738" cy="1097280"/>
+          </a:xfrm>
+          <a:prstGeom prst="rect">
+            <a:avLst/>
+          </a:prstGeom>
+          <a:solidFill>
+            <a:srgbClr val="E0F2FE"/>
+          </a:solidFill>
+          <a:ln w="12700">
+            <a:solidFill>
+              <a:srgbClr val="E0F2FE"/>
+            </a:solidFill>
+            <a:prstDash val="solid"/>
+          </a:ln>
+        </p:spPr>
+      </p:sp>
+      <p:sp>
+        <p:nvSpPr>
+          <p:cNvPr id="13" name="Text 11"/>
+          <p:cNvSpPr/>
+          <p:nvPr/>
+        </p:nvSpPr>
+        <p:spPr>
+          <a:xfrm>
+            <a:off x="8143037" y="2011680"/>
+            <a:ext cx="3545738" cy="594360"/>
+          </a:xfrm>
+          <a:prstGeom prst="rect">
+            <a:avLst/>
+          </a:prstGeom>
+          <a:noFill/>
+          <a:ln/>
+        </p:spPr>
+        <p:txBody>
+          <a:bodyPr wrap="square" lIns="0" tIns="0" rIns="0" bIns="0" rtlCol="0" anchor="ctr"/>
+          <a:lstStyle/>
+          <a:p>
+            <a:pPr algn="ctr" indent="0" marL="0">
+              <a:buNone/>
+            </a:pPr>
+            <a:r>
+              <a:rPr lang="en-US" sz="3000" b="1" dirty="0">
+                <a:solidFill>
+                  <a:srgbClr val="075985"/>
+                </a:solidFill>
+                <a:latin typeface="Arial Black" pitchFamily="34" charset="0"/>
+                <a:ea typeface="Arial Black" pitchFamily="34" charset="-122"/>
+                <a:cs typeface="Arial Black" pitchFamily="34" charset="-120"/>
+              </a:rPr>
+              <a:t>Step 1 + 2</a:t>
+            </a:r>
+            <a:endParaRPr lang="en-US" sz="3000" dirty="0"/>
+          </a:p>
+        </p:txBody>
+      </p:sp>
+      <p:sp>
+        <p:nvSpPr>
+          <p:cNvPr id="14" name="Text 12"/>
+          <p:cNvSpPr/>
+          <p:nvPr/>
+        </p:nvSpPr>
+        <p:spPr>
+          <a:xfrm>
+            <a:off x="8143037" y="2606040"/>
+            <a:ext cx="3545738" cy="365760"/>
+          </a:xfrm>
+          <a:prstGeom prst="rect">
+            <a:avLst/>
+          </a:prstGeom>
+          <a:noFill/>
+          <a:ln/>
+        </p:spPr>
+        <p:txBody>
+          <a:bodyPr wrap="square" lIns="0" tIns="0" rIns="0" bIns="0" rtlCol="0" anchor="ctr"/>
+          <a:lstStyle/>
+          <a:p>
+            <a:pPr algn="ctr" indent="0" marL="0">
+              <a:buNone/>
+            </a:pPr>
+            <a:r>
+              <a:rPr lang="en-US" sz="1300" b="1" spc="200" kern="0" dirty="0">
+                <a:solidFill>
+                  <a:srgbClr val="345671"/>
+                </a:solidFill>
+                <a:latin typeface="Calibri" pitchFamily="34" charset="0"/>
+                <a:ea typeface="Calibri" pitchFamily="34" charset="-122"/>
+                <a:cs typeface="Calibri" pitchFamily="34" charset="-120"/>
+              </a:rPr>
+              <a:t>Combined option</a:t>
+            </a:r>
+            <a:endParaRPr lang="en-US" sz="1300" dirty="0"/>
+          </a:p>
+        </p:txBody>
+      </p:sp>
+      <p:sp>
+        <p:nvSpPr>
+          <p:cNvPr id="15" name="Shape 13"/>
+          <p:cNvSpPr/>
+          <p:nvPr/>
+        </p:nvSpPr>
+        <p:spPr>
+          <a:xfrm>
+            <a:off x="502920" y="3383280"/>
+            <a:ext cx="2693594" cy="2194560"/>
+          </a:xfrm>
+          <a:prstGeom prst="rect">
+            <a:avLst/>
+          </a:prstGeom>
+          <a:solidFill>
+            <a:srgbClr val="FFFFFF"/>
+          </a:solidFill>
+          <a:ln w="9525">
+            <a:solidFill>
+              <a:srgbClr val="D6E8F5"/>
+            </a:solidFill>
+            <a:prstDash val="solid"/>
+          </a:ln>
+          <a:effectLst>
+            <a:outerShdw sx="100000" sy="100000" kx="0" ky="0" algn="bl" rotWithShape="0" blurRad="127000" dist="12700" dir="5400000">
+              <a:srgbClr val="0C2A3D">
+                <a:alpha val="8000"/>
+              </a:srgbClr>
+            </a:outerShdw>
+          </a:effectLst>
+        </p:spPr>
+      </p:sp>
+      <p:sp>
+        <p:nvSpPr>
+          <p:cNvPr id="16" name="Shape 14"/>
+          <p:cNvSpPr/>
+          <p:nvPr/>
+        </p:nvSpPr>
+        <p:spPr>
+          <a:xfrm>
+            <a:off x="502920" y="3383280"/>
+            <a:ext cx="2693594" cy="73152"/>
           </a:xfrm>
           <a:prstGeom prst="rect">
             <a:avLst/>
@@ -8423,119 +10087,16 @@
       </p:sp>
       <p:sp>
         <p:nvSpPr>
-          <p:cNvPr id="8" name="Text 6"/>
-          <p:cNvSpPr/>
-          <p:nvPr/>
-        </p:nvSpPr>
-        <p:spPr>
-          <a:xfrm>
-            <a:off x="502920" y="1874520"/>
-            <a:ext cx="2659304" cy="329184"/>
-          </a:xfrm>
-          <a:prstGeom prst="rect">
-            <a:avLst/>
-          </a:prstGeom>
-          <a:noFill/>
-          <a:ln/>
-        </p:spPr>
-        <p:txBody>
-          <a:bodyPr wrap="square" lIns="0" tIns="0" rIns="0" bIns="0" rtlCol="0" anchor="ctr"/>
-          <a:lstStyle/>
-          <a:p>
-            <a:pPr algn="ctr" indent="0" marL="0">
-              <a:buNone/>
-            </a:pPr>
-            <a:r>
-              <a:rPr lang="en-US" sz="1300" b="1" spc="300" kern="0" dirty="0">
-                <a:solidFill>
-                  <a:srgbClr val="FFFFFF"/>
-                </a:solidFill>
-                <a:latin typeface="Calibri" pitchFamily="34" charset="0"/>
-                <a:ea typeface="Calibri" pitchFamily="34" charset="-122"/>
-                <a:cs typeface="Calibri" pitchFamily="34" charset="-120"/>
-              </a:rPr>
-              <a:t>Month 1</a:t>
-            </a:r>
-            <a:endParaRPr lang="en-US" sz="1300" dirty="0"/>
-          </a:p>
-        </p:txBody>
-      </p:sp>
-      <p:sp>
-        <p:nvSpPr>
-          <p:cNvPr id="9" name="Text 7"/>
-          <p:cNvSpPr/>
-          <p:nvPr/>
-        </p:nvSpPr>
-        <p:spPr>
-          <a:xfrm>
-            <a:off x="667512" y="2286000"/>
-            <a:ext cx="2330120" cy="960120"/>
-          </a:xfrm>
-          <a:prstGeom prst="rect">
-            <a:avLst/>
-          </a:prstGeom>
-          <a:noFill/>
-          <a:ln/>
-        </p:spPr>
-        <p:txBody>
-          <a:bodyPr wrap="square" lIns="0" tIns="0" rIns="0" bIns="0" rtlCol="0" anchor="ctr"/>
-          <a:lstStyle/>
-          <a:p>
-            <a:pPr algn="l" indent="0" marL="0">
-              <a:buNone/>
-            </a:pPr>
-            <a:r>
-              <a:rPr lang="en-US" sz="1200" dirty="0">
-                <a:solidFill>
-                  <a:srgbClr val="345671"/>
-                </a:solidFill>
-                <a:latin typeface="Calibri" pitchFamily="34" charset="0"/>
-                <a:ea typeface="Calibri" pitchFamily="34" charset="-122"/>
-                <a:cs typeface="Calibri" pitchFamily="34" charset="-120"/>
-              </a:rPr>
-              <a:t>Cardiovascular · Respiratory · General Pathology · Epi/Biostats</a:t>
-            </a:r>
-            <a:endParaRPr lang="en-US" sz="1200" dirty="0"/>
-          </a:p>
-        </p:txBody>
-      </p:sp>
-      <p:sp>
-        <p:nvSpPr>
-          <p:cNvPr id="10" name="Shape 8"/>
-          <p:cNvSpPr/>
-          <p:nvPr/>
-        </p:nvSpPr>
-        <p:spPr>
-          <a:xfrm>
-            <a:off x="3345104" y="1874520"/>
-            <a:ext cx="2659304" cy="1417320"/>
-          </a:xfrm>
-          <a:prstGeom prst="rect">
-            <a:avLst/>
-          </a:prstGeom>
-          <a:solidFill>
-            <a:srgbClr val="F5FBFF"/>
-          </a:solidFill>
-          <a:ln w="9525">
-            <a:solidFill>
-              <a:srgbClr val="B8D6EC"/>
-            </a:solidFill>
-            <a:prstDash val="solid"/>
-          </a:ln>
-        </p:spPr>
-      </p:sp>
-      <p:sp>
-        <p:nvSpPr>
-          <p:cNvPr id="11" name="Shape 9"/>
-          <p:cNvSpPr/>
-          <p:nvPr/>
-        </p:nvSpPr>
-        <p:spPr>
-          <a:xfrm>
-            <a:off x="3345104" y="1874520"/>
-            <a:ext cx="2659304" cy="329184"/>
-          </a:xfrm>
-          <a:prstGeom prst="rect">
+          <p:cNvPr id="17" name="Shape 15"/>
+          <p:cNvSpPr/>
+          <p:nvPr/>
+        </p:nvSpPr>
+        <p:spPr>
+          <a:xfrm>
+            <a:off x="777240" y="3657600"/>
+            <a:ext cx="457200" cy="457200"/>
+          </a:xfrm>
+          <a:prstGeom prst="ellipse">
             <a:avLst/>
           </a:prstGeom>
           <a:solidFill>
@@ -8551,14 +10112,14 @@
       </p:sp>
       <p:sp>
         <p:nvSpPr>
-          <p:cNvPr id="12" name="Text 10"/>
-          <p:cNvSpPr/>
-          <p:nvPr/>
-        </p:nvSpPr>
-        <p:spPr>
-          <a:xfrm>
-            <a:off x="3345104" y="1874520"/>
-            <a:ext cx="2659304" cy="329184"/>
+          <p:cNvPr id="18" name="Text 16"/>
+          <p:cNvSpPr/>
+          <p:nvPr/>
+        </p:nvSpPr>
+        <p:spPr>
+          <a:xfrm>
+            <a:off x="777240" y="3657600"/>
+            <a:ext cx="457200" cy="457200"/>
           </a:xfrm>
           <a:prstGeom prst="rect">
             <a:avLst/>
@@ -8574,46 +10135,85 @@
               <a:buNone/>
             </a:pPr>
             <a:r>
-              <a:rPr lang="en-US" sz="1300" b="1" spc="300" kern="0" dirty="0">
+              <a:rPr lang="en-US" sz="1800" b="1" dirty="0">
                 <a:solidFill>
                   <a:srgbClr val="FFFFFF"/>
                 </a:solidFill>
-                <a:latin typeface="Calibri" pitchFamily="34" charset="0"/>
-                <a:ea typeface="Calibri" pitchFamily="34" charset="-122"/>
-                <a:cs typeface="Calibri" pitchFamily="34" charset="-120"/>
-              </a:rPr>
-              <a:t>Month 2</a:t>
-            </a:r>
-            <a:endParaRPr lang="en-US" sz="1300" dirty="0"/>
-          </a:p>
-        </p:txBody>
-      </p:sp>
-      <p:sp>
-        <p:nvSpPr>
-          <p:cNvPr id="13" name="Text 11"/>
-          <p:cNvSpPr/>
-          <p:nvPr/>
-        </p:nvSpPr>
-        <p:spPr>
-          <a:xfrm>
-            <a:off x="3509696" y="2286000"/>
-            <a:ext cx="2330120" cy="960120"/>
-          </a:xfrm>
-          <a:prstGeom prst="rect">
-            <a:avLst/>
-          </a:prstGeom>
-          <a:noFill/>
-          <a:ln/>
-        </p:spPr>
-        <p:txBody>
-          <a:bodyPr wrap="square" lIns="0" tIns="0" rIns="0" bIns="0" rtlCol="0" anchor="ctr"/>
-          <a:lstStyle/>
-          <a:p>
-            <a:pPr algn="l" indent="0" marL="0">
-              <a:buNone/>
-            </a:pPr>
-            <a:r>
-              <a:rPr lang="en-US" sz="1200" dirty="0">
+                <a:latin typeface="Arial Black" pitchFamily="34" charset="0"/>
+                <a:ea typeface="Arial Black" pitchFamily="34" charset="-122"/>
+                <a:cs typeface="Arial Black" pitchFamily="34" charset="-120"/>
+              </a:rPr>
+              <a:t>1</a:t>
+            </a:r>
+            <a:endParaRPr lang="en-US" sz="1800" dirty="0"/>
+          </a:p>
+        </p:txBody>
+      </p:sp>
+      <p:sp>
+        <p:nvSpPr>
+          <p:cNvPr id="19" name="Text 17"/>
+          <p:cNvSpPr/>
+          <p:nvPr/>
+        </p:nvSpPr>
+        <p:spPr>
+          <a:xfrm>
+            <a:off x="777240" y="4251960"/>
+            <a:ext cx="2144954" cy="365760"/>
+          </a:xfrm>
+          <a:prstGeom prst="rect">
+            <a:avLst/>
+          </a:prstGeom>
+          <a:noFill/>
+          <a:ln/>
+        </p:spPr>
+        <p:txBody>
+          <a:bodyPr wrap="square" lIns="0" tIns="0" rIns="0" bIns="0" rtlCol="0" anchor="ctr"/>
+          <a:lstStyle/>
+          <a:p>
+            <a:pPr indent="0" marL="0">
+              <a:buNone/>
+            </a:pPr>
+            <a:r>
+              <a:rPr lang="en-US" sz="1500" b="1" dirty="0">
+                <a:solidFill>
+                  <a:srgbClr val="0C2A3D"/>
+                </a:solidFill>
+                <a:latin typeface="Calibri" pitchFamily="34" charset="0"/>
+                <a:ea typeface="Calibri" pitchFamily="34" charset="-122"/>
+                <a:cs typeface="Calibri" pitchFamily="34" charset="-120"/>
+              </a:rPr>
+              <a:t>Topic teaching</a:t>
+            </a:r>
+            <a:endParaRPr lang="en-US" sz="1500" dirty="0"/>
+          </a:p>
+        </p:txBody>
+      </p:sp>
+      <p:sp>
+        <p:nvSpPr>
+          <p:cNvPr id="20" name="Text 18"/>
+          <p:cNvSpPr/>
+          <p:nvPr/>
+        </p:nvSpPr>
+        <p:spPr>
+          <a:xfrm>
+            <a:off x="777240" y="4663440"/>
+            <a:ext cx="2144954" cy="822960"/>
+          </a:xfrm>
+          <a:prstGeom prst="rect">
+            <a:avLst/>
+          </a:prstGeom>
+          <a:noFill/>
+          <a:ln/>
+        </p:spPr>
+        <p:txBody>
+          <a:bodyPr wrap="square" lIns="0" tIns="0" rIns="0" bIns="0" rtlCol="0" anchor="ctr"/>
+          <a:lstStyle/>
+          <a:p>
+            <a:pPr indent="0" marL="0">
+              <a:buNone/>
+            </a:pPr>
+            <a:r>
+              <a:rPr lang="en-US" sz="1150" dirty="0">
                 <a:solidFill>
                   <a:srgbClr val="345671"/>
                 </a:solidFill>
@@ -8621,47 +10221,253 @@
                 <a:ea typeface="Calibri" pitchFamily="34" charset="-122"/>
                 <a:cs typeface="Calibri" pitchFamily="34" charset="-120"/>
               </a:rPr>
-              <a:t>Endocrine · GI · Heme/Onc · Renal</a:t>
-            </a:r>
-            <a:endParaRPr lang="en-US" sz="1200" dirty="0"/>
-          </a:p>
-        </p:txBody>
-      </p:sp>
-      <p:sp>
-        <p:nvSpPr>
-          <p:cNvPr id="14" name="Shape 12"/>
-          <p:cNvSpPr/>
-          <p:nvPr/>
-        </p:nvSpPr>
-        <p:spPr>
-          <a:xfrm>
-            <a:off x="6187288" y="1874520"/>
-            <a:ext cx="2659304" cy="1417320"/>
-          </a:xfrm>
-          <a:prstGeom prst="rect">
-            <a:avLst/>
-          </a:prstGeom>
-          <a:solidFill>
-            <a:srgbClr val="F5FBFF"/>
+              <a:t>30–45 min focused teaching mapped page-by-page to First Aid 2025.</a:t>
+            </a:r>
+            <a:endParaRPr lang="en-US" sz="1150" dirty="0"/>
+          </a:p>
+        </p:txBody>
+      </p:sp>
+      <p:sp>
+        <p:nvSpPr>
+          <p:cNvPr id="21" name="Shape 19"/>
+          <p:cNvSpPr/>
+          <p:nvPr/>
+        </p:nvSpPr>
+        <p:spPr>
+          <a:xfrm>
+            <a:off x="3333674" y="3383280"/>
+            <a:ext cx="2693594" cy="2194560"/>
+          </a:xfrm>
+          <a:prstGeom prst="rect">
+            <a:avLst/>
+          </a:prstGeom>
+          <a:solidFill>
+            <a:srgbClr val="FFFFFF"/>
           </a:solidFill>
           <a:ln w="9525">
             <a:solidFill>
-              <a:srgbClr val="B8D6EC"/>
+              <a:srgbClr val="D6E8F5"/>
             </a:solidFill>
             <a:prstDash val="solid"/>
           </a:ln>
-        </p:spPr>
-      </p:sp>
-      <p:sp>
-        <p:nvSpPr>
-          <p:cNvPr id="15" name="Shape 13"/>
-          <p:cNvSpPr/>
-          <p:nvPr/>
-        </p:nvSpPr>
-        <p:spPr>
-          <a:xfrm>
-            <a:off x="6187288" y="1874520"/>
-            <a:ext cx="2659304" cy="329184"/>
+          <a:effectLst>
+            <a:outerShdw sx="100000" sy="100000" kx="0" ky="0" algn="bl" rotWithShape="0" blurRad="127000" dist="12700" dir="5400000">
+              <a:srgbClr val="0C2A3D">
+                <a:alpha val="8000"/>
+              </a:srgbClr>
+            </a:outerShdw>
+          </a:effectLst>
+        </p:spPr>
+      </p:sp>
+      <p:sp>
+        <p:nvSpPr>
+          <p:cNvPr id="22" name="Shape 20"/>
+          <p:cNvSpPr/>
+          <p:nvPr/>
+        </p:nvSpPr>
+        <p:spPr>
+          <a:xfrm>
+            <a:off x="3333674" y="3383280"/>
+            <a:ext cx="2693594" cy="73152"/>
+          </a:xfrm>
+          <a:prstGeom prst="rect">
+            <a:avLst/>
+          </a:prstGeom>
+          <a:solidFill>
+            <a:srgbClr val="D97706"/>
+          </a:solidFill>
+          <a:ln w="12700">
+            <a:solidFill>
+              <a:srgbClr val="D97706"/>
+            </a:solidFill>
+            <a:prstDash val="solid"/>
+          </a:ln>
+        </p:spPr>
+      </p:sp>
+      <p:sp>
+        <p:nvSpPr>
+          <p:cNvPr id="23" name="Shape 21"/>
+          <p:cNvSpPr/>
+          <p:nvPr/>
+        </p:nvSpPr>
+        <p:spPr>
+          <a:xfrm>
+            <a:off x="3607994" y="3657600"/>
+            <a:ext cx="457200" cy="457200"/>
+          </a:xfrm>
+          <a:prstGeom prst="ellipse">
+            <a:avLst/>
+          </a:prstGeom>
+          <a:solidFill>
+            <a:srgbClr val="D97706"/>
+          </a:solidFill>
+          <a:ln w="12700">
+            <a:solidFill>
+              <a:srgbClr val="D97706"/>
+            </a:solidFill>
+            <a:prstDash val="solid"/>
+          </a:ln>
+        </p:spPr>
+      </p:sp>
+      <p:sp>
+        <p:nvSpPr>
+          <p:cNvPr id="24" name="Text 22"/>
+          <p:cNvSpPr/>
+          <p:nvPr/>
+        </p:nvSpPr>
+        <p:spPr>
+          <a:xfrm>
+            <a:off x="3607994" y="3657600"/>
+            <a:ext cx="457200" cy="457200"/>
+          </a:xfrm>
+          <a:prstGeom prst="rect">
+            <a:avLst/>
+          </a:prstGeom>
+          <a:noFill/>
+          <a:ln/>
+        </p:spPr>
+        <p:txBody>
+          <a:bodyPr wrap="square" lIns="0" tIns="0" rIns="0" bIns="0" rtlCol="0" anchor="ctr"/>
+          <a:lstStyle/>
+          <a:p>
+            <a:pPr algn="ctr" indent="0" marL="0">
+              <a:buNone/>
+            </a:pPr>
+            <a:r>
+              <a:rPr lang="en-US" sz="1800" b="1" dirty="0">
+                <a:solidFill>
+                  <a:srgbClr val="FFFFFF"/>
+                </a:solidFill>
+                <a:latin typeface="Arial Black" pitchFamily="34" charset="0"/>
+                <a:ea typeface="Arial Black" pitchFamily="34" charset="-122"/>
+                <a:cs typeface="Arial Black" pitchFamily="34" charset="-120"/>
+              </a:rPr>
+              <a:t>2</a:t>
+            </a:r>
+            <a:endParaRPr lang="en-US" sz="1800" dirty="0"/>
+          </a:p>
+        </p:txBody>
+      </p:sp>
+      <p:sp>
+        <p:nvSpPr>
+          <p:cNvPr id="25" name="Text 23"/>
+          <p:cNvSpPr/>
+          <p:nvPr/>
+        </p:nvSpPr>
+        <p:spPr>
+          <a:xfrm>
+            <a:off x="3607994" y="4251960"/>
+            <a:ext cx="2144954" cy="365760"/>
+          </a:xfrm>
+          <a:prstGeom prst="rect">
+            <a:avLst/>
+          </a:prstGeom>
+          <a:noFill/>
+          <a:ln/>
+        </p:spPr>
+        <p:txBody>
+          <a:bodyPr wrap="square" lIns="0" tIns="0" rIns="0" bIns="0" rtlCol="0" anchor="ctr"/>
+          <a:lstStyle/>
+          <a:p>
+            <a:pPr indent="0" marL="0">
+              <a:buNone/>
+            </a:pPr>
+            <a:r>
+              <a:rPr lang="en-US" sz="1500" b="1" dirty="0">
+                <a:solidFill>
+                  <a:srgbClr val="0C2A3D"/>
+                </a:solidFill>
+                <a:latin typeface="Calibri" pitchFamily="34" charset="0"/>
+                <a:ea typeface="Calibri" pitchFamily="34" charset="-122"/>
+                <a:cs typeface="Calibri" pitchFamily="34" charset="-120"/>
+              </a:rPr>
+              <a:t>UWorld debrief</a:t>
+            </a:r>
+            <a:endParaRPr lang="en-US" sz="1500" dirty="0"/>
+          </a:p>
+        </p:txBody>
+      </p:sp>
+      <p:sp>
+        <p:nvSpPr>
+          <p:cNvPr id="26" name="Text 24"/>
+          <p:cNvSpPr/>
+          <p:nvPr/>
+        </p:nvSpPr>
+        <p:spPr>
+          <a:xfrm>
+            <a:off x="3607994" y="4663440"/>
+            <a:ext cx="2144954" cy="822960"/>
+          </a:xfrm>
+          <a:prstGeom prst="rect">
+            <a:avLst/>
+          </a:prstGeom>
+          <a:noFill/>
+          <a:ln/>
+        </p:spPr>
+        <p:txBody>
+          <a:bodyPr wrap="square" lIns="0" tIns="0" rIns="0" bIns="0" rtlCol="0" anchor="ctr"/>
+          <a:lstStyle/>
+          <a:p>
+            <a:pPr indent="0" marL="0">
+              <a:buNone/>
+            </a:pPr>
+            <a:r>
+              <a:rPr lang="en-US" sz="1150" dirty="0">
+                <a:solidFill>
+                  <a:srgbClr val="345671"/>
+                </a:solidFill>
+                <a:latin typeface="Calibri" pitchFamily="34" charset="0"/>
+                <a:ea typeface="Calibri" pitchFamily="34" charset="-122"/>
+                <a:cs typeface="Calibri" pitchFamily="34" charset="-120"/>
+              </a:rPr>
+              <a:t>Walk through the day's UWorld block with reasoning for every option.</a:t>
+            </a:r>
+            <a:endParaRPr lang="en-US" sz="1150" dirty="0"/>
+          </a:p>
+        </p:txBody>
+      </p:sp>
+      <p:sp>
+        <p:nvSpPr>
+          <p:cNvPr id="27" name="Shape 25"/>
+          <p:cNvSpPr/>
+          <p:nvPr/>
+        </p:nvSpPr>
+        <p:spPr>
+          <a:xfrm>
+            <a:off x="6164428" y="3383280"/>
+            <a:ext cx="2693594" cy="2194560"/>
+          </a:xfrm>
+          <a:prstGeom prst="rect">
+            <a:avLst/>
+          </a:prstGeom>
+          <a:solidFill>
+            <a:srgbClr val="FFFFFF"/>
+          </a:solidFill>
+          <a:ln w="9525">
+            <a:solidFill>
+              <a:srgbClr val="D6E8F5"/>
+            </a:solidFill>
+            <a:prstDash val="solid"/>
+          </a:ln>
+          <a:effectLst>
+            <a:outerShdw sx="100000" sy="100000" kx="0" ky="0" algn="bl" rotWithShape="0" blurRad="127000" dist="12700" dir="5400000">
+              <a:srgbClr val="0C2A3D">
+                <a:alpha val="8000"/>
+              </a:srgbClr>
+            </a:outerShdw>
+          </a:effectLst>
+        </p:spPr>
+      </p:sp>
+      <p:sp>
+        <p:nvSpPr>
+          <p:cNvPr id="28" name="Shape 26"/>
+          <p:cNvSpPr/>
+          <p:nvPr/>
+        </p:nvSpPr>
+        <p:spPr>
+          <a:xfrm>
+            <a:off x="6164428" y="3383280"/>
+            <a:ext cx="2693594" cy="73152"/>
           </a:xfrm>
           <a:prstGeom prst="rect">
             <a:avLst/>
@@ -8679,119 +10485,16 @@
       </p:sp>
       <p:sp>
         <p:nvSpPr>
-          <p:cNvPr id="16" name="Text 14"/>
-          <p:cNvSpPr/>
-          <p:nvPr/>
-        </p:nvSpPr>
-        <p:spPr>
-          <a:xfrm>
-            <a:off x="6187288" y="1874520"/>
-            <a:ext cx="2659304" cy="329184"/>
-          </a:xfrm>
-          <a:prstGeom prst="rect">
-            <a:avLst/>
-          </a:prstGeom>
-          <a:noFill/>
-          <a:ln/>
-        </p:spPr>
-        <p:txBody>
-          <a:bodyPr wrap="square" lIns="0" tIns="0" rIns="0" bIns="0" rtlCol="0" anchor="ctr"/>
-          <a:lstStyle/>
-          <a:p>
-            <a:pPr algn="ctr" indent="0" marL="0">
-              <a:buNone/>
-            </a:pPr>
-            <a:r>
-              <a:rPr lang="en-US" sz="1300" b="1" spc="300" kern="0" dirty="0">
-                <a:solidFill>
-                  <a:srgbClr val="FFFFFF"/>
-                </a:solidFill>
-                <a:latin typeface="Calibri" pitchFamily="34" charset="0"/>
-                <a:ea typeface="Calibri" pitchFamily="34" charset="-122"/>
-                <a:cs typeface="Calibri" pitchFamily="34" charset="-120"/>
-              </a:rPr>
-              <a:t>Month 3</a:t>
-            </a:r>
-            <a:endParaRPr lang="en-US" sz="1300" dirty="0"/>
-          </a:p>
-        </p:txBody>
-      </p:sp>
-      <p:sp>
-        <p:nvSpPr>
-          <p:cNvPr id="17" name="Text 15"/>
-          <p:cNvSpPr/>
-          <p:nvPr/>
-        </p:nvSpPr>
-        <p:spPr>
-          <a:xfrm>
-            <a:off x="6351880" y="2286000"/>
-            <a:ext cx="2330120" cy="960120"/>
-          </a:xfrm>
-          <a:prstGeom prst="rect">
-            <a:avLst/>
-          </a:prstGeom>
-          <a:noFill/>
-          <a:ln/>
-        </p:spPr>
-        <p:txBody>
-          <a:bodyPr wrap="square" lIns="0" tIns="0" rIns="0" bIns="0" rtlCol="0" anchor="ctr"/>
-          <a:lstStyle/>
-          <a:p>
-            <a:pPr algn="l" indent="0" marL="0">
-              <a:buNone/>
-            </a:pPr>
-            <a:r>
-              <a:rPr lang="en-US" sz="1200" dirty="0">
-                <a:solidFill>
-                  <a:srgbClr val="345671"/>
-                </a:solidFill>
-                <a:latin typeface="Calibri" pitchFamily="34" charset="0"/>
-                <a:ea typeface="Calibri" pitchFamily="34" charset="-122"/>
-                <a:cs typeface="Calibri" pitchFamily="34" charset="-120"/>
-              </a:rPr>
-              <a:t>Musculoskeletal · Neurology · Psychiatry · Reproductive</a:t>
-            </a:r>
-            <a:endParaRPr lang="en-US" sz="1200" dirty="0"/>
-          </a:p>
-        </p:txBody>
-      </p:sp>
-      <p:sp>
-        <p:nvSpPr>
-          <p:cNvPr id="18" name="Shape 16"/>
-          <p:cNvSpPr/>
-          <p:nvPr/>
-        </p:nvSpPr>
-        <p:spPr>
-          <a:xfrm>
-            <a:off x="9029471" y="1874520"/>
-            <a:ext cx="2659304" cy="1417320"/>
-          </a:xfrm>
-          <a:prstGeom prst="rect">
-            <a:avLst/>
-          </a:prstGeom>
-          <a:solidFill>
-            <a:srgbClr val="F5FBFF"/>
-          </a:solidFill>
-          <a:ln w="9525">
-            <a:solidFill>
-              <a:srgbClr val="B8D6EC"/>
-            </a:solidFill>
-            <a:prstDash val="solid"/>
-          </a:ln>
-        </p:spPr>
-      </p:sp>
-      <p:sp>
-        <p:nvSpPr>
-          <p:cNvPr id="19" name="Shape 17"/>
-          <p:cNvSpPr/>
-          <p:nvPr/>
-        </p:nvSpPr>
-        <p:spPr>
-          <a:xfrm>
-            <a:off x="9029471" y="1874520"/>
-            <a:ext cx="2659304" cy="329184"/>
-          </a:xfrm>
-          <a:prstGeom prst="rect">
+          <p:cNvPr id="29" name="Shape 27"/>
+          <p:cNvSpPr/>
+          <p:nvPr/>
+        </p:nvSpPr>
+        <p:spPr>
+          <a:xfrm>
+            <a:off x="6438748" y="3657600"/>
+            <a:ext cx="457200" cy="457200"/>
+          </a:xfrm>
+          <a:prstGeom prst="ellipse">
             <a:avLst/>
           </a:prstGeom>
           <a:solidFill>
@@ -8807,14 +10510,14 @@
       </p:sp>
       <p:sp>
         <p:nvSpPr>
-          <p:cNvPr id="20" name="Text 18"/>
-          <p:cNvSpPr/>
-          <p:nvPr/>
-        </p:nvSpPr>
-        <p:spPr>
-          <a:xfrm>
-            <a:off x="9029471" y="1874520"/>
-            <a:ext cx="2659304" cy="329184"/>
+          <p:cNvPr id="30" name="Text 28"/>
+          <p:cNvSpPr/>
+          <p:nvPr/>
+        </p:nvSpPr>
+        <p:spPr>
+          <a:xfrm>
+            <a:off x="6438748" y="3657600"/>
+            <a:ext cx="457200" cy="457200"/>
           </a:xfrm>
           <a:prstGeom prst="rect">
             <a:avLst/>
@@ -8830,46 +10533,85 @@
               <a:buNone/>
             </a:pPr>
             <a:r>
-              <a:rPr lang="en-US" sz="1300" b="1" spc="300" kern="0" dirty="0">
+              <a:rPr lang="en-US" sz="1800" b="1" dirty="0">
                 <a:solidFill>
                   <a:srgbClr val="FFFFFF"/>
                 </a:solidFill>
-                <a:latin typeface="Calibri" pitchFamily="34" charset="0"/>
-                <a:ea typeface="Calibri" pitchFamily="34" charset="-122"/>
-                <a:cs typeface="Calibri" pitchFamily="34" charset="-120"/>
-              </a:rPr>
-              <a:t>Month 4</a:t>
-            </a:r>
-            <a:endParaRPr lang="en-US" sz="1300" dirty="0"/>
-          </a:p>
-        </p:txBody>
-      </p:sp>
-      <p:sp>
-        <p:nvSpPr>
-          <p:cNvPr id="21" name="Text 19"/>
-          <p:cNvSpPr/>
-          <p:nvPr/>
-        </p:nvSpPr>
-        <p:spPr>
-          <a:xfrm>
-            <a:off x="9194063" y="2286000"/>
-            <a:ext cx="2330120" cy="960120"/>
-          </a:xfrm>
-          <a:prstGeom prst="rect">
-            <a:avLst/>
-          </a:prstGeom>
-          <a:noFill/>
-          <a:ln/>
-        </p:spPr>
-        <p:txBody>
-          <a:bodyPr wrap="square" lIns="0" tIns="0" rIns="0" bIns="0" rtlCol="0" anchor="ctr"/>
-          <a:lstStyle/>
-          <a:p>
-            <a:pPr algn="l" indent="0" marL="0">
-              <a:buNone/>
-            </a:pPr>
-            <a:r>
-              <a:rPr lang="en-US" sz="1200" dirty="0">
+                <a:latin typeface="Arial Black" pitchFamily="34" charset="0"/>
+                <a:ea typeface="Arial Black" pitchFamily="34" charset="-122"/>
+                <a:cs typeface="Arial Black" pitchFamily="34" charset="-120"/>
+              </a:rPr>
+              <a:t>3</a:t>
+            </a:r>
+            <a:endParaRPr lang="en-US" sz="1800" dirty="0"/>
+          </a:p>
+        </p:txBody>
+      </p:sp>
+      <p:sp>
+        <p:nvSpPr>
+          <p:cNvPr id="31" name="Text 29"/>
+          <p:cNvSpPr/>
+          <p:nvPr/>
+        </p:nvSpPr>
+        <p:spPr>
+          <a:xfrm>
+            <a:off x="6438748" y="4251960"/>
+            <a:ext cx="2144954" cy="365760"/>
+          </a:xfrm>
+          <a:prstGeom prst="rect">
+            <a:avLst/>
+          </a:prstGeom>
+          <a:noFill/>
+          <a:ln/>
+        </p:spPr>
+        <p:txBody>
+          <a:bodyPr wrap="square" lIns="0" tIns="0" rIns="0" bIns="0" rtlCol="0" anchor="ctr"/>
+          <a:lstStyle/>
+          <a:p>
+            <a:pPr indent="0" marL="0">
+              <a:buNone/>
+            </a:pPr>
+            <a:r>
+              <a:rPr lang="en-US" sz="1500" b="1" dirty="0">
+                <a:solidFill>
+                  <a:srgbClr val="0C2A3D"/>
+                </a:solidFill>
+                <a:latin typeface="Calibri" pitchFamily="34" charset="0"/>
+                <a:ea typeface="Calibri" pitchFamily="34" charset="-122"/>
+                <a:cs typeface="Calibri" pitchFamily="34" charset="-120"/>
+              </a:rPr>
+              <a:t>High-yield wrap</a:t>
+            </a:r>
+            <a:endParaRPr lang="en-US" sz="1500" dirty="0"/>
+          </a:p>
+        </p:txBody>
+      </p:sp>
+      <p:sp>
+        <p:nvSpPr>
+          <p:cNvPr id="32" name="Text 30"/>
+          <p:cNvSpPr/>
+          <p:nvPr/>
+        </p:nvSpPr>
+        <p:spPr>
+          <a:xfrm>
+            <a:off x="6438748" y="4663440"/>
+            <a:ext cx="2144954" cy="822960"/>
+          </a:xfrm>
+          <a:prstGeom prst="rect">
+            <a:avLst/>
+          </a:prstGeom>
+          <a:noFill/>
+          <a:ln/>
+        </p:spPr>
+        <p:txBody>
+          <a:bodyPr wrap="square" lIns="0" tIns="0" rIns="0" bIns="0" rtlCol="0" anchor="ctr"/>
+          <a:lstStyle/>
+          <a:p>
+            <a:pPr indent="0" marL="0">
+              <a:buNone/>
+            </a:pPr>
+            <a:r>
+              <a:rPr lang="en-US" sz="1150" dirty="0">
                 <a:solidFill>
                   <a:srgbClr val="345671"/>
                 </a:solidFill>
@@ -8877,63 +10619,56 @@
                 <a:ea typeface="Calibri" pitchFamily="34" charset="-122"/>
                 <a:cs typeface="Calibri" pitchFamily="34" charset="-120"/>
               </a:rPr>
-              <a:t>Immunology / Microbiology · Pharmacology · Behavioral · Mock blocks</a:t>
-            </a:r>
-            <a:endParaRPr lang="en-US" sz="1200" dirty="0"/>
-          </a:p>
-        </p:txBody>
-      </p:sp>
-      <p:sp>
-        <p:nvSpPr>
-          <p:cNvPr id="22" name="Text 20"/>
-          <p:cNvSpPr/>
-          <p:nvPr/>
-        </p:nvSpPr>
-        <p:spPr>
-          <a:xfrm>
-            <a:off x="502920" y="3657600"/>
-            <a:ext cx="11185855" cy="274320"/>
-          </a:xfrm>
-          <a:prstGeom prst="rect">
-            <a:avLst/>
-          </a:prstGeom>
-          <a:noFill/>
-          <a:ln/>
-        </p:spPr>
-        <p:txBody>
-          <a:bodyPr wrap="square" lIns="0" tIns="0" rIns="0" bIns="0" rtlCol="0" anchor="ctr"/>
-          <a:lstStyle/>
-          <a:p>
-            <a:pPr indent="0" marL="0">
-              <a:buNone/>
-            </a:pPr>
-            <a:r>
-              <a:rPr lang="en-US" sz="1200" b="1" spc="400" kern="0" dirty="0">
-                <a:solidFill>
-                  <a:srgbClr val="B45309"/>
-                </a:solidFill>
-                <a:latin typeface="Calibri" pitchFamily="34" charset="0"/>
-                <a:ea typeface="Calibri" pitchFamily="34" charset="-122"/>
-                <a:cs typeface="Calibri" pitchFamily="34" charset="-120"/>
-              </a:rPr>
-              <a:t>END-TO-END MENTORSHIP</a:t>
-            </a:r>
-            <a:endParaRPr lang="en-US" sz="1200" dirty="0"/>
-          </a:p>
-        </p:txBody>
-      </p:sp>
-      <p:sp>
-        <p:nvSpPr>
-          <p:cNvPr id="23" name="Shape 21"/>
-          <p:cNvSpPr/>
-          <p:nvPr/>
-        </p:nvSpPr>
-        <p:spPr>
-          <a:xfrm>
-            <a:off x="502920" y="4023360"/>
-            <a:ext cx="164592" cy="164592"/>
-          </a:xfrm>
-          <a:prstGeom prst="ellipse">
+              <a:t>5-minute mnemonic / pearls recap that you take into the next day.</a:t>
+            </a:r>
+            <a:endParaRPr lang="en-US" sz="1150" dirty="0"/>
+          </a:p>
+        </p:txBody>
+      </p:sp>
+      <p:sp>
+        <p:nvSpPr>
+          <p:cNvPr id="33" name="Shape 31"/>
+          <p:cNvSpPr/>
+          <p:nvPr/>
+        </p:nvSpPr>
+        <p:spPr>
+          <a:xfrm>
+            <a:off x="8995181" y="3383280"/>
+            <a:ext cx="2693594" cy="2194560"/>
+          </a:xfrm>
+          <a:prstGeom prst="rect">
+            <a:avLst/>
+          </a:prstGeom>
+          <a:solidFill>
+            <a:srgbClr val="FFFFFF"/>
+          </a:solidFill>
+          <a:ln w="9525">
+            <a:solidFill>
+              <a:srgbClr val="D6E8F5"/>
+            </a:solidFill>
+            <a:prstDash val="solid"/>
+          </a:ln>
+          <a:effectLst>
+            <a:outerShdw sx="100000" sy="100000" kx="0" ky="0" algn="bl" rotWithShape="0" blurRad="127000" dist="12700" dir="5400000">
+              <a:srgbClr val="0C2A3D">
+                <a:alpha val="8000"/>
+              </a:srgbClr>
+            </a:outerShdw>
+          </a:effectLst>
+        </p:spPr>
+      </p:sp>
+      <p:sp>
+        <p:nvSpPr>
+          <p:cNvPr id="34" name="Shape 32"/>
+          <p:cNvSpPr/>
+          <p:nvPr/>
+        </p:nvSpPr>
+        <p:spPr>
+          <a:xfrm>
+            <a:off x="8995181" y="3383280"/>
+            <a:ext cx="2693594" cy="73152"/>
+          </a:xfrm>
+          <a:prstGeom prst="rect">
             <a:avLst/>
           </a:prstGeom>
           <a:solidFill>
@@ -8949,53 +10684,14 @@
       </p:sp>
       <p:sp>
         <p:nvSpPr>
-          <p:cNvPr id="24" name="Text 22"/>
-          <p:cNvSpPr/>
-          <p:nvPr/>
-        </p:nvSpPr>
-        <p:spPr>
-          <a:xfrm>
-            <a:off x="777240" y="3968496"/>
-            <a:ext cx="10911535" cy="329184"/>
-          </a:xfrm>
-          <a:prstGeom prst="rect">
-            <a:avLst/>
-          </a:prstGeom>
-          <a:noFill/>
-          <a:ln/>
-        </p:spPr>
-        <p:txBody>
-          <a:bodyPr wrap="square" lIns="0" tIns="0" rIns="0" bIns="0" rtlCol="0" anchor="ctr"/>
-          <a:lstStyle/>
-          <a:p>
-            <a:pPr indent="0" marL="0">
-              <a:buNone/>
-            </a:pPr>
-            <a:r>
-              <a:rPr lang="en-US" sz="1300" dirty="0">
-                <a:solidFill>
-                  <a:srgbClr val="0C2A3D"/>
-                </a:solidFill>
-                <a:latin typeface="Calibri" pitchFamily="34" charset="0"/>
-                <a:ea typeface="Calibri" pitchFamily="34" charset="-122"/>
-                <a:cs typeface="Calibri" pitchFamily="34" charset="-120"/>
-              </a:rPr>
-              <a:t>ECFMG application — credentials submission, sponsor notes, EPIC.</a:t>
-            </a:r>
-            <a:endParaRPr lang="en-US" sz="1300" dirty="0"/>
-          </a:p>
-        </p:txBody>
-      </p:sp>
-      <p:sp>
-        <p:nvSpPr>
-          <p:cNvPr id="25" name="Shape 23"/>
-          <p:cNvSpPr/>
-          <p:nvPr/>
-        </p:nvSpPr>
-        <p:spPr>
-          <a:xfrm>
-            <a:off x="502920" y="4407408"/>
-            <a:ext cx="164592" cy="164592"/>
+          <p:cNvPr id="35" name="Shape 33"/>
+          <p:cNvSpPr/>
+          <p:nvPr/>
+        </p:nvSpPr>
+        <p:spPr>
+          <a:xfrm>
+            <a:off x="9269501" y="3657600"/>
+            <a:ext cx="457200" cy="457200"/>
           </a:xfrm>
           <a:prstGeom prst="ellipse">
             <a:avLst/>
@@ -9013,14 +10709,53 @@
       </p:sp>
       <p:sp>
         <p:nvSpPr>
-          <p:cNvPr id="26" name="Text 24"/>
-          <p:cNvSpPr/>
-          <p:nvPr/>
-        </p:nvSpPr>
-        <p:spPr>
-          <a:xfrm>
-            <a:off x="777240" y="4352544"/>
-            <a:ext cx="10911535" cy="329184"/>
+          <p:cNvPr id="36" name="Text 34"/>
+          <p:cNvSpPr/>
+          <p:nvPr/>
+        </p:nvSpPr>
+        <p:spPr>
+          <a:xfrm>
+            <a:off x="9269501" y="3657600"/>
+            <a:ext cx="457200" cy="457200"/>
+          </a:xfrm>
+          <a:prstGeom prst="rect">
+            <a:avLst/>
+          </a:prstGeom>
+          <a:noFill/>
+          <a:ln/>
+        </p:spPr>
+        <p:txBody>
+          <a:bodyPr wrap="square" lIns="0" tIns="0" rIns="0" bIns="0" rtlCol="0" anchor="ctr"/>
+          <a:lstStyle/>
+          <a:p>
+            <a:pPr algn="ctr" indent="0" marL="0">
+              <a:buNone/>
+            </a:pPr>
+            <a:r>
+              <a:rPr lang="en-US" sz="1800" b="1" dirty="0">
+                <a:solidFill>
+                  <a:srgbClr val="FFFFFF"/>
+                </a:solidFill>
+                <a:latin typeface="Arial Black" pitchFamily="34" charset="0"/>
+                <a:ea typeface="Arial Black" pitchFamily="34" charset="-122"/>
+                <a:cs typeface="Arial Black" pitchFamily="34" charset="-120"/>
+              </a:rPr>
+              <a:t>4</a:t>
+            </a:r>
+            <a:endParaRPr lang="en-US" sz="1800" dirty="0"/>
+          </a:p>
+        </p:txBody>
+      </p:sp>
+      <p:sp>
+        <p:nvSpPr>
+          <p:cNvPr id="37" name="Text 35"/>
+          <p:cNvSpPr/>
+          <p:nvPr/>
+        </p:nvSpPr>
+        <p:spPr>
+          <a:xfrm>
+            <a:off x="9269501" y="4251960"/>
+            <a:ext cx="2144954" cy="365760"/>
           </a:xfrm>
           <a:prstGeom prst="rect">
             <a:avLst/>
@@ -9036,7 +10771,7 @@
               <a:buNone/>
             </a:pPr>
             <a:r>
-              <a:rPr lang="en-US" sz="1300" dirty="0">
+              <a:rPr lang="en-US" sz="1500" b="1" dirty="0">
                 <a:solidFill>
                   <a:srgbClr val="0C2A3D"/>
                 </a:solidFill>
@@ -9044,47 +10779,22 @@
                 <a:ea typeface="Calibri" pitchFamily="34" charset="-122"/>
                 <a:cs typeface="Calibri" pitchFamily="34" charset="-120"/>
               </a:rPr>
-              <a:t>Personal statement &amp; CV review, with iterative drafts.</a:t>
-            </a:r>
-            <a:endParaRPr lang="en-US" sz="1300" dirty="0"/>
-          </a:p>
-        </p:txBody>
-      </p:sp>
-      <p:sp>
-        <p:nvSpPr>
-          <p:cNvPr id="27" name="Shape 25"/>
-          <p:cNvSpPr/>
-          <p:nvPr/>
-        </p:nvSpPr>
-        <p:spPr>
-          <a:xfrm>
-            <a:off x="502920" y="4791456"/>
-            <a:ext cx="164592" cy="164592"/>
-          </a:xfrm>
-          <a:prstGeom prst="ellipse">
-            <a:avLst/>
-          </a:prstGeom>
-          <a:solidFill>
-            <a:srgbClr val="D97706"/>
-          </a:solidFill>
-          <a:ln w="12700">
-            <a:solidFill>
-              <a:srgbClr val="D97706"/>
-            </a:solidFill>
-            <a:prstDash val="solid"/>
-          </a:ln>
-        </p:spPr>
-      </p:sp>
-      <p:sp>
-        <p:nvSpPr>
-          <p:cNvPr id="28" name="Text 26"/>
-          <p:cNvSpPr/>
-          <p:nvPr/>
-        </p:nvSpPr>
-        <p:spPr>
-          <a:xfrm>
-            <a:off x="777240" y="4736592"/>
-            <a:ext cx="10911535" cy="329184"/>
+              <a:t>Office hours</a:t>
+            </a:r>
+            <a:endParaRPr lang="en-US" sz="1500" dirty="0"/>
+          </a:p>
+        </p:txBody>
+      </p:sp>
+      <p:sp>
+        <p:nvSpPr>
+          <p:cNvPr id="38" name="Text 36"/>
+          <p:cNvSpPr/>
+          <p:nvPr/>
+        </p:nvSpPr>
+        <p:spPr>
+          <a:xfrm>
+            <a:off x="9269501" y="4663440"/>
+            <a:ext cx="2144954" cy="822960"/>
           </a:xfrm>
           <a:prstGeom prst="rect">
             <a:avLst/>
@@ -9100,151 +10810,23 @@
               <a:buNone/>
             </a:pPr>
             <a:r>
-              <a:rPr lang="en-US" sz="1300" dirty="0">
-                <a:solidFill>
-                  <a:srgbClr val="0C2A3D"/>
-                </a:solidFill>
-                <a:latin typeface="Calibri" pitchFamily="34" charset="0"/>
-                <a:ea typeface="Calibri" pitchFamily="34" charset="-122"/>
-                <a:cs typeface="Calibri" pitchFamily="34" charset="-120"/>
-              </a:rPr>
-              <a:t>Interview prep — mock interviews, IMG-specific Q&amp;A, programs by signal.</a:t>
-            </a:r>
-            <a:endParaRPr lang="en-US" sz="1300" dirty="0"/>
-          </a:p>
-        </p:txBody>
-      </p:sp>
-      <p:sp>
-        <p:nvSpPr>
-          <p:cNvPr id="29" name="Shape 27"/>
-          <p:cNvSpPr/>
-          <p:nvPr/>
-        </p:nvSpPr>
-        <p:spPr>
-          <a:xfrm>
-            <a:off x="502920" y="5175504"/>
-            <a:ext cx="164592" cy="164592"/>
-          </a:xfrm>
-          <a:prstGeom prst="ellipse">
-            <a:avLst/>
-          </a:prstGeom>
-          <a:solidFill>
-            <a:srgbClr val="D97706"/>
-          </a:solidFill>
-          <a:ln w="12700">
-            <a:solidFill>
-              <a:srgbClr val="D97706"/>
-            </a:solidFill>
-            <a:prstDash val="solid"/>
-          </a:ln>
-        </p:spPr>
-      </p:sp>
-      <p:sp>
-        <p:nvSpPr>
-          <p:cNvPr id="30" name="Text 28"/>
-          <p:cNvSpPr/>
-          <p:nvPr/>
-        </p:nvSpPr>
-        <p:spPr>
-          <a:xfrm>
-            <a:off x="777240" y="5120640"/>
-            <a:ext cx="10911535" cy="329184"/>
-          </a:xfrm>
-          <a:prstGeom prst="rect">
-            <a:avLst/>
-          </a:prstGeom>
-          <a:noFill/>
-          <a:ln/>
-        </p:spPr>
-        <p:txBody>
-          <a:bodyPr wrap="square" lIns="0" tIns="0" rIns="0" bIns="0" rtlCol="0" anchor="ctr"/>
-          <a:lstStyle/>
-          <a:p>
-            <a:pPr indent="0" marL="0">
-              <a:buNone/>
-            </a:pPr>
-            <a:r>
-              <a:rPr lang="en-US" sz="1300" dirty="0">
-                <a:solidFill>
-                  <a:srgbClr val="0C2A3D"/>
-                </a:solidFill>
-                <a:latin typeface="Calibri" pitchFamily="34" charset="0"/>
-                <a:ea typeface="Calibri" pitchFamily="34" charset="-122"/>
-                <a:cs typeface="Calibri" pitchFamily="34" charset="-120"/>
-              </a:rPr>
-              <a:t>ERAS / NRMP timeline coaching from application to rank list.</a:t>
-            </a:r>
-            <a:endParaRPr lang="en-US" sz="1300" dirty="0"/>
-          </a:p>
-        </p:txBody>
-      </p:sp>
-      <p:sp>
-        <p:nvSpPr>
-          <p:cNvPr id="31" name="Shape 29"/>
-          <p:cNvSpPr/>
-          <p:nvPr/>
-        </p:nvSpPr>
-        <p:spPr>
-          <a:xfrm>
-            <a:off x="502920" y="5559552"/>
-            <a:ext cx="164592" cy="164592"/>
-          </a:xfrm>
-          <a:prstGeom prst="ellipse">
-            <a:avLst/>
-          </a:prstGeom>
-          <a:solidFill>
-            <a:srgbClr val="D97706"/>
-          </a:solidFill>
-          <a:ln w="12700">
-            <a:solidFill>
-              <a:srgbClr val="D97706"/>
-            </a:solidFill>
-            <a:prstDash val="solid"/>
-          </a:ln>
-        </p:spPr>
-      </p:sp>
-      <p:sp>
-        <p:nvSpPr>
-          <p:cNvPr id="32" name="Text 30"/>
-          <p:cNvSpPr/>
-          <p:nvPr/>
-        </p:nvSpPr>
-        <p:spPr>
-          <a:xfrm>
-            <a:off x="777240" y="5504688"/>
-            <a:ext cx="10911535" cy="329184"/>
-          </a:xfrm>
-          <a:prstGeom prst="rect">
-            <a:avLst/>
-          </a:prstGeom>
-          <a:noFill/>
-          <a:ln/>
-        </p:spPr>
-        <p:txBody>
-          <a:bodyPr wrap="square" lIns="0" tIns="0" rIns="0" bIns="0" rtlCol="0" anchor="ctr"/>
-          <a:lstStyle/>
-          <a:p>
-            <a:pPr indent="0" marL="0">
-              <a:buNone/>
-            </a:pPr>
-            <a:r>
-              <a:rPr lang="en-US" sz="1300" dirty="0">
-                <a:solidFill>
-                  <a:srgbClr val="0C2A3D"/>
-                </a:solidFill>
-                <a:latin typeface="Calibri" pitchFamily="34" charset="0"/>
-                <a:ea typeface="Calibri" pitchFamily="34" charset="-122"/>
-                <a:cs typeface="Calibri" pitchFamily="34" charset="-120"/>
-              </a:rPr>
-              <a:t>Combined Step 1 + Step 2 expedited track for efficient overlap.</a:t>
-            </a:r>
-            <a:endParaRPr lang="en-US" sz="1300" dirty="0"/>
-          </a:p>
-        </p:txBody>
-      </p:sp>
-      <p:sp>
-        <p:nvSpPr>
-          <p:cNvPr id="33" name="Text 31"/>
+              <a:rPr lang="en-US" sz="1150" dirty="0">
+                <a:solidFill>
+                  <a:srgbClr val="345671"/>
+                </a:solidFill>
+                <a:latin typeface="Calibri" pitchFamily="34" charset="0"/>
+                <a:ea typeface="Calibri" pitchFamily="34" charset="-122"/>
+                <a:cs typeface="Calibri" pitchFamily="34" charset="-120"/>
+              </a:rPr>
+              <a:t>Open Q&amp;A outside class time for clarifying questions and weak areas.</a:t>
+            </a:r>
+            <a:endParaRPr lang="en-US" sz="1150" dirty="0"/>
+          </a:p>
+        </p:txBody>
+      </p:sp>
+      <p:sp>
+        <p:nvSpPr>
+          <p:cNvPr id="39" name="Text 37"/>
           <p:cNvSpPr/>
           <p:nvPr/>
         </p:nvSpPr>
@@ -9283,7 +10865,7 @@
       </p:sp>
       <p:sp>
         <p:nvSpPr>
-          <p:cNvPr id="34" name="Text 32"/>
+          <p:cNvPr id="40" name="Text 38"/>
           <p:cNvSpPr/>
           <p:nvPr/>
         </p:nvSpPr>
@@ -9314,7 +10896,7 @@
                 <a:ea typeface="Calibri" pitchFamily="34" charset="-122"/>
                 <a:cs typeface="Calibri" pitchFamily="34" charset="-120"/>
               </a:rPr>
-              <a:t>6 / 7</a:t>
+              <a:t>6 / 8</a:t>
             </a:r>
             <a:endParaRPr lang="en-US" sz="1000" dirty="0"/>
           </a:p>
@@ -9331,6 +10913,1115 @@
 <file path=ppt/slides/slide7.xml><?xml version="1.0" encoding="utf-8"?>
 <p:sld xmlns:a="http://schemas.openxmlformats.org/drawingml/2006/main" xmlns:r="http://schemas.openxmlformats.org/officeDocument/2006/relationships" xmlns:p="http://schemas.openxmlformats.org/presentationml/2006/main">
   <p:cSld name="Slide 7">
+    <p:bg>
+      <p:bgPr>
+        <a:solidFill>
+          <a:srgbClr val="FFFFFF"/>
+        </a:solidFill>
+      </p:bgPr>
+    </p:bg>
+    <p:spTree>
+      <p:nvGrpSpPr>
+        <p:cNvPr id="1" name=""/>
+        <p:cNvGrpSpPr/>
+        <p:nvPr/>
+      </p:nvGrpSpPr>
+      <p:grpSpPr>
+        <a:xfrm>
+          <a:off x="0" y="0"/>
+          <a:ext cx="0" cy="0"/>
+          <a:chOff x="0" y="0"/>
+          <a:chExt cx="0" cy="0"/>
+        </a:xfrm>
+      </p:grpSpPr>
+      <p:sp>
+        <p:nvSpPr>
+          <p:cNvPr id="2" name="Shape 0"/>
+          <p:cNvSpPr/>
+          <p:nvPr/>
+        </p:nvSpPr>
+        <p:spPr>
+          <a:xfrm>
+            <a:off x="0" y="0"/>
+            <a:ext cx="7315017" cy="411480"/>
+          </a:xfrm>
+          <a:prstGeom prst="rect">
+            <a:avLst/>
+          </a:prstGeom>
+          <a:solidFill>
+            <a:srgbClr val="0284C7"/>
+          </a:solidFill>
+          <a:ln w="12700">
+            <a:solidFill>
+              <a:srgbClr val="0284C7"/>
+            </a:solidFill>
+            <a:prstDash val="solid"/>
+          </a:ln>
+        </p:spPr>
+      </p:sp>
+      <p:sp>
+        <p:nvSpPr>
+          <p:cNvPr id="3" name="Shape 1"/>
+          <p:cNvSpPr/>
+          <p:nvPr/>
+        </p:nvSpPr>
+        <p:spPr>
+          <a:xfrm>
+            <a:off x="7315017" y="0"/>
+            <a:ext cx="4876678" cy="411480"/>
+          </a:xfrm>
+          <a:prstGeom prst="rect">
+            <a:avLst/>
+          </a:prstGeom>
+          <a:solidFill>
+            <a:srgbClr val="D97706"/>
+          </a:solidFill>
+          <a:ln w="12700">
+            <a:solidFill>
+              <a:srgbClr val="D97706"/>
+            </a:solidFill>
+            <a:prstDash val="solid"/>
+          </a:ln>
+        </p:spPr>
+      </p:sp>
+      <p:sp>
+        <p:nvSpPr>
+          <p:cNvPr id="4" name="Text 2"/>
+          <p:cNvSpPr/>
+          <p:nvPr/>
+        </p:nvSpPr>
+        <p:spPr>
+          <a:xfrm>
+            <a:off x="502920" y="640080"/>
+            <a:ext cx="11185855" cy="274320"/>
+          </a:xfrm>
+          <a:prstGeom prst="rect">
+            <a:avLst/>
+          </a:prstGeom>
+          <a:noFill/>
+          <a:ln/>
+        </p:spPr>
+        <p:txBody>
+          <a:bodyPr wrap="square" lIns="0" tIns="0" rIns="0" bIns="0" rtlCol="0" anchor="ctr"/>
+          <a:lstStyle/>
+          <a:p>
+            <a:pPr indent="0" marL="0">
+              <a:buNone/>
+            </a:pPr>
+            <a:r>
+              <a:rPr lang="en-US" sz="1200" b="1" spc="400" kern="0" dirty="0">
+                <a:solidFill>
+                  <a:srgbClr val="0284C7"/>
+                </a:solidFill>
+                <a:latin typeface="Calibri" pitchFamily="34" charset="0"/>
+                <a:ea typeface="Calibri" pitchFamily="34" charset="-122"/>
+                <a:cs typeface="Calibri" pitchFamily="34" charset="-120"/>
+              </a:rPr>
+              <a:t>HOW THE CLASSES WORK  ·  PART 2</a:t>
+            </a:r>
+            <a:endParaRPr lang="en-US" sz="1200" dirty="0"/>
+          </a:p>
+        </p:txBody>
+      </p:sp>
+      <p:sp>
+        <p:nvSpPr>
+          <p:cNvPr id="5" name="Text 3"/>
+          <p:cNvSpPr/>
+          <p:nvPr/>
+        </p:nvSpPr>
+        <p:spPr>
+          <a:xfrm>
+            <a:off x="502920" y="914400"/>
+            <a:ext cx="11185855" cy="731520"/>
+          </a:xfrm>
+          <a:prstGeom prst="rect">
+            <a:avLst/>
+          </a:prstGeom>
+          <a:noFill/>
+          <a:ln/>
+        </p:spPr>
+        <p:txBody>
+          <a:bodyPr wrap="square" lIns="0" tIns="0" rIns="0" bIns="0" rtlCol="0" anchor="ctr"/>
+          <a:lstStyle/>
+          <a:p>
+            <a:pPr indent="0" marL="0">
+              <a:buNone/>
+            </a:pPr>
+            <a:r>
+              <a:rPr lang="en-US" sz="3200" b="1" dirty="0">
+                <a:solidFill>
+                  <a:srgbClr val="0C2A3D"/>
+                </a:solidFill>
+                <a:latin typeface="Arial Black" pitchFamily="34" charset="0"/>
+                <a:ea typeface="Arial Black" pitchFamily="34" charset="-122"/>
+                <a:cs typeface="Arial Black" pitchFamily="34" charset="-120"/>
+              </a:rPr>
+              <a:t>4-month roadmap + end-to-end mentorship</a:t>
+            </a:r>
+            <a:endParaRPr lang="en-US" sz="3200" dirty="0"/>
+          </a:p>
+        </p:txBody>
+      </p:sp>
+      <p:sp>
+        <p:nvSpPr>
+          <p:cNvPr id="6" name="Shape 4"/>
+          <p:cNvSpPr/>
+          <p:nvPr/>
+        </p:nvSpPr>
+        <p:spPr>
+          <a:xfrm>
+            <a:off x="502920" y="1874520"/>
+            <a:ext cx="2659304" cy="1417320"/>
+          </a:xfrm>
+          <a:prstGeom prst="rect">
+            <a:avLst/>
+          </a:prstGeom>
+          <a:solidFill>
+            <a:srgbClr val="F5FBFF"/>
+          </a:solidFill>
+          <a:ln w="9525">
+            <a:solidFill>
+              <a:srgbClr val="B8D6EC"/>
+            </a:solidFill>
+            <a:prstDash val="solid"/>
+          </a:ln>
+        </p:spPr>
+      </p:sp>
+      <p:sp>
+        <p:nvSpPr>
+          <p:cNvPr id="7" name="Shape 5"/>
+          <p:cNvSpPr/>
+          <p:nvPr/>
+        </p:nvSpPr>
+        <p:spPr>
+          <a:xfrm>
+            <a:off x="502920" y="1874520"/>
+            <a:ext cx="2659304" cy="329184"/>
+          </a:xfrm>
+          <a:prstGeom prst="rect">
+            <a:avLst/>
+          </a:prstGeom>
+          <a:solidFill>
+            <a:srgbClr val="0284C7"/>
+          </a:solidFill>
+          <a:ln w="12700">
+            <a:solidFill>
+              <a:srgbClr val="0284C7"/>
+            </a:solidFill>
+            <a:prstDash val="solid"/>
+          </a:ln>
+        </p:spPr>
+      </p:sp>
+      <p:sp>
+        <p:nvSpPr>
+          <p:cNvPr id="8" name="Text 6"/>
+          <p:cNvSpPr/>
+          <p:nvPr/>
+        </p:nvSpPr>
+        <p:spPr>
+          <a:xfrm>
+            <a:off x="502920" y="1874520"/>
+            <a:ext cx="2659304" cy="329184"/>
+          </a:xfrm>
+          <a:prstGeom prst="rect">
+            <a:avLst/>
+          </a:prstGeom>
+          <a:noFill/>
+          <a:ln/>
+        </p:spPr>
+        <p:txBody>
+          <a:bodyPr wrap="square" lIns="0" tIns="0" rIns="0" bIns="0" rtlCol="0" anchor="ctr"/>
+          <a:lstStyle/>
+          <a:p>
+            <a:pPr algn="ctr" indent="0" marL="0">
+              <a:buNone/>
+            </a:pPr>
+            <a:r>
+              <a:rPr lang="en-US" sz="1300" b="1" spc="300" kern="0" dirty="0">
+                <a:solidFill>
+                  <a:srgbClr val="FFFFFF"/>
+                </a:solidFill>
+                <a:latin typeface="Calibri" pitchFamily="34" charset="0"/>
+                <a:ea typeface="Calibri" pitchFamily="34" charset="-122"/>
+                <a:cs typeface="Calibri" pitchFamily="34" charset="-120"/>
+              </a:rPr>
+              <a:t>Month 1</a:t>
+            </a:r>
+            <a:endParaRPr lang="en-US" sz="1300" dirty="0"/>
+          </a:p>
+        </p:txBody>
+      </p:sp>
+      <p:sp>
+        <p:nvSpPr>
+          <p:cNvPr id="9" name="Text 7"/>
+          <p:cNvSpPr/>
+          <p:nvPr/>
+        </p:nvSpPr>
+        <p:spPr>
+          <a:xfrm>
+            <a:off x="667512" y="2286000"/>
+            <a:ext cx="2330120" cy="960120"/>
+          </a:xfrm>
+          <a:prstGeom prst="rect">
+            <a:avLst/>
+          </a:prstGeom>
+          <a:noFill/>
+          <a:ln/>
+        </p:spPr>
+        <p:txBody>
+          <a:bodyPr wrap="square" lIns="0" tIns="0" rIns="0" bIns="0" rtlCol="0" anchor="ctr"/>
+          <a:lstStyle/>
+          <a:p>
+            <a:pPr algn="l" indent="0" marL="0">
+              <a:buNone/>
+            </a:pPr>
+            <a:r>
+              <a:rPr lang="en-US" sz="1200" dirty="0">
+                <a:solidFill>
+                  <a:srgbClr val="345671"/>
+                </a:solidFill>
+                <a:latin typeface="Calibri" pitchFamily="34" charset="0"/>
+                <a:ea typeface="Calibri" pitchFamily="34" charset="-122"/>
+                <a:cs typeface="Calibri" pitchFamily="34" charset="-120"/>
+              </a:rPr>
+              <a:t>Cardiovascular · Respiratory · General Pathology · Epi/Biostats</a:t>
+            </a:r>
+            <a:endParaRPr lang="en-US" sz="1200" dirty="0"/>
+          </a:p>
+        </p:txBody>
+      </p:sp>
+      <p:sp>
+        <p:nvSpPr>
+          <p:cNvPr id="10" name="Shape 8"/>
+          <p:cNvSpPr/>
+          <p:nvPr/>
+        </p:nvSpPr>
+        <p:spPr>
+          <a:xfrm>
+            <a:off x="3345104" y="1874520"/>
+            <a:ext cx="2659304" cy="1417320"/>
+          </a:xfrm>
+          <a:prstGeom prst="rect">
+            <a:avLst/>
+          </a:prstGeom>
+          <a:solidFill>
+            <a:srgbClr val="F5FBFF"/>
+          </a:solidFill>
+          <a:ln w="9525">
+            <a:solidFill>
+              <a:srgbClr val="B8D6EC"/>
+            </a:solidFill>
+            <a:prstDash val="solid"/>
+          </a:ln>
+        </p:spPr>
+      </p:sp>
+      <p:sp>
+        <p:nvSpPr>
+          <p:cNvPr id="11" name="Shape 9"/>
+          <p:cNvSpPr/>
+          <p:nvPr/>
+        </p:nvSpPr>
+        <p:spPr>
+          <a:xfrm>
+            <a:off x="3345104" y="1874520"/>
+            <a:ext cx="2659304" cy="329184"/>
+          </a:xfrm>
+          <a:prstGeom prst="rect">
+            <a:avLst/>
+          </a:prstGeom>
+          <a:solidFill>
+            <a:srgbClr val="0284C7"/>
+          </a:solidFill>
+          <a:ln w="12700">
+            <a:solidFill>
+              <a:srgbClr val="0284C7"/>
+            </a:solidFill>
+            <a:prstDash val="solid"/>
+          </a:ln>
+        </p:spPr>
+      </p:sp>
+      <p:sp>
+        <p:nvSpPr>
+          <p:cNvPr id="12" name="Text 10"/>
+          <p:cNvSpPr/>
+          <p:nvPr/>
+        </p:nvSpPr>
+        <p:spPr>
+          <a:xfrm>
+            <a:off x="3345104" y="1874520"/>
+            <a:ext cx="2659304" cy="329184"/>
+          </a:xfrm>
+          <a:prstGeom prst="rect">
+            <a:avLst/>
+          </a:prstGeom>
+          <a:noFill/>
+          <a:ln/>
+        </p:spPr>
+        <p:txBody>
+          <a:bodyPr wrap="square" lIns="0" tIns="0" rIns="0" bIns="0" rtlCol="0" anchor="ctr"/>
+          <a:lstStyle/>
+          <a:p>
+            <a:pPr algn="ctr" indent="0" marL="0">
+              <a:buNone/>
+            </a:pPr>
+            <a:r>
+              <a:rPr lang="en-US" sz="1300" b="1" spc="300" kern="0" dirty="0">
+                <a:solidFill>
+                  <a:srgbClr val="FFFFFF"/>
+                </a:solidFill>
+                <a:latin typeface="Calibri" pitchFamily="34" charset="0"/>
+                <a:ea typeface="Calibri" pitchFamily="34" charset="-122"/>
+                <a:cs typeface="Calibri" pitchFamily="34" charset="-120"/>
+              </a:rPr>
+              <a:t>Month 2</a:t>
+            </a:r>
+            <a:endParaRPr lang="en-US" sz="1300" dirty="0"/>
+          </a:p>
+        </p:txBody>
+      </p:sp>
+      <p:sp>
+        <p:nvSpPr>
+          <p:cNvPr id="13" name="Text 11"/>
+          <p:cNvSpPr/>
+          <p:nvPr/>
+        </p:nvSpPr>
+        <p:spPr>
+          <a:xfrm>
+            <a:off x="3509696" y="2286000"/>
+            <a:ext cx="2330120" cy="960120"/>
+          </a:xfrm>
+          <a:prstGeom prst="rect">
+            <a:avLst/>
+          </a:prstGeom>
+          <a:noFill/>
+          <a:ln/>
+        </p:spPr>
+        <p:txBody>
+          <a:bodyPr wrap="square" lIns="0" tIns="0" rIns="0" bIns="0" rtlCol="0" anchor="ctr"/>
+          <a:lstStyle/>
+          <a:p>
+            <a:pPr algn="l" indent="0" marL="0">
+              <a:buNone/>
+            </a:pPr>
+            <a:r>
+              <a:rPr lang="en-US" sz="1200" dirty="0">
+                <a:solidFill>
+                  <a:srgbClr val="345671"/>
+                </a:solidFill>
+                <a:latin typeface="Calibri" pitchFamily="34" charset="0"/>
+                <a:ea typeface="Calibri" pitchFamily="34" charset="-122"/>
+                <a:cs typeface="Calibri" pitchFamily="34" charset="-120"/>
+              </a:rPr>
+              <a:t>Endocrine · GI · Heme/Onc · Renal</a:t>
+            </a:r>
+            <a:endParaRPr lang="en-US" sz="1200" dirty="0"/>
+          </a:p>
+        </p:txBody>
+      </p:sp>
+      <p:sp>
+        <p:nvSpPr>
+          <p:cNvPr id="14" name="Shape 12"/>
+          <p:cNvSpPr/>
+          <p:nvPr/>
+        </p:nvSpPr>
+        <p:spPr>
+          <a:xfrm>
+            <a:off x="6187288" y="1874520"/>
+            <a:ext cx="2659304" cy="1417320"/>
+          </a:xfrm>
+          <a:prstGeom prst="rect">
+            <a:avLst/>
+          </a:prstGeom>
+          <a:solidFill>
+            <a:srgbClr val="F5FBFF"/>
+          </a:solidFill>
+          <a:ln w="9525">
+            <a:solidFill>
+              <a:srgbClr val="B8D6EC"/>
+            </a:solidFill>
+            <a:prstDash val="solid"/>
+          </a:ln>
+        </p:spPr>
+      </p:sp>
+      <p:sp>
+        <p:nvSpPr>
+          <p:cNvPr id="15" name="Shape 13"/>
+          <p:cNvSpPr/>
+          <p:nvPr/>
+        </p:nvSpPr>
+        <p:spPr>
+          <a:xfrm>
+            <a:off x="6187288" y="1874520"/>
+            <a:ext cx="2659304" cy="329184"/>
+          </a:xfrm>
+          <a:prstGeom prst="rect">
+            <a:avLst/>
+          </a:prstGeom>
+          <a:solidFill>
+            <a:srgbClr val="0284C7"/>
+          </a:solidFill>
+          <a:ln w="12700">
+            <a:solidFill>
+              <a:srgbClr val="0284C7"/>
+            </a:solidFill>
+            <a:prstDash val="solid"/>
+          </a:ln>
+        </p:spPr>
+      </p:sp>
+      <p:sp>
+        <p:nvSpPr>
+          <p:cNvPr id="16" name="Text 14"/>
+          <p:cNvSpPr/>
+          <p:nvPr/>
+        </p:nvSpPr>
+        <p:spPr>
+          <a:xfrm>
+            <a:off x="6187288" y="1874520"/>
+            <a:ext cx="2659304" cy="329184"/>
+          </a:xfrm>
+          <a:prstGeom prst="rect">
+            <a:avLst/>
+          </a:prstGeom>
+          <a:noFill/>
+          <a:ln/>
+        </p:spPr>
+        <p:txBody>
+          <a:bodyPr wrap="square" lIns="0" tIns="0" rIns="0" bIns="0" rtlCol="0" anchor="ctr"/>
+          <a:lstStyle/>
+          <a:p>
+            <a:pPr algn="ctr" indent="0" marL="0">
+              <a:buNone/>
+            </a:pPr>
+            <a:r>
+              <a:rPr lang="en-US" sz="1300" b="1" spc="300" kern="0" dirty="0">
+                <a:solidFill>
+                  <a:srgbClr val="FFFFFF"/>
+                </a:solidFill>
+                <a:latin typeface="Calibri" pitchFamily="34" charset="0"/>
+                <a:ea typeface="Calibri" pitchFamily="34" charset="-122"/>
+                <a:cs typeface="Calibri" pitchFamily="34" charset="-120"/>
+              </a:rPr>
+              <a:t>Month 3</a:t>
+            </a:r>
+            <a:endParaRPr lang="en-US" sz="1300" dirty="0"/>
+          </a:p>
+        </p:txBody>
+      </p:sp>
+      <p:sp>
+        <p:nvSpPr>
+          <p:cNvPr id="17" name="Text 15"/>
+          <p:cNvSpPr/>
+          <p:nvPr/>
+        </p:nvSpPr>
+        <p:spPr>
+          <a:xfrm>
+            <a:off x="6351880" y="2286000"/>
+            <a:ext cx="2330120" cy="960120"/>
+          </a:xfrm>
+          <a:prstGeom prst="rect">
+            <a:avLst/>
+          </a:prstGeom>
+          <a:noFill/>
+          <a:ln/>
+        </p:spPr>
+        <p:txBody>
+          <a:bodyPr wrap="square" lIns="0" tIns="0" rIns="0" bIns="0" rtlCol="0" anchor="ctr"/>
+          <a:lstStyle/>
+          <a:p>
+            <a:pPr algn="l" indent="0" marL="0">
+              <a:buNone/>
+            </a:pPr>
+            <a:r>
+              <a:rPr lang="en-US" sz="1200" dirty="0">
+                <a:solidFill>
+                  <a:srgbClr val="345671"/>
+                </a:solidFill>
+                <a:latin typeface="Calibri" pitchFamily="34" charset="0"/>
+                <a:ea typeface="Calibri" pitchFamily="34" charset="-122"/>
+                <a:cs typeface="Calibri" pitchFamily="34" charset="-120"/>
+              </a:rPr>
+              <a:t>Musculoskeletal · Neurology · Psychiatry · Reproductive</a:t>
+            </a:r>
+            <a:endParaRPr lang="en-US" sz="1200" dirty="0"/>
+          </a:p>
+        </p:txBody>
+      </p:sp>
+      <p:sp>
+        <p:nvSpPr>
+          <p:cNvPr id="18" name="Shape 16"/>
+          <p:cNvSpPr/>
+          <p:nvPr/>
+        </p:nvSpPr>
+        <p:spPr>
+          <a:xfrm>
+            <a:off x="9029471" y="1874520"/>
+            <a:ext cx="2659304" cy="1417320"/>
+          </a:xfrm>
+          <a:prstGeom prst="rect">
+            <a:avLst/>
+          </a:prstGeom>
+          <a:solidFill>
+            <a:srgbClr val="F5FBFF"/>
+          </a:solidFill>
+          <a:ln w="9525">
+            <a:solidFill>
+              <a:srgbClr val="B8D6EC"/>
+            </a:solidFill>
+            <a:prstDash val="solid"/>
+          </a:ln>
+        </p:spPr>
+      </p:sp>
+      <p:sp>
+        <p:nvSpPr>
+          <p:cNvPr id="19" name="Shape 17"/>
+          <p:cNvSpPr/>
+          <p:nvPr/>
+        </p:nvSpPr>
+        <p:spPr>
+          <a:xfrm>
+            <a:off x="9029471" y="1874520"/>
+            <a:ext cx="2659304" cy="329184"/>
+          </a:xfrm>
+          <a:prstGeom prst="rect">
+            <a:avLst/>
+          </a:prstGeom>
+          <a:solidFill>
+            <a:srgbClr val="0284C7"/>
+          </a:solidFill>
+          <a:ln w="12700">
+            <a:solidFill>
+              <a:srgbClr val="0284C7"/>
+            </a:solidFill>
+            <a:prstDash val="solid"/>
+          </a:ln>
+        </p:spPr>
+      </p:sp>
+      <p:sp>
+        <p:nvSpPr>
+          <p:cNvPr id="20" name="Text 18"/>
+          <p:cNvSpPr/>
+          <p:nvPr/>
+        </p:nvSpPr>
+        <p:spPr>
+          <a:xfrm>
+            <a:off x="9029471" y="1874520"/>
+            <a:ext cx="2659304" cy="329184"/>
+          </a:xfrm>
+          <a:prstGeom prst="rect">
+            <a:avLst/>
+          </a:prstGeom>
+          <a:noFill/>
+          <a:ln/>
+        </p:spPr>
+        <p:txBody>
+          <a:bodyPr wrap="square" lIns="0" tIns="0" rIns="0" bIns="0" rtlCol="0" anchor="ctr"/>
+          <a:lstStyle/>
+          <a:p>
+            <a:pPr algn="ctr" indent="0" marL="0">
+              <a:buNone/>
+            </a:pPr>
+            <a:r>
+              <a:rPr lang="en-US" sz="1300" b="1" spc="300" kern="0" dirty="0">
+                <a:solidFill>
+                  <a:srgbClr val="FFFFFF"/>
+                </a:solidFill>
+                <a:latin typeface="Calibri" pitchFamily="34" charset="0"/>
+                <a:ea typeface="Calibri" pitchFamily="34" charset="-122"/>
+                <a:cs typeface="Calibri" pitchFamily="34" charset="-120"/>
+              </a:rPr>
+              <a:t>Month 4</a:t>
+            </a:r>
+            <a:endParaRPr lang="en-US" sz="1300" dirty="0"/>
+          </a:p>
+        </p:txBody>
+      </p:sp>
+      <p:sp>
+        <p:nvSpPr>
+          <p:cNvPr id="21" name="Text 19"/>
+          <p:cNvSpPr/>
+          <p:nvPr/>
+        </p:nvSpPr>
+        <p:spPr>
+          <a:xfrm>
+            <a:off x="9194063" y="2286000"/>
+            <a:ext cx="2330120" cy="960120"/>
+          </a:xfrm>
+          <a:prstGeom prst="rect">
+            <a:avLst/>
+          </a:prstGeom>
+          <a:noFill/>
+          <a:ln/>
+        </p:spPr>
+        <p:txBody>
+          <a:bodyPr wrap="square" lIns="0" tIns="0" rIns="0" bIns="0" rtlCol="0" anchor="ctr"/>
+          <a:lstStyle/>
+          <a:p>
+            <a:pPr algn="l" indent="0" marL="0">
+              <a:buNone/>
+            </a:pPr>
+            <a:r>
+              <a:rPr lang="en-US" sz="1200" dirty="0">
+                <a:solidFill>
+                  <a:srgbClr val="345671"/>
+                </a:solidFill>
+                <a:latin typeface="Calibri" pitchFamily="34" charset="0"/>
+                <a:ea typeface="Calibri" pitchFamily="34" charset="-122"/>
+                <a:cs typeface="Calibri" pitchFamily="34" charset="-120"/>
+              </a:rPr>
+              <a:t>Immunology / Microbiology · Pharmacology · Behavioral · Mock blocks</a:t>
+            </a:r>
+            <a:endParaRPr lang="en-US" sz="1200" dirty="0"/>
+          </a:p>
+        </p:txBody>
+      </p:sp>
+      <p:sp>
+        <p:nvSpPr>
+          <p:cNvPr id="22" name="Text 20"/>
+          <p:cNvSpPr/>
+          <p:nvPr/>
+        </p:nvSpPr>
+        <p:spPr>
+          <a:xfrm>
+            <a:off x="502920" y="3657600"/>
+            <a:ext cx="11185855" cy="274320"/>
+          </a:xfrm>
+          <a:prstGeom prst="rect">
+            <a:avLst/>
+          </a:prstGeom>
+          <a:noFill/>
+          <a:ln/>
+        </p:spPr>
+        <p:txBody>
+          <a:bodyPr wrap="square" lIns="0" tIns="0" rIns="0" bIns="0" rtlCol="0" anchor="ctr"/>
+          <a:lstStyle/>
+          <a:p>
+            <a:pPr indent="0" marL="0">
+              <a:buNone/>
+            </a:pPr>
+            <a:r>
+              <a:rPr lang="en-US" sz="1200" b="1" spc="400" kern="0" dirty="0">
+                <a:solidFill>
+                  <a:srgbClr val="B45309"/>
+                </a:solidFill>
+                <a:latin typeface="Calibri" pitchFamily="34" charset="0"/>
+                <a:ea typeface="Calibri" pitchFamily="34" charset="-122"/>
+                <a:cs typeface="Calibri" pitchFamily="34" charset="-120"/>
+              </a:rPr>
+              <a:t>END-TO-END MENTORSHIP</a:t>
+            </a:r>
+            <a:endParaRPr lang="en-US" sz="1200" dirty="0"/>
+          </a:p>
+        </p:txBody>
+      </p:sp>
+      <p:sp>
+        <p:nvSpPr>
+          <p:cNvPr id="23" name="Shape 21"/>
+          <p:cNvSpPr/>
+          <p:nvPr/>
+        </p:nvSpPr>
+        <p:spPr>
+          <a:xfrm>
+            <a:off x="502920" y="4023360"/>
+            <a:ext cx="164592" cy="164592"/>
+          </a:xfrm>
+          <a:prstGeom prst="ellipse">
+            <a:avLst/>
+          </a:prstGeom>
+          <a:solidFill>
+            <a:srgbClr val="D97706"/>
+          </a:solidFill>
+          <a:ln w="12700">
+            <a:solidFill>
+              <a:srgbClr val="D97706"/>
+            </a:solidFill>
+            <a:prstDash val="solid"/>
+          </a:ln>
+        </p:spPr>
+      </p:sp>
+      <p:sp>
+        <p:nvSpPr>
+          <p:cNvPr id="24" name="Text 22"/>
+          <p:cNvSpPr/>
+          <p:nvPr/>
+        </p:nvSpPr>
+        <p:spPr>
+          <a:xfrm>
+            <a:off x="777240" y="3968496"/>
+            <a:ext cx="10911535" cy="329184"/>
+          </a:xfrm>
+          <a:prstGeom prst="rect">
+            <a:avLst/>
+          </a:prstGeom>
+          <a:noFill/>
+          <a:ln/>
+        </p:spPr>
+        <p:txBody>
+          <a:bodyPr wrap="square" lIns="0" tIns="0" rIns="0" bIns="0" rtlCol="0" anchor="ctr"/>
+          <a:lstStyle/>
+          <a:p>
+            <a:pPr indent="0" marL="0">
+              <a:buNone/>
+            </a:pPr>
+            <a:r>
+              <a:rPr lang="en-US" sz="1300" dirty="0">
+                <a:solidFill>
+                  <a:srgbClr val="0C2A3D"/>
+                </a:solidFill>
+                <a:latin typeface="Calibri" pitchFamily="34" charset="0"/>
+                <a:ea typeface="Calibri" pitchFamily="34" charset="-122"/>
+                <a:cs typeface="Calibri" pitchFamily="34" charset="-120"/>
+              </a:rPr>
+              <a:t>ECFMG application — credentials submission, sponsor notes, EPIC.</a:t>
+            </a:r>
+            <a:endParaRPr lang="en-US" sz="1300" dirty="0"/>
+          </a:p>
+        </p:txBody>
+      </p:sp>
+      <p:sp>
+        <p:nvSpPr>
+          <p:cNvPr id="25" name="Shape 23"/>
+          <p:cNvSpPr/>
+          <p:nvPr/>
+        </p:nvSpPr>
+        <p:spPr>
+          <a:xfrm>
+            <a:off x="502920" y="4407408"/>
+            <a:ext cx="164592" cy="164592"/>
+          </a:xfrm>
+          <a:prstGeom prst="ellipse">
+            <a:avLst/>
+          </a:prstGeom>
+          <a:solidFill>
+            <a:srgbClr val="D97706"/>
+          </a:solidFill>
+          <a:ln w="12700">
+            <a:solidFill>
+              <a:srgbClr val="D97706"/>
+            </a:solidFill>
+            <a:prstDash val="solid"/>
+          </a:ln>
+        </p:spPr>
+      </p:sp>
+      <p:sp>
+        <p:nvSpPr>
+          <p:cNvPr id="26" name="Text 24"/>
+          <p:cNvSpPr/>
+          <p:nvPr/>
+        </p:nvSpPr>
+        <p:spPr>
+          <a:xfrm>
+            <a:off x="777240" y="4352544"/>
+            <a:ext cx="10911535" cy="329184"/>
+          </a:xfrm>
+          <a:prstGeom prst="rect">
+            <a:avLst/>
+          </a:prstGeom>
+          <a:noFill/>
+          <a:ln/>
+        </p:spPr>
+        <p:txBody>
+          <a:bodyPr wrap="square" lIns="0" tIns="0" rIns="0" bIns="0" rtlCol="0" anchor="ctr"/>
+          <a:lstStyle/>
+          <a:p>
+            <a:pPr indent="0" marL="0">
+              <a:buNone/>
+            </a:pPr>
+            <a:r>
+              <a:rPr lang="en-US" sz="1300" dirty="0">
+                <a:solidFill>
+                  <a:srgbClr val="0C2A3D"/>
+                </a:solidFill>
+                <a:latin typeface="Calibri" pitchFamily="34" charset="0"/>
+                <a:ea typeface="Calibri" pitchFamily="34" charset="-122"/>
+                <a:cs typeface="Calibri" pitchFamily="34" charset="-120"/>
+              </a:rPr>
+              <a:t>Personal statement &amp; CV review, with iterative drafts.</a:t>
+            </a:r>
+            <a:endParaRPr lang="en-US" sz="1300" dirty="0"/>
+          </a:p>
+        </p:txBody>
+      </p:sp>
+      <p:sp>
+        <p:nvSpPr>
+          <p:cNvPr id="27" name="Shape 25"/>
+          <p:cNvSpPr/>
+          <p:nvPr/>
+        </p:nvSpPr>
+        <p:spPr>
+          <a:xfrm>
+            <a:off x="502920" y="4791456"/>
+            <a:ext cx="164592" cy="164592"/>
+          </a:xfrm>
+          <a:prstGeom prst="ellipse">
+            <a:avLst/>
+          </a:prstGeom>
+          <a:solidFill>
+            <a:srgbClr val="D97706"/>
+          </a:solidFill>
+          <a:ln w="12700">
+            <a:solidFill>
+              <a:srgbClr val="D97706"/>
+            </a:solidFill>
+            <a:prstDash val="solid"/>
+          </a:ln>
+        </p:spPr>
+      </p:sp>
+      <p:sp>
+        <p:nvSpPr>
+          <p:cNvPr id="28" name="Text 26"/>
+          <p:cNvSpPr/>
+          <p:nvPr/>
+        </p:nvSpPr>
+        <p:spPr>
+          <a:xfrm>
+            <a:off x="777240" y="4736592"/>
+            <a:ext cx="10911535" cy="329184"/>
+          </a:xfrm>
+          <a:prstGeom prst="rect">
+            <a:avLst/>
+          </a:prstGeom>
+          <a:noFill/>
+          <a:ln/>
+        </p:spPr>
+        <p:txBody>
+          <a:bodyPr wrap="square" lIns="0" tIns="0" rIns="0" bIns="0" rtlCol="0" anchor="ctr"/>
+          <a:lstStyle/>
+          <a:p>
+            <a:pPr indent="0" marL="0">
+              <a:buNone/>
+            </a:pPr>
+            <a:r>
+              <a:rPr lang="en-US" sz="1300" dirty="0">
+                <a:solidFill>
+                  <a:srgbClr val="0C2A3D"/>
+                </a:solidFill>
+                <a:latin typeface="Calibri" pitchFamily="34" charset="0"/>
+                <a:ea typeface="Calibri" pitchFamily="34" charset="-122"/>
+                <a:cs typeface="Calibri" pitchFamily="34" charset="-120"/>
+              </a:rPr>
+              <a:t>Interview prep — mock interviews, IMG-specific Q&amp;A, programs by signal.</a:t>
+            </a:r>
+            <a:endParaRPr lang="en-US" sz="1300" dirty="0"/>
+          </a:p>
+        </p:txBody>
+      </p:sp>
+      <p:sp>
+        <p:nvSpPr>
+          <p:cNvPr id="29" name="Shape 27"/>
+          <p:cNvSpPr/>
+          <p:nvPr/>
+        </p:nvSpPr>
+        <p:spPr>
+          <a:xfrm>
+            <a:off x="502920" y="5175504"/>
+            <a:ext cx="164592" cy="164592"/>
+          </a:xfrm>
+          <a:prstGeom prst="ellipse">
+            <a:avLst/>
+          </a:prstGeom>
+          <a:solidFill>
+            <a:srgbClr val="D97706"/>
+          </a:solidFill>
+          <a:ln w="12700">
+            <a:solidFill>
+              <a:srgbClr val="D97706"/>
+            </a:solidFill>
+            <a:prstDash val="solid"/>
+          </a:ln>
+        </p:spPr>
+      </p:sp>
+      <p:sp>
+        <p:nvSpPr>
+          <p:cNvPr id="30" name="Text 28"/>
+          <p:cNvSpPr/>
+          <p:nvPr/>
+        </p:nvSpPr>
+        <p:spPr>
+          <a:xfrm>
+            <a:off x="777240" y="5120640"/>
+            <a:ext cx="10911535" cy="329184"/>
+          </a:xfrm>
+          <a:prstGeom prst="rect">
+            <a:avLst/>
+          </a:prstGeom>
+          <a:noFill/>
+          <a:ln/>
+        </p:spPr>
+        <p:txBody>
+          <a:bodyPr wrap="square" lIns="0" tIns="0" rIns="0" bIns="0" rtlCol="0" anchor="ctr"/>
+          <a:lstStyle/>
+          <a:p>
+            <a:pPr indent="0" marL="0">
+              <a:buNone/>
+            </a:pPr>
+            <a:r>
+              <a:rPr lang="en-US" sz="1300" dirty="0">
+                <a:solidFill>
+                  <a:srgbClr val="0C2A3D"/>
+                </a:solidFill>
+                <a:latin typeface="Calibri" pitchFamily="34" charset="0"/>
+                <a:ea typeface="Calibri" pitchFamily="34" charset="-122"/>
+                <a:cs typeface="Calibri" pitchFamily="34" charset="-120"/>
+              </a:rPr>
+              <a:t>ERAS / NRMP timeline coaching from application to rank list.</a:t>
+            </a:r>
+            <a:endParaRPr lang="en-US" sz="1300" dirty="0"/>
+          </a:p>
+        </p:txBody>
+      </p:sp>
+      <p:sp>
+        <p:nvSpPr>
+          <p:cNvPr id="31" name="Shape 29"/>
+          <p:cNvSpPr/>
+          <p:nvPr/>
+        </p:nvSpPr>
+        <p:spPr>
+          <a:xfrm>
+            <a:off x="502920" y="5559552"/>
+            <a:ext cx="164592" cy="164592"/>
+          </a:xfrm>
+          <a:prstGeom prst="ellipse">
+            <a:avLst/>
+          </a:prstGeom>
+          <a:solidFill>
+            <a:srgbClr val="D97706"/>
+          </a:solidFill>
+          <a:ln w="12700">
+            <a:solidFill>
+              <a:srgbClr val="D97706"/>
+            </a:solidFill>
+            <a:prstDash val="solid"/>
+          </a:ln>
+        </p:spPr>
+      </p:sp>
+      <p:sp>
+        <p:nvSpPr>
+          <p:cNvPr id="32" name="Text 30"/>
+          <p:cNvSpPr/>
+          <p:nvPr/>
+        </p:nvSpPr>
+        <p:spPr>
+          <a:xfrm>
+            <a:off x="777240" y="5504688"/>
+            <a:ext cx="10911535" cy="329184"/>
+          </a:xfrm>
+          <a:prstGeom prst="rect">
+            <a:avLst/>
+          </a:prstGeom>
+          <a:noFill/>
+          <a:ln/>
+        </p:spPr>
+        <p:txBody>
+          <a:bodyPr wrap="square" lIns="0" tIns="0" rIns="0" bIns="0" rtlCol="0" anchor="ctr"/>
+          <a:lstStyle/>
+          <a:p>
+            <a:pPr indent="0" marL="0">
+              <a:buNone/>
+            </a:pPr>
+            <a:r>
+              <a:rPr lang="en-US" sz="1300" dirty="0">
+                <a:solidFill>
+                  <a:srgbClr val="0C2A3D"/>
+                </a:solidFill>
+                <a:latin typeface="Calibri" pitchFamily="34" charset="0"/>
+                <a:ea typeface="Calibri" pitchFamily="34" charset="-122"/>
+                <a:cs typeface="Calibri" pitchFamily="34" charset="-120"/>
+              </a:rPr>
+              <a:t>Combined Step 1 + Step 2 expedited track for efficient overlap.</a:t>
+            </a:r>
+            <a:endParaRPr lang="en-US" sz="1300" dirty="0"/>
+          </a:p>
+        </p:txBody>
+      </p:sp>
+      <p:sp>
+        <p:nvSpPr>
+          <p:cNvPr id="33" name="Text 31"/>
+          <p:cNvSpPr/>
+          <p:nvPr/>
+        </p:nvSpPr>
+        <p:spPr>
+          <a:xfrm>
+            <a:off x="502920" y="6492240"/>
+            <a:ext cx="7830099" cy="274320"/>
+          </a:xfrm>
+          <a:prstGeom prst="rect">
+            <a:avLst/>
+          </a:prstGeom>
+          <a:noFill/>
+          <a:ln/>
+        </p:spPr>
+        <p:txBody>
+          <a:bodyPr wrap="square" lIns="0" tIns="0" rIns="0" bIns="0" rtlCol="0" anchor="ctr"/>
+          <a:lstStyle/>
+          <a:p>
+            <a:pPr indent="0" marL="0">
+              <a:buNone/>
+            </a:pPr>
+            <a:r>
+              <a:rPr lang="en-US" sz="1000" i="1" dirty="0">
+                <a:solidFill>
+                  <a:srgbClr val="6B87A3"/>
+                </a:solidFill>
+                <a:latin typeface="Calibri" pitchFamily="34" charset="0"/>
+                <a:ea typeface="Calibri" pitchFamily="34" charset="-122"/>
+                <a:cs typeface="Calibri" pitchFamily="34" charset="-120"/>
+              </a:rPr>
+              <a:t>Allan's USMLE Class · June Cohort</a:t>
+            </a:r>
+            <a:endParaRPr lang="en-US" sz="1000" dirty="0"/>
+          </a:p>
+        </p:txBody>
+      </p:sp>
+      <p:sp>
+        <p:nvSpPr>
+          <p:cNvPr id="34" name="Text 32"/>
+          <p:cNvSpPr/>
+          <p:nvPr/>
+        </p:nvSpPr>
+        <p:spPr>
+          <a:xfrm>
+            <a:off x="11140135" y="6492240"/>
+            <a:ext cx="548640" cy="274320"/>
+          </a:xfrm>
+          <a:prstGeom prst="rect">
+            <a:avLst/>
+          </a:prstGeom>
+          <a:noFill/>
+          <a:ln/>
+        </p:spPr>
+        <p:txBody>
+          <a:bodyPr wrap="square" lIns="0" tIns="0" rIns="0" bIns="0" rtlCol="0" anchor="ctr"/>
+          <a:lstStyle/>
+          <a:p>
+            <a:pPr algn="r" indent="0" marL="0">
+              <a:buNone/>
+            </a:pPr>
+            <a:r>
+              <a:rPr lang="en-US" sz="1000" dirty="0">
+                <a:solidFill>
+                  <a:srgbClr val="6B87A3"/>
+                </a:solidFill>
+                <a:latin typeface="Calibri" pitchFamily="34" charset="0"/>
+                <a:ea typeface="Calibri" pitchFamily="34" charset="-122"/>
+                <a:cs typeface="Calibri" pitchFamily="34" charset="-120"/>
+              </a:rPr>
+              <a:t>7 / 8</a:t>
+            </a:r>
+            <a:endParaRPr lang="en-US" sz="1000" dirty="0"/>
+          </a:p>
+        </p:txBody>
+      </p:sp>
+    </p:spTree>
+  </p:cSld>
+  <p:clrMapOvr>
+    <a:masterClrMapping/>
+  </p:clrMapOvr>
+</p:sld>
+</file>
+
+<file path=ppt/slides/slide8.xml><?xml version="1.0" encoding="utf-8"?>
+<p:sld xmlns:a="http://schemas.openxmlformats.org/drawingml/2006/main" xmlns:r="http://schemas.openxmlformats.org/officeDocument/2006/relationships" xmlns:p="http://schemas.openxmlformats.org/presentationml/2006/main">
+  <p:cSld name="Slide 8">
     <p:bg>
       <p:bgPr>
         <a:solidFill>
@@ -9668,7 +12359,7 @@
                 <a:ea typeface="Calibri" pitchFamily="34" charset="-122"/>
                 <a:cs typeface="Calibri" pitchFamily="34" charset="-120"/>
               </a:rPr>
-              <a:t>7 / 7</a:t>
+              <a:t>8 / 8</a:t>
             </a:r>
             <a:endParaRPr lang="en-US" sz="1000" dirty="0"/>
           </a:p>
